--- a/deliverables/ppt/澜脉_商业计划书.pptx
+++ b/deliverables/ppt/澜脉_商业计划书.pptx
@@ -10,19 +10,29 @@
     <p:sldId id="258" r:id="rId4"/>
     <p:sldId id="259" r:id="rId5"/>
     <p:sldId id="260" r:id="rId6"/>
+    <p:sldId id="292" r:id="rId38"/>
     <p:sldId id="261" r:id="rId7"/>
+    <p:sldId id="293" r:id="rId39"/>
     <p:sldId id="262" r:id="rId8"/>
+    <p:sldId id="294" r:id="rId40"/>
     <p:sldId id="263" r:id="rId9"/>
     <p:sldId id="264" r:id="rId10"/>
+    <p:sldId id="295" r:id="rId41"/>
     <p:sldId id="265" r:id="rId11"/>
+    <p:sldId id="296" r:id="rId42"/>
     <p:sldId id="266" r:id="rId12"/>
+    <p:sldId id="297" r:id="rId43"/>
     <p:sldId id="267" r:id="rId13"/>
     <p:sldId id="268" r:id="rId14"/>
+    <p:sldId id="298" r:id="rId44"/>
     <p:sldId id="269" r:id="rId15"/>
     <p:sldId id="270" r:id="rId16"/>
+    <p:sldId id="299" r:id="rId45"/>
     <p:sldId id="271" r:id="rId17"/>
     <p:sldId id="272" r:id="rId18"/>
+    <p:sldId id="300" r:id="rId46"/>
     <p:sldId id="273" r:id="rId19"/>
+    <p:sldId id="301" r:id="rId47"/>
     <p:sldId id="274" r:id="rId20"/>
     <p:sldId id="275" r:id="rId21"/>
     <p:sldId id="276" r:id="rId22"/>
@@ -32,6 +42,17 @@
     <p:sldId id="280" r:id="rId26"/>
     <p:sldId id="281" r:id="rId27"/>
     <p:sldId id="282" r:id="rId28"/>
+    <p:sldId id="283" r:id="rId29"/>
+    <p:sldId id="284" r:id="rId30"/>
+    <p:sldId id="285" r:id="rId31"/>
+    <p:sldId id="286" r:id="rId32"/>
+    <p:sldId id="287" r:id="rId33"/>
+    <p:sldId id="288" r:id="rId34"/>
+    <p:sldId id="302" r:id="rId48"/>
+    <p:sldId id="289" r:id="rId35"/>
+    <p:sldId id="303" r:id="rId49"/>
+    <p:sldId id="290" r:id="rId36"/>
+    <p:sldId id="291" r:id="rId37"/>
   </p:sldIdLst>
   <p:sldSz cx="12192000" cy="6858000" type="screen16x9"/>
   <p:notesSz cx="6858000" cy="9144000"/>
@@ -514,7 +535,7 @@
                 <a:latin typeface="Helvetica Neue"/>
                 <a:ea typeface="Helvetica Neue"/>
               </a:rPr>
-              <a:t>01 / 27</a:t>
+              <a:t>01 / 36</a:t>
             </a:r>
           </a:p>
         </p:txBody>
@@ -755,7 +776,7 @@
                 <a:latin typeface="Helvetica Neue"/>
                 <a:ea typeface="Helvetica Neue"/>
               </a:rPr>
-              <a:t>10 / 27</a:t>
+              <a:t>10 / 36</a:t>
             </a:r>
           </a:p>
         </p:txBody>
@@ -1173,7 +1194,7 @@
                 <a:latin typeface="Helvetica Neue"/>
                 <a:ea typeface="Helvetica Neue"/>
               </a:rPr>
-              <a:t>11 / 27</a:t>
+              <a:t>11 / 36</a:t>
             </a:r>
           </a:p>
         </p:txBody>
@@ -1536,7 +1557,23 @@
                 <a:latin typeface="Helvetica Neue"/>
                 <a:ea typeface="Helvetica Neue"/>
               </a:rPr>
-              <a:t>⑤ 阈值按工况自身基线标定；⑥ 拟合窗匹配退化时标 + 趋势门控</a:t>
+              <a:t>⑤ 阈值按工况自身基线标定</a:t>
+            </a:r>
+          </a:p>
+          <a:p>
+            <a:pPr marL="285750" indent="-285750">
+              <a:buFont typeface="Arial" panose="020B0604020202020204"/>
+              <a:buChar char="•"/>
+            </a:pPr>
+            <a:r>
+              <a:rPr lang="zh-CN" sz="2000" b="0" dirty="0">
+                <a:solidFill>
+                  <a:srgbClr val="F4EFE6"/>
+                </a:solidFill>
+                <a:latin typeface="Helvetica Neue"/>
+                <a:ea typeface="Helvetica Neue"/>
+              </a:rPr>
+              <a:t>⑥ 拟合窗匹配退化时标 + 趋势门控</a:t>
             </a:r>
           </a:p>
           <a:p>
@@ -1591,7 +1628,7 @@
                 <a:latin typeface="Helvetica Neue"/>
                 <a:ea typeface="Helvetica Neue"/>
               </a:rPr>
-              <a:t>12 / 27</a:t>
+              <a:t>12 / 36</a:t>
             </a:r>
           </a:p>
         </p:txBody>
@@ -1756,6 +1793,42 @@
                       </p:childTnLst>
                     </p:cTn>
                   </p:par>
+                  <p:par>
+                    <p:cTn id="15" fill="hold">
+                      <p:stCondLst>
+                        <p:cond delay="indefinite"/>
+                      </p:stCondLst>
+                      <p:childTnLst>
+                        <p:par>
+                          <p:cTn id="16" presetID="1" presetClass="entr" presetSubtype="0" fill="hold" grpId="0" nodeType="clickEffect">
+                            <p:stCondLst>
+                              <p:cond delay="0"/>
+                            </p:stCondLst>
+                            <p:childTnLst>
+                              <p:set>
+                                <p:cBhvr>
+                                  <p:cTn id="17" dur="1" fill="hold">
+                                    <p:stCondLst>
+                                      <p:cond delay="0"/>
+                                    </p:stCondLst>
+                                  </p:cTn>
+                                  <p:tgtEl>
+                                    <p:spTgt spid="123"/>
+                                  </p:tgtEl>
+                                  <p:attrNameLst>
+                                    <p:attrName>style.visibility</p:attrName>
+                                  </p:attrNameLst>
+                                </p:cBhvr>
+                                <p:to>
+                                  <p:strVal val="visible"/>
+                                </p:to>
+                              </p:set>
+                            </p:childTnLst>
+                          </p:cTn>
+                        </p:par>
+                      </p:childTnLst>
+                    </p:cTn>
+                  </p:par>
                 </p:childTnLst>
               </p:cTn>
               <p:prevCondLst>
@@ -1843,138 +1916,350 @@
                 <a:latin typeface="Helvetica Neue"/>
                 <a:ea typeface="Helvetica Neue"/>
               </a:rPr>
-              <a:t>产品形态：现场能直接用，不是论文代码</a:t>
+              <a:t>验证纪律：四轮独立复核 + 数字总检</a:t>
             </a:r>
           </a:p>
         </p:txBody>
       </p:sp>
-      <p:sp>
-        <p:nvSpPr>
-          <p:cNvPr id="132" name="Title"/>
-          <p:cNvSpPr txBox="1"/>
+      <p:graphicFrame>
+        <p:nvGraphicFramePr>
+          <p:cNvPr id="133" name="Table"/>
+          <p:cNvGraphicFramePr>
+            <a:graphicFrameLocks noGrp="1"/>
+          </p:cNvGraphicFramePr>
           <p:nvPr/>
-        </p:nvSpPr>
-        <p:spPr>
-          <a:xfrm>
-            <a:off x="900000" y="920000"/>
-            <a:ext cx="10300000" cy="800000"/>
-          </a:xfrm>
-          <a:prstGeom prst="rect">
-            <a:avLst/>
-          </a:prstGeom>
-          <a:noFill/>
-          <a:ln/>
-        </p:spPr>
-        <p:txBody>
-          <a:bodyPr wrap="square" rtlCol="0">
-            <a:normAutofit/>
-          </a:bodyPr>
-          <a:lstStyle/>
-          <a:p>
-            <a:pPr>
-              <a:buNone/>
-            </a:pPr>
-            <a:r>
-              <a:rPr lang="zh-CN" sz="3400" b="1" dirty="0">
-                <a:solidFill>
-                  <a:srgbClr val="F4EFE6"/>
-                </a:solidFill>
-                <a:latin typeface="Georgia"/>
-                <a:ea typeface="Georgia"/>
-              </a:rPr>
-              <a:t>产品形态：现场能直接用，不是论文代码</a:t>
-            </a:r>
-          </a:p>
-        </p:txBody>
-      </p:sp>
-      <p:sp>
-        <p:nvSpPr>
-          <p:cNvPr id="133" name="Body"/>
-          <p:cNvSpPr txBox="1"/>
-          <p:nvPr/>
-        </p:nvSpPr>
-        <p:spPr>
-          <a:xfrm>
-            <a:off x="1050000" y="1850000"/>
-            <a:ext cx="10100000" cy="4500000"/>
-          </a:xfrm>
-          <a:prstGeom prst="rect">
-            <a:avLst/>
-          </a:prstGeom>
-          <a:noFill/>
-          <a:ln/>
-        </p:spPr>
-        <p:txBody>
-          <a:bodyPr wrap="square" rtlCol="0">
-            <a:normAutofit/>
-          </a:bodyPr>
-          <a:lstStyle/>
-          <a:p>
-            <a:pPr marL="285750" indent="-285750">
-              <a:buFont typeface="Arial" panose="020B0604020202020204"/>
-              <a:buChar char="•"/>
-            </a:pPr>
-            <a:r>
-              <a:rPr lang="zh-CN" sz="2000" b="0" dirty="0">
-                <a:solidFill>
-                  <a:srgbClr val="F4EFE6"/>
-                </a:solidFill>
-                <a:latin typeface="Helvetica Neue"/>
-                <a:ea typeface="Helvetica Neue"/>
-              </a:rPr>
-              <a:t>命令行：体检 / 标定 / 告警 / 报告 / 本地工作台</a:t>
-            </a:r>
-          </a:p>
-          <a:p>
-            <a:pPr marL="285750" indent="-285750">
-              <a:buFont typeface="Arial" panose="020B0604020202020204"/>
-              <a:buChar char="•"/>
-            </a:pPr>
-            <a:r>
-              <a:rPr lang="zh-CN" sz="2000" b="0" dirty="0">
-                <a:solidFill>
-                  <a:srgbClr val="F4EFE6"/>
-                </a:solidFill>
-                <a:latin typeface="Helvetica Neue"/>
-                <a:ea typeface="Helvetica Neue"/>
-              </a:rPr>
-              <a:t>本地工作台：浏览器上传 CSV → 标定基线 → 出报告</a:t>
-            </a:r>
-          </a:p>
-          <a:p>
-            <a:pPr marL="285750" indent="-285750">
-              <a:buFont typeface="Arial" panose="020B0604020202020204"/>
-              <a:buChar char="•"/>
-            </a:pPr>
-            <a:r>
-              <a:rPr lang="zh-CN" sz="2000" b="0" dirty="0">
-                <a:solidFill>
-                  <a:srgbClr val="F4EFE6"/>
-                </a:solidFill>
-                <a:latin typeface="Helvetica Neue"/>
-                <a:ea typeface="Helvetica Neue"/>
-              </a:rPr>
-              <a:t>企业版报告：单文件 HTML，自带局限与复现命令</a:t>
-            </a:r>
-          </a:p>
-          <a:p>
-            <a:pPr marL="285750" indent="-285750">
-              <a:buFont typeface="Arial" panose="020B0604020202020204"/>
-              <a:buChar char="•"/>
-            </a:pPr>
-            <a:r>
-              <a:rPr lang="zh-CN" sz="2000" b="0" dirty="0">
-                <a:solidFill>
-                  <a:srgbClr val="F4EFE6"/>
-                </a:solidFill>
-                <a:latin typeface="Helvetica Neue"/>
-                <a:ea typeface="Helvetica Neue"/>
-              </a:rPr>
-              <a:t>零外部依赖（只需 numpy/pandas），可离线运行</a:t>
-            </a:r>
-          </a:p>
-        </p:txBody>
-      </p:sp>
+        </p:nvGraphicFramePr>
+        <p:xfrm>
+          <a:off x="900000" y="900000"/>
+          <a:ext cx="10300000" cy="1680000"/>
+        </p:xfrm>
+        <a:graphic>
+          <a:graphicData uri="http://schemas.openxmlformats.org/drawingml/2006/table">
+            <a:tbl>
+              <a:tblPr firstRow="1" bandRow="1"/>
+              <a:tblGrid>
+                <a:gridCol w="3433333"/>
+                <a:gridCol w="3433333"/>
+                <a:gridCol w="3433333"/>
+              </a:tblGrid>
+              <a:tr h="420000">
+                <a:tc>
+                  <a:txBody>
+                    <a:bodyPr anchor="ctr"/>
+                    <a:lstStyle/>
+                    <a:p>
+                      <a:pPr algn="l">
+                        <a:buNone/>
+                      </a:pPr>
+                      <a:r>
+                        <a:rPr lang="zh-CN" sz="1400" b="1" dirty="0">
+                          <a:solidFill>
+                            <a:srgbClr val="111316"/>
+                          </a:solidFill>
+                          <a:latin typeface="Helvetica Neue"/>
+                          <a:ea typeface="Helvetica Neue"/>
+                        </a:rPr>
+                        <a:t>复核批次</a:t>
+                      </a:r>
+                    </a:p>
+                  </a:txBody>
+                  <a:tcPr marL="91440" marR="91440" anchor="ctr">
+                    <a:solidFill>
+                      <a:srgbClr val="C9A84C"/>
+                    </a:solidFill>
+                  </a:tcPr>
+                </a:tc>
+                <a:tc>
+                  <a:txBody>
+                    <a:bodyPr anchor="ctr"/>
+                    <a:lstStyle/>
+                    <a:p>
+                      <a:pPr algn="l">
+                        <a:buNone/>
+                      </a:pPr>
+                      <a:r>
+                        <a:rPr lang="zh-CN" sz="1400" b="1" dirty="0">
+                          <a:solidFill>
+                            <a:srgbClr val="111316"/>
+                          </a:solidFill>
+                          <a:latin typeface="Helvetica Neue"/>
+                          <a:ea typeface="Helvetica Neue"/>
+                        </a:rPr>
+                        <a:t>内容</a:t>
+                      </a:r>
+                    </a:p>
+                  </a:txBody>
+                  <a:tcPr marL="91440" marR="91440" anchor="ctr">
+                    <a:solidFill>
+                      <a:srgbClr val="C9A84C"/>
+                    </a:solidFill>
+                  </a:tcPr>
+                </a:tc>
+                <a:tc>
+                  <a:txBody>
+                    <a:bodyPr anchor="ctr"/>
+                    <a:lstStyle/>
+                    <a:p>
+                      <a:pPr algn="l">
+                        <a:buNone/>
+                      </a:pPr>
+                      <a:r>
+                        <a:rPr lang="zh-CN" sz="1400" b="1" dirty="0">
+                          <a:solidFill>
+                            <a:srgbClr val="111316"/>
+                          </a:solidFill>
+                          <a:latin typeface="Helvetica Neue"/>
+                          <a:ea typeface="Helvetica Neue"/>
+                        </a:rPr>
+                        <a:t>结果</a:t>
+                      </a:r>
+                    </a:p>
+                  </a:txBody>
+                  <a:tcPr marL="91440" marR="91440" anchor="ctr">
+                    <a:solidFill>
+                      <a:srgbClr val="C9A84C"/>
+                    </a:solidFill>
+                  </a:tcPr>
+                </a:tc>
+              </a:tr>
+              <a:tr h="420000">
+                <a:tc>
+                  <a:txBody>
+                    <a:bodyPr anchor="ctr"/>
+                    <a:lstStyle/>
+                    <a:p>
+                      <a:pPr algn="l">
+                        <a:buNone/>
+                      </a:pPr>
+                      <a:r>
+                        <a:rPr lang="zh-CN" sz="1400" b="0" dirty="0">
+                          <a:solidFill>
+                            <a:srgbClr val="F4EFE6"/>
+                          </a:solidFill>
+                          <a:latin typeface="Helvetica Neue"/>
+                          <a:ea typeface="Helvetica Neue"/>
+                        </a:rPr>
+                        <a:t>批次 2 ｜ 4 ｜ 5 ｜ 6</a:t>
+                      </a:r>
+                    </a:p>
+                  </a:txBody>
+                  <a:tcPr marL="91440" marR="91440" anchor="ctr">
+                    <a:solidFill>
+                      <a:srgbClr val="1A1D22"/>
+                    </a:solidFill>
+                  </a:tcPr>
+                </a:tc>
+                <a:tc>
+                  <a:txBody>
+                    <a:bodyPr anchor="ctr"/>
+                    <a:lstStyle/>
+                    <a:p>
+                      <a:pPr algn="l">
+                        <a:buNone/>
+                      </a:pPr>
+                      <a:r>
+                        <a:rPr lang="zh-CN" sz="1400" b="0" dirty="0">
+                          <a:solidFill>
+                            <a:srgbClr val="F4EFE6"/>
+                          </a:solidFill>
+                          <a:latin typeface="Helvetica Neue"/>
+                          <a:ea typeface="Helvetica Neue"/>
+                        </a:rPr>
+                        <a:t>由第二套独立实现复核全部关键结论</a:t>
+                      </a:r>
+                    </a:p>
+                  </a:txBody>
+                  <a:tcPr marL="91440" marR="91440" anchor="ctr">
+                    <a:solidFill>
+                      <a:srgbClr val="1A1D22"/>
+                    </a:solidFill>
+                  </a:tcPr>
+                </a:tc>
+                <a:tc>
+                  <a:txBody>
+                    <a:bodyPr anchor="ctr"/>
+                    <a:lstStyle/>
+                    <a:p>
+                      <a:pPr algn="l">
+                        <a:buNone/>
+                      </a:pPr>
+                      <a:r>
+                        <a:rPr lang="zh-CN" sz="1400" b="0" dirty="0">
+                          <a:solidFill>
+                            <a:srgbClr val="F4EFE6"/>
+                          </a:solidFill>
+                          <a:latin typeface="Helvetica Neue"/>
+                          <a:ea typeface="Helvetica Neue"/>
+                        </a:rPr>
+                        <a:t>被指出的问题全部回写（含我们自己的两个口径 bug）</a:t>
+                      </a:r>
+                    </a:p>
+                  </a:txBody>
+                  <a:tcPr marL="91440" marR="91440" anchor="ctr">
+                    <a:solidFill>
+                      <a:srgbClr val="1A1D22"/>
+                    </a:solidFill>
+                  </a:tcPr>
+                </a:tc>
+              </a:tr>
+              <a:tr h="420000">
+                <a:tc>
+                  <a:txBody>
+                    <a:bodyPr anchor="ctr"/>
+                    <a:lstStyle/>
+                    <a:p>
+                      <a:pPr algn="l">
+                        <a:buNone/>
+                      </a:pPr>
+                      <a:r>
+                        <a:rPr lang="zh-CN" sz="1400" b="0" dirty="0">
+                          <a:solidFill>
+                            <a:srgbClr val="F4EFE6"/>
+                          </a:solidFill>
+                          <a:latin typeface="Helvetica Neue"/>
+                          <a:ea typeface="Helvetica Neue"/>
+                        </a:rPr>
+                        <a:t>冻结前数字总检</a:t>
+                      </a:r>
+                    </a:p>
+                  </a:txBody>
+                  <a:tcPr marL="91440" marR="91440" anchor="ctr">
+                    <a:noFill/>
+                  </a:tcPr>
+                </a:tc>
+                <a:tc>
+                  <a:txBody>
+                    <a:bodyPr anchor="ctr"/>
+                    <a:lstStyle/>
+                    <a:p>
+                      <a:pPr algn="l">
+                        <a:buNone/>
+                      </a:pPr>
+                      <a:r>
+                        <a:rPr lang="zh-CN" sz="1400" b="0" dirty="0">
+                          <a:solidFill>
+                            <a:srgbClr val="F4EFE6"/>
+                          </a:solidFill>
+                          <a:latin typeface="Helvetica Neue"/>
+                          <a:ea typeface="Helvetica Neue"/>
+                        </a:rPr>
+                        <a:t>每个对外数字回溯到结果文件并在文档中检索</a:t>
+                      </a:r>
+                    </a:p>
+                  </a:txBody>
+                  <a:tcPr marL="91440" marR="91440" anchor="ctr">
+                    <a:noFill/>
+                  </a:tcPr>
+                </a:tc>
+                <a:tc>
+                  <a:txBody>
+                    <a:bodyPr anchor="ctr"/>
+                    <a:lstStyle/>
+                    <a:p>
+                      <a:pPr algn="l">
+                        <a:buNone/>
+                      </a:pPr>
+                      <a:r>
+                        <a:rPr lang="zh-CN" sz="1400" b="0" dirty="0">
+                          <a:solidFill>
+                            <a:srgbClr val="F4EFE6"/>
+                          </a:solidFill>
+                          <a:latin typeface="Helvetica Neue"/>
+                          <a:ea typeface="Helvetica Neue"/>
+                        </a:rPr>
+                        <a:t>30/30 通过</a:t>
+                      </a:r>
+                    </a:p>
+                  </a:txBody>
+                  <a:tcPr marL="91440" marR="91440" anchor="ctr">
+                    <a:noFill/>
+                  </a:tcPr>
+                </a:tc>
+              </a:tr>
+              <a:tr h="420000">
+                <a:tc>
+                  <a:txBody>
+                    <a:bodyPr anchor="ctr"/>
+                    <a:lstStyle/>
+                    <a:p>
+                      <a:pPr algn="l">
+                        <a:buNone/>
+                      </a:pPr>
+                      <a:r>
+                        <a:rPr lang="zh-CN" sz="1400" b="0" dirty="0">
+                          <a:solidFill>
+                            <a:srgbClr val="F4EFE6"/>
+                          </a:solidFill>
+                          <a:latin typeface="Helvetica Neue"/>
+                          <a:ea typeface="Helvetica Neue"/>
+                        </a:rPr>
+                        <a:t>一键复现</a:t>
+                      </a:r>
+                    </a:p>
+                  </a:txBody>
+                  <a:tcPr marL="91440" marR="91440" anchor="ctr">
+                    <a:solidFill>
+                      <a:srgbClr val="1A1D22"/>
+                    </a:solidFill>
+                  </a:tcPr>
+                </a:tc>
+                <a:tc>
+                  <a:txBody>
+                    <a:bodyPr anchor="ctr"/>
+                    <a:lstStyle/>
+                    <a:p>
+                      <a:pPr algn="l">
+                        <a:buNone/>
+                      </a:pPr>
+                      <a:r>
+                        <a:rPr lang="zh-CN" sz="1400" b="0" dirty="0">
+                          <a:solidFill>
+                            <a:srgbClr val="F4EFE6"/>
+                          </a:solidFill>
+                          <a:latin typeface="Helvetica Neue"/>
+                          <a:ea typeface="Helvetica Neue"/>
+                        </a:rPr>
+                        <a:t>run_all 快速 9 阶段 / 全量 39 阶段</a:t>
+                      </a:r>
+                    </a:p>
+                  </a:txBody>
+                  <a:tcPr marL="91440" marR="91440" anchor="ctr">
+                    <a:solidFill>
+                      <a:srgbClr val="1A1D22"/>
+                    </a:solidFill>
+                  </a:tcPr>
+                </a:tc>
+                <a:tc>
+                  <a:txBody>
+                    <a:bodyPr anchor="ctr"/>
+                    <a:lstStyle/>
+                    <a:p>
+                      <a:pPr algn="l">
+                        <a:buNone/>
+                      </a:pPr>
+                      <a:r>
+                        <a:rPr lang="zh-CN" sz="1400" b="0" dirty="0">
+                          <a:solidFill>
+                            <a:srgbClr val="F4EFE6"/>
+                          </a:solidFill>
+                          <a:latin typeface="Helvetica Neue"/>
+                          <a:ea typeface="Helvetica Neue"/>
+                        </a:rPr>
+                        <a:t>全部通过</a:t>
+                      </a:r>
+                    </a:p>
+                  </a:txBody>
+                  <a:tcPr marL="91440" marR="91440" anchor="ctr">
+                    <a:solidFill>
+                      <a:srgbClr val="1A1D22"/>
+                    </a:solidFill>
+                  </a:tcPr>
+                </a:tc>
+              </a:tr>
+            </a:tbl>
+          </a:graphicData>
+        </a:graphic>
+      </p:graphicFrame>
       <p:sp>
         <p:nvSpPr>
           <p:cNvPr id="139" name="Page number"/>
@@ -2009,7 +2294,7 @@
                 <a:latin typeface="Helvetica Neue"/>
                 <a:ea typeface="Helvetica Neue"/>
               </a:rPr>
-              <a:t>13 / 27</a:t>
+              <a:t>13 / 36</a:t>
             </a:r>
           </a:p>
         </p:txBody>
@@ -2022,183 +2307,6 @@
   <p:transition spd="med">
     <p:fade/>
   </p:transition>
-  <p:timing>
-    <p:tnLst>
-      <p:par>
-        <p:cTn id="1" dur="indefinite" restart="never" nodeType="tmRoot">
-          <p:childTnLst>
-            <p:seq concurrent="1" nextAc="seek">
-              <p:cTn id="2" dur="indefinite" nodeType="mainSeq">
-                <p:childTnLst>
-                  <p:par>
-                    <p:cTn id="3" fill="hold">
-                      <p:stCondLst>
-                        <p:cond delay="indefinite"/>
-                      </p:stCondLst>
-                      <p:childTnLst>
-                        <p:par>
-                          <p:cTn id="4" presetID="1" presetClass="entr" presetSubtype="0" fill="hold" grpId="0" nodeType="clickEffect">
-                            <p:stCondLst>
-                              <p:cond delay="0"/>
-                            </p:stCondLst>
-                            <p:childTnLst>
-                              <p:set>
-                                <p:cBhvr>
-                                  <p:cTn id="5" dur="1" fill="hold">
-                                    <p:stCondLst>
-                                      <p:cond delay="0"/>
-                                    </p:stCondLst>
-                                  </p:cTn>
-                                  <p:tgtEl>
-                                    <p:spTgt spid="133"/>
-                                  </p:tgtEl>
-                                  <p:attrNameLst>
-                                    <p:attrName>style.visibility</p:attrName>
-                                  </p:attrNameLst>
-                                </p:cBhvr>
-                                <p:to>
-                                  <p:strVal val="visible"/>
-                                </p:to>
-                              </p:set>
-                            </p:childTnLst>
-                          </p:cTn>
-                        </p:par>
-                      </p:childTnLst>
-                    </p:cTn>
-                  </p:par>
-                  <p:par>
-                    <p:cTn id="6" fill="hold">
-                      <p:stCondLst>
-                        <p:cond delay="indefinite"/>
-                      </p:stCondLst>
-                      <p:childTnLst>
-                        <p:par>
-                          <p:cTn id="7" presetID="1" presetClass="entr" presetSubtype="0" fill="hold" grpId="0" nodeType="clickEffect">
-                            <p:stCondLst>
-                              <p:cond delay="0"/>
-                            </p:stCondLst>
-                            <p:childTnLst>
-                              <p:set>
-                                <p:cBhvr>
-                                  <p:cTn id="8" dur="1" fill="hold">
-                                    <p:stCondLst>
-                                      <p:cond delay="0"/>
-                                    </p:stCondLst>
-                                  </p:cTn>
-                                  <p:tgtEl>
-                                    <p:spTgt spid="133"/>
-                                  </p:tgtEl>
-                                  <p:attrNameLst>
-                                    <p:attrName>style.visibility</p:attrName>
-                                  </p:attrNameLst>
-                                </p:cBhvr>
-                                <p:to>
-                                  <p:strVal val="visible"/>
-                                </p:to>
-                              </p:set>
-                            </p:childTnLst>
-                          </p:cTn>
-                        </p:par>
-                      </p:childTnLst>
-                    </p:cTn>
-                  </p:par>
-                  <p:par>
-                    <p:cTn id="9" fill="hold">
-                      <p:stCondLst>
-                        <p:cond delay="indefinite"/>
-                      </p:stCondLst>
-                      <p:childTnLst>
-                        <p:par>
-                          <p:cTn id="10" presetID="1" presetClass="entr" presetSubtype="0" fill="hold" grpId="0" nodeType="clickEffect">
-                            <p:stCondLst>
-                              <p:cond delay="0"/>
-                            </p:stCondLst>
-                            <p:childTnLst>
-                              <p:set>
-                                <p:cBhvr>
-                                  <p:cTn id="11" dur="1" fill="hold">
-                                    <p:stCondLst>
-                                      <p:cond delay="0"/>
-                                    </p:stCondLst>
-                                  </p:cTn>
-                                  <p:tgtEl>
-                                    <p:spTgt spid="133"/>
-                                  </p:tgtEl>
-                                  <p:attrNameLst>
-                                    <p:attrName>style.visibility</p:attrName>
-                                  </p:attrNameLst>
-                                </p:cBhvr>
-                                <p:to>
-                                  <p:strVal val="visible"/>
-                                </p:to>
-                              </p:set>
-                            </p:childTnLst>
-                          </p:cTn>
-                        </p:par>
-                      </p:childTnLst>
-                    </p:cTn>
-                  </p:par>
-                  <p:par>
-                    <p:cTn id="12" fill="hold">
-                      <p:stCondLst>
-                        <p:cond delay="indefinite"/>
-                      </p:stCondLst>
-                      <p:childTnLst>
-                        <p:par>
-                          <p:cTn id="13" presetID="1" presetClass="entr" presetSubtype="0" fill="hold" grpId="0" nodeType="clickEffect">
-                            <p:stCondLst>
-                              <p:cond delay="0"/>
-                            </p:stCondLst>
-                            <p:childTnLst>
-                              <p:set>
-                                <p:cBhvr>
-                                  <p:cTn id="14" dur="1" fill="hold">
-                                    <p:stCondLst>
-                                      <p:cond delay="0"/>
-                                    </p:stCondLst>
-                                  </p:cTn>
-                                  <p:tgtEl>
-                                    <p:spTgt spid="133"/>
-                                  </p:tgtEl>
-                                  <p:attrNameLst>
-                                    <p:attrName>style.visibility</p:attrName>
-                                  </p:attrNameLst>
-                                </p:cBhvr>
-                                <p:to>
-                                  <p:strVal val="visible"/>
-                                </p:to>
-                              </p:set>
-                            </p:childTnLst>
-                          </p:cTn>
-                        </p:par>
-                      </p:childTnLst>
-                    </p:cTn>
-                  </p:par>
-                </p:childTnLst>
-              </p:cTn>
-              <p:prevCondLst>
-                <p:cond evt="onPrev" delay="0">
-                  <p:tgtEl>
-                    <p:sldTgt/>
-                  </p:tgtEl>
-                </p:cond>
-              </p:prevCondLst>
-              <p:nextCondLst>
-                <p:cond evt="onNext" delay="0">
-                  <p:tgtEl>
-                    <p:sldTgt/>
-                  </p:tgtEl>
-                </p:cond>
-              </p:nextCondLst>
-            </p:seq>
-          </p:childTnLst>
-        </p:cTn>
-      </p:par>
-    </p:tnLst>
-    <p:bldLst>
-      <p:bldP spid="133" grpId="0"/>
-    </p:bldLst>
-  </p:timing>
 </p:sld>
 </file>
 
@@ -2261,6 +2369,2200 @@
                 <a:latin typeface="Helvetica Neue"/>
                 <a:ea typeface="Helvetica Neue"/>
               </a:rPr>
+              <a:t>已验证 / 未验证：把边界写在明处</a:t>
+            </a:r>
+          </a:p>
+        </p:txBody>
+      </p:sp>
+      <p:sp>
+        <p:nvSpPr>
+          <p:cNvPr id="142" name="Title"/>
+          <p:cNvSpPr txBox="1"/>
+          <p:nvPr/>
+        </p:nvSpPr>
+        <p:spPr>
+          <a:xfrm>
+            <a:off x="900000" y="920000"/>
+            <a:ext cx="10300000" cy="800000"/>
+          </a:xfrm>
+          <a:prstGeom prst="rect">
+            <a:avLst/>
+          </a:prstGeom>
+          <a:noFill/>
+          <a:ln/>
+        </p:spPr>
+        <p:txBody>
+          <a:bodyPr wrap="square" rtlCol="0">
+            <a:normAutofit/>
+          </a:bodyPr>
+          <a:lstStyle/>
+          <a:p>
+            <a:pPr>
+              <a:buNone/>
+            </a:pPr>
+            <a:r>
+              <a:rPr lang="zh-CN" sz="3400" b="1" dirty="0">
+                <a:solidFill>
+                  <a:srgbClr val="F4EFE6"/>
+                </a:solidFill>
+                <a:latin typeface="Georgia"/>
+                <a:ea typeface="Georgia"/>
+              </a:rPr>
+              <a:t>已验证 / 未验证：把边界写在明处</a:t>
+            </a:r>
+          </a:p>
+        </p:txBody>
+      </p:sp>
+      <p:sp>
+        <p:nvSpPr>
+          <p:cNvPr id="143" name="Body"/>
+          <p:cNvSpPr txBox="1"/>
+          <p:nvPr/>
+        </p:nvSpPr>
+        <p:spPr>
+          <a:xfrm>
+            <a:off x="1050000" y="1850000"/>
+            <a:ext cx="10100000" cy="4500000"/>
+          </a:xfrm>
+          <a:prstGeom prst="rect">
+            <a:avLst/>
+          </a:prstGeom>
+          <a:noFill/>
+          <a:ln/>
+        </p:spPr>
+        <p:txBody>
+          <a:bodyPr wrap="square" rtlCol="0">
+            <a:normAutofit/>
+          </a:bodyPr>
+          <a:lstStyle/>
+          <a:p>
+            <a:pPr marL="285750" indent="-285750">
+              <a:buFont typeface="Arial" panose="020B0604020202020204"/>
+              <a:buChar char="•"/>
+            </a:pPr>
+            <a:r>
+              <a:rPr lang="zh-CN" sz="2000" b="0" dirty="0">
+                <a:solidFill>
+                  <a:srgbClr val="F4EFE6"/>
+                </a:solidFill>
+                <a:latin typeface="Helvetica Neue"/>
+                <a:ea typeface="Helvetica Neue"/>
+              </a:rPr>
+              <a:t>已实测（真实数据）：SKAB 水泵台架、MetroPT-3 地铁空压机 214 天</a:t>
+            </a:r>
+          </a:p>
+          <a:p>
+            <a:pPr marL="285750" indent="-285750">
+              <a:buFont typeface="Arial" panose="020B0604020202020204"/>
+              <a:buChar char="•"/>
+            </a:pPr>
+            <a:r>
+              <a:rPr lang="zh-CN" sz="2000" b="0" dirty="0">
+                <a:solidFill>
+                  <a:srgbClr val="F4EFE6"/>
+                </a:solidFill>
+                <a:latin typeface="Helvetica Neue"/>
+                <a:ea typeface="Helvetica Neue"/>
+              </a:rPr>
+              <a:t>已闭环（机理仿真）：BSM1 标准模型、BSM2 整厂（含 ADM1 消化罐）</a:t>
+            </a:r>
+          </a:p>
+          <a:p>
+            <a:pPr marL="285750" indent="-285750">
+              <a:buFont typeface="Arial" panose="020B0604020202020204"/>
+              <a:buChar char="•"/>
+            </a:pPr>
+            <a:r>
+              <a:rPr lang="zh-CN" sz="2000" b="0" dirty="0">
+                <a:solidFill>
+                  <a:srgbClr val="F4EFE6"/>
+                </a:solidFill>
+                <a:latin typeface="Helvetica Neue"/>
+                <a:ea typeface="Helvetica Neue"/>
+              </a:rPr>
+              <a:t>未验证：真实污水厂的现场数据（正在申请试点）</a:t>
+            </a:r>
+          </a:p>
+          <a:p>
+            <a:pPr marL="285750" indent="-285750">
+              <a:buFont typeface="Arial" panose="020B0604020202020204"/>
+              <a:buChar char="•"/>
+            </a:pPr>
+            <a:r>
+              <a:rPr lang="zh-CN" sz="2000" b="0" dirty="0">
+                <a:solidFill>
+                  <a:srgbClr val="F4EFE6"/>
+                </a:solidFill>
+                <a:latin typeface="Helvetica Neue"/>
+                <a:ea typeface="Helvetica Neue"/>
+              </a:rPr>
+              <a:t>未做：诊断到水务设备语义的完整映射、成本参数企业标定</a:t>
+            </a:r>
+          </a:p>
+        </p:txBody>
+      </p:sp>
+      <p:sp>
+        <p:nvSpPr>
+          <p:cNvPr id="149" name="Page number"/>
+          <p:cNvSpPr txBox="1"/>
+          <p:nvPr/>
+        </p:nvSpPr>
+        <p:spPr>
+          <a:xfrm>
+            <a:off x="10600000" y="6250000"/>
+            <a:ext cx="1200000" cy="400000"/>
+          </a:xfrm>
+          <a:prstGeom prst="rect">
+            <a:avLst/>
+          </a:prstGeom>
+          <a:noFill/>
+          <a:ln/>
+        </p:spPr>
+        <p:txBody>
+          <a:bodyPr wrap="square" rtlCol="0">
+            <a:normAutofit/>
+          </a:bodyPr>
+          <a:lstStyle/>
+          <a:p>
+            <a:pPr algn="r">
+              <a:buNone/>
+            </a:pPr>
+            <a:r>
+              <a:rPr lang="zh-CN" sz="1000" b="0" dirty="0">
+                <a:solidFill>
+                  <a:srgbClr val="A79F91"/>
+                </a:solidFill>
+                <a:latin typeface="Helvetica Neue"/>
+                <a:ea typeface="Helvetica Neue"/>
+              </a:rPr>
+              <a:t>14 / 36</a:t>
+            </a:r>
+          </a:p>
+        </p:txBody>
+      </p:sp>
+    </p:spTree>
+  </p:cSld>
+  <p:clrMapOvr>
+    <a:overrideClrMapping bg1="lt1" tx1="dk1" bg2="lt2" tx2="dk2" accent1="accent1" accent2="accent2" accent3="accent3" accent4="accent4" accent5="accent5" accent6="accent6" hlink="hlink" folHlink="folHlink"/>
+  </p:clrMapOvr>
+  <p:transition spd="med">
+    <p:fade/>
+  </p:transition>
+  <p:timing>
+    <p:tnLst>
+      <p:par>
+        <p:cTn id="1" dur="indefinite" restart="never" nodeType="tmRoot">
+          <p:childTnLst>
+            <p:seq concurrent="1" nextAc="seek">
+              <p:cTn id="2" dur="indefinite" nodeType="mainSeq">
+                <p:childTnLst>
+                  <p:par>
+                    <p:cTn id="3" fill="hold">
+                      <p:stCondLst>
+                        <p:cond delay="indefinite"/>
+                      </p:stCondLst>
+                      <p:childTnLst>
+                        <p:par>
+                          <p:cTn id="4" presetID="1" presetClass="entr" presetSubtype="0" fill="hold" grpId="0" nodeType="clickEffect">
+                            <p:stCondLst>
+                              <p:cond delay="0"/>
+                            </p:stCondLst>
+                            <p:childTnLst>
+                              <p:set>
+                                <p:cBhvr>
+                                  <p:cTn id="5" dur="1" fill="hold">
+                                    <p:stCondLst>
+                                      <p:cond delay="0"/>
+                                    </p:stCondLst>
+                                  </p:cTn>
+                                  <p:tgtEl>
+                                    <p:spTgt spid="143"/>
+                                  </p:tgtEl>
+                                  <p:attrNameLst>
+                                    <p:attrName>style.visibility</p:attrName>
+                                  </p:attrNameLst>
+                                </p:cBhvr>
+                                <p:to>
+                                  <p:strVal val="visible"/>
+                                </p:to>
+                              </p:set>
+                            </p:childTnLst>
+                          </p:cTn>
+                        </p:par>
+                      </p:childTnLst>
+                    </p:cTn>
+                  </p:par>
+                  <p:par>
+                    <p:cTn id="6" fill="hold">
+                      <p:stCondLst>
+                        <p:cond delay="indefinite"/>
+                      </p:stCondLst>
+                      <p:childTnLst>
+                        <p:par>
+                          <p:cTn id="7" presetID="1" presetClass="entr" presetSubtype="0" fill="hold" grpId="0" nodeType="clickEffect">
+                            <p:stCondLst>
+                              <p:cond delay="0"/>
+                            </p:stCondLst>
+                            <p:childTnLst>
+                              <p:set>
+                                <p:cBhvr>
+                                  <p:cTn id="8" dur="1" fill="hold">
+                                    <p:stCondLst>
+                                      <p:cond delay="0"/>
+                                    </p:stCondLst>
+                                  </p:cTn>
+                                  <p:tgtEl>
+                                    <p:spTgt spid="143"/>
+                                  </p:tgtEl>
+                                  <p:attrNameLst>
+                                    <p:attrName>style.visibility</p:attrName>
+                                  </p:attrNameLst>
+                                </p:cBhvr>
+                                <p:to>
+                                  <p:strVal val="visible"/>
+                                </p:to>
+                              </p:set>
+                            </p:childTnLst>
+                          </p:cTn>
+                        </p:par>
+                      </p:childTnLst>
+                    </p:cTn>
+                  </p:par>
+                  <p:par>
+                    <p:cTn id="9" fill="hold">
+                      <p:stCondLst>
+                        <p:cond delay="indefinite"/>
+                      </p:stCondLst>
+                      <p:childTnLst>
+                        <p:par>
+                          <p:cTn id="10" presetID="1" presetClass="entr" presetSubtype="0" fill="hold" grpId="0" nodeType="clickEffect">
+                            <p:stCondLst>
+                              <p:cond delay="0"/>
+                            </p:stCondLst>
+                            <p:childTnLst>
+                              <p:set>
+                                <p:cBhvr>
+                                  <p:cTn id="11" dur="1" fill="hold">
+                                    <p:stCondLst>
+                                      <p:cond delay="0"/>
+                                    </p:stCondLst>
+                                  </p:cTn>
+                                  <p:tgtEl>
+                                    <p:spTgt spid="143"/>
+                                  </p:tgtEl>
+                                  <p:attrNameLst>
+                                    <p:attrName>style.visibility</p:attrName>
+                                  </p:attrNameLst>
+                                </p:cBhvr>
+                                <p:to>
+                                  <p:strVal val="visible"/>
+                                </p:to>
+                              </p:set>
+                            </p:childTnLst>
+                          </p:cTn>
+                        </p:par>
+                      </p:childTnLst>
+                    </p:cTn>
+                  </p:par>
+                  <p:par>
+                    <p:cTn id="12" fill="hold">
+                      <p:stCondLst>
+                        <p:cond delay="indefinite"/>
+                      </p:stCondLst>
+                      <p:childTnLst>
+                        <p:par>
+                          <p:cTn id="13" presetID="1" presetClass="entr" presetSubtype="0" fill="hold" grpId="0" nodeType="clickEffect">
+                            <p:stCondLst>
+                              <p:cond delay="0"/>
+                            </p:stCondLst>
+                            <p:childTnLst>
+                              <p:set>
+                                <p:cBhvr>
+                                  <p:cTn id="14" dur="1" fill="hold">
+                                    <p:stCondLst>
+                                      <p:cond delay="0"/>
+                                    </p:stCondLst>
+                                  </p:cTn>
+                                  <p:tgtEl>
+                                    <p:spTgt spid="143"/>
+                                  </p:tgtEl>
+                                  <p:attrNameLst>
+                                    <p:attrName>style.visibility</p:attrName>
+                                  </p:attrNameLst>
+                                </p:cBhvr>
+                                <p:to>
+                                  <p:strVal val="visible"/>
+                                </p:to>
+                              </p:set>
+                            </p:childTnLst>
+                          </p:cTn>
+                        </p:par>
+                      </p:childTnLst>
+                    </p:cTn>
+                  </p:par>
+                </p:childTnLst>
+              </p:cTn>
+              <p:prevCondLst>
+                <p:cond evt="onPrev" delay="0">
+                  <p:tgtEl>
+                    <p:sldTgt/>
+                  </p:tgtEl>
+                </p:cond>
+              </p:prevCondLst>
+              <p:nextCondLst>
+                <p:cond evt="onNext" delay="0">
+                  <p:tgtEl>
+                    <p:sldTgt/>
+                  </p:tgtEl>
+                </p:cond>
+              </p:nextCondLst>
+            </p:seq>
+          </p:childTnLst>
+        </p:cTn>
+      </p:par>
+    </p:tnLst>
+    <p:bldLst>
+      <p:bldP spid="143" grpId="0"/>
+    </p:bldLst>
+  </p:timing>
+</p:sld>
+</file>
+
+<file path=ppt/slides/slide15.xml><?xml version="1.0" encoding="utf-8"?>
+<p:sld xmlns:a="http://schemas.openxmlformats.org/drawingml/2006/main" xmlns:r="http://schemas.openxmlformats.org/officeDocument/2006/relationships" xmlns:p="http://schemas.openxmlformats.org/presentationml/2006/main">
+  <p:cSld>
+    <p:bg>
+      <p:bgPr>
+        <a:solidFill>
+          <a:srgbClr val="111316"/>
+        </a:solidFill>
+        <a:effectLst/>
+      </p:bgPr>
+    </p:bg>
+    <p:spTree>
+      <p:nvGrpSpPr>
+        <p:cNvPr id="1" name=""/>
+        <p:cNvGrpSpPr/>
+        <p:nvPr/>
+      </p:nvGrpSpPr>
+      <p:grpSpPr>
+        <a:xfrm>
+          <a:off x="0" y="0"/>
+          <a:ext cx="0" cy="0"/>
+          <a:chOff x="0" y="0"/>
+          <a:chExt cx="0" cy="0"/>
+        </a:xfrm>
+      </p:grpSpPr>
+      <p:sp>
+        <p:nvSpPr>
+          <p:cNvPr id="151" name="Kicker"/>
+          <p:cNvSpPr txBox="1"/>
+          <p:nvPr/>
+        </p:nvSpPr>
+        <p:spPr>
+          <a:xfrm>
+            <a:off x="900000" y="420000"/>
+            <a:ext cx="10000000" cy="420000"/>
+          </a:xfrm>
+          <a:prstGeom prst="rect">
+            <a:avLst/>
+          </a:prstGeom>
+          <a:noFill/>
+          <a:ln/>
+        </p:spPr>
+        <p:txBody>
+          <a:bodyPr wrap="square" rtlCol="0">
+            <a:normAutofit/>
+          </a:bodyPr>
+          <a:lstStyle/>
+          <a:p>
+            <a:pPr>
+              <a:buNone/>
+            </a:pPr>
+            <a:r>
+              <a:rPr lang="zh-CN" sz="1400" b="1" dirty="0">
+                <a:solidFill>
+                  <a:srgbClr val="C9A84C"/>
+                </a:solidFill>
+                <a:latin typeface="Helvetica Neue"/>
+                <a:ea typeface="Helvetica Neue"/>
+              </a:rPr>
+              <a:t>产品形态：现场能直接用，不是论文代码</a:t>
+            </a:r>
+          </a:p>
+        </p:txBody>
+      </p:sp>
+      <p:sp>
+        <p:nvSpPr>
+          <p:cNvPr id="152" name="Title"/>
+          <p:cNvSpPr txBox="1"/>
+          <p:nvPr/>
+        </p:nvSpPr>
+        <p:spPr>
+          <a:xfrm>
+            <a:off x="900000" y="920000"/>
+            <a:ext cx="10300000" cy="800000"/>
+          </a:xfrm>
+          <a:prstGeom prst="rect">
+            <a:avLst/>
+          </a:prstGeom>
+          <a:noFill/>
+          <a:ln/>
+        </p:spPr>
+        <p:txBody>
+          <a:bodyPr wrap="square" rtlCol="0">
+            <a:normAutofit/>
+          </a:bodyPr>
+          <a:lstStyle/>
+          <a:p>
+            <a:pPr>
+              <a:buNone/>
+            </a:pPr>
+            <a:r>
+              <a:rPr lang="zh-CN" sz="3400" b="1" dirty="0">
+                <a:solidFill>
+                  <a:srgbClr val="F4EFE6"/>
+                </a:solidFill>
+                <a:latin typeface="Georgia"/>
+                <a:ea typeface="Georgia"/>
+              </a:rPr>
+              <a:t>产品形态：现场能直接用，不是论文代码</a:t>
+            </a:r>
+          </a:p>
+        </p:txBody>
+      </p:sp>
+      <p:sp>
+        <p:nvSpPr>
+          <p:cNvPr id="153" name="Body"/>
+          <p:cNvSpPr txBox="1"/>
+          <p:nvPr/>
+        </p:nvSpPr>
+        <p:spPr>
+          <a:xfrm>
+            <a:off x="1050000" y="1850000"/>
+            <a:ext cx="10100000" cy="4500000"/>
+          </a:xfrm>
+          <a:prstGeom prst="rect">
+            <a:avLst/>
+          </a:prstGeom>
+          <a:noFill/>
+          <a:ln/>
+        </p:spPr>
+        <p:txBody>
+          <a:bodyPr wrap="square" rtlCol="0">
+            <a:normAutofit/>
+          </a:bodyPr>
+          <a:lstStyle/>
+          <a:p>
+            <a:pPr marL="285750" indent="-285750">
+              <a:buFont typeface="Arial" panose="020B0604020202020204"/>
+              <a:buChar char="•"/>
+            </a:pPr>
+            <a:r>
+              <a:rPr lang="zh-CN" sz="2000" b="0" dirty="0">
+                <a:solidFill>
+                  <a:srgbClr val="F4EFE6"/>
+                </a:solidFill>
+                <a:latin typeface="Helvetica Neue"/>
+                <a:ea typeface="Helvetica Neue"/>
+              </a:rPr>
+              <a:t>命令行：体检 / 标定 / 告警 / 报告 / 本地工作台</a:t>
+            </a:r>
+          </a:p>
+          <a:p>
+            <a:pPr marL="285750" indent="-285750">
+              <a:buFont typeface="Arial" panose="020B0604020202020204"/>
+              <a:buChar char="•"/>
+            </a:pPr>
+            <a:r>
+              <a:rPr lang="zh-CN" sz="2000" b="0" dirty="0">
+                <a:solidFill>
+                  <a:srgbClr val="F4EFE6"/>
+                </a:solidFill>
+                <a:latin typeface="Helvetica Neue"/>
+                <a:ea typeface="Helvetica Neue"/>
+              </a:rPr>
+              <a:t>本地工作台：浏览器上传 CSV → 标定基线 → 出报告</a:t>
+            </a:r>
+          </a:p>
+          <a:p>
+            <a:pPr marL="285750" indent="-285750">
+              <a:buFont typeface="Arial" panose="020B0604020202020204"/>
+              <a:buChar char="•"/>
+            </a:pPr>
+            <a:r>
+              <a:rPr lang="zh-CN" sz="2000" b="0" dirty="0">
+                <a:solidFill>
+                  <a:srgbClr val="F4EFE6"/>
+                </a:solidFill>
+                <a:latin typeface="Helvetica Neue"/>
+                <a:ea typeface="Helvetica Neue"/>
+              </a:rPr>
+              <a:t>企业版报告：单文件 HTML，自带局限与复现命令</a:t>
+            </a:r>
+          </a:p>
+          <a:p>
+            <a:pPr marL="285750" indent="-285750">
+              <a:buFont typeface="Arial" panose="020B0604020202020204"/>
+              <a:buChar char="•"/>
+            </a:pPr>
+            <a:r>
+              <a:rPr lang="zh-CN" sz="2000" b="0" dirty="0">
+                <a:solidFill>
+                  <a:srgbClr val="F4EFE6"/>
+                </a:solidFill>
+                <a:latin typeface="Helvetica Neue"/>
+                <a:ea typeface="Helvetica Neue"/>
+              </a:rPr>
+              <a:t>零外部依赖（只需 numpy/pandas），可离线运行</a:t>
+            </a:r>
+          </a:p>
+        </p:txBody>
+      </p:sp>
+      <p:sp>
+        <p:nvSpPr>
+          <p:cNvPr id="159" name="Page number"/>
+          <p:cNvSpPr txBox="1"/>
+          <p:nvPr/>
+        </p:nvSpPr>
+        <p:spPr>
+          <a:xfrm>
+            <a:off x="10600000" y="6250000"/>
+            <a:ext cx="1200000" cy="400000"/>
+          </a:xfrm>
+          <a:prstGeom prst="rect">
+            <a:avLst/>
+          </a:prstGeom>
+          <a:noFill/>
+          <a:ln/>
+        </p:spPr>
+        <p:txBody>
+          <a:bodyPr wrap="square" rtlCol="0">
+            <a:normAutofit/>
+          </a:bodyPr>
+          <a:lstStyle/>
+          <a:p>
+            <a:pPr algn="r">
+              <a:buNone/>
+            </a:pPr>
+            <a:r>
+              <a:rPr lang="zh-CN" sz="1000" b="0" dirty="0">
+                <a:solidFill>
+                  <a:srgbClr val="A79F91"/>
+                </a:solidFill>
+                <a:latin typeface="Helvetica Neue"/>
+                <a:ea typeface="Helvetica Neue"/>
+              </a:rPr>
+              <a:t>15 / 36</a:t>
+            </a:r>
+          </a:p>
+        </p:txBody>
+      </p:sp>
+    </p:spTree>
+  </p:cSld>
+  <p:clrMapOvr>
+    <a:overrideClrMapping bg1="lt1" tx1="dk1" bg2="lt2" tx2="dk2" accent1="accent1" accent2="accent2" accent3="accent3" accent4="accent4" accent5="accent5" accent6="accent6" hlink="hlink" folHlink="folHlink"/>
+  </p:clrMapOvr>
+  <p:transition spd="med">
+    <p:fade/>
+  </p:transition>
+  <p:timing>
+    <p:tnLst>
+      <p:par>
+        <p:cTn id="1" dur="indefinite" restart="never" nodeType="tmRoot">
+          <p:childTnLst>
+            <p:seq concurrent="1" nextAc="seek">
+              <p:cTn id="2" dur="indefinite" nodeType="mainSeq">
+                <p:childTnLst>
+                  <p:par>
+                    <p:cTn id="3" fill="hold">
+                      <p:stCondLst>
+                        <p:cond delay="indefinite"/>
+                      </p:stCondLst>
+                      <p:childTnLst>
+                        <p:par>
+                          <p:cTn id="4" presetID="1" presetClass="entr" presetSubtype="0" fill="hold" grpId="0" nodeType="clickEffect">
+                            <p:stCondLst>
+                              <p:cond delay="0"/>
+                            </p:stCondLst>
+                            <p:childTnLst>
+                              <p:set>
+                                <p:cBhvr>
+                                  <p:cTn id="5" dur="1" fill="hold">
+                                    <p:stCondLst>
+                                      <p:cond delay="0"/>
+                                    </p:stCondLst>
+                                  </p:cTn>
+                                  <p:tgtEl>
+                                    <p:spTgt spid="153"/>
+                                  </p:tgtEl>
+                                  <p:attrNameLst>
+                                    <p:attrName>style.visibility</p:attrName>
+                                  </p:attrNameLst>
+                                </p:cBhvr>
+                                <p:to>
+                                  <p:strVal val="visible"/>
+                                </p:to>
+                              </p:set>
+                            </p:childTnLst>
+                          </p:cTn>
+                        </p:par>
+                      </p:childTnLst>
+                    </p:cTn>
+                  </p:par>
+                  <p:par>
+                    <p:cTn id="6" fill="hold">
+                      <p:stCondLst>
+                        <p:cond delay="indefinite"/>
+                      </p:stCondLst>
+                      <p:childTnLst>
+                        <p:par>
+                          <p:cTn id="7" presetID="1" presetClass="entr" presetSubtype="0" fill="hold" grpId="0" nodeType="clickEffect">
+                            <p:stCondLst>
+                              <p:cond delay="0"/>
+                            </p:stCondLst>
+                            <p:childTnLst>
+                              <p:set>
+                                <p:cBhvr>
+                                  <p:cTn id="8" dur="1" fill="hold">
+                                    <p:stCondLst>
+                                      <p:cond delay="0"/>
+                                    </p:stCondLst>
+                                  </p:cTn>
+                                  <p:tgtEl>
+                                    <p:spTgt spid="153"/>
+                                  </p:tgtEl>
+                                  <p:attrNameLst>
+                                    <p:attrName>style.visibility</p:attrName>
+                                  </p:attrNameLst>
+                                </p:cBhvr>
+                                <p:to>
+                                  <p:strVal val="visible"/>
+                                </p:to>
+                              </p:set>
+                            </p:childTnLst>
+                          </p:cTn>
+                        </p:par>
+                      </p:childTnLst>
+                    </p:cTn>
+                  </p:par>
+                  <p:par>
+                    <p:cTn id="9" fill="hold">
+                      <p:stCondLst>
+                        <p:cond delay="indefinite"/>
+                      </p:stCondLst>
+                      <p:childTnLst>
+                        <p:par>
+                          <p:cTn id="10" presetID="1" presetClass="entr" presetSubtype="0" fill="hold" grpId="0" nodeType="clickEffect">
+                            <p:stCondLst>
+                              <p:cond delay="0"/>
+                            </p:stCondLst>
+                            <p:childTnLst>
+                              <p:set>
+                                <p:cBhvr>
+                                  <p:cTn id="11" dur="1" fill="hold">
+                                    <p:stCondLst>
+                                      <p:cond delay="0"/>
+                                    </p:stCondLst>
+                                  </p:cTn>
+                                  <p:tgtEl>
+                                    <p:spTgt spid="153"/>
+                                  </p:tgtEl>
+                                  <p:attrNameLst>
+                                    <p:attrName>style.visibility</p:attrName>
+                                  </p:attrNameLst>
+                                </p:cBhvr>
+                                <p:to>
+                                  <p:strVal val="visible"/>
+                                </p:to>
+                              </p:set>
+                            </p:childTnLst>
+                          </p:cTn>
+                        </p:par>
+                      </p:childTnLst>
+                    </p:cTn>
+                  </p:par>
+                  <p:par>
+                    <p:cTn id="12" fill="hold">
+                      <p:stCondLst>
+                        <p:cond delay="indefinite"/>
+                      </p:stCondLst>
+                      <p:childTnLst>
+                        <p:par>
+                          <p:cTn id="13" presetID="1" presetClass="entr" presetSubtype="0" fill="hold" grpId="0" nodeType="clickEffect">
+                            <p:stCondLst>
+                              <p:cond delay="0"/>
+                            </p:stCondLst>
+                            <p:childTnLst>
+                              <p:set>
+                                <p:cBhvr>
+                                  <p:cTn id="14" dur="1" fill="hold">
+                                    <p:stCondLst>
+                                      <p:cond delay="0"/>
+                                    </p:stCondLst>
+                                  </p:cTn>
+                                  <p:tgtEl>
+                                    <p:spTgt spid="153"/>
+                                  </p:tgtEl>
+                                  <p:attrNameLst>
+                                    <p:attrName>style.visibility</p:attrName>
+                                  </p:attrNameLst>
+                                </p:cBhvr>
+                                <p:to>
+                                  <p:strVal val="visible"/>
+                                </p:to>
+                              </p:set>
+                            </p:childTnLst>
+                          </p:cTn>
+                        </p:par>
+                      </p:childTnLst>
+                    </p:cTn>
+                  </p:par>
+                </p:childTnLst>
+              </p:cTn>
+              <p:prevCondLst>
+                <p:cond evt="onPrev" delay="0">
+                  <p:tgtEl>
+                    <p:sldTgt/>
+                  </p:tgtEl>
+                </p:cond>
+              </p:prevCondLst>
+              <p:nextCondLst>
+                <p:cond evt="onNext" delay="0">
+                  <p:tgtEl>
+                    <p:sldTgt/>
+                  </p:tgtEl>
+                </p:cond>
+              </p:nextCondLst>
+            </p:seq>
+          </p:childTnLst>
+        </p:cTn>
+      </p:par>
+    </p:tnLst>
+    <p:bldLst>
+      <p:bldP spid="153" grpId="0"/>
+    </p:bldLst>
+  </p:timing>
+</p:sld>
+</file>
+
+<file path=ppt/slides/slide16.xml><?xml version="1.0" encoding="utf-8"?>
+<p:sld xmlns:a="http://schemas.openxmlformats.org/drawingml/2006/main" xmlns:r="http://schemas.openxmlformats.org/officeDocument/2006/relationships" xmlns:p="http://schemas.openxmlformats.org/presentationml/2006/main">
+  <p:cSld>
+    <p:bg>
+      <p:bgPr>
+        <a:solidFill>
+          <a:srgbClr val="111316"/>
+        </a:solidFill>
+        <a:effectLst/>
+      </p:bgPr>
+    </p:bg>
+    <p:spTree>
+      <p:nvGrpSpPr>
+        <p:cNvPr id="1" name=""/>
+        <p:cNvGrpSpPr/>
+        <p:nvPr/>
+      </p:nvGrpSpPr>
+      <p:grpSpPr>
+        <a:xfrm>
+          <a:off x="0" y="0"/>
+          <a:ext cx="0" cy="0"/>
+          <a:chOff x="0" y="0"/>
+          <a:chExt cx="0" cy="0"/>
+        </a:xfrm>
+      </p:grpSpPr>
+      <p:sp>
+        <p:nvSpPr>
+          <p:cNvPr id="161" name="Kicker"/>
+          <p:cNvSpPr txBox="1"/>
+          <p:nvPr/>
+        </p:nvSpPr>
+        <p:spPr>
+          <a:xfrm>
+            <a:off x="900000" y="420000"/>
+            <a:ext cx="10000000" cy="420000"/>
+          </a:xfrm>
+          <a:prstGeom prst="rect">
+            <a:avLst/>
+          </a:prstGeom>
+          <a:noFill/>
+          <a:ln/>
+        </p:spPr>
+        <p:txBody>
+          <a:bodyPr wrap="square" rtlCol="0">
+            <a:normAutofit/>
+          </a:bodyPr>
+          <a:lstStyle/>
+          <a:p>
+            <a:pPr>
+              <a:buNone/>
+            </a:pPr>
+            <a:r>
+              <a:rPr lang="zh-CN" sz="1400" b="1" dirty="0">
+                <a:solidFill>
+                  <a:srgbClr val="C9A84C"/>
+                </a:solidFill>
+                <a:latin typeface="Helvetica Neue"/>
+                <a:ea typeface="Helvetica Neue"/>
+              </a:rPr>
+              <a:t>使用方式（一）：四条命令跑通全流程</a:t>
+            </a:r>
+          </a:p>
+        </p:txBody>
+      </p:sp>
+      <p:sp>
+        <p:nvSpPr>
+          <p:cNvPr id="162" name="Title"/>
+          <p:cNvSpPr txBox="1"/>
+          <p:nvPr/>
+        </p:nvSpPr>
+        <p:spPr>
+          <a:xfrm>
+            <a:off x="900000" y="920000"/>
+            <a:ext cx="10300000" cy="800000"/>
+          </a:xfrm>
+          <a:prstGeom prst="rect">
+            <a:avLst/>
+          </a:prstGeom>
+          <a:noFill/>
+          <a:ln/>
+        </p:spPr>
+        <p:txBody>
+          <a:bodyPr wrap="square" rtlCol="0">
+            <a:normAutofit/>
+          </a:bodyPr>
+          <a:lstStyle/>
+          <a:p>
+            <a:pPr>
+              <a:buNone/>
+            </a:pPr>
+            <a:r>
+              <a:rPr lang="zh-CN" sz="3400" b="1" dirty="0">
+                <a:solidFill>
+                  <a:srgbClr val="F4EFE6"/>
+                </a:solidFill>
+                <a:latin typeface="Georgia"/>
+                <a:ea typeface="Georgia"/>
+              </a:rPr>
+              <a:t>使用方式（一）：四条命令跑通全流程</a:t>
+            </a:r>
+          </a:p>
+        </p:txBody>
+      </p:sp>
+      <p:sp>
+        <p:nvSpPr>
+          <p:cNvPr id="163" name="Body"/>
+          <p:cNvSpPr txBox="1"/>
+          <p:nvPr/>
+        </p:nvSpPr>
+        <p:spPr>
+          <a:xfrm>
+            <a:off x="1050000" y="1850000"/>
+            <a:ext cx="10100000" cy="4500000"/>
+          </a:xfrm>
+          <a:prstGeom prst="rect">
+            <a:avLst/>
+          </a:prstGeom>
+          <a:noFill/>
+          <a:ln/>
+        </p:spPr>
+        <p:txBody>
+          <a:bodyPr wrap="square" rtlCol="0">
+            <a:normAutofit/>
+          </a:bodyPr>
+          <a:lstStyle/>
+          <a:p>
+            <a:pPr marL="285750" indent="-285750">
+              <a:buFont typeface="Arial" panose="020B0604020202020204"/>
+              <a:buChar char="•"/>
+            </a:pPr>
+            <a:r>
+              <a:rPr lang="zh-CN" sz="2000" b="0" dirty="0">
+                <a:solidFill>
+                  <a:srgbClr val="F4EFE6"/>
+                </a:solidFill>
+                <a:latin typeface="Helvetica Neue"/>
+                <a:ea typeface="Helvetica Neue"/>
+              </a:rPr>
+              <a:t>体检：lanmai inspect --data 现场导出.csv</a:t>
+            </a:r>
+          </a:p>
+          <a:p>
+            <a:pPr marL="285750" indent="-285750">
+              <a:buFont typeface="Arial" panose="020B0604020202020204"/>
+              <a:buChar char="•"/>
+            </a:pPr>
+            <a:r>
+              <a:rPr lang="zh-CN" sz="2000" b="0" dirty="0">
+                <a:solidFill>
+                  <a:srgbClr val="F4EFE6"/>
+                </a:solidFill>
+                <a:latin typeface="Helvetica Neue"/>
+                <a:ea typeface="Helvetica Neue"/>
+              </a:rPr>
+              <a:t>标定：lanmai calibrate --data 健康期.csv --out baseline.json</a:t>
+            </a:r>
+          </a:p>
+          <a:p>
+            <a:pPr marL="285750" indent="-285750">
+              <a:buFont typeface="Arial" panose="020B0604020202020204"/>
+              <a:buChar char="•"/>
+            </a:pPr>
+            <a:r>
+              <a:rPr lang="zh-CN" sz="2000" b="0" dirty="0">
+                <a:solidFill>
+                  <a:srgbClr val="F4EFE6"/>
+                </a:solidFill>
+                <a:latin typeface="Helvetica Neue"/>
+                <a:ea typeface="Helvetica Neue"/>
+              </a:rPr>
+              <a:t>告警：lanmai watch --data 待监测.csv --baseline baseline.json --out alarms.csv</a:t>
+            </a:r>
+          </a:p>
+          <a:p>
+            <a:pPr marL="285750" indent="-285750">
+              <a:buFont typeface="Arial" panose="020B0604020202020204"/>
+              <a:buChar char="•"/>
+            </a:pPr>
+            <a:r>
+              <a:rPr lang="zh-CN" sz="2000" b="0" dirty="0">
+                <a:solidFill>
+                  <a:srgbClr val="F4EFE6"/>
+                </a:solidFill>
+                <a:latin typeface="Helvetica Neue"/>
+                <a:ea typeface="Helvetica Neue"/>
+              </a:rPr>
+              <a:t>报告：lanmai report ... --out report.html</a:t>
+            </a:r>
+          </a:p>
+          <a:p>
+            <a:pPr marL="285750" indent="-285750">
+              <a:buFont typeface="Arial" panose="020B0604020202020204"/>
+              <a:buChar char="•"/>
+            </a:pPr>
+            <a:r>
+              <a:rPr lang="zh-CN" sz="2000" b="0" dirty="0">
+                <a:solidFill>
+                  <a:srgbClr val="F4EFE6"/>
+                </a:solidFill>
+                <a:latin typeface="Helvetica Neue"/>
+                <a:ea typeface="Helvetica Neue"/>
+              </a:rPr>
+              <a:t>一键自检：lanmai selftest（含回归检查）</a:t>
+            </a:r>
+          </a:p>
+        </p:txBody>
+      </p:sp>
+      <p:sp>
+        <p:nvSpPr>
+          <p:cNvPr id="169" name="Page number"/>
+          <p:cNvSpPr txBox="1"/>
+          <p:nvPr/>
+        </p:nvSpPr>
+        <p:spPr>
+          <a:xfrm>
+            <a:off x="10600000" y="6250000"/>
+            <a:ext cx="1200000" cy="400000"/>
+          </a:xfrm>
+          <a:prstGeom prst="rect">
+            <a:avLst/>
+          </a:prstGeom>
+          <a:noFill/>
+          <a:ln/>
+        </p:spPr>
+        <p:txBody>
+          <a:bodyPr wrap="square" rtlCol="0">
+            <a:normAutofit/>
+          </a:bodyPr>
+          <a:lstStyle/>
+          <a:p>
+            <a:pPr algn="r">
+              <a:buNone/>
+            </a:pPr>
+            <a:r>
+              <a:rPr lang="zh-CN" sz="1000" b="0" dirty="0">
+                <a:solidFill>
+                  <a:srgbClr val="A79F91"/>
+                </a:solidFill>
+                <a:latin typeface="Helvetica Neue"/>
+                <a:ea typeface="Helvetica Neue"/>
+              </a:rPr>
+              <a:t>16 / 36</a:t>
+            </a:r>
+          </a:p>
+        </p:txBody>
+      </p:sp>
+    </p:spTree>
+  </p:cSld>
+  <p:clrMapOvr>
+    <a:overrideClrMapping bg1="lt1" tx1="dk1" bg2="lt2" tx2="dk2" accent1="accent1" accent2="accent2" accent3="accent3" accent4="accent4" accent5="accent5" accent6="accent6" hlink="hlink" folHlink="folHlink"/>
+  </p:clrMapOvr>
+  <p:transition spd="med">
+    <p:fade/>
+  </p:transition>
+  <p:timing>
+    <p:tnLst>
+      <p:par>
+        <p:cTn id="1" dur="indefinite" restart="never" nodeType="tmRoot">
+          <p:childTnLst>
+            <p:seq concurrent="1" nextAc="seek">
+              <p:cTn id="2" dur="indefinite" nodeType="mainSeq">
+                <p:childTnLst>
+                  <p:par>
+                    <p:cTn id="3" fill="hold">
+                      <p:stCondLst>
+                        <p:cond delay="indefinite"/>
+                      </p:stCondLst>
+                      <p:childTnLst>
+                        <p:par>
+                          <p:cTn id="4" presetID="1" presetClass="entr" presetSubtype="0" fill="hold" grpId="0" nodeType="clickEffect">
+                            <p:stCondLst>
+                              <p:cond delay="0"/>
+                            </p:stCondLst>
+                            <p:childTnLst>
+                              <p:set>
+                                <p:cBhvr>
+                                  <p:cTn id="5" dur="1" fill="hold">
+                                    <p:stCondLst>
+                                      <p:cond delay="0"/>
+                                    </p:stCondLst>
+                                  </p:cTn>
+                                  <p:tgtEl>
+                                    <p:spTgt spid="163"/>
+                                  </p:tgtEl>
+                                  <p:attrNameLst>
+                                    <p:attrName>style.visibility</p:attrName>
+                                  </p:attrNameLst>
+                                </p:cBhvr>
+                                <p:to>
+                                  <p:strVal val="visible"/>
+                                </p:to>
+                              </p:set>
+                            </p:childTnLst>
+                          </p:cTn>
+                        </p:par>
+                      </p:childTnLst>
+                    </p:cTn>
+                  </p:par>
+                  <p:par>
+                    <p:cTn id="6" fill="hold">
+                      <p:stCondLst>
+                        <p:cond delay="indefinite"/>
+                      </p:stCondLst>
+                      <p:childTnLst>
+                        <p:par>
+                          <p:cTn id="7" presetID="1" presetClass="entr" presetSubtype="0" fill="hold" grpId="0" nodeType="clickEffect">
+                            <p:stCondLst>
+                              <p:cond delay="0"/>
+                            </p:stCondLst>
+                            <p:childTnLst>
+                              <p:set>
+                                <p:cBhvr>
+                                  <p:cTn id="8" dur="1" fill="hold">
+                                    <p:stCondLst>
+                                      <p:cond delay="0"/>
+                                    </p:stCondLst>
+                                  </p:cTn>
+                                  <p:tgtEl>
+                                    <p:spTgt spid="163"/>
+                                  </p:tgtEl>
+                                  <p:attrNameLst>
+                                    <p:attrName>style.visibility</p:attrName>
+                                  </p:attrNameLst>
+                                </p:cBhvr>
+                                <p:to>
+                                  <p:strVal val="visible"/>
+                                </p:to>
+                              </p:set>
+                            </p:childTnLst>
+                          </p:cTn>
+                        </p:par>
+                      </p:childTnLst>
+                    </p:cTn>
+                  </p:par>
+                  <p:par>
+                    <p:cTn id="9" fill="hold">
+                      <p:stCondLst>
+                        <p:cond delay="indefinite"/>
+                      </p:stCondLst>
+                      <p:childTnLst>
+                        <p:par>
+                          <p:cTn id="10" presetID="1" presetClass="entr" presetSubtype="0" fill="hold" grpId="0" nodeType="clickEffect">
+                            <p:stCondLst>
+                              <p:cond delay="0"/>
+                            </p:stCondLst>
+                            <p:childTnLst>
+                              <p:set>
+                                <p:cBhvr>
+                                  <p:cTn id="11" dur="1" fill="hold">
+                                    <p:stCondLst>
+                                      <p:cond delay="0"/>
+                                    </p:stCondLst>
+                                  </p:cTn>
+                                  <p:tgtEl>
+                                    <p:spTgt spid="163"/>
+                                  </p:tgtEl>
+                                  <p:attrNameLst>
+                                    <p:attrName>style.visibility</p:attrName>
+                                  </p:attrNameLst>
+                                </p:cBhvr>
+                                <p:to>
+                                  <p:strVal val="visible"/>
+                                </p:to>
+                              </p:set>
+                            </p:childTnLst>
+                          </p:cTn>
+                        </p:par>
+                      </p:childTnLst>
+                    </p:cTn>
+                  </p:par>
+                  <p:par>
+                    <p:cTn id="12" fill="hold">
+                      <p:stCondLst>
+                        <p:cond delay="indefinite"/>
+                      </p:stCondLst>
+                      <p:childTnLst>
+                        <p:par>
+                          <p:cTn id="13" presetID="1" presetClass="entr" presetSubtype="0" fill="hold" grpId="0" nodeType="clickEffect">
+                            <p:stCondLst>
+                              <p:cond delay="0"/>
+                            </p:stCondLst>
+                            <p:childTnLst>
+                              <p:set>
+                                <p:cBhvr>
+                                  <p:cTn id="14" dur="1" fill="hold">
+                                    <p:stCondLst>
+                                      <p:cond delay="0"/>
+                                    </p:stCondLst>
+                                  </p:cTn>
+                                  <p:tgtEl>
+                                    <p:spTgt spid="163"/>
+                                  </p:tgtEl>
+                                  <p:attrNameLst>
+                                    <p:attrName>style.visibility</p:attrName>
+                                  </p:attrNameLst>
+                                </p:cBhvr>
+                                <p:to>
+                                  <p:strVal val="visible"/>
+                                </p:to>
+                              </p:set>
+                            </p:childTnLst>
+                          </p:cTn>
+                        </p:par>
+                      </p:childTnLst>
+                    </p:cTn>
+                  </p:par>
+                  <p:par>
+                    <p:cTn id="15" fill="hold">
+                      <p:stCondLst>
+                        <p:cond delay="indefinite"/>
+                      </p:stCondLst>
+                      <p:childTnLst>
+                        <p:par>
+                          <p:cTn id="16" presetID="1" presetClass="entr" presetSubtype="0" fill="hold" grpId="0" nodeType="clickEffect">
+                            <p:stCondLst>
+                              <p:cond delay="0"/>
+                            </p:stCondLst>
+                            <p:childTnLst>
+                              <p:set>
+                                <p:cBhvr>
+                                  <p:cTn id="17" dur="1" fill="hold">
+                                    <p:stCondLst>
+                                      <p:cond delay="0"/>
+                                    </p:stCondLst>
+                                  </p:cTn>
+                                  <p:tgtEl>
+                                    <p:spTgt spid="163"/>
+                                  </p:tgtEl>
+                                  <p:attrNameLst>
+                                    <p:attrName>style.visibility</p:attrName>
+                                  </p:attrNameLst>
+                                </p:cBhvr>
+                                <p:to>
+                                  <p:strVal val="visible"/>
+                                </p:to>
+                              </p:set>
+                            </p:childTnLst>
+                          </p:cTn>
+                        </p:par>
+                      </p:childTnLst>
+                    </p:cTn>
+                  </p:par>
+                </p:childTnLst>
+              </p:cTn>
+              <p:prevCondLst>
+                <p:cond evt="onPrev" delay="0">
+                  <p:tgtEl>
+                    <p:sldTgt/>
+                  </p:tgtEl>
+                </p:cond>
+              </p:prevCondLst>
+              <p:nextCondLst>
+                <p:cond evt="onNext" delay="0">
+                  <p:tgtEl>
+                    <p:sldTgt/>
+                  </p:tgtEl>
+                </p:cond>
+              </p:nextCondLst>
+            </p:seq>
+          </p:childTnLst>
+        </p:cTn>
+      </p:par>
+    </p:tnLst>
+    <p:bldLst>
+      <p:bldP spid="163" grpId="0"/>
+    </p:bldLst>
+  </p:timing>
+</p:sld>
+</file>
+
+<file path=ppt/slides/slide17.xml><?xml version="1.0" encoding="utf-8"?>
+<p:sld xmlns:a="http://schemas.openxmlformats.org/drawingml/2006/main" xmlns:r="http://schemas.openxmlformats.org/officeDocument/2006/relationships" xmlns:p="http://schemas.openxmlformats.org/presentationml/2006/main">
+  <p:cSld>
+    <p:bg>
+      <p:bgPr>
+        <a:solidFill>
+          <a:srgbClr val="111316"/>
+        </a:solidFill>
+        <a:effectLst/>
+      </p:bgPr>
+    </p:bg>
+    <p:spTree>
+      <p:nvGrpSpPr>
+        <p:cNvPr id="1" name=""/>
+        <p:cNvGrpSpPr/>
+        <p:nvPr/>
+      </p:nvGrpSpPr>
+      <p:grpSpPr>
+        <a:xfrm>
+          <a:off x="0" y="0"/>
+          <a:ext cx="0" cy="0"/>
+          <a:chOff x="0" y="0"/>
+          <a:chExt cx="0" cy="0"/>
+        </a:xfrm>
+      </p:grpSpPr>
+      <p:sp>
+        <p:nvSpPr>
+          <p:cNvPr id="171" name="Kicker"/>
+          <p:cNvSpPr txBox="1"/>
+          <p:nvPr/>
+        </p:nvSpPr>
+        <p:spPr>
+          <a:xfrm>
+            <a:off x="900000" y="420000"/>
+            <a:ext cx="10000000" cy="420000"/>
+          </a:xfrm>
+          <a:prstGeom prst="rect">
+            <a:avLst/>
+          </a:prstGeom>
+          <a:noFill/>
+          <a:ln/>
+        </p:spPr>
+        <p:txBody>
+          <a:bodyPr wrap="square" rtlCol="0">
+            <a:normAutofit/>
+          </a:bodyPr>
+          <a:lstStyle/>
+          <a:p>
+            <a:pPr>
+              <a:buNone/>
+            </a:pPr>
+            <a:r>
+              <a:rPr lang="zh-CN" sz="1400" b="1" dirty="0">
+                <a:solidFill>
+                  <a:srgbClr val="C9A84C"/>
+                </a:solidFill>
+                <a:latin typeface="Helvetica Neue"/>
+                <a:ea typeface="Helvetica Neue"/>
+              </a:rPr>
+              <a:t>使用方式（二）：本地工作台，浏览器里上传就能出报告</a:t>
+            </a:r>
+          </a:p>
+        </p:txBody>
+      </p:sp>
+      <p:sp>
+        <p:nvSpPr>
+          <p:cNvPr id="172" name="Title"/>
+          <p:cNvSpPr txBox="1"/>
+          <p:nvPr/>
+        </p:nvSpPr>
+        <p:spPr>
+          <a:xfrm>
+            <a:off x="900000" y="920000"/>
+            <a:ext cx="10300000" cy="800000"/>
+          </a:xfrm>
+          <a:prstGeom prst="rect">
+            <a:avLst/>
+          </a:prstGeom>
+          <a:noFill/>
+          <a:ln/>
+        </p:spPr>
+        <p:txBody>
+          <a:bodyPr wrap="square" rtlCol="0">
+            <a:normAutofit/>
+          </a:bodyPr>
+          <a:lstStyle/>
+          <a:p>
+            <a:pPr>
+              <a:buNone/>
+            </a:pPr>
+            <a:r>
+              <a:rPr lang="zh-CN" sz="3400" b="1" dirty="0">
+                <a:solidFill>
+                  <a:srgbClr val="F4EFE6"/>
+                </a:solidFill>
+                <a:latin typeface="Georgia"/>
+                <a:ea typeface="Georgia"/>
+              </a:rPr>
+              <a:t>使用方式（二）：本地工作台，浏览器里上传就能出报告</a:t>
+            </a:r>
+          </a:p>
+        </p:txBody>
+      </p:sp>
+      <p:sp>
+        <p:nvSpPr>
+          <p:cNvPr id="173" name="Body"/>
+          <p:cNvSpPr txBox="1"/>
+          <p:nvPr/>
+        </p:nvSpPr>
+        <p:spPr>
+          <a:xfrm>
+            <a:off x="1050000" y="1850000"/>
+            <a:ext cx="10100000" cy="4500000"/>
+          </a:xfrm>
+          <a:prstGeom prst="rect">
+            <a:avLst/>
+          </a:prstGeom>
+          <a:noFill/>
+          <a:ln/>
+        </p:spPr>
+        <p:txBody>
+          <a:bodyPr wrap="square" rtlCol="0">
+            <a:normAutofit/>
+          </a:bodyPr>
+          <a:lstStyle/>
+          <a:p>
+            <a:pPr marL="285750" indent="-285750">
+              <a:buFont typeface="Arial" panose="020B0604020202020204"/>
+              <a:buChar char="•"/>
+            </a:pPr>
+            <a:r>
+              <a:rPr lang="zh-CN" sz="2000" b="0" dirty="0">
+                <a:solidFill>
+                  <a:srgbClr val="F4EFE6"/>
+                </a:solidFill>
+                <a:latin typeface="Helvetica Neue"/>
+                <a:ea typeface="Helvetica Neue"/>
+              </a:rPr>
+              <a:t>双击 startlanmai.cmd，或 python runlanmai.py serve --open</a:t>
+            </a:r>
+          </a:p>
+          <a:p>
+            <a:pPr marL="285750" indent="-285750">
+              <a:buFont typeface="Arial" panose="020B0604020202020204"/>
+              <a:buChar char="•"/>
+            </a:pPr>
+            <a:r>
+              <a:rPr lang="zh-CN" sz="2000" b="0" dirty="0">
+                <a:solidFill>
+                  <a:srgbClr val="F4EFE6"/>
+                </a:solidFill>
+                <a:latin typeface="Helvetica Neue"/>
+                <a:ea typeface="Helvetica Neue"/>
+              </a:rPr>
+              <a:t>① 上传健康期数据 → 生成 baseline.json</a:t>
+            </a:r>
+          </a:p>
+          <a:p>
+            <a:pPr marL="285750" indent="-285750">
+              <a:buFont typeface="Arial" panose="020B0604020202020204"/>
+              <a:buChar char="•"/>
+            </a:pPr>
+            <a:r>
+              <a:rPr lang="zh-CN" sz="2000" b="0" dirty="0">
+                <a:solidFill>
+                  <a:srgbClr val="F4EFE6"/>
+                </a:solidFill>
+                <a:latin typeface="Helvetica Neue"/>
+                <a:ea typeface="Helvetica Neue"/>
+              </a:rPr>
+              <a:t>② 上传待监测数据 + 基线 → 生成 report.html</a:t>
+            </a:r>
+          </a:p>
+          <a:p>
+            <a:pPr marL="285750" indent="-285750">
+              <a:buFont typeface="Arial" panose="020B0604020202020204"/>
+              <a:buChar char="•"/>
+            </a:pPr>
+            <a:r>
+              <a:rPr lang="zh-CN" sz="2000" b="0" dirty="0">
+                <a:solidFill>
+                  <a:srgbClr val="F4EFE6"/>
+                </a:solidFill>
+                <a:latin typeface="Helvetica Neue"/>
+                <a:ea typeface="Helvetica Neue"/>
+              </a:rPr>
+              <a:t>③ 样例一键试跑；④ 产物列表下载明细</a:t>
+            </a:r>
+          </a:p>
+          <a:p>
+            <a:pPr marL="285750" indent="-285750">
+              <a:buFont typeface="Arial" panose="020B0604020202020204"/>
+              <a:buChar char="•"/>
+            </a:pPr>
+            <a:r>
+              <a:rPr lang="zh-CN" sz="2000" b="0" dirty="0">
+                <a:solidFill>
+                  <a:srgbClr val="F4EFE6"/>
+                </a:solidFill>
+                <a:latin typeface="Helvetica Neue"/>
+                <a:ea typeface="Helvetica Neue"/>
+              </a:rPr>
+              <a:t>默认只监听本机 127.0.0.1，数据不出厂</a:t>
+            </a:r>
+          </a:p>
+        </p:txBody>
+      </p:sp>
+      <p:sp>
+        <p:nvSpPr>
+          <p:cNvPr id="179" name="Page number"/>
+          <p:cNvSpPr txBox="1"/>
+          <p:nvPr/>
+        </p:nvSpPr>
+        <p:spPr>
+          <a:xfrm>
+            <a:off x="10600000" y="6250000"/>
+            <a:ext cx="1200000" cy="400000"/>
+          </a:xfrm>
+          <a:prstGeom prst="rect">
+            <a:avLst/>
+          </a:prstGeom>
+          <a:noFill/>
+          <a:ln/>
+        </p:spPr>
+        <p:txBody>
+          <a:bodyPr wrap="square" rtlCol="0">
+            <a:normAutofit/>
+          </a:bodyPr>
+          <a:lstStyle/>
+          <a:p>
+            <a:pPr algn="r">
+              <a:buNone/>
+            </a:pPr>
+            <a:r>
+              <a:rPr lang="zh-CN" sz="1000" b="0" dirty="0">
+                <a:solidFill>
+                  <a:srgbClr val="A79F91"/>
+                </a:solidFill>
+                <a:latin typeface="Helvetica Neue"/>
+                <a:ea typeface="Helvetica Neue"/>
+              </a:rPr>
+              <a:t>17 / 36</a:t>
+            </a:r>
+          </a:p>
+        </p:txBody>
+      </p:sp>
+    </p:spTree>
+  </p:cSld>
+  <p:clrMapOvr>
+    <a:overrideClrMapping bg1="lt1" tx1="dk1" bg2="lt2" tx2="dk2" accent1="accent1" accent2="accent2" accent3="accent3" accent4="accent4" accent5="accent5" accent6="accent6" hlink="hlink" folHlink="folHlink"/>
+  </p:clrMapOvr>
+  <p:transition spd="med">
+    <p:fade/>
+  </p:transition>
+  <p:timing>
+    <p:tnLst>
+      <p:par>
+        <p:cTn id="1" dur="indefinite" restart="never" nodeType="tmRoot">
+          <p:childTnLst>
+            <p:seq concurrent="1" nextAc="seek">
+              <p:cTn id="2" dur="indefinite" nodeType="mainSeq">
+                <p:childTnLst>
+                  <p:par>
+                    <p:cTn id="3" fill="hold">
+                      <p:stCondLst>
+                        <p:cond delay="indefinite"/>
+                      </p:stCondLst>
+                      <p:childTnLst>
+                        <p:par>
+                          <p:cTn id="4" presetID="1" presetClass="entr" presetSubtype="0" fill="hold" grpId="0" nodeType="clickEffect">
+                            <p:stCondLst>
+                              <p:cond delay="0"/>
+                            </p:stCondLst>
+                            <p:childTnLst>
+                              <p:set>
+                                <p:cBhvr>
+                                  <p:cTn id="5" dur="1" fill="hold">
+                                    <p:stCondLst>
+                                      <p:cond delay="0"/>
+                                    </p:stCondLst>
+                                  </p:cTn>
+                                  <p:tgtEl>
+                                    <p:spTgt spid="173"/>
+                                  </p:tgtEl>
+                                  <p:attrNameLst>
+                                    <p:attrName>style.visibility</p:attrName>
+                                  </p:attrNameLst>
+                                </p:cBhvr>
+                                <p:to>
+                                  <p:strVal val="visible"/>
+                                </p:to>
+                              </p:set>
+                            </p:childTnLst>
+                          </p:cTn>
+                        </p:par>
+                      </p:childTnLst>
+                    </p:cTn>
+                  </p:par>
+                  <p:par>
+                    <p:cTn id="6" fill="hold">
+                      <p:stCondLst>
+                        <p:cond delay="indefinite"/>
+                      </p:stCondLst>
+                      <p:childTnLst>
+                        <p:par>
+                          <p:cTn id="7" presetID="1" presetClass="entr" presetSubtype="0" fill="hold" grpId="0" nodeType="clickEffect">
+                            <p:stCondLst>
+                              <p:cond delay="0"/>
+                            </p:stCondLst>
+                            <p:childTnLst>
+                              <p:set>
+                                <p:cBhvr>
+                                  <p:cTn id="8" dur="1" fill="hold">
+                                    <p:stCondLst>
+                                      <p:cond delay="0"/>
+                                    </p:stCondLst>
+                                  </p:cTn>
+                                  <p:tgtEl>
+                                    <p:spTgt spid="173"/>
+                                  </p:tgtEl>
+                                  <p:attrNameLst>
+                                    <p:attrName>style.visibility</p:attrName>
+                                  </p:attrNameLst>
+                                </p:cBhvr>
+                                <p:to>
+                                  <p:strVal val="visible"/>
+                                </p:to>
+                              </p:set>
+                            </p:childTnLst>
+                          </p:cTn>
+                        </p:par>
+                      </p:childTnLst>
+                    </p:cTn>
+                  </p:par>
+                  <p:par>
+                    <p:cTn id="9" fill="hold">
+                      <p:stCondLst>
+                        <p:cond delay="indefinite"/>
+                      </p:stCondLst>
+                      <p:childTnLst>
+                        <p:par>
+                          <p:cTn id="10" presetID="1" presetClass="entr" presetSubtype="0" fill="hold" grpId="0" nodeType="clickEffect">
+                            <p:stCondLst>
+                              <p:cond delay="0"/>
+                            </p:stCondLst>
+                            <p:childTnLst>
+                              <p:set>
+                                <p:cBhvr>
+                                  <p:cTn id="11" dur="1" fill="hold">
+                                    <p:stCondLst>
+                                      <p:cond delay="0"/>
+                                    </p:stCondLst>
+                                  </p:cTn>
+                                  <p:tgtEl>
+                                    <p:spTgt spid="173"/>
+                                  </p:tgtEl>
+                                  <p:attrNameLst>
+                                    <p:attrName>style.visibility</p:attrName>
+                                  </p:attrNameLst>
+                                </p:cBhvr>
+                                <p:to>
+                                  <p:strVal val="visible"/>
+                                </p:to>
+                              </p:set>
+                            </p:childTnLst>
+                          </p:cTn>
+                        </p:par>
+                      </p:childTnLst>
+                    </p:cTn>
+                  </p:par>
+                  <p:par>
+                    <p:cTn id="12" fill="hold">
+                      <p:stCondLst>
+                        <p:cond delay="indefinite"/>
+                      </p:stCondLst>
+                      <p:childTnLst>
+                        <p:par>
+                          <p:cTn id="13" presetID="1" presetClass="entr" presetSubtype="0" fill="hold" grpId="0" nodeType="clickEffect">
+                            <p:stCondLst>
+                              <p:cond delay="0"/>
+                            </p:stCondLst>
+                            <p:childTnLst>
+                              <p:set>
+                                <p:cBhvr>
+                                  <p:cTn id="14" dur="1" fill="hold">
+                                    <p:stCondLst>
+                                      <p:cond delay="0"/>
+                                    </p:stCondLst>
+                                  </p:cTn>
+                                  <p:tgtEl>
+                                    <p:spTgt spid="173"/>
+                                  </p:tgtEl>
+                                  <p:attrNameLst>
+                                    <p:attrName>style.visibility</p:attrName>
+                                  </p:attrNameLst>
+                                </p:cBhvr>
+                                <p:to>
+                                  <p:strVal val="visible"/>
+                                </p:to>
+                              </p:set>
+                            </p:childTnLst>
+                          </p:cTn>
+                        </p:par>
+                      </p:childTnLst>
+                    </p:cTn>
+                  </p:par>
+                  <p:par>
+                    <p:cTn id="15" fill="hold">
+                      <p:stCondLst>
+                        <p:cond delay="indefinite"/>
+                      </p:stCondLst>
+                      <p:childTnLst>
+                        <p:par>
+                          <p:cTn id="16" presetID="1" presetClass="entr" presetSubtype="0" fill="hold" grpId="0" nodeType="clickEffect">
+                            <p:stCondLst>
+                              <p:cond delay="0"/>
+                            </p:stCondLst>
+                            <p:childTnLst>
+                              <p:set>
+                                <p:cBhvr>
+                                  <p:cTn id="17" dur="1" fill="hold">
+                                    <p:stCondLst>
+                                      <p:cond delay="0"/>
+                                    </p:stCondLst>
+                                  </p:cTn>
+                                  <p:tgtEl>
+                                    <p:spTgt spid="173"/>
+                                  </p:tgtEl>
+                                  <p:attrNameLst>
+                                    <p:attrName>style.visibility</p:attrName>
+                                  </p:attrNameLst>
+                                </p:cBhvr>
+                                <p:to>
+                                  <p:strVal val="visible"/>
+                                </p:to>
+                              </p:set>
+                            </p:childTnLst>
+                          </p:cTn>
+                        </p:par>
+                      </p:childTnLst>
+                    </p:cTn>
+                  </p:par>
+                </p:childTnLst>
+              </p:cTn>
+              <p:prevCondLst>
+                <p:cond evt="onPrev" delay="0">
+                  <p:tgtEl>
+                    <p:sldTgt/>
+                  </p:tgtEl>
+                </p:cond>
+              </p:prevCondLst>
+              <p:nextCondLst>
+                <p:cond evt="onNext" delay="0">
+                  <p:tgtEl>
+                    <p:sldTgt/>
+                  </p:tgtEl>
+                </p:cond>
+              </p:nextCondLst>
+            </p:seq>
+          </p:childTnLst>
+        </p:cTn>
+      </p:par>
+    </p:tnLst>
+    <p:bldLst>
+      <p:bldP spid="173" grpId="0"/>
+    </p:bldLst>
+  </p:timing>
+</p:sld>
+</file>
+
+<file path=ppt/slides/slide18.xml><?xml version="1.0" encoding="utf-8"?>
+<p:sld xmlns:a="http://schemas.openxmlformats.org/drawingml/2006/main" xmlns:r="http://schemas.openxmlformats.org/officeDocument/2006/relationships" xmlns:p="http://schemas.openxmlformats.org/presentationml/2006/main">
+  <p:cSld>
+    <p:bg>
+      <p:bgPr>
+        <a:solidFill>
+          <a:srgbClr val="111316"/>
+        </a:solidFill>
+        <a:effectLst/>
+      </p:bgPr>
+    </p:bg>
+    <p:spTree>
+      <p:nvGrpSpPr>
+        <p:cNvPr id="1" name=""/>
+        <p:cNvGrpSpPr/>
+        <p:nvPr/>
+      </p:nvGrpSpPr>
+      <p:grpSpPr>
+        <a:xfrm>
+          <a:off x="0" y="0"/>
+          <a:ext cx="0" cy="0"/>
+          <a:chOff x="0" y="0"/>
+          <a:chExt cx="0" cy="0"/>
+        </a:xfrm>
+      </p:grpSpPr>
+      <p:sp>
+        <p:nvSpPr>
+          <p:cNvPr id="181" name="Kicker"/>
+          <p:cNvSpPr txBox="1"/>
+          <p:nvPr/>
+        </p:nvSpPr>
+        <p:spPr>
+          <a:xfrm>
+            <a:off x="900000" y="420000"/>
+            <a:ext cx="10000000" cy="420000"/>
+          </a:xfrm>
+          <a:prstGeom prst="rect">
+            <a:avLst/>
+          </a:prstGeom>
+          <a:noFill/>
+          <a:ln/>
+        </p:spPr>
+        <p:txBody>
+          <a:bodyPr wrap="square" rtlCol="0">
+            <a:normAutofit/>
+          </a:bodyPr>
+          <a:lstStyle/>
+          <a:p>
+            <a:pPr>
+              <a:buNone/>
+            </a:pPr>
+            <a:r>
+              <a:rPr lang="zh-CN" sz="1400" b="1" dirty="0">
+                <a:solidFill>
+                  <a:srgbClr val="C9A84C"/>
+                </a:solidFill>
+                <a:latin typeface="Helvetica Neue"/>
+                <a:ea typeface="Helvetica Neue"/>
+              </a:rPr>
+              <a:t>企业版报告长什么样</a:t>
+            </a:r>
+          </a:p>
+        </p:txBody>
+      </p:sp>
+      <p:sp>
+        <p:nvSpPr>
+          <p:cNvPr id="182" name="Title"/>
+          <p:cNvSpPr txBox="1"/>
+          <p:nvPr/>
+        </p:nvSpPr>
+        <p:spPr>
+          <a:xfrm>
+            <a:off x="900000" y="920000"/>
+            <a:ext cx="10300000" cy="800000"/>
+          </a:xfrm>
+          <a:prstGeom prst="rect">
+            <a:avLst/>
+          </a:prstGeom>
+          <a:noFill/>
+          <a:ln/>
+        </p:spPr>
+        <p:txBody>
+          <a:bodyPr wrap="square" rtlCol="0">
+            <a:normAutofit/>
+          </a:bodyPr>
+          <a:lstStyle/>
+          <a:p>
+            <a:pPr>
+              <a:buNone/>
+            </a:pPr>
+            <a:r>
+              <a:rPr lang="zh-CN" sz="3400" b="1" dirty="0">
+                <a:solidFill>
+                  <a:srgbClr val="F4EFE6"/>
+                </a:solidFill>
+                <a:latin typeface="Georgia"/>
+                <a:ea typeface="Georgia"/>
+              </a:rPr>
+              <a:t>企业版报告长什么样</a:t>
+            </a:r>
+          </a:p>
+        </p:txBody>
+      </p:sp>
+      <p:sp>
+        <p:nvSpPr>
+          <p:cNvPr id="183" name="Body"/>
+          <p:cNvSpPr txBox="1"/>
+          <p:nvPr/>
+        </p:nvSpPr>
+        <p:spPr>
+          <a:xfrm>
+            <a:off x="1050000" y="1850000"/>
+            <a:ext cx="10100000" cy="4500000"/>
+          </a:xfrm>
+          <a:prstGeom prst="rect">
+            <a:avLst/>
+          </a:prstGeom>
+          <a:noFill/>
+          <a:ln/>
+        </p:spPr>
+        <p:txBody>
+          <a:bodyPr wrap="square" rtlCol="0">
+            <a:normAutofit/>
+          </a:bodyPr>
+          <a:lstStyle/>
+          <a:p>
+            <a:pPr marL="285750" indent="-285750">
+              <a:buFont typeface="Arial" panose="020B0604020202020204"/>
+              <a:buChar char="•"/>
+            </a:pPr>
+            <a:r>
+              <a:rPr lang="zh-CN" sz="2000" b="0" dirty="0">
+                <a:solidFill>
+                  <a:srgbClr val="F4EFE6"/>
+                </a:solidFill>
+                <a:latin typeface="Helvetica Neue"/>
+                <a:ea typeface="Helvetica Neue"/>
+              </a:rPr>
+              <a:t>数据体检：行数、采样间隔、缺失、零方差、分类列</a:t>
+            </a:r>
+          </a:p>
+          <a:p>
+            <a:pPr marL="285750" indent="-285750">
+              <a:buFont typeface="Arial" panose="020B0604020202020204"/>
+              <a:buChar char="•"/>
+            </a:pPr>
+            <a:r>
+              <a:rPr lang="zh-CN" sz="2000" b="0" dirty="0">
+                <a:solidFill>
+                  <a:srgbClr val="F4EFE6"/>
+                </a:solidFill>
+                <a:latin typeface="Helvetica Neue"/>
+                <a:ea typeface="Helvetica Neue"/>
+              </a:rPr>
+              <a:t>标定摘要：参考窗、工况分层、阈值、工具告警</a:t>
+            </a:r>
+          </a:p>
+          <a:p>
+            <a:pPr marL="285750" indent="-285750">
+              <a:buFont typeface="Arial" panose="020B0604020202020204"/>
+              <a:buChar char="•"/>
+            </a:pPr>
+            <a:r>
+              <a:rPr lang="zh-CN" sz="2000" b="0" dirty="0">
+                <a:solidFill>
+                  <a:srgbClr val="F4EFE6"/>
+                </a:solidFill>
+                <a:latin typeface="Helvetica Neue"/>
+                <a:ea typeface="Helvetica Neue"/>
+              </a:rPr>
+              <a:t>分级告警：P1/P2/P3 明细与处置动作</a:t>
+            </a:r>
+          </a:p>
+          <a:p>
+            <a:pPr marL="285750" indent="-285750">
+              <a:buFont typeface="Arial" panose="020B0604020202020204"/>
+              <a:buChar char="•"/>
+            </a:pPr>
+            <a:r>
+              <a:rPr lang="zh-CN" sz="2000" b="0" dirty="0">
+                <a:solidFill>
+                  <a:srgbClr val="F4EFE6"/>
+                </a:solidFill>
+                <a:latin typeface="Helvetica Neue"/>
+                <a:ea typeface="Helvetica Neue"/>
+              </a:rPr>
+              <a:t>四张图 + 口径局限 + 复现命令（单文件、可离线打开）</a:t>
+            </a:r>
+          </a:p>
+        </p:txBody>
+      </p:sp>
+      <p:sp>
+        <p:nvSpPr>
+          <p:cNvPr id="189" name="Page number"/>
+          <p:cNvSpPr txBox="1"/>
+          <p:nvPr/>
+        </p:nvSpPr>
+        <p:spPr>
+          <a:xfrm>
+            <a:off x="10600000" y="6250000"/>
+            <a:ext cx="1200000" cy="400000"/>
+          </a:xfrm>
+          <a:prstGeom prst="rect">
+            <a:avLst/>
+          </a:prstGeom>
+          <a:noFill/>
+          <a:ln/>
+        </p:spPr>
+        <p:txBody>
+          <a:bodyPr wrap="square" rtlCol="0">
+            <a:normAutofit/>
+          </a:bodyPr>
+          <a:lstStyle/>
+          <a:p>
+            <a:pPr algn="r">
+              <a:buNone/>
+            </a:pPr>
+            <a:r>
+              <a:rPr lang="zh-CN" sz="1000" b="0" dirty="0">
+                <a:solidFill>
+                  <a:srgbClr val="A79F91"/>
+                </a:solidFill>
+                <a:latin typeface="Helvetica Neue"/>
+                <a:ea typeface="Helvetica Neue"/>
+              </a:rPr>
+              <a:t>18 / 36</a:t>
+            </a:r>
+          </a:p>
+        </p:txBody>
+      </p:sp>
+    </p:spTree>
+  </p:cSld>
+  <p:clrMapOvr>
+    <a:overrideClrMapping bg1="lt1" tx1="dk1" bg2="lt2" tx2="dk2" accent1="accent1" accent2="accent2" accent3="accent3" accent4="accent4" accent5="accent5" accent6="accent6" hlink="hlink" folHlink="folHlink"/>
+  </p:clrMapOvr>
+  <p:transition spd="med">
+    <p:fade/>
+  </p:transition>
+  <p:timing>
+    <p:tnLst>
+      <p:par>
+        <p:cTn id="1" dur="indefinite" restart="never" nodeType="tmRoot">
+          <p:childTnLst>
+            <p:seq concurrent="1" nextAc="seek">
+              <p:cTn id="2" dur="indefinite" nodeType="mainSeq">
+                <p:childTnLst>
+                  <p:par>
+                    <p:cTn id="3" fill="hold">
+                      <p:stCondLst>
+                        <p:cond delay="indefinite"/>
+                      </p:stCondLst>
+                      <p:childTnLst>
+                        <p:par>
+                          <p:cTn id="4" presetID="1" presetClass="entr" presetSubtype="0" fill="hold" grpId="0" nodeType="clickEffect">
+                            <p:stCondLst>
+                              <p:cond delay="0"/>
+                            </p:stCondLst>
+                            <p:childTnLst>
+                              <p:set>
+                                <p:cBhvr>
+                                  <p:cTn id="5" dur="1" fill="hold">
+                                    <p:stCondLst>
+                                      <p:cond delay="0"/>
+                                    </p:stCondLst>
+                                  </p:cTn>
+                                  <p:tgtEl>
+                                    <p:spTgt spid="183"/>
+                                  </p:tgtEl>
+                                  <p:attrNameLst>
+                                    <p:attrName>style.visibility</p:attrName>
+                                  </p:attrNameLst>
+                                </p:cBhvr>
+                                <p:to>
+                                  <p:strVal val="visible"/>
+                                </p:to>
+                              </p:set>
+                            </p:childTnLst>
+                          </p:cTn>
+                        </p:par>
+                      </p:childTnLst>
+                    </p:cTn>
+                  </p:par>
+                  <p:par>
+                    <p:cTn id="6" fill="hold">
+                      <p:stCondLst>
+                        <p:cond delay="indefinite"/>
+                      </p:stCondLst>
+                      <p:childTnLst>
+                        <p:par>
+                          <p:cTn id="7" presetID="1" presetClass="entr" presetSubtype="0" fill="hold" grpId="0" nodeType="clickEffect">
+                            <p:stCondLst>
+                              <p:cond delay="0"/>
+                            </p:stCondLst>
+                            <p:childTnLst>
+                              <p:set>
+                                <p:cBhvr>
+                                  <p:cTn id="8" dur="1" fill="hold">
+                                    <p:stCondLst>
+                                      <p:cond delay="0"/>
+                                    </p:stCondLst>
+                                  </p:cTn>
+                                  <p:tgtEl>
+                                    <p:spTgt spid="183"/>
+                                  </p:tgtEl>
+                                  <p:attrNameLst>
+                                    <p:attrName>style.visibility</p:attrName>
+                                  </p:attrNameLst>
+                                </p:cBhvr>
+                                <p:to>
+                                  <p:strVal val="visible"/>
+                                </p:to>
+                              </p:set>
+                            </p:childTnLst>
+                          </p:cTn>
+                        </p:par>
+                      </p:childTnLst>
+                    </p:cTn>
+                  </p:par>
+                  <p:par>
+                    <p:cTn id="9" fill="hold">
+                      <p:stCondLst>
+                        <p:cond delay="indefinite"/>
+                      </p:stCondLst>
+                      <p:childTnLst>
+                        <p:par>
+                          <p:cTn id="10" presetID="1" presetClass="entr" presetSubtype="0" fill="hold" grpId="0" nodeType="clickEffect">
+                            <p:stCondLst>
+                              <p:cond delay="0"/>
+                            </p:stCondLst>
+                            <p:childTnLst>
+                              <p:set>
+                                <p:cBhvr>
+                                  <p:cTn id="11" dur="1" fill="hold">
+                                    <p:stCondLst>
+                                      <p:cond delay="0"/>
+                                    </p:stCondLst>
+                                  </p:cTn>
+                                  <p:tgtEl>
+                                    <p:spTgt spid="183"/>
+                                  </p:tgtEl>
+                                  <p:attrNameLst>
+                                    <p:attrName>style.visibility</p:attrName>
+                                  </p:attrNameLst>
+                                </p:cBhvr>
+                                <p:to>
+                                  <p:strVal val="visible"/>
+                                </p:to>
+                              </p:set>
+                            </p:childTnLst>
+                          </p:cTn>
+                        </p:par>
+                      </p:childTnLst>
+                    </p:cTn>
+                  </p:par>
+                  <p:par>
+                    <p:cTn id="12" fill="hold">
+                      <p:stCondLst>
+                        <p:cond delay="indefinite"/>
+                      </p:stCondLst>
+                      <p:childTnLst>
+                        <p:par>
+                          <p:cTn id="13" presetID="1" presetClass="entr" presetSubtype="0" fill="hold" grpId="0" nodeType="clickEffect">
+                            <p:stCondLst>
+                              <p:cond delay="0"/>
+                            </p:stCondLst>
+                            <p:childTnLst>
+                              <p:set>
+                                <p:cBhvr>
+                                  <p:cTn id="14" dur="1" fill="hold">
+                                    <p:stCondLst>
+                                      <p:cond delay="0"/>
+                                    </p:stCondLst>
+                                  </p:cTn>
+                                  <p:tgtEl>
+                                    <p:spTgt spid="183"/>
+                                  </p:tgtEl>
+                                  <p:attrNameLst>
+                                    <p:attrName>style.visibility</p:attrName>
+                                  </p:attrNameLst>
+                                </p:cBhvr>
+                                <p:to>
+                                  <p:strVal val="visible"/>
+                                </p:to>
+                              </p:set>
+                            </p:childTnLst>
+                          </p:cTn>
+                        </p:par>
+                      </p:childTnLst>
+                    </p:cTn>
+                  </p:par>
+                </p:childTnLst>
+              </p:cTn>
+              <p:prevCondLst>
+                <p:cond evt="onPrev" delay="0">
+                  <p:tgtEl>
+                    <p:sldTgt/>
+                  </p:tgtEl>
+                </p:cond>
+              </p:prevCondLst>
+              <p:nextCondLst>
+                <p:cond evt="onNext" delay="0">
+                  <p:tgtEl>
+                    <p:sldTgt/>
+                  </p:tgtEl>
+                </p:cond>
+              </p:nextCondLst>
+            </p:seq>
+          </p:childTnLst>
+        </p:cTn>
+      </p:par>
+    </p:tnLst>
+    <p:bldLst>
+      <p:bldP spid="183" grpId="0"/>
+    </p:bldLst>
+  </p:timing>
+</p:sld>
+</file>
+
+<file path=ppt/slides/slide19.xml><?xml version="1.0" encoding="utf-8"?>
+<p:sld xmlns:a="http://schemas.openxmlformats.org/drawingml/2006/main" xmlns:r="http://schemas.openxmlformats.org/officeDocument/2006/relationships" xmlns:p="http://schemas.openxmlformats.org/presentationml/2006/main">
+  <p:cSld>
+    <p:bg>
+      <p:bgPr>
+        <a:solidFill>
+          <a:srgbClr val="111316"/>
+        </a:solidFill>
+        <a:effectLst/>
+      </p:bgPr>
+    </p:bg>
+    <p:spTree>
+      <p:nvGrpSpPr>
+        <p:cNvPr id="1" name=""/>
+        <p:cNvGrpSpPr/>
+        <p:nvPr/>
+      </p:nvGrpSpPr>
+      <p:grpSpPr>
+        <a:xfrm>
+          <a:off x="0" y="0"/>
+          <a:ext cx="0" cy="0"/>
+          <a:chOff x="0" y="0"/>
+          <a:chExt cx="0" cy="0"/>
+        </a:xfrm>
+      </p:grpSpPr>
+      <p:sp>
+        <p:nvSpPr>
+          <p:cNvPr id="191" name="Kicker"/>
+          <p:cNvSpPr txBox="1"/>
+          <p:nvPr/>
+        </p:nvSpPr>
+        <p:spPr>
+          <a:xfrm>
+            <a:off x="900000" y="420000"/>
+            <a:ext cx="10000000" cy="420000"/>
+          </a:xfrm>
+          <a:prstGeom prst="rect">
+            <a:avLst/>
+          </a:prstGeom>
+          <a:noFill/>
+          <a:ln/>
+        </p:spPr>
+        <p:txBody>
+          <a:bodyPr wrap="square" rtlCol="0">
+            <a:normAutofit/>
+          </a:bodyPr>
+          <a:lstStyle/>
+          <a:p>
+            <a:pPr>
+              <a:buNone/>
+            </a:pPr>
+            <a:r>
+              <a:rPr lang="zh-CN" sz="1400" b="1" dirty="0">
+                <a:solidFill>
+                  <a:srgbClr val="C9A84C"/>
+                </a:solidFill>
+                <a:latin typeface="Helvetica Neue"/>
+                <a:ea typeface="Helvetica Neue"/>
+              </a:rPr>
               <a:t>当前进展：技术侧已冻结待命</a:t>
             </a:r>
           </a:p>
@@ -2268,7 +4570,7 @@
       </p:sp>
       <p:graphicFrame>
         <p:nvGraphicFramePr>
-          <p:cNvPr id="143" name="Table"/>
+          <p:cNvPr id="193" name="Table"/>
           <p:cNvGraphicFramePr>
             <a:graphicFrameLocks noGrp="1"/>
           </p:cNvGraphicFramePr>
@@ -2276,7 +4578,7 @@
         </p:nvGraphicFramePr>
         <p:xfrm>
           <a:off x="900000" y="900000"/>
-          <a:ext cx="10300000" cy="2100000"/>
+          <a:ext cx="10300000" cy="2520000"/>
         </p:xfrm>
         <a:graphic>
           <a:graphicData uri="http://schemas.openxmlformats.org/drawingml/2006/table">
@@ -2539,12 +4841,66 @@
                           <a:latin typeface="Helvetica Neue"/>
                           <a:ea typeface="Helvetica Neue"/>
                         </a:rPr>
-                        <a:t>冻结前数字总检 30/30 通过；一键复现 39 阶段</a:t>
+                        <a:t>冻结前数字总检 30/30；一键复现 39 阶段</a:t>
                       </a:r>
                     </a:p>
                   </a:txBody>
                   <a:tcPr marL="91440" marR="91440" anchor="ctr">
                     <a:noFill/>
+                  </a:tcPr>
+                </a:tc>
+              </a:tr>
+              <a:tr h="420000">
+                <a:tc>
+                  <a:txBody>
+                    <a:bodyPr anchor="ctr"/>
+                    <a:lstStyle/>
+                    <a:p>
+                      <a:pPr algn="l">
+                        <a:buNone/>
+                      </a:pPr>
+                      <a:r>
+                        <a:rPr lang="zh-CN" sz="1400" b="0" dirty="0">
+                          <a:solidFill>
+                            <a:srgbClr val="F4EFE6"/>
+                          </a:solidFill>
+                          <a:latin typeface="Helvetica Neue"/>
+                          <a:ea typeface="Helvetica Neue"/>
+                        </a:rPr>
+                        <a:t>交付物</a:t>
+                      </a:r>
+                    </a:p>
+                  </a:txBody>
+                  <a:tcPr marL="91440" marR="91440" anchor="ctr">
+                    <a:solidFill>
+                      <a:srgbClr val="1A1D22"/>
+                    </a:solidFill>
+                  </a:tcPr>
+                </a:tc>
+                <a:tc>
+                  <a:txBody>
+                    <a:bodyPr anchor="ctr"/>
+                    <a:lstStyle/>
+                    <a:p>
+                      <a:pPr algn="l">
+                        <a:buNone/>
+                      </a:pPr>
+                      <a:r>
+                        <a:rPr lang="zh-CN" sz="1400" b="0" dirty="0">
+                          <a:solidFill>
+                            <a:srgbClr val="F4EFE6"/>
+                          </a:solidFill>
+                          <a:latin typeface="Helvetica Neue"/>
+                          <a:ea typeface="Helvetica Neue"/>
+                        </a:rPr>
+                        <a:t>说明书、商业计划书、本地工作台、企业版报告</a:t>
+                      </a:r>
+                    </a:p>
+                  </a:txBody>
+                  <a:tcPr marL="91440" marR="91440" anchor="ctr">
+                    <a:solidFill>
+                      <a:srgbClr val="1A1D22"/>
+                    </a:solidFill>
                   </a:tcPr>
                 </a:tc>
               </a:tr>
@@ -2554,7 +4910,7 @@
       </p:graphicFrame>
       <p:sp>
         <p:nvSpPr>
-          <p:cNvPr id="149" name="Page number"/>
+          <p:cNvPr id="199" name="Page number"/>
           <p:cNvSpPr txBox="1"/>
           <p:nvPr/>
         </p:nvSpPr>
@@ -2586,7 +4942,7 @@
                 <a:latin typeface="Helvetica Neue"/>
                 <a:ea typeface="Helvetica Neue"/>
               </a:rPr>
-              <a:t>14 / 27</a:t>
+              <a:t>19 / 36</a:t>
             </a:r>
           </a:p>
         </p:txBody>
@@ -2602,7 +4958,7 @@
 </p:sld>
 </file>
 
-<file path=ppt/slides/slide15.xml><?xml version="1.0" encoding="utf-8"?>
+<file path=ppt/slides/slide2.xml><?xml version="1.0" encoding="utf-8"?>
 <p:sld xmlns:a="http://schemas.openxmlformats.org/drawingml/2006/main" xmlns:r="http://schemas.openxmlformats.org/officeDocument/2006/relationships" xmlns:p="http://schemas.openxmlformats.org/presentationml/2006/main">
   <p:cSld>
     <p:bg>
@@ -2629,7 +4985,7 @@
       </p:grpSpPr>
       <p:sp>
         <p:nvSpPr>
-          <p:cNvPr id="151" name="Kicker"/>
+          <p:cNvPr id="21" name="Kicker"/>
           <p:cNvSpPr txBox="1"/>
           <p:nvPr/>
         </p:nvSpPr>
@@ -2661,14 +5017,14 @@
                 <a:latin typeface="Helvetica Neue"/>
                 <a:ea typeface="Helvetica Neue"/>
               </a:rPr>
-              <a:t>项目亮点：创新性、社会价值、商业价值</a:t>
+              <a:t>目录</a:t>
             </a:r>
           </a:p>
         </p:txBody>
       </p:sp>
       <p:sp>
         <p:nvSpPr>
-          <p:cNvPr id="152" name="Title"/>
+          <p:cNvPr id="22" name="Title"/>
           <p:cNvSpPr txBox="1"/>
           <p:nvPr/>
         </p:nvSpPr>
@@ -2700,14 +5056,14 @@
                 <a:latin typeface="Georgia"/>
                 <a:ea typeface="Georgia"/>
               </a:rPr>
-              <a:t>项目亮点：创新性、社会价值、商业价值</a:t>
+              <a:t>目录</a:t>
             </a:r>
           </a:p>
         </p:txBody>
       </p:sp>
       <p:sp>
         <p:nvSpPr>
-          <p:cNvPr id="153" name="Body"/>
+          <p:cNvPr id="23" name="Body"/>
           <p:cNvSpPr txBox="1"/>
           <p:nvPr/>
         </p:nvSpPr>
@@ -2740,7 +5096,7 @@
                 <a:latin typeface="Helvetica Neue"/>
                 <a:ea typeface="Helvetica Neue"/>
               </a:rPr>
-              <a:t>创新性：三层防误报 + 设备级比值 + 机理 RUL + 诚实工程</a:t>
+              <a:t>一、项目概述 二、产品与服务设计 三、技术创新与证据</a:t>
             </a:r>
           </a:p>
           <a:p>
@@ -2756,7 +5112,7 @@
                 <a:latin typeface="Helvetica Neue"/>
                 <a:ea typeface="Helvetica Neue"/>
               </a:rPr>
-              <a:t>社会价值：减少溢流与非计划停机；泥饼含固率合规预警</a:t>
+              <a:t>四、产品形态与使用方式 五、行业背景与目标市场</a:t>
             </a:r>
           </a:p>
           <a:p>
@@ -2772,7 +5128,7 @@
                 <a:latin typeface="Helvetica Neue"/>
                 <a:ea typeface="Helvetica Neue"/>
               </a:rPr>
-              <a:t>社会价值：不新增传感器，不增加现场改造与电子垃圾</a:t>
+              <a:t>六、竞争格局与优势 七、商业模式与财务</a:t>
             </a:r>
           </a:p>
           <a:p>
@@ -2788,14 +5144,14 @@
                 <a:latin typeface="Helvetica Neue"/>
                 <a:ea typeface="Helvetica Neue"/>
               </a:rPr>
-              <a:t>商业价值：按设备订阅，轻资产、不垫资、可复制到供水与管网</a:t>
+              <a:t>八、实施计划与风险 九、团队与附录</a:t>
             </a:r>
           </a:p>
         </p:txBody>
       </p:sp>
       <p:sp>
         <p:nvSpPr>
-          <p:cNvPr id="159" name="Page number"/>
+          <p:cNvPr id="29" name="Page number"/>
           <p:cNvSpPr txBox="1"/>
           <p:nvPr/>
         </p:nvSpPr>
@@ -2827,7 +5183,7 @@
                 <a:latin typeface="Helvetica Neue"/>
                 <a:ea typeface="Helvetica Neue"/>
               </a:rPr>
-              <a:t>15 / 27</a:t>
+              <a:t>02 / 36</a:t>
             </a:r>
           </a:p>
         </p:txBody>
@@ -2868,7 +5224,7 @@
                                     </p:stCondLst>
                                   </p:cTn>
                                   <p:tgtEl>
-                                    <p:spTgt spid="153"/>
+                                    <p:spTgt spid="23"/>
                                   </p:tgtEl>
                                   <p:attrNameLst>
                                     <p:attrName>style.visibility</p:attrName>
@@ -2904,7 +5260,7 @@
                                     </p:stCondLst>
                                   </p:cTn>
                                   <p:tgtEl>
-                                    <p:spTgt spid="153"/>
+                                    <p:spTgt spid="23"/>
                                   </p:tgtEl>
                                   <p:attrNameLst>
                                     <p:attrName>style.visibility</p:attrName>
@@ -2940,7 +5296,7 @@
                                     </p:stCondLst>
                                   </p:cTn>
                                   <p:tgtEl>
-                                    <p:spTgt spid="153"/>
+                                    <p:spTgt spid="23"/>
                                   </p:tgtEl>
                                   <p:attrNameLst>
                                     <p:attrName>style.visibility</p:attrName>
@@ -2976,7 +5332,7 @@
                                     </p:stCondLst>
                                   </p:cTn>
                                   <p:tgtEl>
-                                    <p:spTgt spid="153"/>
+                                    <p:spTgt spid="23"/>
                                   </p:tgtEl>
                                   <p:attrNameLst>
                                     <p:attrName>style.visibility</p:attrName>
@@ -3014,13 +5370,13 @@
       </p:par>
     </p:tnLst>
     <p:bldLst>
-      <p:bldP spid="153" grpId="0"/>
+      <p:bldP spid="23" grpId="0"/>
     </p:bldLst>
   </p:timing>
 </p:sld>
 </file>
 
-<file path=ppt/slides/slide16.xml><?xml version="1.0" encoding="utf-8"?>
+<file path=ppt/slides/slide20.xml><?xml version="1.0" encoding="utf-8"?>
 <p:sld xmlns:a="http://schemas.openxmlformats.org/drawingml/2006/main" xmlns:r="http://schemas.openxmlformats.org/officeDocument/2006/relationships" xmlns:p="http://schemas.openxmlformats.org/presentationml/2006/main">
   <p:cSld>
     <p:bg>
@@ -3047,7 +5403,7 @@
       </p:grpSpPr>
       <p:sp>
         <p:nvSpPr>
-          <p:cNvPr id="161" name="Kicker"/>
+          <p:cNvPr id="201" name="Kicker"/>
           <p:cNvSpPr txBox="1"/>
           <p:nvPr/>
         </p:nvSpPr>
@@ -3079,14 +5435,14 @@
                 <a:latin typeface="Helvetica Neue"/>
                 <a:ea typeface="Helvetica Neue"/>
               </a:rPr>
-              <a:t>行业背景：存量巨大、政策明确、数据已就位</a:t>
+              <a:t>项目亮点：创新性、社会价值、商业价值</a:t>
             </a:r>
           </a:p>
         </p:txBody>
       </p:sp>
       <p:sp>
         <p:nvSpPr>
-          <p:cNvPr id="162" name="Title"/>
+          <p:cNvPr id="202" name="Title"/>
           <p:cNvSpPr txBox="1"/>
           <p:nvPr/>
         </p:nvSpPr>
@@ -3118,14 +5474,14 @@
                 <a:latin typeface="Georgia"/>
                 <a:ea typeface="Georgia"/>
               </a:rPr>
-              <a:t>行业背景：存量巨大、政策明确、数据已就位</a:t>
+              <a:t>项目亮点：创新性、社会价值、商业价值</a:t>
             </a:r>
           </a:p>
         </p:txBody>
       </p:sp>
       <p:sp>
         <p:nvSpPr>
-          <p:cNvPr id="163" name="Body"/>
+          <p:cNvPr id="203" name="Body"/>
           <p:cNvSpPr txBox="1"/>
           <p:nvPr/>
         </p:nvSpPr>
@@ -3158,7 +5514,7 @@
                 <a:latin typeface="Helvetica Neue"/>
                 <a:ea typeface="Helvetica Neue"/>
               </a:rPr>
-              <a:t>城市及县城污水处理厂约 4816 座（2023 城乡建设统计年鉴，待原文核实）</a:t>
+              <a:t>创新性：三层防误报 + 设备级比值 + 机理 RUL + 诚实工程</a:t>
             </a:r>
           </a:p>
           <a:p>
@@ -3174,7 +5530,7 @@
                 <a:latin typeface="Helvetica Neue"/>
                 <a:ea typeface="Helvetica Neue"/>
               </a:rPr>
-              <a:t>双碳与污水资源化政策持续加压，运维成本被盯得越来越紧</a:t>
+              <a:t>社会价值：减少溢流与非计划停机；泥饼含固率合规预警</a:t>
             </a:r>
           </a:p>
           <a:p>
@@ -3190,7 +5546,7 @@
                 <a:latin typeface="Helvetica Neue"/>
                 <a:ea typeface="Helvetica Neue"/>
               </a:rPr>
-              <a:t>关键设备普遍缺乏预测性维护手段，仍以定期大修为主</a:t>
+              <a:t>社会价值：不新增传感器，不增加现场改造与电子垃圾</a:t>
             </a:r>
           </a:p>
           <a:p>
@@ -3206,14 +5562,14 @@
                 <a:latin typeface="Helvetica Neue"/>
                 <a:ea typeface="Helvetica Neue"/>
               </a:rPr>
-              <a:t>数据已在 DCS/SCADA 里，差的是方法与工具</a:t>
+              <a:t>商业价值：按设备订阅，轻资产、不垫资、可复制到供水与管网</a:t>
             </a:r>
           </a:p>
         </p:txBody>
       </p:sp>
       <p:sp>
         <p:nvSpPr>
-          <p:cNvPr id="169" name="Page number"/>
+          <p:cNvPr id="209" name="Page number"/>
           <p:cNvSpPr txBox="1"/>
           <p:nvPr/>
         </p:nvSpPr>
@@ -3245,7 +5601,7 @@
                 <a:latin typeface="Helvetica Neue"/>
                 <a:ea typeface="Helvetica Neue"/>
               </a:rPr>
-              <a:t>16 / 27</a:t>
+              <a:t>20 / 36</a:t>
             </a:r>
           </a:p>
         </p:txBody>
@@ -3286,7 +5642,7 @@
                                     </p:stCondLst>
                                   </p:cTn>
                                   <p:tgtEl>
-                                    <p:spTgt spid="163"/>
+                                    <p:spTgt spid="203"/>
                                   </p:tgtEl>
                                   <p:attrNameLst>
                                     <p:attrName>style.visibility</p:attrName>
@@ -3322,7 +5678,7 @@
                                     </p:stCondLst>
                                   </p:cTn>
                                   <p:tgtEl>
-                                    <p:spTgt spid="163"/>
+                                    <p:spTgt spid="203"/>
                                   </p:tgtEl>
                                   <p:attrNameLst>
                                     <p:attrName>style.visibility</p:attrName>
@@ -3358,7 +5714,7 @@
                                     </p:stCondLst>
                                   </p:cTn>
                                   <p:tgtEl>
-                                    <p:spTgt spid="163"/>
+                                    <p:spTgt spid="203"/>
                                   </p:tgtEl>
                                   <p:attrNameLst>
                                     <p:attrName>style.visibility</p:attrName>
@@ -3394,7 +5750,7 @@
                                     </p:stCondLst>
                                   </p:cTn>
                                   <p:tgtEl>
-                                    <p:spTgt spid="163"/>
+                                    <p:spTgt spid="203"/>
                                   </p:tgtEl>
                                   <p:attrNameLst>
                                     <p:attrName>style.visibility</p:attrName>
@@ -3432,13 +5788,13 @@
       </p:par>
     </p:tnLst>
     <p:bldLst>
-      <p:bldP spid="163" grpId="0"/>
+      <p:bldP spid="203" grpId="0"/>
     </p:bldLst>
   </p:timing>
 </p:sld>
 </file>
 
-<file path=ppt/slides/slide17.xml><?xml version="1.0" encoding="utf-8"?>
+<file path=ppt/slides/slide21.xml><?xml version="1.0" encoding="utf-8"?>
 <p:sld xmlns:a="http://schemas.openxmlformats.org/drawingml/2006/main" xmlns:r="http://schemas.openxmlformats.org/officeDocument/2006/relationships" xmlns:p="http://schemas.openxmlformats.org/presentationml/2006/main">
   <p:cSld>
     <p:bg>
@@ -3465,7 +5821,7 @@
       </p:grpSpPr>
       <p:sp>
         <p:nvSpPr>
-          <p:cNvPr id="171" name="Kicker"/>
+          <p:cNvPr id="211" name="Kicker"/>
           <p:cNvSpPr txBox="1"/>
           <p:nvPr/>
         </p:nvSpPr>
@@ -3497,14 +5853,14 @@
                 <a:latin typeface="Helvetica Neue"/>
                 <a:ea typeface="Helvetica Neue"/>
               </a:rPr>
-              <a:t>目标用户：厂级设备科先用起来，集团统一采购</a:t>
+              <a:t>行业背景：存量巨大、政策明确、数据已就位</a:t>
             </a:r>
           </a:p>
         </p:txBody>
       </p:sp>
       <p:sp>
         <p:nvSpPr>
-          <p:cNvPr id="172" name="Title"/>
+          <p:cNvPr id="212" name="Title"/>
           <p:cNvSpPr txBox="1"/>
           <p:nvPr/>
         </p:nvSpPr>
@@ -3536,14 +5892,14 @@
                 <a:latin typeface="Georgia"/>
                 <a:ea typeface="Georgia"/>
               </a:rPr>
-              <a:t>目标用户：厂级设备科先用起来，集团统一采购</a:t>
+              <a:t>行业背景：存量巨大、政策明确、数据已就位</a:t>
             </a:r>
           </a:p>
         </p:txBody>
       </p:sp>
       <p:sp>
         <p:nvSpPr>
-          <p:cNvPr id="173" name="Body"/>
+          <p:cNvPr id="213" name="Body"/>
           <p:cNvSpPr txBox="1"/>
           <p:nvPr/>
         </p:nvSpPr>
@@ -3576,7 +5932,7 @@
                 <a:latin typeface="Helvetica Neue"/>
                 <a:ea typeface="Helvetica Neue"/>
               </a:rPr>
-              <a:t>使用者：设备科 / 运维班长（看 P1/P2/P3 决定动作）</a:t>
+              <a:t>城市及县城污水处理厂约 4816 座（2023 城乡建设统计年鉴，待原文核实）</a:t>
             </a:r>
           </a:p>
           <a:p>
@@ -3592,7 +5948,7 @@
                 <a:latin typeface="Helvetica Neue"/>
                 <a:ea typeface="Helvetica Neue"/>
               </a:rPr>
-              <a:t>付费方：水务集团 / 地方水司（按设备数订阅）</a:t>
+              <a:t>双碳与污水资源化政策持续加压，运维成本被盯得越来越紧</a:t>
             </a:r>
           </a:p>
           <a:p>
@@ -3608,7 +5964,7 @@
                 <a:latin typeface="Helvetica Neue"/>
                 <a:ea typeface="Helvetica Neue"/>
               </a:rPr>
-              <a:t>决策链：厂级试点 → 集团技术部评估 → 统一部署</a:t>
+              <a:t>关键设备普遍缺乏预测性维护手段，仍以定期大修为主</a:t>
             </a:r>
           </a:p>
           <a:p>
@@ -3624,14 +5980,14 @@
                 <a:latin typeface="Helvetica Neue"/>
                 <a:ea typeface="Helvetica Neue"/>
               </a:rPr>
-              <a:t>明确不做：不碰硬件、不做垫资、不承诺未标定的收益</a:t>
+              <a:t>数据已在 DCS/SCADA 里，差的是方法与工具</a:t>
             </a:r>
           </a:p>
         </p:txBody>
       </p:sp>
       <p:sp>
         <p:nvSpPr>
-          <p:cNvPr id="179" name="Page number"/>
+          <p:cNvPr id="219" name="Page number"/>
           <p:cNvSpPr txBox="1"/>
           <p:nvPr/>
         </p:nvSpPr>
@@ -3663,7 +6019,7 @@
                 <a:latin typeface="Helvetica Neue"/>
                 <a:ea typeface="Helvetica Neue"/>
               </a:rPr>
-              <a:t>17 / 27</a:t>
+              <a:t>21 / 36</a:t>
             </a:r>
           </a:p>
         </p:txBody>
@@ -3704,7 +6060,7 @@
                                     </p:stCondLst>
                                   </p:cTn>
                                   <p:tgtEl>
-                                    <p:spTgt spid="173"/>
+                                    <p:spTgt spid="213"/>
                                   </p:tgtEl>
                                   <p:attrNameLst>
                                     <p:attrName>style.visibility</p:attrName>
@@ -3740,7 +6096,7 @@
                                     </p:stCondLst>
                                   </p:cTn>
                                   <p:tgtEl>
-                                    <p:spTgt spid="173"/>
+                                    <p:spTgt spid="213"/>
                                   </p:tgtEl>
                                   <p:attrNameLst>
                                     <p:attrName>style.visibility</p:attrName>
@@ -3776,7 +6132,7 @@
                                     </p:stCondLst>
                                   </p:cTn>
                                   <p:tgtEl>
-                                    <p:spTgt spid="173"/>
+                                    <p:spTgt spid="213"/>
                                   </p:tgtEl>
                                   <p:attrNameLst>
                                     <p:attrName>style.visibility</p:attrName>
@@ -3812,7 +6168,7 @@
                                     </p:stCondLst>
                                   </p:cTn>
                                   <p:tgtEl>
-                                    <p:spTgt spid="173"/>
+                                    <p:spTgt spid="213"/>
                                   </p:tgtEl>
                                   <p:attrNameLst>
                                     <p:attrName>style.visibility</p:attrName>
@@ -3850,13 +6206,13 @@
       </p:par>
     </p:tnLst>
     <p:bldLst>
-      <p:bldP spid="173" grpId="0"/>
+      <p:bldP spid="213" grpId="0"/>
     </p:bldLst>
   </p:timing>
 </p:sld>
 </file>
 
-<file path=ppt/slides/slide18.xml><?xml version="1.0" encoding="utf-8"?>
+<file path=ppt/slides/slide22.xml><?xml version="1.0" encoding="utf-8"?>
 <p:sld xmlns:a="http://schemas.openxmlformats.org/drawingml/2006/main" xmlns:r="http://schemas.openxmlformats.org/officeDocument/2006/relationships" xmlns:p="http://schemas.openxmlformats.org/presentationml/2006/main">
   <p:cSld>
     <p:bg>
@@ -3883,7 +6239,7 @@
       </p:grpSpPr>
       <p:sp>
         <p:nvSpPr>
-          <p:cNvPr id="181" name="Kicker"/>
+          <p:cNvPr id="221" name="Kicker"/>
           <p:cNvSpPr txBox="1"/>
           <p:nvPr/>
         </p:nvSpPr>
@@ -3915,6 +6271,842 @@
                 <a:latin typeface="Helvetica Neue"/>
                 <a:ea typeface="Helvetica Neue"/>
               </a:rPr>
+              <a:t>目标用户：厂级设备科先用起来，集团统一采购</a:t>
+            </a:r>
+          </a:p>
+        </p:txBody>
+      </p:sp>
+      <p:sp>
+        <p:nvSpPr>
+          <p:cNvPr id="222" name="Title"/>
+          <p:cNvSpPr txBox="1"/>
+          <p:nvPr/>
+        </p:nvSpPr>
+        <p:spPr>
+          <a:xfrm>
+            <a:off x="900000" y="920000"/>
+            <a:ext cx="10300000" cy="800000"/>
+          </a:xfrm>
+          <a:prstGeom prst="rect">
+            <a:avLst/>
+          </a:prstGeom>
+          <a:noFill/>
+          <a:ln/>
+        </p:spPr>
+        <p:txBody>
+          <a:bodyPr wrap="square" rtlCol="0">
+            <a:normAutofit/>
+          </a:bodyPr>
+          <a:lstStyle/>
+          <a:p>
+            <a:pPr>
+              <a:buNone/>
+            </a:pPr>
+            <a:r>
+              <a:rPr lang="zh-CN" sz="3400" b="1" dirty="0">
+                <a:solidFill>
+                  <a:srgbClr val="F4EFE6"/>
+                </a:solidFill>
+                <a:latin typeface="Georgia"/>
+                <a:ea typeface="Georgia"/>
+              </a:rPr>
+              <a:t>目标用户：厂级设备科先用起来，集团统一采购</a:t>
+            </a:r>
+          </a:p>
+        </p:txBody>
+      </p:sp>
+      <p:sp>
+        <p:nvSpPr>
+          <p:cNvPr id="223" name="Body"/>
+          <p:cNvSpPr txBox="1"/>
+          <p:nvPr/>
+        </p:nvSpPr>
+        <p:spPr>
+          <a:xfrm>
+            <a:off x="1050000" y="1850000"/>
+            <a:ext cx="10100000" cy="4500000"/>
+          </a:xfrm>
+          <a:prstGeom prst="rect">
+            <a:avLst/>
+          </a:prstGeom>
+          <a:noFill/>
+          <a:ln/>
+        </p:spPr>
+        <p:txBody>
+          <a:bodyPr wrap="square" rtlCol="0">
+            <a:normAutofit/>
+          </a:bodyPr>
+          <a:lstStyle/>
+          <a:p>
+            <a:pPr marL="285750" indent="-285750">
+              <a:buFont typeface="Arial" panose="020B0604020202020204"/>
+              <a:buChar char="•"/>
+            </a:pPr>
+            <a:r>
+              <a:rPr lang="zh-CN" sz="2000" b="0" dirty="0">
+                <a:solidFill>
+                  <a:srgbClr val="F4EFE6"/>
+                </a:solidFill>
+                <a:latin typeface="Helvetica Neue"/>
+                <a:ea typeface="Helvetica Neue"/>
+              </a:rPr>
+              <a:t>使用者：设备科 / 运维班长（看 P1/P2/P3 决定动作）</a:t>
+            </a:r>
+          </a:p>
+          <a:p>
+            <a:pPr marL="285750" indent="-285750">
+              <a:buFont typeface="Arial" panose="020B0604020202020204"/>
+              <a:buChar char="•"/>
+            </a:pPr>
+            <a:r>
+              <a:rPr lang="zh-CN" sz="2000" b="0" dirty="0">
+                <a:solidFill>
+                  <a:srgbClr val="F4EFE6"/>
+                </a:solidFill>
+                <a:latin typeface="Helvetica Neue"/>
+                <a:ea typeface="Helvetica Neue"/>
+              </a:rPr>
+              <a:t>付费方：水务集团 / 地方水司（按设备数订阅）</a:t>
+            </a:r>
+          </a:p>
+          <a:p>
+            <a:pPr marL="285750" indent="-285750">
+              <a:buFont typeface="Arial" panose="020B0604020202020204"/>
+              <a:buChar char="•"/>
+            </a:pPr>
+            <a:r>
+              <a:rPr lang="zh-CN" sz="2000" b="0" dirty="0">
+                <a:solidFill>
+                  <a:srgbClr val="F4EFE6"/>
+                </a:solidFill>
+                <a:latin typeface="Helvetica Neue"/>
+                <a:ea typeface="Helvetica Neue"/>
+              </a:rPr>
+              <a:t>决策链：厂级试点 → 集团技术部评估 → 统一部署</a:t>
+            </a:r>
+          </a:p>
+          <a:p>
+            <a:pPr marL="285750" indent="-285750">
+              <a:buFont typeface="Arial" panose="020B0604020202020204"/>
+              <a:buChar char="•"/>
+            </a:pPr>
+            <a:r>
+              <a:rPr lang="zh-CN" sz="2000" b="0" dirty="0">
+                <a:solidFill>
+                  <a:srgbClr val="F4EFE6"/>
+                </a:solidFill>
+                <a:latin typeface="Helvetica Neue"/>
+                <a:ea typeface="Helvetica Neue"/>
+              </a:rPr>
+              <a:t>明确不做：不碰硬件、不做垫资、不承诺未标定的收益</a:t>
+            </a:r>
+          </a:p>
+        </p:txBody>
+      </p:sp>
+      <p:sp>
+        <p:nvSpPr>
+          <p:cNvPr id="229" name="Page number"/>
+          <p:cNvSpPr txBox="1"/>
+          <p:nvPr/>
+        </p:nvSpPr>
+        <p:spPr>
+          <a:xfrm>
+            <a:off x="10600000" y="6250000"/>
+            <a:ext cx="1200000" cy="400000"/>
+          </a:xfrm>
+          <a:prstGeom prst="rect">
+            <a:avLst/>
+          </a:prstGeom>
+          <a:noFill/>
+          <a:ln/>
+        </p:spPr>
+        <p:txBody>
+          <a:bodyPr wrap="square" rtlCol="0">
+            <a:normAutofit/>
+          </a:bodyPr>
+          <a:lstStyle/>
+          <a:p>
+            <a:pPr algn="r">
+              <a:buNone/>
+            </a:pPr>
+            <a:r>
+              <a:rPr lang="zh-CN" sz="1000" b="0" dirty="0">
+                <a:solidFill>
+                  <a:srgbClr val="A79F91"/>
+                </a:solidFill>
+                <a:latin typeface="Helvetica Neue"/>
+                <a:ea typeface="Helvetica Neue"/>
+              </a:rPr>
+              <a:t>22 / 36</a:t>
+            </a:r>
+          </a:p>
+        </p:txBody>
+      </p:sp>
+    </p:spTree>
+  </p:cSld>
+  <p:clrMapOvr>
+    <a:overrideClrMapping bg1="lt1" tx1="dk1" bg2="lt2" tx2="dk2" accent1="accent1" accent2="accent2" accent3="accent3" accent4="accent4" accent5="accent5" accent6="accent6" hlink="hlink" folHlink="folHlink"/>
+  </p:clrMapOvr>
+  <p:transition spd="med">
+    <p:fade/>
+  </p:transition>
+  <p:timing>
+    <p:tnLst>
+      <p:par>
+        <p:cTn id="1" dur="indefinite" restart="never" nodeType="tmRoot">
+          <p:childTnLst>
+            <p:seq concurrent="1" nextAc="seek">
+              <p:cTn id="2" dur="indefinite" nodeType="mainSeq">
+                <p:childTnLst>
+                  <p:par>
+                    <p:cTn id="3" fill="hold">
+                      <p:stCondLst>
+                        <p:cond delay="indefinite"/>
+                      </p:stCondLst>
+                      <p:childTnLst>
+                        <p:par>
+                          <p:cTn id="4" presetID="1" presetClass="entr" presetSubtype="0" fill="hold" grpId="0" nodeType="clickEffect">
+                            <p:stCondLst>
+                              <p:cond delay="0"/>
+                            </p:stCondLst>
+                            <p:childTnLst>
+                              <p:set>
+                                <p:cBhvr>
+                                  <p:cTn id="5" dur="1" fill="hold">
+                                    <p:stCondLst>
+                                      <p:cond delay="0"/>
+                                    </p:stCondLst>
+                                  </p:cTn>
+                                  <p:tgtEl>
+                                    <p:spTgt spid="223"/>
+                                  </p:tgtEl>
+                                  <p:attrNameLst>
+                                    <p:attrName>style.visibility</p:attrName>
+                                  </p:attrNameLst>
+                                </p:cBhvr>
+                                <p:to>
+                                  <p:strVal val="visible"/>
+                                </p:to>
+                              </p:set>
+                            </p:childTnLst>
+                          </p:cTn>
+                        </p:par>
+                      </p:childTnLst>
+                    </p:cTn>
+                  </p:par>
+                  <p:par>
+                    <p:cTn id="6" fill="hold">
+                      <p:stCondLst>
+                        <p:cond delay="indefinite"/>
+                      </p:stCondLst>
+                      <p:childTnLst>
+                        <p:par>
+                          <p:cTn id="7" presetID="1" presetClass="entr" presetSubtype="0" fill="hold" grpId="0" nodeType="clickEffect">
+                            <p:stCondLst>
+                              <p:cond delay="0"/>
+                            </p:stCondLst>
+                            <p:childTnLst>
+                              <p:set>
+                                <p:cBhvr>
+                                  <p:cTn id="8" dur="1" fill="hold">
+                                    <p:stCondLst>
+                                      <p:cond delay="0"/>
+                                    </p:stCondLst>
+                                  </p:cTn>
+                                  <p:tgtEl>
+                                    <p:spTgt spid="223"/>
+                                  </p:tgtEl>
+                                  <p:attrNameLst>
+                                    <p:attrName>style.visibility</p:attrName>
+                                  </p:attrNameLst>
+                                </p:cBhvr>
+                                <p:to>
+                                  <p:strVal val="visible"/>
+                                </p:to>
+                              </p:set>
+                            </p:childTnLst>
+                          </p:cTn>
+                        </p:par>
+                      </p:childTnLst>
+                    </p:cTn>
+                  </p:par>
+                  <p:par>
+                    <p:cTn id="9" fill="hold">
+                      <p:stCondLst>
+                        <p:cond delay="indefinite"/>
+                      </p:stCondLst>
+                      <p:childTnLst>
+                        <p:par>
+                          <p:cTn id="10" presetID="1" presetClass="entr" presetSubtype="0" fill="hold" grpId="0" nodeType="clickEffect">
+                            <p:stCondLst>
+                              <p:cond delay="0"/>
+                            </p:stCondLst>
+                            <p:childTnLst>
+                              <p:set>
+                                <p:cBhvr>
+                                  <p:cTn id="11" dur="1" fill="hold">
+                                    <p:stCondLst>
+                                      <p:cond delay="0"/>
+                                    </p:stCondLst>
+                                  </p:cTn>
+                                  <p:tgtEl>
+                                    <p:spTgt spid="223"/>
+                                  </p:tgtEl>
+                                  <p:attrNameLst>
+                                    <p:attrName>style.visibility</p:attrName>
+                                  </p:attrNameLst>
+                                </p:cBhvr>
+                                <p:to>
+                                  <p:strVal val="visible"/>
+                                </p:to>
+                              </p:set>
+                            </p:childTnLst>
+                          </p:cTn>
+                        </p:par>
+                      </p:childTnLst>
+                    </p:cTn>
+                  </p:par>
+                  <p:par>
+                    <p:cTn id="12" fill="hold">
+                      <p:stCondLst>
+                        <p:cond delay="indefinite"/>
+                      </p:stCondLst>
+                      <p:childTnLst>
+                        <p:par>
+                          <p:cTn id="13" presetID="1" presetClass="entr" presetSubtype="0" fill="hold" grpId="0" nodeType="clickEffect">
+                            <p:stCondLst>
+                              <p:cond delay="0"/>
+                            </p:stCondLst>
+                            <p:childTnLst>
+                              <p:set>
+                                <p:cBhvr>
+                                  <p:cTn id="14" dur="1" fill="hold">
+                                    <p:stCondLst>
+                                      <p:cond delay="0"/>
+                                    </p:stCondLst>
+                                  </p:cTn>
+                                  <p:tgtEl>
+                                    <p:spTgt spid="223"/>
+                                  </p:tgtEl>
+                                  <p:attrNameLst>
+                                    <p:attrName>style.visibility</p:attrName>
+                                  </p:attrNameLst>
+                                </p:cBhvr>
+                                <p:to>
+                                  <p:strVal val="visible"/>
+                                </p:to>
+                              </p:set>
+                            </p:childTnLst>
+                          </p:cTn>
+                        </p:par>
+                      </p:childTnLst>
+                    </p:cTn>
+                  </p:par>
+                </p:childTnLst>
+              </p:cTn>
+              <p:prevCondLst>
+                <p:cond evt="onPrev" delay="0">
+                  <p:tgtEl>
+                    <p:sldTgt/>
+                  </p:tgtEl>
+                </p:cond>
+              </p:prevCondLst>
+              <p:nextCondLst>
+                <p:cond evt="onNext" delay="0">
+                  <p:tgtEl>
+                    <p:sldTgt/>
+                  </p:tgtEl>
+                </p:cond>
+              </p:nextCondLst>
+            </p:seq>
+          </p:childTnLst>
+        </p:cTn>
+      </p:par>
+    </p:tnLst>
+    <p:bldLst>
+      <p:bldP spid="223" grpId="0"/>
+    </p:bldLst>
+  </p:timing>
+</p:sld>
+</file>
+
+<file path=ppt/slides/slide23.xml><?xml version="1.0" encoding="utf-8"?>
+<p:sld xmlns:a="http://schemas.openxmlformats.org/drawingml/2006/main" xmlns:r="http://schemas.openxmlformats.org/officeDocument/2006/relationships" xmlns:p="http://schemas.openxmlformats.org/presentationml/2006/main">
+  <p:cSld>
+    <p:bg>
+      <p:bgPr>
+        <a:solidFill>
+          <a:srgbClr val="111316"/>
+        </a:solidFill>
+        <a:effectLst/>
+      </p:bgPr>
+    </p:bg>
+    <p:spTree>
+      <p:nvGrpSpPr>
+        <p:cNvPr id="1" name=""/>
+        <p:cNvGrpSpPr/>
+        <p:nvPr/>
+      </p:nvGrpSpPr>
+      <p:grpSpPr>
+        <a:xfrm>
+          <a:off x="0" y="0"/>
+          <a:ext cx="0" cy="0"/>
+          <a:chOff x="0" y="0"/>
+          <a:chExt cx="0" cy="0"/>
+        </a:xfrm>
+      </p:grpSpPr>
+      <p:sp>
+        <p:nvSpPr>
+          <p:cNvPr id="231" name="Kicker"/>
+          <p:cNvSpPr txBox="1"/>
+          <p:nvPr/>
+        </p:nvSpPr>
+        <p:spPr>
+          <a:xfrm>
+            <a:off x="900000" y="420000"/>
+            <a:ext cx="10000000" cy="420000"/>
+          </a:xfrm>
+          <a:prstGeom prst="rect">
+            <a:avLst/>
+          </a:prstGeom>
+          <a:noFill/>
+          <a:ln/>
+        </p:spPr>
+        <p:txBody>
+          <a:bodyPr wrap="square" rtlCol="0">
+            <a:normAutofit/>
+          </a:bodyPr>
+          <a:lstStyle/>
+          <a:p>
+            <a:pPr>
+              <a:buNone/>
+            </a:pPr>
+            <a:r>
+              <a:rPr lang="zh-CN" sz="1400" b="1" dirty="0">
+                <a:solidFill>
+                  <a:srgbClr val="C9A84C"/>
+                </a:solidFill>
+                <a:latin typeface="Helvetica Neue"/>
+                <a:ea typeface="Helvetica Neue"/>
+              </a:rPr>
+              <a:t>细分市场规模怎么估：按"关键设备 × 存量厂"</a:t>
+            </a:r>
+          </a:p>
+        </p:txBody>
+      </p:sp>
+      <p:sp>
+        <p:nvSpPr>
+          <p:cNvPr id="232" name="Title"/>
+          <p:cNvSpPr txBox="1"/>
+          <p:nvPr/>
+        </p:nvSpPr>
+        <p:spPr>
+          <a:xfrm>
+            <a:off x="900000" y="920000"/>
+            <a:ext cx="10300000" cy="800000"/>
+          </a:xfrm>
+          <a:prstGeom prst="rect">
+            <a:avLst/>
+          </a:prstGeom>
+          <a:noFill/>
+          <a:ln/>
+        </p:spPr>
+        <p:txBody>
+          <a:bodyPr wrap="square" rtlCol="0">
+            <a:normAutofit/>
+          </a:bodyPr>
+          <a:lstStyle/>
+          <a:p>
+            <a:pPr>
+              <a:buNone/>
+            </a:pPr>
+            <a:r>
+              <a:rPr lang="zh-CN" sz="3400" b="1" dirty="0">
+                <a:solidFill>
+                  <a:srgbClr val="F4EFE6"/>
+                </a:solidFill>
+                <a:latin typeface="Georgia"/>
+                <a:ea typeface="Georgia"/>
+              </a:rPr>
+              <a:t>细分市场规模怎么估：按"关键设备 × 存量厂"</a:t>
+            </a:r>
+          </a:p>
+        </p:txBody>
+      </p:sp>
+      <p:sp>
+        <p:nvSpPr>
+          <p:cNvPr id="233" name="Body"/>
+          <p:cNvSpPr txBox="1"/>
+          <p:nvPr/>
+        </p:nvSpPr>
+        <p:spPr>
+          <a:xfrm>
+            <a:off x="1050000" y="1850000"/>
+            <a:ext cx="10100000" cy="4500000"/>
+          </a:xfrm>
+          <a:prstGeom prst="rect">
+            <a:avLst/>
+          </a:prstGeom>
+          <a:noFill/>
+          <a:ln/>
+        </p:spPr>
+        <p:txBody>
+          <a:bodyPr wrap="square" rtlCol="0">
+            <a:normAutofit/>
+          </a:bodyPr>
+          <a:lstStyle/>
+          <a:p>
+            <a:pPr marL="285750" indent="-285750">
+              <a:buFont typeface="Arial" panose="020B0604020202020204"/>
+              <a:buChar char="•"/>
+            </a:pPr>
+            <a:r>
+              <a:rPr lang="zh-CN" sz="2000" b="0" dirty="0">
+                <a:solidFill>
+                  <a:srgbClr val="F4EFE6"/>
+                </a:solidFill>
+                <a:latin typeface="Helvetica Neue"/>
+                <a:ea typeface="Helvetica Neue"/>
+              </a:rPr>
+              <a:t>口径一：存量厂数 × 单厂关键设备数（鼓风机/脱水机/泵）</a:t>
+            </a:r>
+          </a:p>
+          <a:p>
+            <a:pPr marL="285750" indent="-285750">
+              <a:buFont typeface="Arial" panose="020B0604020202020204"/>
+              <a:buChar char="•"/>
+            </a:pPr>
+            <a:r>
+              <a:rPr lang="zh-CN" sz="2000" b="0" dirty="0">
+                <a:solidFill>
+                  <a:srgbClr val="F4EFE6"/>
+                </a:solidFill>
+                <a:latin typeface="Helvetica Neue"/>
+                <a:ea typeface="Helvetica Neue"/>
+              </a:rPr>
+              <a:t>口径二：单厂运维预算中的"非计划停机损失"占比</a:t>
+            </a:r>
+          </a:p>
+          <a:p>
+            <a:pPr marL="285750" indent="-285750">
+              <a:buFont typeface="Arial" panose="020B0604020202020204"/>
+              <a:buChar char="•"/>
+            </a:pPr>
+            <a:r>
+              <a:rPr lang="zh-CN" sz="2000" b="0" dirty="0">
+                <a:solidFill>
+                  <a:srgbClr val="F4EFE6"/>
+                </a:solidFill>
+                <a:latin typeface="Helvetica Neue"/>
+                <a:ea typeface="Helvetica Neue"/>
+              </a:rPr>
+              <a:t>口径三：竞品单价区间 × 渗透率（对标工业 PdM 订阅）</a:t>
+            </a:r>
+          </a:p>
+          <a:p>
+            <a:pPr marL="285750" indent="-285750">
+              <a:buFont typeface="Arial" panose="020B0604020202020204"/>
+              <a:buChar char="•"/>
+            </a:pPr>
+            <a:r>
+              <a:rPr lang="zh-CN" sz="2000" b="0" dirty="0">
+                <a:solidFill>
+                  <a:srgbClr val="F4EFE6"/>
+                </a:solidFill>
+                <a:latin typeface="Helvetica Neue"/>
+                <a:ea typeface="Helvetica Neue"/>
+              </a:rPr>
+              <a:t>三种口径都要用公开原文核实，未核实前不外报</a:t>
+            </a:r>
+          </a:p>
+        </p:txBody>
+      </p:sp>
+      <p:sp>
+        <p:nvSpPr>
+          <p:cNvPr id="239" name="Page number"/>
+          <p:cNvSpPr txBox="1"/>
+          <p:nvPr/>
+        </p:nvSpPr>
+        <p:spPr>
+          <a:xfrm>
+            <a:off x="10600000" y="6250000"/>
+            <a:ext cx="1200000" cy="400000"/>
+          </a:xfrm>
+          <a:prstGeom prst="rect">
+            <a:avLst/>
+          </a:prstGeom>
+          <a:noFill/>
+          <a:ln/>
+        </p:spPr>
+        <p:txBody>
+          <a:bodyPr wrap="square" rtlCol="0">
+            <a:normAutofit/>
+          </a:bodyPr>
+          <a:lstStyle/>
+          <a:p>
+            <a:pPr algn="r">
+              <a:buNone/>
+            </a:pPr>
+            <a:r>
+              <a:rPr lang="zh-CN" sz="1000" b="0" dirty="0">
+                <a:solidFill>
+                  <a:srgbClr val="A79F91"/>
+                </a:solidFill>
+                <a:latin typeface="Helvetica Neue"/>
+                <a:ea typeface="Helvetica Neue"/>
+              </a:rPr>
+              <a:t>23 / 36</a:t>
+            </a:r>
+          </a:p>
+        </p:txBody>
+      </p:sp>
+    </p:spTree>
+  </p:cSld>
+  <p:clrMapOvr>
+    <a:overrideClrMapping bg1="lt1" tx1="dk1" bg2="lt2" tx2="dk2" accent1="accent1" accent2="accent2" accent3="accent3" accent4="accent4" accent5="accent5" accent6="accent6" hlink="hlink" folHlink="folHlink"/>
+  </p:clrMapOvr>
+  <p:transition spd="med">
+    <p:fade/>
+  </p:transition>
+  <p:timing>
+    <p:tnLst>
+      <p:par>
+        <p:cTn id="1" dur="indefinite" restart="never" nodeType="tmRoot">
+          <p:childTnLst>
+            <p:seq concurrent="1" nextAc="seek">
+              <p:cTn id="2" dur="indefinite" nodeType="mainSeq">
+                <p:childTnLst>
+                  <p:par>
+                    <p:cTn id="3" fill="hold">
+                      <p:stCondLst>
+                        <p:cond delay="indefinite"/>
+                      </p:stCondLst>
+                      <p:childTnLst>
+                        <p:par>
+                          <p:cTn id="4" presetID="1" presetClass="entr" presetSubtype="0" fill="hold" grpId="0" nodeType="clickEffect">
+                            <p:stCondLst>
+                              <p:cond delay="0"/>
+                            </p:stCondLst>
+                            <p:childTnLst>
+                              <p:set>
+                                <p:cBhvr>
+                                  <p:cTn id="5" dur="1" fill="hold">
+                                    <p:stCondLst>
+                                      <p:cond delay="0"/>
+                                    </p:stCondLst>
+                                  </p:cTn>
+                                  <p:tgtEl>
+                                    <p:spTgt spid="233"/>
+                                  </p:tgtEl>
+                                  <p:attrNameLst>
+                                    <p:attrName>style.visibility</p:attrName>
+                                  </p:attrNameLst>
+                                </p:cBhvr>
+                                <p:to>
+                                  <p:strVal val="visible"/>
+                                </p:to>
+                              </p:set>
+                            </p:childTnLst>
+                          </p:cTn>
+                        </p:par>
+                      </p:childTnLst>
+                    </p:cTn>
+                  </p:par>
+                  <p:par>
+                    <p:cTn id="6" fill="hold">
+                      <p:stCondLst>
+                        <p:cond delay="indefinite"/>
+                      </p:stCondLst>
+                      <p:childTnLst>
+                        <p:par>
+                          <p:cTn id="7" presetID="1" presetClass="entr" presetSubtype="0" fill="hold" grpId="0" nodeType="clickEffect">
+                            <p:stCondLst>
+                              <p:cond delay="0"/>
+                            </p:stCondLst>
+                            <p:childTnLst>
+                              <p:set>
+                                <p:cBhvr>
+                                  <p:cTn id="8" dur="1" fill="hold">
+                                    <p:stCondLst>
+                                      <p:cond delay="0"/>
+                                    </p:stCondLst>
+                                  </p:cTn>
+                                  <p:tgtEl>
+                                    <p:spTgt spid="233"/>
+                                  </p:tgtEl>
+                                  <p:attrNameLst>
+                                    <p:attrName>style.visibility</p:attrName>
+                                  </p:attrNameLst>
+                                </p:cBhvr>
+                                <p:to>
+                                  <p:strVal val="visible"/>
+                                </p:to>
+                              </p:set>
+                            </p:childTnLst>
+                          </p:cTn>
+                        </p:par>
+                      </p:childTnLst>
+                    </p:cTn>
+                  </p:par>
+                  <p:par>
+                    <p:cTn id="9" fill="hold">
+                      <p:stCondLst>
+                        <p:cond delay="indefinite"/>
+                      </p:stCondLst>
+                      <p:childTnLst>
+                        <p:par>
+                          <p:cTn id="10" presetID="1" presetClass="entr" presetSubtype="0" fill="hold" grpId="0" nodeType="clickEffect">
+                            <p:stCondLst>
+                              <p:cond delay="0"/>
+                            </p:stCondLst>
+                            <p:childTnLst>
+                              <p:set>
+                                <p:cBhvr>
+                                  <p:cTn id="11" dur="1" fill="hold">
+                                    <p:stCondLst>
+                                      <p:cond delay="0"/>
+                                    </p:stCondLst>
+                                  </p:cTn>
+                                  <p:tgtEl>
+                                    <p:spTgt spid="233"/>
+                                  </p:tgtEl>
+                                  <p:attrNameLst>
+                                    <p:attrName>style.visibility</p:attrName>
+                                  </p:attrNameLst>
+                                </p:cBhvr>
+                                <p:to>
+                                  <p:strVal val="visible"/>
+                                </p:to>
+                              </p:set>
+                            </p:childTnLst>
+                          </p:cTn>
+                        </p:par>
+                      </p:childTnLst>
+                    </p:cTn>
+                  </p:par>
+                  <p:par>
+                    <p:cTn id="12" fill="hold">
+                      <p:stCondLst>
+                        <p:cond delay="indefinite"/>
+                      </p:stCondLst>
+                      <p:childTnLst>
+                        <p:par>
+                          <p:cTn id="13" presetID="1" presetClass="entr" presetSubtype="0" fill="hold" grpId="0" nodeType="clickEffect">
+                            <p:stCondLst>
+                              <p:cond delay="0"/>
+                            </p:stCondLst>
+                            <p:childTnLst>
+                              <p:set>
+                                <p:cBhvr>
+                                  <p:cTn id="14" dur="1" fill="hold">
+                                    <p:stCondLst>
+                                      <p:cond delay="0"/>
+                                    </p:stCondLst>
+                                  </p:cTn>
+                                  <p:tgtEl>
+                                    <p:spTgt spid="233"/>
+                                  </p:tgtEl>
+                                  <p:attrNameLst>
+                                    <p:attrName>style.visibility</p:attrName>
+                                  </p:attrNameLst>
+                                </p:cBhvr>
+                                <p:to>
+                                  <p:strVal val="visible"/>
+                                </p:to>
+                              </p:set>
+                            </p:childTnLst>
+                          </p:cTn>
+                        </p:par>
+                      </p:childTnLst>
+                    </p:cTn>
+                  </p:par>
+                </p:childTnLst>
+              </p:cTn>
+              <p:prevCondLst>
+                <p:cond evt="onPrev" delay="0">
+                  <p:tgtEl>
+                    <p:sldTgt/>
+                  </p:tgtEl>
+                </p:cond>
+              </p:prevCondLst>
+              <p:nextCondLst>
+                <p:cond evt="onNext" delay="0">
+                  <p:tgtEl>
+                    <p:sldTgt/>
+                  </p:tgtEl>
+                </p:cond>
+              </p:nextCondLst>
+            </p:seq>
+          </p:childTnLst>
+        </p:cTn>
+      </p:par>
+    </p:tnLst>
+    <p:bldLst>
+      <p:bldP spid="233" grpId="0"/>
+    </p:bldLst>
+  </p:timing>
+</p:sld>
+</file>
+
+<file path=ppt/slides/slide24.xml><?xml version="1.0" encoding="utf-8"?>
+<p:sld xmlns:a="http://schemas.openxmlformats.org/drawingml/2006/main" xmlns:r="http://schemas.openxmlformats.org/officeDocument/2006/relationships" xmlns:p="http://schemas.openxmlformats.org/presentationml/2006/main">
+  <p:cSld>
+    <p:bg>
+      <p:bgPr>
+        <a:solidFill>
+          <a:srgbClr val="111316"/>
+        </a:solidFill>
+        <a:effectLst/>
+      </p:bgPr>
+    </p:bg>
+    <p:spTree>
+      <p:nvGrpSpPr>
+        <p:cNvPr id="1" name=""/>
+        <p:cNvGrpSpPr/>
+        <p:nvPr/>
+      </p:nvGrpSpPr>
+      <p:grpSpPr>
+        <a:xfrm>
+          <a:off x="0" y="0"/>
+          <a:ext cx="0" cy="0"/>
+          <a:chOff x="0" y="0"/>
+          <a:chExt cx="0" cy="0"/>
+        </a:xfrm>
+      </p:grpSpPr>
+      <p:sp>
+        <p:nvSpPr>
+          <p:cNvPr id="241" name="Kicker"/>
+          <p:cNvSpPr txBox="1"/>
+          <p:nvPr/>
+        </p:nvSpPr>
+        <p:spPr>
+          <a:xfrm>
+            <a:off x="900000" y="420000"/>
+            <a:ext cx="10000000" cy="420000"/>
+          </a:xfrm>
+          <a:prstGeom prst="rect">
+            <a:avLst/>
+          </a:prstGeom>
+          <a:noFill/>
+          <a:ln/>
+        </p:spPr>
+        <p:txBody>
+          <a:bodyPr wrap="square" rtlCol="0">
+            <a:normAutofit/>
+          </a:bodyPr>
+          <a:lstStyle/>
+          <a:p>
+            <a:pPr>
+              <a:buNone/>
+            </a:pPr>
+            <a:r>
+              <a:rPr lang="zh-CN" sz="1400" b="1" dirty="0">
+                <a:solidFill>
+                  <a:srgbClr val="C9A84C"/>
+                </a:solidFill>
+                <a:latin typeface="Helvetica Neue"/>
+                <a:ea typeface="Helvetica Neue"/>
+              </a:rPr>
               <a:t>竞争格局：通用平台强在算法，弱在污水厂设备语境</a:t>
             </a:r>
           </a:p>
@@ -3922,7 +7114,7 @@
       </p:sp>
       <p:graphicFrame>
         <p:nvGraphicFramePr>
-          <p:cNvPr id="183" name="Table"/>
+          <p:cNvPr id="243" name="Table"/>
           <p:cNvGraphicFramePr>
             <a:graphicFrameLocks noGrp="1"/>
           </p:cNvGraphicFramePr>
@@ -4364,7 +7556,7 @@
       </p:graphicFrame>
       <p:sp>
         <p:nvSpPr>
-          <p:cNvPr id="189" name="Page number"/>
+          <p:cNvPr id="249" name="Page number"/>
           <p:cNvSpPr txBox="1"/>
           <p:nvPr/>
         </p:nvSpPr>
@@ -4396,7 +7588,7 @@
                 <a:latin typeface="Helvetica Neue"/>
                 <a:ea typeface="Helvetica Neue"/>
               </a:rPr>
-              <a:t>18 / 27</a:t>
+              <a:t>24 / 36</a:t>
             </a:r>
           </a:p>
         </p:txBody>
@@ -4412,7 +7604,7 @@
 </p:sld>
 </file>
 
-<file path=ppt/slides/slide19.xml><?xml version="1.0" encoding="utf-8"?>
+<file path=ppt/slides/slide25.xml><?xml version="1.0" encoding="utf-8"?>
 <p:sld xmlns:a="http://schemas.openxmlformats.org/drawingml/2006/main" xmlns:r="http://schemas.openxmlformats.org/officeDocument/2006/relationships" xmlns:p="http://schemas.openxmlformats.org/presentationml/2006/main">
   <p:cSld>
     <p:bg>
@@ -4439,7 +7631,7 @@
       </p:grpSpPr>
       <p:sp>
         <p:nvSpPr>
-          <p:cNvPr id="191" name="Kicker"/>
+          <p:cNvPr id="251" name="Kicker"/>
           <p:cNvSpPr txBox="1"/>
           <p:nvPr/>
         </p:nvSpPr>
@@ -4471,14 +7663,14 @@
                 <a:latin typeface="Helvetica Neue"/>
                 <a:ea typeface="Helvetica Neue"/>
               </a:rPr>
-              <a:t>市场进入策略：一台设备、三个月、一份对照报告</a:t>
+              <a:t>项目竞争优势：四项别人不容易同时做到的</a:t>
             </a:r>
           </a:p>
         </p:txBody>
       </p:sp>
       <p:sp>
         <p:nvSpPr>
-          <p:cNvPr id="192" name="Title"/>
+          <p:cNvPr id="252" name="Title"/>
           <p:cNvSpPr txBox="1"/>
           <p:nvPr/>
         </p:nvSpPr>
@@ -4510,14 +7702,14 @@
                 <a:latin typeface="Georgia"/>
                 <a:ea typeface="Georgia"/>
               </a:rPr>
-              <a:t>市场进入策略：一台设备、三个月、一份对照报告</a:t>
+              <a:t>项目竞争优势：四项别人不容易同时做到的</a:t>
             </a:r>
           </a:p>
         </p:txBody>
       </p:sp>
       <p:sp>
         <p:nvSpPr>
-          <p:cNvPr id="193" name="Body"/>
+          <p:cNvPr id="253" name="Body"/>
           <p:cNvSpPr txBox="1"/>
           <p:nvPr/>
         </p:nvSpPr>
@@ -4550,7 +7742,7 @@
                 <a:latin typeface="Helvetica Neue"/>
                 <a:ea typeface="Helvetica Neue"/>
               </a:rPr>
-              <a:t>第一步：免费试点 1 台设备，出健康基线报告</a:t>
+              <a:t>机制把误报压下去（三层防误报，实测少 2.8 倍）</a:t>
             </a:r>
           </a:p>
           <a:p>
@@ -4566,7 +7758,7 @@
                 <a:latin typeface="Helvetica Neue"/>
                 <a:ea typeface="Helvetica Neue"/>
               </a:rPr>
-              <a:t>第二步：回放历史故障，给出提前量与误报数</a:t>
+              <a:t>设备级退化能被发现（整厂原始量检不出 → 比值量 9.8 天）</a:t>
             </a:r>
           </a:p>
           <a:p>
@@ -4582,7 +7774,7 @@
                 <a:latin typeface="Helvetica Neue"/>
                 <a:ea typeface="Helvetica Neue"/>
               </a:rPr>
-              <a:t>第三步：单厂多设备（鼓风机 / 脱水机 / 泵）</a:t>
+              <a:t>现场能自己接数据（工具 + 工作台 + 报告，数据不出厂）</a:t>
             </a:r>
           </a:p>
           <a:p>
@@ -4598,14 +7790,14 @@
                 <a:latin typeface="Helvetica Neue"/>
                 <a:ea typeface="Helvetica Neue"/>
               </a:rPr>
-              <a:t>渠道：水务集团技术部、设计院、设备厂商、大赛产业对接会</a:t>
+              <a:t>数字可核查（四轮独立复核 + 数字总检 30/30）</a:t>
             </a:r>
           </a:p>
         </p:txBody>
       </p:sp>
       <p:sp>
         <p:nvSpPr>
-          <p:cNvPr id="199" name="Page number"/>
+          <p:cNvPr id="259" name="Page number"/>
           <p:cNvSpPr txBox="1"/>
           <p:nvPr/>
         </p:nvSpPr>
@@ -4637,7 +7829,7 @@
                 <a:latin typeface="Helvetica Neue"/>
                 <a:ea typeface="Helvetica Neue"/>
               </a:rPr>
-              <a:t>19 / 27</a:t>
+              <a:t>25 / 36</a:t>
             </a:r>
           </a:p>
         </p:txBody>
@@ -4678,7 +7870,7 @@
                                     </p:stCondLst>
                                   </p:cTn>
                                   <p:tgtEl>
-                                    <p:spTgt spid="193"/>
+                                    <p:spTgt spid="253"/>
                                   </p:tgtEl>
                                   <p:attrNameLst>
                                     <p:attrName>style.visibility</p:attrName>
@@ -4714,7 +7906,7 @@
                                     </p:stCondLst>
                                   </p:cTn>
                                   <p:tgtEl>
-                                    <p:spTgt spid="193"/>
+                                    <p:spTgt spid="253"/>
                                   </p:tgtEl>
                                   <p:attrNameLst>
                                     <p:attrName>style.visibility</p:attrName>
@@ -4750,7 +7942,7 @@
                                     </p:stCondLst>
                                   </p:cTn>
                                   <p:tgtEl>
-                                    <p:spTgt spid="193"/>
+                                    <p:spTgt spid="253"/>
                                   </p:tgtEl>
                                   <p:attrNameLst>
                                     <p:attrName>style.visibility</p:attrName>
@@ -4786,7 +7978,7 @@
                                     </p:stCondLst>
                                   </p:cTn>
                                   <p:tgtEl>
-                                    <p:spTgt spid="193"/>
+                                    <p:spTgt spid="253"/>
                                   </p:tgtEl>
                                   <p:attrNameLst>
                                     <p:attrName>style.visibility</p:attrName>
@@ -4824,13 +8016,13 @@
       </p:par>
     </p:tnLst>
     <p:bldLst>
-      <p:bldP spid="193" grpId="0"/>
+      <p:bldP spid="253" grpId="0"/>
     </p:bldLst>
   </p:timing>
 </p:sld>
 </file>
 
-<file path=ppt/slides/slide2.xml><?xml version="1.0" encoding="utf-8"?>
+<file path=ppt/slides/slide26.xml><?xml version="1.0" encoding="utf-8"?>
 <p:sld xmlns:a="http://schemas.openxmlformats.org/drawingml/2006/main" xmlns:r="http://schemas.openxmlformats.org/officeDocument/2006/relationships" xmlns:p="http://schemas.openxmlformats.org/presentationml/2006/main">
   <p:cSld>
     <p:bg>
@@ -4857,7 +8049,7 @@
       </p:grpSpPr>
       <p:sp>
         <p:nvSpPr>
-          <p:cNvPr id="21" name="Kicker"/>
+          <p:cNvPr id="261" name="Kicker"/>
           <p:cNvSpPr txBox="1"/>
           <p:nvPr/>
         </p:nvSpPr>
@@ -4889,14 +8081,14 @@
                 <a:latin typeface="Helvetica Neue"/>
                 <a:ea typeface="Helvetica Neue"/>
               </a:rPr>
-              <a:t>目录</a:t>
+              <a:t>市场进入策略：一台设备、三个月、一份对照报告</a:t>
             </a:r>
           </a:p>
         </p:txBody>
       </p:sp>
       <p:sp>
         <p:nvSpPr>
-          <p:cNvPr id="22" name="Title"/>
+          <p:cNvPr id="262" name="Title"/>
           <p:cNvSpPr txBox="1"/>
           <p:nvPr/>
         </p:nvSpPr>
@@ -4928,14 +8120,14 @@
                 <a:latin typeface="Georgia"/>
                 <a:ea typeface="Georgia"/>
               </a:rPr>
-              <a:t>目录</a:t>
+              <a:t>市场进入策略：一台设备、三个月、一份对照报告</a:t>
             </a:r>
           </a:p>
         </p:txBody>
       </p:sp>
       <p:sp>
         <p:nvSpPr>
-          <p:cNvPr id="23" name="Body"/>
+          <p:cNvPr id="263" name="Body"/>
           <p:cNvSpPr txBox="1"/>
           <p:nvPr/>
         </p:nvSpPr>
@@ -4968,7 +8160,7 @@
                 <a:latin typeface="Helvetica Neue"/>
                 <a:ea typeface="Helvetica Neue"/>
               </a:rPr>
-              <a:t>项目概述</a:t>
+              <a:t>第一步：免费试点 1 台设备，出健康基线报告</a:t>
             </a:r>
           </a:p>
           <a:p>
@@ -4984,7 +8176,7 @@
                 <a:latin typeface="Helvetica Neue"/>
                 <a:ea typeface="Helvetica Neue"/>
               </a:rPr>
-              <a:t>产品与服务设计</a:t>
+              <a:t>第二步：回放历史故障，给出提前量与误报数</a:t>
             </a:r>
           </a:p>
           <a:p>
@@ -5000,7 +8192,7 @@
                 <a:latin typeface="Helvetica Neue"/>
                 <a:ea typeface="Helvetica Neue"/>
               </a:rPr>
-              <a:t>技术创新与证据</a:t>
+              <a:t>第三步：单厂多设备（鼓风机 / 脱水机 / 泵）</a:t>
             </a:r>
           </a:p>
           <a:p>
@@ -5016,78 +8208,14 @@
                 <a:latin typeface="Helvetica Neue"/>
                 <a:ea typeface="Helvetica Neue"/>
               </a:rPr>
-              <a:t>产品形态与使用方式</a:t>
-            </a:r>
-          </a:p>
-          <a:p>
-            <a:pPr marL="285750" indent="-285750">
-              <a:buFont typeface="Arial" panose="020B0604020202020204"/>
-              <a:buChar char="•"/>
-            </a:pPr>
-            <a:r>
-              <a:rPr lang="zh-CN" sz="2000" b="0" dirty="0">
-                <a:solidFill>
-                  <a:srgbClr val="F4EFE6"/>
-                </a:solidFill>
-                <a:latin typeface="Helvetica Neue"/>
-                <a:ea typeface="Helvetica Neue"/>
-              </a:rPr>
-              <a:t>行业背景与目标市场</a:t>
-            </a:r>
-          </a:p>
-          <a:p>
-            <a:pPr marL="285750" indent="-285750">
-              <a:buFont typeface="Arial" panose="020B0604020202020204"/>
-              <a:buChar char="•"/>
-            </a:pPr>
-            <a:r>
-              <a:rPr lang="zh-CN" sz="2000" b="0" dirty="0">
-                <a:solidFill>
-                  <a:srgbClr val="F4EFE6"/>
-                </a:solidFill>
-                <a:latin typeface="Helvetica Neue"/>
-                <a:ea typeface="Helvetica Neue"/>
-              </a:rPr>
-              <a:t>竞争格局与优势</a:t>
-            </a:r>
-          </a:p>
-          <a:p>
-            <a:pPr marL="285750" indent="-285750">
-              <a:buFont typeface="Arial" panose="020B0604020202020204"/>
-              <a:buChar char="•"/>
-            </a:pPr>
-            <a:r>
-              <a:rPr lang="zh-CN" sz="2000" b="0" dirty="0">
-                <a:solidFill>
-                  <a:srgbClr val="F4EFE6"/>
-                </a:solidFill>
-                <a:latin typeface="Helvetica Neue"/>
-                <a:ea typeface="Helvetica Neue"/>
-              </a:rPr>
-              <a:t>商业模式与财务</a:t>
-            </a:r>
-          </a:p>
-          <a:p>
-            <a:pPr marL="285750" indent="-285750">
-              <a:buFont typeface="Arial" panose="020B0604020202020204"/>
-              <a:buChar char="•"/>
-            </a:pPr>
-            <a:r>
-              <a:rPr lang="zh-CN" sz="2000" b="0" dirty="0">
-                <a:solidFill>
-                  <a:srgbClr val="F4EFE6"/>
-                </a:solidFill>
-                <a:latin typeface="Helvetica Neue"/>
-                <a:ea typeface="Helvetica Neue"/>
-              </a:rPr>
-              <a:t>实施计划与风险</a:t>
+              <a:t>渠道：水务集团技术部、设计院、设备厂商、大赛产业对接会</a:t>
             </a:r>
           </a:p>
         </p:txBody>
       </p:sp>
       <p:sp>
         <p:nvSpPr>
-          <p:cNvPr id="29" name="Page number"/>
+          <p:cNvPr id="269" name="Page number"/>
           <p:cNvSpPr txBox="1"/>
           <p:nvPr/>
         </p:nvSpPr>
@@ -5119,7 +8247,7 @@
                 <a:latin typeface="Helvetica Neue"/>
                 <a:ea typeface="Helvetica Neue"/>
               </a:rPr>
-              <a:t>02 / 27</a:t>
+              <a:t>26 / 36</a:t>
             </a:r>
           </a:p>
         </p:txBody>
@@ -5160,7 +8288,7 @@
                                     </p:stCondLst>
                                   </p:cTn>
                                   <p:tgtEl>
-                                    <p:spTgt spid="23"/>
+                                    <p:spTgt spid="263"/>
                                   </p:tgtEl>
                                   <p:attrNameLst>
                                     <p:attrName>style.visibility</p:attrName>
@@ -5196,7 +8324,7 @@
                                     </p:stCondLst>
                                   </p:cTn>
                                   <p:tgtEl>
-                                    <p:spTgt spid="23"/>
+                                    <p:spTgt spid="263"/>
                                   </p:tgtEl>
                                   <p:attrNameLst>
                                     <p:attrName>style.visibility</p:attrName>
@@ -5232,7 +8360,7 @@
                                     </p:stCondLst>
                                   </p:cTn>
                                   <p:tgtEl>
-                                    <p:spTgt spid="23"/>
+                                    <p:spTgt spid="263"/>
                                   </p:tgtEl>
                                   <p:attrNameLst>
                                     <p:attrName>style.visibility</p:attrName>
@@ -5268,151 +8396,7 @@
                                     </p:stCondLst>
                                   </p:cTn>
                                   <p:tgtEl>
-                                    <p:spTgt spid="23"/>
-                                  </p:tgtEl>
-                                  <p:attrNameLst>
-                                    <p:attrName>style.visibility</p:attrName>
-                                  </p:attrNameLst>
-                                </p:cBhvr>
-                                <p:to>
-                                  <p:strVal val="visible"/>
-                                </p:to>
-                              </p:set>
-                            </p:childTnLst>
-                          </p:cTn>
-                        </p:par>
-                      </p:childTnLst>
-                    </p:cTn>
-                  </p:par>
-                  <p:par>
-                    <p:cTn id="15" fill="hold">
-                      <p:stCondLst>
-                        <p:cond delay="indefinite"/>
-                      </p:stCondLst>
-                      <p:childTnLst>
-                        <p:par>
-                          <p:cTn id="16" presetID="1" presetClass="entr" presetSubtype="0" fill="hold" grpId="0" nodeType="clickEffect">
-                            <p:stCondLst>
-                              <p:cond delay="0"/>
-                            </p:stCondLst>
-                            <p:childTnLst>
-                              <p:set>
-                                <p:cBhvr>
-                                  <p:cTn id="17" dur="1" fill="hold">
-                                    <p:stCondLst>
-                                      <p:cond delay="0"/>
-                                    </p:stCondLst>
-                                  </p:cTn>
-                                  <p:tgtEl>
-                                    <p:spTgt spid="23"/>
-                                  </p:tgtEl>
-                                  <p:attrNameLst>
-                                    <p:attrName>style.visibility</p:attrName>
-                                  </p:attrNameLst>
-                                </p:cBhvr>
-                                <p:to>
-                                  <p:strVal val="visible"/>
-                                </p:to>
-                              </p:set>
-                            </p:childTnLst>
-                          </p:cTn>
-                        </p:par>
-                      </p:childTnLst>
-                    </p:cTn>
-                  </p:par>
-                  <p:par>
-                    <p:cTn id="18" fill="hold">
-                      <p:stCondLst>
-                        <p:cond delay="indefinite"/>
-                      </p:stCondLst>
-                      <p:childTnLst>
-                        <p:par>
-                          <p:cTn id="19" presetID="1" presetClass="entr" presetSubtype="0" fill="hold" grpId="0" nodeType="clickEffect">
-                            <p:stCondLst>
-                              <p:cond delay="0"/>
-                            </p:stCondLst>
-                            <p:childTnLst>
-                              <p:set>
-                                <p:cBhvr>
-                                  <p:cTn id="20" dur="1" fill="hold">
-                                    <p:stCondLst>
-                                      <p:cond delay="0"/>
-                                    </p:stCondLst>
-                                  </p:cTn>
-                                  <p:tgtEl>
-                                    <p:spTgt spid="23"/>
-                                  </p:tgtEl>
-                                  <p:attrNameLst>
-                                    <p:attrName>style.visibility</p:attrName>
-                                  </p:attrNameLst>
-                                </p:cBhvr>
-                                <p:to>
-                                  <p:strVal val="visible"/>
-                                </p:to>
-                              </p:set>
-                            </p:childTnLst>
-                          </p:cTn>
-                        </p:par>
-                      </p:childTnLst>
-                    </p:cTn>
-                  </p:par>
-                  <p:par>
-                    <p:cTn id="21" fill="hold">
-                      <p:stCondLst>
-                        <p:cond delay="indefinite"/>
-                      </p:stCondLst>
-                      <p:childTnLst>
-                        <p:par>
-                          <p:cTn id="22" presetID="1" presetClass="entr" presetSubtype="0" fill="hold" grpId="0" nodeType="clickEffect">
-                            <p:stCondLst>
-                              <p:cond delay="0"/>
-                            </p:stCondLst>
-                            <p:childTnLst>
-                              <p:set>
-                                <p:cBhvr>
-                                  <p:cTn id="23" dur="1" fill="hold">
-                                    <p:stCondLst>
-                                      <p:cond delay="0"/>
-                                    </p:stCondLst>
-                                  </p:cTn>
-                                  <p:tgtEl>
-                                    <p:spTgt spid="23"/>
-                                  </p:tgtEl>
-                                  <p:attrNameLst>
-                                    <p:attrName>style.visibility</p:attrName>
-                                  </p:attrNameLst>
-                                </p:cBhvr>
-                                <p:to>
-                                  <p:strVal val="visible"/>
-                                </p:to>
-                              </p:set>
-                            </p:childTnLst>
-                          </p:cTn>
-                        </p:par>
-                      </p:childTnLst>
-                    </p:cTn>
-                  </p:par>
-                  <p:par>
-                    <p:cTn id="24" fill="hold">
-                      <p:stCondLst>
-                        <p:cond delay="indefinite"/>
-                      </p:stCondLst>
-                      <p:childTnLst>
-                        <p:par>
-                          <p:cTn id="25" presetID="1" presetClass="entr" presetSubtype="0" fill="hold" grpId="0" nodeType="clickEffect">
-                            <p:stCondLst>
-                              <p:cond delay="0"/>
-                            </p:stCondLst>
-                            <p:childTnLst>
-                              <p:set>
-                                <p:cBhvr>
-                                  <p:cTn id="26" dur="1" fill="hold">
-                                    <p:stCondLst>
-                                      <p:cond delay="0"/>
-                                    </p:stCondLst>
-                                  </p:cTn>
-                                  <p:tgtEl>
-                                    <p:spTgt spid="23"/>
+                                    <p:spTgt spid="263"/>
                                   </p:tgtEl>
                                   <p:attrNameLst>
                                     <p:attrName>style.visibility</p:attrName>
@@ -5450,13 +8434,13 @@
       </p:par>
     </p:tnLst>
     <p:bldLst>
-      <p:bldP spid="23" grpId="0"/>
+      <p:bldP spid="263" grpId="0"/>
     </p:bldLst>
   </p:timing>
 </p:sld>
 </file>
 
-<file path=ppt/slides/slide20.xml><?xml version="1.0" encoding="utf-8"?>
+<file path=ppt/slides/slide27.xml><?xml version="1.0" encoding="utf-8"?>
 <p:sld xmlns:a="http://schemas.openxmlformats.org/drawingml/2006/main" xmlns:r="http://schemas.openxmlformats.org/officeDocument/2006/relationships" xmlns:p="http://schemas.openxmlformats.org/presentationml/2006/main">
   <p:cSld>
     <p:bg>
@@ -5483,7 +8467,7 @@
       </p:grpSpPr>
       <p:sp>
         <p:nvSpPr>
-          <p:cNvPr id="201" name="Kicker"/>
+          <p:cNvPr id="271" name="Kicker"/>
           <p:cNvSpPr txBox="1"/>
           <p:nvPr/>
         </p:nvSpPr>
@@ -5522,7 +8506,7 @@
       </p:sp>
       <p:sp>
         <p:nvSpPr>
-          <p:cNvPr id="202" name="Title"/>
+          <p:cNvPr id="272" name="Title"/>
           <p:cNvSpPr txBox="1"/>
           <p:nvPr/>
         </p:nvSpPr>
@@ -5561,7 +8545,7 @@
       </p:sp>
       <p:sp>
         <p:nvSpPr>
-          <p:cNvPr id="203" name="Body"/>
+          <p:cNvPr id="273" name="Body"/>
           <p:cNvSpPr txBox="1"/>
           <p:nvPr/>
         </p:nvSpPr>
@@ -5649,7 +8633,7 @@
       </p:sp>
       <p:sp>
         <p:nvSpPr>
-          <p:cNvPr id="209" name="Page number"/>
+          <p:cNvPr id="279" name="Page number"/>
           <p:cNvSpPr txBox="1"/>
           <p:nvPr/>
         </p:nvSpPr>
@@ -5681,7 +8665,7 @@
                 <a:latin typeface="Helvetica Neue"/>
                 <a:ea typeface="Helvetica Neue"/>
               </a:rPr>
-              <a:t>20 / 27</a:t>
+              <a:t>27 / 36</a:t>
             </a:r>
           </a:p>
         </p:txBody>
@@ -5722,7 +8706,7 @@
                                     </p:stCondLst>
                                   </p:cTn>
                                   <p:tgtEl>
-                                    <p:spTgt spid="203"/>
+                                    <p:spTgt spid="273"/>
                                   </p:tgtEl>
                                   <p:attrNameLst>
                                     <p:attrName>style.visibility</p:attrName>
@@ -5758,7 +8742,7 @@
                                     </p:stCondLst>
                                   </p:cTn>
                                   <p:tgtEl>
-                                    <p:spTgt spid="203"/>
+                                    <p:spTgt spid="273"/>
                                   </p:tgtEl>
                                   <p:attrNameLst>
                                     <p:attrName>style.visibility</p:attrName>
@@ -5794,7 +8778,7 @@
                                     </p:stCondLst>
                                   </p:cTn>
                                   <p:tgtEl>
-                                    <p:spTgt spid="203"/>
+                                    <p:spTgt spid="273"/>
                                   </p:tgtEl>
                                   <p:attrNameLst>
                                     <p:attrName>style.visibility</p:attrName>
@@ -5830,7 +8814,7 @@
                                     </p:stCondLst>
                                   </p:cTn>
                                   <p:tgtEl>
-                                    <p:spTgt spid="203"/>
+                                    <p:spTgt spid="273"/>
                                   </p:tgtEl>
                                   <p:attrNameLst>
                                     <p:attrName>style.visibility</p:attrName>
@@ -5868,13 +8852,13 @@
       </p:par>
     </p:tnLst>
     <p:bldLst>
-      <p:bldP spid="203" grpId="0"/>
+      <p:bldP spid="273" grpId="0"/>
     </p:bldLst>
   </p:timing>
 </p:sld>
 </file>
 
-<file path=ppt/slides/slide21.xml><?xml version="1.0" encoding="utf-8"?>
+<file path=ppt/slides/slide28.xml><?xml version="1.0" encoding="utf-8"?>
 <p:sld xmlns:a="http://schemas.openxmlformats.org/drawingml/2006/main" xmlns:r="http://schemas.openxmlformats.org/officeDocument/2006/relationships" xmlns:p="http://schemas.openxmlformats.org/presentationml/2006/main">
   <p:cSld>
     <p:bg>
@@ -5901,7 +8885,7 @@
       </p:grpSpPr>
       <p:sp>
         <p:nvSpPr>
-          <p:cNvPr id="211" name="Kicker"/>
+          <p:cNvPr id="281" name="Kicker"/>
           <p:cNvSpPr txBox="1"/>
           <p:nvPr/>
         </p:nvSpPr>
@@ -5940,7 +8924,7 @@
       </p:sp>
       <p:sp>
         <p:nvSpPr>
-          <p:cNvPr id="212" name="Title"/>
+          <p:cNvPr id="282" name="Title"/>
           <p:cNvSpPr txBox="1"/>
           <p:nvPr/>
         </p:nvSpPr>
@@ -5979,7 +8963,7 @@
       </p:sp>
       <p:sp>
         <p:nvSpPr>
-          <p:cNvPr id="213" name="Body"/>
+          <p:cNvPr id="283" name="Body"/>
           <p:cNvSpPr txBox="1"/>
           <p:nvPr/>
         </p:nvSpPr>
@@ -6067,7 +9051,7 @@
       </p:sp>
       <p:sp>
         <p:nvSpPr>
-          <p:cNvPr id="219" name="Page number"/>
+          <p:cNvPr id="289" name="Page number"/>
           <p:cNvSpPr txBox="1"/>
           <p:nvPr/>
         </p:nvSpPr>
@@ -6099,7 +9083,7 @@
                 <a:latin typeface="Helvetica Neue"/>
                 <a:ea typeface="Helvetica Neue"/>
               </a:rPr>
-              <a:t>21 / 27</a:t>
+              <a:t>28 / 36</a:t>
             </a:r>
           </a:p>
         </p:txBody>
@@ -6140,7 +9124,7 @@
                                     </p:stCondLst>
                                   </p:cTn>
                                   <p:tgtEl>
-                                    <p:spTgt spid="213"/>
+                                    <p:spTgt spid="283"/>
                                   </p:tgtEl>
                                   <p:attrNameLst>
                                     <p:attrName>style.visibility</p:attrName>
@@ -6176,7 +9160,7 @@
                                     </p:stCondLst>
                                   </p:cTn>
                                   <p:tgtEl>
-                                    <p:spTgt spid="213"/>
+                                    <p:spTgt spid="283"/>
                                   </p:tgtEl>
                                   <p:attrNameLst>
                                     <p:attrName>style.visibility</p:attrName>
@@ -6212,7 +9196,7 @@
                                     </p:stCondLst>
                                   </p:cTn>
                                   <p:tgtEl>
-                                    <p:spTgt spid="213"/>
+                                    <p:spTgt spid="283"/>
                                   </p:tgtEl>
                                   <p:attrNameLst>
                                     <p:attrName>style.visibility</p:attrName>
@@ -6248,7 +9232,7 @@
                                     </p:stCondLst>
                                   </p:cTn>
                                   <p:tgtEl>
-                                    <p:spTgt spid="213"/>
+                                    <p:spTgt spid="283"/>
                                   </p:tgtEl>
                                   <p:attrNameLst>
                                     <p:attrName>style.visibility</p:attrName>
@@ -6286,13 +9270,13 @@
       </p:par>
     </p:tnLst>
     <p:bldLst>
-      <p:bldP spid="213" grpId="0"/>
+      <p:bldP spid="283" grpId="0"/>
     </p:bldLst>
   </p:timing>
 </p:sld>
 </file>
 
-<file path=ppt/slides/slide22.xml><?xml version="1.0" encoding="utf-8"?>
+<file path=ppt/slides/slide29.xml><?xml version="1.0" encoding="utf-8"?>
 <p:sld xmlns:a="http://schemas.openxmlformats.org/drawingml/2006/main" xmlns:r="http://schemas.openxmlformats.org/officeDocument/2006/relationships" xmlns:p="http://schemas.openxmlformats.org/presentationml/2006/main">
   <p:cSld>
     <p:bg>
@@ -6319,7 +9303,7 @@
       </p:grpSpPr>
       <p:sp>
         <p:nvSpPr>
-          <p:cNvPr id="221" name="Kicker"/>
+          <p:cNvPr id="291" name="Kicker"/>
           <p:cNvSpPr txBox="1"/>
           <p:nvPr/>
         </p:nvSpPr>
@@ -6358,7 +9342,7 @@
       </p:sp>
       <p:sp>
         <p:nvSpPr>
-          <p:cNvPr id="222" name="Title"/>
+          <p:cNvPr id="292" name="Title"/>
           <p:cNvSpPr txBox="1"/>
           <p:nvPr/>
         </p:nvSpPr>
@@ -6397,7 +9381,7 @@
       </p:sp>
       <p:sp>
         <p:nvSpPr>
-          <p:cNvPr id="223" name="Body"/>
+          <p:cNvPr id="293" name="Body"/>
           <p:cNvSpPr txBox="1"/>
           <p:nvPr/>
         </p:nvSpPr>
@@ -6485,7 +9469,7 @@
       </p:sp>
       <p:sp>
         <p:nvSpPr>
-          <p:cNvPr id="229" name="Page number"/>
+          <p:cNvPr id="299" name="Page number"/>
           <p:cNvSpPr txBox="1"/>
           <p:nvPr/>
         </p:nvSpPr>
@@ -6517,7 +9501,7 @@
                 <a:latin typeface="Helvetica Neue"/>
                 <a:ea typeface="Helvetica Neue"/>
               </a:rPr>
-              <a:t>22 / 27</a:t>
+              <a:t>29 / 36</a:t>
             </a:r>
           </a:p>
         </p:txBody>
@@ -6558,7 +9542,7 @@
                                     </p:stCondLst>
                                   </p:cTn>
                                   <p:tgtEl>
-                                    <p:spTgt spid="223"/>
+                                    <p:spTgt spid="293"/>
                                   </p:tgtEl>
                                   <p:attrNameLst>
                                     <p:attrName>style.visibility</p:attrName>
@@ -6594,7 +9578,7 @@
                                     </p:stCondLst>
                                   </p:cTn>
                                   <p:tgtEl>
-                                    <p:spTgt spid="223"/>
+                                    <p:spTgt spid="293"/>
                                   </p:tgtEl>
                                   <p:attrNameLst>
                                     <p:attrName>style.visibility</p:attrName>
@@ -6630,7 +9614,7 @@
                                     </p:stCondLst>
                                   </p:cTn>
                                   <p:tgtEl>
-                                    <p:spTgt spid="223"/>
+                                    <p:spTgt spid="293"/>
                                   </p:tgtEl>
                                   <p:attrNameLst>
                                     <p:attrName>style.visibility</p:attrName>
@@ -6666,7 +9650,7 @@
                                     </p:stCondLst>
                                   </p:cTn>
                                   <p:tgtEl>
-                                    <p:spTgt spid="223"/>
+                                    <p:spTgt spid="293"/>
                                   </p:tgtEl>
                                   <p:attrNameLst>
                                     <p:attrName>style.visibility</p:attrName>
@@ -6704,13 +9688,13 @@
       </p:par>
     </p:tnLst>
     <p:bldLst>
-      <p:bldP spid="223" grpId="0"/>
+      <p:bldP spid="293" grpId="0"/>
     </p:bldLst>
   </p:timing>
 </p:sld>
 </file>
 
-<file path=ppt/slides/slide23.xml><?xml version="1.0" encoding="utf-8"?>
+<file path=ppt/slides/slide3.xml><?xml version="1.0" encoding="utf-8"?>
 <p:sld xmlns:a="http://schemas.openxmlformats.org/drawingml/2006/main" xmlns:r="http://schemas.openxmlformats.org/officeDocument/2006/relationships" xmlns:p="http://schemas.openxmlformats.org/presentationml/2006/main">
   <p:cSld>
     <p:bg>
@@ -6737,7 +9721,7 @@
       </p:grpSpPr>
       <p:sp>
         <p:nvSpPr>
-          <p:cNvPr id="231" name="Kicker"/>
+          <p:cNvPr id="31" name="Kicker"/>
           <p:cNvSpPr txBox="1"/>
           <p:nvPr/>
         </p:nvSpPr>
@@ -6769,6 +9753,424 @@
                 <a:latin typeface="Helvetica Neue"/>
                 <a:ea typeface="Helvetica Neue"/>
               </a:rPr>
+              <a:t>现状：关键设备仍是"坏了才修、到期就修"</a:t>
+            </a:r>
+          </a:p>
+        </p:txBody>
+      </p:sp>
+      <p:sp>
+        <p:nvSpPr>
+          <p:cNvPr id="32" name="Title"/>
+          <p:cNvSpPr txBox="1"/>
+          <p:nvPr/>
+        </p:nvSpPr>
+        <p:spPr>
+          <a:xfrm>
+            <a:off x="900000" y="920000"/>
+            <a:ext cx="10300000" cy="800000"/>
+          </a:xfrm>
+          <a:prstGeom prst="rect">
+            <a:avLst/>
+          </a:prstGeom>
+          <a:noFill/>
+          <a:ln/>
+        </p:spPr>
+        <p:txBody>
+          <a:bodyPr wrap="square" rtlCol="0">
+            <a:normAutofit/>
+          </a:bodyPr>
+          <a:lstStyle/>
+          <a:p>
+            <a:pPr>
+              <a:buNone/>
+            </a:pPr>
+            <a:r>
+              <a:rPr lang="zh-CN" sz="3400" b="1" dirty="0">
+                <a:solidFill>
+                  <a:srgbClr val="F4EFE6"/>
+                </a:solidFill>
+                <a:latin typeface="Georgia"/>
+                <a:ea typeface="Georgia"/>
+              </a:rPr>
+              <a:t>现状：关键设备仍是"坏了才修、到期就修"</a:t>
+            </a:r>
+          </a:p>
+        </p:txBody>
+      </p:sp>
+      <p:sp>
+        <p:nvSpPr>
+          <p:cNvPr id="33" name="Body"/>
+          <p:cNvSpPr txBox="1"/>
+          <p:nvPr/>
+        </p:nvSpPr>
+        <p:spPr>
+          <a:xfrm>
+            <a:off x="1050000" y="1850000"/>
+            <a:ext cx="10100000" cy="4500000"/>
+          </a:xfrm>
+          <a:prstGeom prst="rect">
+            <a:avLst/>
+          </a:prstGeom>
+          <a:noFill/>
+          <a:ln/>
+        </p:spPr>
+        <p:txBody>
+          <a:bodyPr wrap="square" rtlCol="0">
+            <a:normAutofit/>
+          </a:bodyPr>
+          <a:lstStyle/>
+          <a:p>
+            <a:pPr marL="285750" indent="-285750">
+              <a:buFont typeface="Arial" panose="020B0604020202020204"/>
+              <a:buChar char="•"/>
+            </a:pPr>
+            <a:r>
+              <a:rPr lang="zh-CN" sz="2000" b="0" dirty="0">
+                <a:solidFill>
+                  <a:srgbClr val="F4EFE6"/>
+                </a:solidFill>
+                <a:latin typeface="Helvetica Neue"/>
+                <a:ea typeface="Helvetica Neue"/>
+              </a:rPr>
+              <a:t>鼓风机、脱水机、泵：非计划停机代价高</a:t>
+            </a:r>
+          </a:p>
+          <a:p>
+            <a:pPr marL="285750" indent="-285750">
+              <a:buFont typeface="Arial" panose="020B0604020202020204"/>
+              <a:buChar char="•"/>
+            </a:pPr>
+            <a:r>
+              <a:rPr lang="zh-CN" sz="2000" b="0" dirty="0">
+                <a:solidFill>
+                  <a:srgbClr val="F4EFE6"/>
+                </a:solidFill>
+                <a:latin typeface="Helvetica Neue"/>
+                <a:ea typeface="Helvetica Neue"/>
+              </a:rPr>
+              <a:t>定期大修：备件与人工浪费在没坏的设备上</a:t>
+            </a:r>
+          </a:p>
+          <a:p>
+            <a:pPr marL="285750" indent="-285750">
+              <a:buFont typeface="Arial" panose="020B0604020202020204"/>
+              <a:buChar char="•"/>
+            </a:pPr>
+            <a:r>
+              <a:rPr lang="zh-CN" sz="2000" b="0" dirty="0">
+                <a:solidFill>
+                  <a:srgbClr val="F4EFE6"/>
+                </a:solidFill>
+                <a:latin typeface="Helvetica Neue"/>
+                <a:ea typeface="Helvetica Neue"/>
+              </a:rPr>
+              <a:t>电流、温度、压力、流量数据厂里本来就有</a:t>
+            </a:r>
+          </a:p>
+          <a:p>
+            <a:pPr marL="285750" indent="-285750">
+              <a:buFont typeface="Arial" panose="020B0604020202020204"/>
+              <a:buChar char="•"/>
+            </a:pPr>
+            <a:r>
+              <a:rPr lang="zh-CN" sz="2000" b="0" dirty="0">
+                <a:solidFill>
+                  <a:srgbClr val="F4EFE6"/>
+                </a:solidFill>
+                <a:latin typeface="Helvetica Neue"/>
+                <a:ea typeface="Helvetica Neue"/>
+              </a:rPr>
+              <a:t>缺的是"从数据看出设备在退化"的方法与工具</a:t>
+            </a:r>
+          </a:p>
+        </p:txBody>
+      </p:sp>
+      <p:sp>
+        <p:nvSpPr>
+          <p:cNvPr id="39" name="Page number"/>
+          <p:cNvSpPr txBox="1"/>
+          <p:nvPr/>
+        </p:nvSpPr>
+        <p:spPr>
+          <a:xfrm>
+            <a:off x="10600000" y="6250000"/>
+            <a:ext cx="1200000" cy="400000"/>
+          </a:xfrm>
+          <a:prstGeom prst="rect">
+            <a:avLst/>
+          </a:prstGeom>
+          <a:noFill/>
+          <a:ln/>
+        </p:spPr>
+        <p:txBody>
+          <a:bodyPr wrap="square" rtlCol="0">
+            <a:normAutofit/>
+          </a:bodyPr>
+          <a:lstStyle/>
+          <a:p>
+            <a:pPr algn="r">
+              <a:buNone/>
+            </a:pPr>
+            <a:r>
+              <a:rPr lang="zh-CN" sz="1000" b="0" dirty="0">
+                <a:solidFill>
+                  <a:srgbClr val="A79F91"/>
+                </a:solidFill>
+                <a:latin typeface="Helvetica Neue"/>
+                <a:ea typeface="Helvetica Neue"/>
+              </a:rPr>
+              <a:t>03 / 36</a:t>
+            </a:r>
+          </a:p>
+        </p:txBody>
+      </p:sp>
+    </p:spTree>
+  </p:cSld>
+  <p:clrMapOvr>
+    <a:overrideClrMapping bg1="lt1" tx1="dk1" bg2="lt2" tx2="dk2" accent1="accent1" accent2="accent2" accent3="accent3" accent4="accent4" accent5="accent5" accent6="accent6" hlink="hlink" folHlink="folHlink"/>
+  </p:clrMapOvr>
+  <p:transition spd="med">
+    <p:fade/>
+  </p:transition>
+  <p:timing>
+    <p:tnLst>
+      <p:par>
+        <p:cTn id="1" dur="indefinite" restart="never" nodeType="tmRoot">
+          <p:childTnLst>
+            <p:seq concurrent="1" nextAc="seek">
+              <p:cTn id="2" dur="indefinite" nodeType="mainSeq">
+                <p:childTnLst>
+                  <p:par>
+                    <p:cTn id="3" fill="hold">
+                      <p:stCondLst>
+                        <p:cond delay="indefinite"/>
+                      </p:stCondLst>
+                      <p:childTnLst>
+                        <p:par>
+                          <p:cTn id="4" presetID="1" presetClass="entr" presetSubtype="0" fill="hold" grpId="0" nodeType="clickEffect">
+                            <p:stCondLst>
+                              <p:cond delay="0"/>
+                            </p:stCondLst>
+                            <p:childTnLst>
+                              <p:set>
+                                <p:cBhvr>
+                                  <p:cTn id="5" dur="1" fill="hold">
+                                    <p:stCondLst>
+                                      <p:cond delay="0"/>
+                                    </p:stCondLst>
+                                  </p:cTn>
+                                  <p:tgtEl>
+                                    <p:spTgt spid="33"/>
+                                  </p:tgtEl>
+                                  <p:attrNameLst>
+                                    <p:attrName>style.visibility</p:attrName>
+                                  </p:attrNameLst>
+                                </p:cBhvr>
+                                <p:to>
+                                  <p:strVal val="visible"/>
+                                </p:to>
+                              </p:set>
+                            </p:childTnLst>
+                          </p:cTn>
+                        </p:par>
+                      </p:childTnLst>
+                    </p:cTn>
+                  </p:par>
+                  <p:par>
+                    <p:cTn id="6" fill="hold">
+                      <p:stCondLst>
+                        <p:cond delay="indefinite"/>
+                      </p:stCondLst>
+                      <p:childTnLst>
+                        <p:par>
+                          <p:cTn id="7" presetID="1" presetClass="entr" presetSubtype="0" fill="hold" grpId="0" nodeType="clickEffect">
+                            <p:stCondLst>
+                              <p:cond delay="0"/>
+                            </p:stCondLst>
+                            <p:childTnLst>
+                              <p:set>
+                                <p:cBhvr>
+                                  <p:cTn id="8" dur="1" fill="hold">
+                                    <p:stCondLst>
+                                      <p:cond delay="0"/>
+                                    </p:stCondLst>
+                                  </p:cTn>
+                                  <p:tgtEl>
+                                    <p:spTgt spid="33"/>
+                                  </p:tgtEl>
+                                  <p:attrNameLst>
+                                    <p:attrName>style.visibility</p:attrName>
+                                  </p:attrNameLst>
+                                </p:cBhvr>
+                                <p:to>
+                                  <p:strVal val="visible"/>
+                                </p:to>
+                              </p:set>
+                            </p:childTnLst>
+                          </p:cTn>
+                        </p:par>
+                      </p:childTnLst>
+                    </p:cTn>
+                  </p:par>
+                  <p:par>
+                    <p:cTn id="9" fill="hold">
+                      <p:stCondLst>
+                        <p:cond delay="indefinite"/>
+                      </p:stCondLst>
+                      <p:childTnLst>
+                        <p:par>
+                          <p:cTn id="10" presetID="1" presetClass="entr" presetSubtype="0" fill="hold" grpId="0" nodeType="clickEffect">
+                            <p:stCondLst>
+                              <p:cond delay="0"/>
+                            </p:stCondLst>
+                            <p:childTnLst>
+                              <p:set>
+                                <p:cBhvr>
+                                  <p:cTn id="11" dur="1" fill="hold">
+                                    <p:stCondLst>
+                                      <p:cond delay="0"/>
+                                    </p:stCondLst>
+                                  </p:cTn>
+                                  <p:tgtEl>
+                                    <p:spTgt spid="33"/>
+                                  </p:tgtEl>
+                                  <p:attrNameLst>
+                                    <p:attrName>style.visibility</p:attrName>
+                                  </p:attrNameLst>
+                                </p:cBhvr>
+                                <p:to>
+                                  <p:strVal val="visible"/>
+                                </p:to>
+                              </p:set>
+                            </p:childTnLst>
+                          </p:cTn>
+                        </p:par>
+                      </p:childTnLst>
+                    </p:cTn>
+                  </p:par>
+                  <p:par>
+                    <p:cTn id="12" fill="hold">
+                      <p:stCondLst>
+                        <p:cond delay="indefinite"/>
+                      </p:stCondLst>
+                      <p:childTnLst>
+                        <p:par>
+                          <p:cTn id="13" presetID="1" presetClass="entr" presetSubtype="0" fill="hold" grpId="0" nodeType="clickEffect">
+                            <p:stCondLst>
+                              <p:cond delay="0"/>
+                            </p:stCondLst>
+                            <p:childTnLst>
+                              <p:set>
+                                <p:cBhvr>
+                                  <p:cTn id="14" dur="1" fill="hold">
+                                    <p:stCondLst>
+                                      <p:cond delay="0"/>
+                                    </p:stCondLst>
+                                  </p:cTn>
+                                  <p:tgtEl>
+                                    <p:spTgt spid="33"/>
+                                  </p:tgtEl>
+                                  <p:attrNameLst>
+                                    <p:attrName>style.visibility</p:attrName>
+                                  </p:attrNameLst>
+                                </p:cBhvr>
+                                <p:to>
+                                  <p:strVal val="visible"/>
+                                </p:to>
+                              </p:set>
+                            </p:childTnLst>
+                          </p:cTn>
+                        </p:par>
+                      </p:childTnLst>
+                    </p:cTn>
+                  </p:par>
+                </p:childTnLst>
+              </p:cTn>
+              <p:prevCondLst>
+                <p:cond evt="onPrev" delay="0">
+                  <p:tgtEl>
+                    <p:sldTgt/>
+                  </p:tgtEl>
+                </p:cond>
+              </p:prevCondLst>
+              <p:nextCondLst>
+                <p:cond evt="onNext" delay="0">
+                  <p:tgtEl>
+                    <p:sldTgt/>
+                  </p:tgtEl>
+                </p:cond>
+              </p:nextCondLst>
+            </p:seq>
+          </p:childTnLst>
+        </p:cTn>
+      </p:par>
+    </p:tnLst>
+    <p:bldLst>
+      <p:bldP spid="33" grpId="0"/>
+    </p:bldLst>
+  </p:timing>
+</p:sld>
+</file>
+
+<file path=ppt/slides/slide30.xml><?xml version="1.0" encoding="utf-8"?>
+<p:sld xmlns:a="http://schemas.openxmlformats.org/drawingml/2006/main" xmlns:r="http://schemas.openxmlformats.org/officeDocument/2006/relationships" xmlns:p="http://schemas.openxmlformats.org/presentationml/2006/main">
+  <p:cSld>
+    <p:bg>
+      <p:bgPr>
+        <a:solidFill>
+          <a:srgbClr val="111316"/>
+        </a:solidFill>
+        <a:effectLst/>
+      </p:bgPr>
+    </p:bg>
+    <p:spTree>
+      <p:nvGrpSpPr>
+        <p:cNvPr id="1" name=""/>
+        <p:cNvGrpSpPr/>
+        <p:nvPr/>
+      </p:nvGrpSpPr>
+      <p:grpSpPr>
+        <a:xfrm>
+          <a:off x="0" y="0"/>
+          <a:ext cx="0" cy="0"/>
+          <a:chOff x="0" y="0"/>
+          <a:chExt cx="0" cy="0"/>
+        </a:xfrm>
+      </p:grpSpPr>
+      <p:sp>
+        <p:nvSpPr>
+          <p:cNvPr id="301" name="Kicker"/>
+          <p:cNvSpPr txBox="1"/>
+          <p:nvPr/>
+        </p:nvSpPr>
+        <p:spPr>
+          <a:xfrm>
+            <a:off x="900000" y="420000"/>
+            <a:ext cx="10000000" cy="420000"/>
+          </a:xfrm>
+          <a:prstGeom prst="rect">
+            <a:avLst/>
+          </a:prstGeom>
+          <a:noFill/>
+          <a:ln/>
+        </p:spPr>
+        <p:txBody>
+          <a:bodyPr wrap="square" rtlCol="0">
+            <a:normAutofit/>
+          </a:bodyPr>
+          <a:lstStyle/>
+          <a:p>
+            <a:pPr>
+              <a:buNone/>
+            </a:pPr>
+            <a:r>
+              <a:rPr lang="zh-CN" sz="1400" b="1" dirty="0">
+                <a:solidFill>
+                  <a:srgbClr val="C9A84C"/>
+                </a:solidFill>
+                <a:latin typeface="Helvetica Neue"/>
+                <a:ea typeface="Helvetica Neue"/>
+              </a:rPr>
               <a:t>风险与对策：风险都写在明处</a:t>
             </a:r>
           </a:p>
@@ -6776,7 +10178,7 @@
       </p:sp>
       <p:graphicFrame>
         <p:nvGraphicFramePr>
-          <p:cNvPr id="233" name="Table"/>
+          <p:cNvPr id="303" name="Table"/>
           <p:cNvGraphicFramePr>
             <a:graphicFrameLocks noGrp="1"/>
           </p:cNvGraphicFramePr>
@@ -7062,7 +10464,7 @@
       </p:graphicFrame>
       <p:sp>
         <p:nvSpPr>
-          <p:cNvPr id="239" name="Page number"/>
+          <p:cNvPr id="309" name="Page number"/>
           <p:cNvSpPr txBox="1"/>
           <p:nvPr/>
         </p:nvSpPr>
@@ -7094,7 +10496,7 @@
                 <a:latin typeface="Helvetica Neue"/>
                 <a:ea typeface="Helvetica Neue"/>
               </a:rPr>
-              <a:t>23 / 27</a:t>
+              <a:t>30 / 36</a:t>
             </a:r>
           </a:p>
         </p:txBody>
@@ -7110,7 +10512,7 @@
 </p:sld>
 </file>
 
-<file path=ppt/slides/slide24.xml><?xml version="1.0" encoding="utf-8"?>
+<file path=ppt/slides/slide31.xml><?xml version="1.0" encoding="utf-8"?>
 <p:sld xmlns:a="http://schemas.openxmlformats.org/drawingml/2006/main" xmlns:r="http://schemas.openxmlformats.org/officeDocument/2006/relationships" xmlns:p="http://schemas.openxmlformats.org/presentationml/2006/main">
   <p:cSld>
     <p:bg>
@@ -7137,7 +10539,7 @@
       </p:grpSpPr>
       <p:sp>
         <p:nvSpPr>
-          <p:cNvPr id="241" name="Kicker"/>
+          <p:cNvPr id="311" name="Kicker"/>
           <p:cNvSpPr txBox="1"/>
           <p:nvPr/>
         </p:nvSpPr>
@@ -7169,14 +10571,14 @@
                 <a:latin typeface="Helvetica Neue"/>
                 <a:ea typeface="Helvetica Neue"/>
               </a:rPr>
-              <a:t>团队：技术线已具备，正在补齐水务专业与指导老师</a:t>
+              <a:t>评委常问五问（应答预案）</a:t>
             </a:r>
           </a:p>
         </p:txBody>
       </p:sp>
       <p:sp>
         <p:nvSpPr>
-          <p:cNvPr id="242" name="Title"/>
+          <p:cNvPr id="312" name="Title"/>
           <p:cNvSpPr txBox="1"/>
           <p:nvPr/>
         </p:nvSpPr>
@@ -7208,14 +10610,14 @@
                 <a:latin typeface="Georgia"/>
                 <a:ea typeface="Georgia"/>
               </a:rPr>
-              <a:t>团队：技术线已具备，正在补齐水务专业与指导老师</a:t>
+              <a:t>评委常问五问（应答预案）</a:t>
             </a:r>
           </a:p>
         </p:txBody>
       </p:sp>
       <p:sp>
         <p:nvSpPr>
-          <p:cNvPr id="243" name="Body"/>
+          <p:cNvPr id="313" name="Body"/>
           <p:cNvSpPr txBox="1"/>
           <p:nvPr/>
         </p:nvSpPr>
@@ -7248,7 +10650,7 @@
                 <a:latin typeface="Helvetica Neue"/>
                 <a:ea typeface="Helvetica Neue"/>
               </a:rPr>
-              <a:t>负责人：（算法、工程、材料）</a:t>
+              <a:t>问：有真实污水厂数据吗？答：没有，正在申请；污水厂侧结论全部标注"仿真"</a:t>
             </a:r>
           </a:p>
           <a:p>
@@ -7264,7 +10666,7 @@
                 <a:latin typeface="Helvetica Neue"/>
                 <a:ea typeface="Helvetica Neue"/>
               </a:rPr>
-              <a:t>拟补：给排水 / 环境专业 1 人（把关专业说法）</a:t>
+              <a:t>问：能在别的厂复现吗？答：阈值按厂标定；工具支持多段与工况分层</a:t>
             </a:r>
           </a:p>
           <a:p>
@@ -7280,7 +10682,7 @@
                 <a:latin typeface="Helvetica Neue"/>
                 <a:ea typeface="Helvetica Neue"/>
               </a:rPr>
-              <a:t>拟补：市场与 PPT 1 人（市场与商业内容）</a:t>
+              <a:t>问：和现有算法比强在哪？答：机制层（双基线/条件化/对拍）+ 设备级比值</a:t>
             </a:r>
           </a:p>
           <a:p>
@@ -7296,14 +10698,30 @@
                 <a:latin typeface="Helvetica Neue"/>
                 <a:ea typeface="Helvetica Neue"/>
               </a:rPr>
-              <a:t>指导老师：；合作资源：高校实验室 + 大赛产业导师</a:t>
+              <a:t>问：能省多少钱？答：结构可算，金额待企业参数标定</a:t>
+            </a:r>
+          </a:p>
+          <a:p>
+            <a:pPr marL="285750" indent="-285750">
+              <a:buFont typeface="Arial" panose="020B0604020202020204"/>
+              <a:buChar char="•"/>
+            </a:pPr>
+            <a:r>
+              <a:rPr lang="zh-CN" sz="2000" b="0" dirty="0">
+                <a:solidFill>
+                  <a:srgbClr val="F4EFE6"/>
+                </a:solidFill>
+                <a:latin typeface="Helvetica Neue"/>
+                <a:ea typeface="Helvetica Neue"/>
+              </a:rPr>
+              <a:t>问：知识产权？答：软著在办；代码与文档可现场演示</a:t>
             </a:r>
           </a:p>
         </p:txBody>
       </p:sp>
       <p:sp>
         <p:nvSpPr>
-          <p:cNvPr id="249" name="Page number"/>
+          <p:cNvPr id="319" name="Page number"/>
           <p:cNvSpPr txBox="1"/>
           <p:nvPr/>
         </p:nvSpPr>
@@ -7335,7 +10753,7 @@
                 <a:latin typeface="Helvetica Neue"/>
                 <a:ea typeface="Helvetica Neue"/>
               </a:rPr>
-              <a:t>24 / 27</a:t>
+              <a:t>31 / 36</a:t>
             </a:r>
           </a:p>
         </p:txBody>
@@ -7376,7 +10794,7 @@
                                     </p:stCondLst>
                                   </p:cTn>
                                   <p:tgtEl>
-                                    <p:spTgt spid="243"/>
+                                    <p:spTgt spid="313"/>
                                   </p:tgtEl>
                                   <p:attrNameLst>
                                     <p:attrName>style.visibility</p:attrName>
@@ -7412,7 +10830,7 @@
                                     </p:stCondLst>
                                   </p:cTn>
                                   <p:tgtEl>
-                                    <p:spTgt spid="243"/>
+                                    <p:spTgt spid="313"/>
                                   </p:tgtEl>
                                   <p:attrNameLst>
                                     <p:attrName>style.visibility</p:attrName>
@@ -7448,7 +10866,7 @@
                                     </p:stCondLst>
                                   </p:cTn>
                                   <p:tgtEl>
-                                    <p:spTgt spid="243"/>
+                                    <p:spTgt spid="313"/>
                                   </p:tgtEl>
                                   <p:attrNameLst>
                                     <p:attrName>style.visibility</p:attrName>
@@ -7484,7 +10902,43 @@
                                     </p:stCondLst>
                                   </p:cTn>
                                   <p:tgtEl>
-                                    <p:spTgt spid="243"/>
+                                    <p:spTgt spid="313"/>
+                                  </p:tgtEl>
+                                  <p:attrNameLst>
+                                    <p:attrName>style.visibility</p:attrName>
+                                  </p:attrNameLst>
+                                </p:cBhvr>
+                                <p:to>
+                                  <p:strVal val="visible"/>
+                                </p:to>
+                              </p:set>
+                            </p:childTnLst>
+                          </p:cTn>
+                        </p:par>
+                      </p:childTnLst>
+                    </p:cTn>
+                  </p:par>
+                  <p:par>
+                    <p:cTn id="15" fill="hold">
+                      <p:stCondLst>
+                        <p:cond delay="indefinite"/>
+                      </p:stCondLst>
+                      <p:childTnLst>
+                        <p:par>
+                          <p:cTn id="16" presetID="1" presetClass="entr" presetSubtype="0" fill="hold" grpId="0" nodeType="clickEffect">
+                            <p:stCondLst>
+                              <p:cond delay="0"/>
+                            </p:stCondLst>
+                            <p:childTnLst>
+                              <p:set>
+                                <p:cBhvr>
+                                  <p:cTn id="17" dur="1" fill="hold">
+                                    <p:stCondLst>
+                                      <p:cond delay="0"/>
+                                    </p:stCondLst>
+                                  </p:cTn>
+                                  <p:tgtEl>
+                                    <p:spTgt spid="313"/>
                                   </p:tgtEl>
                                   <p:attrNameLst>
                                     <p:attrName>style.visibility</p:attrName>
@@ -7522,13 +10976,13 @@
       </p:par>
     </p:tnLst>
     <p:bldLst>
-      <p:bldP spid="243" grpId="0"/>
+      <p:bldP spid="313" grpId="0"/>
     </p:bldLst>
   </p:timing>
 </p:sld>
 </file>
 
-<file path=ppt/slides/slide25.xml><?xml version="1.0" encoding="utf-8"?>
+<file path=ppt/slides/slide32.xml><?xml version="1.0" encoding="utf-8"?>
 <p:sld xmlns:a="http://schemas.openxmlformats.org/drawingml/2006/main" xmlns:r="http://schemas.openxmlformats.org/officeDocument/2006/relationships" xmlns:p="http://schemas.openxmlformats.org/presentationml/2006/main">
   <p:cSld>
     <p:bg>
@@ -7555,7 +11009,7 @@
       </p:grpSpPr>
       <p:sp>
         <p:nvSpPr>
-          <p:cNvPr id="251" name="Kicker"/>
+          <p:cNvPr id="321" name="Kicker"/>
           <p:cNvSpPr txBox="1"/>
           <p:nvPr/>
         </p:nvSpPr>
@@ -7587,14 +11041,14 @@
                 <a:latin typeface="Helvetica Neue"/>
                 <a:ea typeface="Helvetica Neue"/>
               </a:rPr>
-              <a:t>附录：所有数字都能复现</a:t>
+              <a:t>团队：技术线已具备，正在补齐水务专业与指导老师</a:t>
             </a:r>
           </a:p>
         </p:txBody>
       </p:sp>
       <p:sp>
         <p:nvSpPr>
-          <p:cNvPr id="252" name="Title"/>
+          <p:cNvPr id="322" name="Title"/>
           <p:cNvSpPr txBox="1"/>
           <p:nvPr/>
         </p:nvSpPr>
@@ -7626,14 +11080,14 @@
                 <a:latin typeface="Georgia"/>
                 <a:ea typeface="Georgia"/>
               </a:rPr>
-              <a:t>附录：所有数字都能复现</a:t>
+              <a:t>团队：技术线已具备，正在补齐水务专业与指导老师</a:t>
             </a:r>
           </a:p>
         </p:txBody>
       </p:sp>
       <p:sp>
         <p:nvSpPr>
-          <p:cNvPr id="253" name="Body"/>
+          <p:cNvPr id="323" name="Body"/>
           <p:cNvSpPr txBox="1"/>
           <p:nvPr/>
         </p:nvSpPr>
@@ -7666,7 +11120,7 @@
                 <a:latin typeface="Helvetica Neue"/>
                 <a:ea typeface="Helvetica Neue"/>
               </a:rPr>
-              <a:t>线上演示：落地页 / 十节看板 / 交互式演示台 / 两份样例报告</a:t>
+              <a:t>负责人：（算法、工程、材料）</a:t>
             </a:r>
           </a:p>
           <a:p>
@@ -7682,7 +11136,7 @@
                 <a:latin typeface="Helvetica Neue"/>
                 <a:ea typeface="Helvetica Neue"/>
               </a:rPr>
-              <a:t>一键复现：run_all（快速 9 阶段 / 全量 39 阶段）</a:t>
+              <a:t>拟补：给排水 / 环境专业 1 人（把关专业说法）</a:t>
             </a:r>
           </a:p>
           <a:p>
@@ -7698,7 +11152,7 @@
                 <a:latin typeface="Helvetica Neue"/>
                 <a:ea typeface="Helvetica Neue"/>
               </a:rPr>
-              <a:t>口径与限定词清单：docs/08；技术细节与复核台账：PROJECT_STATE</a:t>
+              <a:t>拟补：市场与 PPT 1 人（市场与商业内容）</a:t>
             </a:r>
           </a:p>
           <a:p>
@@ -7714,14 +11168,14 @@
                 <a:latin typeface="Helvetica Neue"/>
                 <a:ea typeface="Helvetica Neue"/>
               </a:rPr>
-              <a:t>可引用数字均标注来源文件，仿真一律标"仿真"</a:t>
+              <a:t>指导老师：；合作资源：高校实验室 + 大赛产业导师</a:t>
             </a:r>
           </a:p>
         </p:txBody>
       </p:sp>
       <p:sp>
         <p:nvSpPr>
-          <p:cNvPr id="259" name="Page number"/>
+          <p:cNvPr id="329" name="Page number"/>
           <p:cNvSpPr txBox="1"/>
           <p:nvPr/>
         </p:nvSpPr>
@@ -7753,7 +11207,7 @@
                 <a:latin typeface="Helvetica Neue"/>
                 <a:ea typeface="Helvetica Neue"/>
               </a:rPr>
-              <a:t>25 / 27</a:t>
+              <a:t>32 / 36</a:t>
             </a:r>
           </a:p>
         </p:txBody>
@@ -7794,7 +11248,7 @@
                                     </p:stCondLst>
                                   </p:cTn>
                                   <p:tgtEl>
-                                    <p:spTgt spid="253"/>
+                                    <p:spTgt spid="323"/>
                                   </p:tgtEl>
                                   <p:attrNameLst>
                                     <p:attrName>style.visibility</p:attrName>
@@ -7830,7 +11284,7 @@
                                     </p:stCondLst>
                                   </p:cTn>
                                   <p:tgtEl>
-                                    <p:spTgt spid="253"/>
+                                    <p:spTgt spid="323"/>
                                   </p:tgtEl>
                                   <p:attrNameLst>
                                     <p:attrName>style.visibility</p:attrName>
@@ -7866,7 +11320,7 @@
                                     </p:stCondLst>
                                   </p:cTn>
                                   <p:tgtEl>
-                                    <p:spTgt spid="253"/>
+                                    <p:spTgt spid="323"/>
                                   </p:tgtEl>
                                   <p:attrNameLst>
                                     <p:attrName>style.visibility</p:attrName>
@@ -7902,7 +11356,7 @@
                                     </p:stCondLst>
                                   </p:cTn>
                                   <p:tgtEl>
-                                    <p:spTgt spid="253"/>
+                                    <p:spTgt spid="323"/>
                                   </p:tgtEl>
                                   <p:attrNameLst>
                                     <p:attrName>style.visibility</p:attrName>
@@ -7940,13 +11394,13 @@
       </p:par>
     </p:tnLst>
     <p:bldLst>
-      <p:bldP spid="253" grpId="0"/>
+      <p:bldP spid="323" grpId="0"/>
     </p:bldLst>
   </p:timing>
 </p:sld>
 </file>
 
-<file path=ppt/slides/slide26.xml><?xml version="1.0" encoding="utf-8"?>
+<file path=ppt/slides/slide33.xml><?xml version="1.0" encoding="utf-8"?>
 <p:sld xmlns:a="http://schemas.openxmlformats.org/drawingml/2006/main" xmlns:r="http://schemas.openxmlformats.org/officeDocument/2006/relationships" xmlns:p="http://schemas.openxmlformats.org/presentationml/2006/main">
   <p:cSld>
     <p:bg>
@@ -7973,7 +11427,7 @@
       </p:grpSpPr>
       <p:sp>
         <p:nvSpPr>
-          <p:cNvPr id="261" name="Kicker"/>
+          <p:cNvPr id="331" name="Kicker"/>
           <p:cNvSpPr txBox="1"/>
           <p:nvPr/>
         </p:nvSpPr>
@@ -8005,14 +11459,14 @@
                 <a:latin typeface="Helvetica Neue"/>
                 <a:ea typeface="Helvetica Neue"/>
               </a:rPr>
-              <a:t>谢谢——我们要的是一次试点机会</a:t>
+              <a:t>现场试点四步走：把"相信我们"变成"看数据"</a:t>
             </a:r>
           </a:p>
         </p:txBody>
       </p:sp>
       <p:sp>
         <p:nvSpPr>
-          <p:cNvPr id="262" name="Title"/>
+          <p:cNvPr id="332" name="Title"/>
           <p:cNvSpPr txBox="1"/>
           <p:nvPr/>
         </p:nvSpPr>
@@ -8044,14 +11498,14 @@
                 <a:latin typeface="Georgia"/>
                 <a:ea typeface="Georgia"/>
               </a:rPr>
-              <a:t>谢谢——我们要的是一次试点机会</a:t>
+              <a:t>现场试点四步走：把"相信我们"变成"看数据"</a:t>
             </a:r>
           </a:p>
         </p:txBody>
       </p:sp>
       <p:sp>
         <p:nvSpPr>
-          <p:cNvPr id="263" name="Body"/>
+          <p:cNvPr id="333" name="Body"/>
           <p:cNvSpPr txBox="1"/>
           <p:nvPr/>
         </p:nvSpPr>
@@ -8084,7 +11538,7 @@
                 <a:latin typeface="Helvetica Neue"/>
                 <a:ea typeface="Helvetica Neue"/>
               </a:rPr>
-              <a:t>不要"相信我们"，要一台设备、三个月、一份对照报告</a:t>
+              <a:t>第 1 步：选 1 台设备，取 ≥12 个月数据 + 检修台账</a:t>
             </a:r>
           </a:p>
           <a:p>
@@ -8100,7 +11554,7 @@
                 <a:latin typeface="Helvetica Neue"/>
                 <a:ea typeface="Helvetica Neue"/>
               </a:rPr>
-              <a:t>试点零成本：我们出工具、出报告，贵方只需提供历史数据与检修台账</a:t>
+              <a:t>第 2 步：用无故障健康段标定基线（工具告警参考窗趋势）</a:t>
             </a:r>
           </a:p>
           <a:p>
@@ -8116,14 +11570,30 @@
                 <a:latin typeface="Helvetica Neue"/>
                 <a:ea typeface="Helvetica Neue"/>
               </a:rPr>
-              <a:t>联系方式： ｜ ｜</a:t>
+              <a:t>第 3 步：用含故障历史段回放，算提前量与误报数</a:t>
+            </a:r>
+          </a:p>
+          <a:p>
+            <a:pPr marL="285750" indent="-285750">
+              <a:buFont typeface="Arial" panose="020B0604020202020204"/>
+              <a:buChar char="•"/>
+            </a:pPr>
+            <a:r>
+              <a:rPr lang="zh-CN" sz="2000" b="0" dirty="0">
+                <a:solidFill>
+                  <a:srgbClr val="F4EFE6"/>
+                </a:solidFill>
+                <a:latin typeface="Helvetica Neue"/>
+                <a:ea typeface="Helvetica Neue"/>
+              </a:rPr>
+              <a:t>第 4 步：在线运行 + 月度报告 + 季度复盘扩设备</a:t>
             </a:r>
           </a:p>
         </p:txBody>
       </p:sp>
       <p:sp>
         <p:nvSpPr>
-          <p:cNvPr id="269" name="Page number"/>
+          <p:cNvPr id="339" name="Page number"/>
           <p:cNvSpPr txBox="1"/>
           <p:nvPr/>
         </p:nvSpPr>
@@ -8155,7 +11625,7 @@
                 <a:latin typeface="Helvetica Neue"/>
                 <a:ea typeface="Helvetica Neue"/>
               </a:rPr>
-              <a:t>26 / 27</a:t>
+              <a:t>33 / 36</a:t>
             </a:r>
           </a:p>
         </p:txBody>
@@ -8196,7 +11666,7 @@
                                     </p:stCondLst>
                                   </p:cTn>
                                   <p:tgtEl>
-                                    <p:spTgt spid="263"/>
+                                    <p:spTgt spid="333"/>
                                   </p:tgtEl>
                                   <p:attrNameLst>
                                     <p:attrName>style.visibility</p:attrName>
@@ -8232,7 +11702,7 @@
                                     </p:stCondLst>
                                   </p:cTn>
                                   <p:tgtEl>
-                                    <p:spTgt spid="263"/>
+                                    <p:spTgt spid="333"/>
                                   </p:tgtEl>
                                   <p:attrNameLst>
                                     <p:attrName>style.visibility</p:attrName>
@@ -8268,7 +11738,43 @@
                                     </p:stCondLst>
                                   </p:cTn>
                                   <p:tgtEl>
-                                    <p:spTgt spid="263"/>
+                                    <p:spTgt spid="333"/>
+                                  </p:tgtEl>
+                                  <p:attrNameLst>
+                                    <p:attrName>style.visibility</p:attrName>
+                                  </p:attrNameLst>
+                                </p:cBhvr>
+                                <p:to>
+                                  <p:strVal val="visible"/>
+                                </p:to>
+                              </p:set>
+                            </p:childTnLst>
+                          </p:cTn>
+                        </p:par>
+                      </p:childTnLst>
+                    </p:cTn>
+                  </p:par>
+                  <p:par>
+                    <p:cTn id="12" fill="hold">
+                      <p:stCondLst>
+                        <p:cond delay="indefinite"/>
+                      </p:stCondLst>
+                      <p:childTnLst>
+                        <p:par>
+                          <p:cTn id="13" presetID="1" presetClass="entr" presetSubtype="0" fill="hold" grpId="0" nodeType="clickEffect">
+                            <p:stCondLst>
+                              <p:cond delay="0"/>
+                            </p:stCondLst>
+                            <p:childTnLst>
+                              <p:set>
+                                <p:cBhvr>
+                                  <p:cTn id="14" dur="1" fill="hold">
+                                    <p:stCondLst>
+                                      <p:cond delay="0"/>
+                                    </p:stCondLst>
+                                  </p:cTn>
+                                  <p:tgtEl>
+                                    <p:spTgt spid="333"/>
                                   </p:tgtEl>
                                   <p:attrNameLst>
                                     <p:attrName>style.visibility</p:attrName>
@@ -8306,13 +11812,13 @@
       </p:par>
     </p:tnLst>
     <p:bldLst>
-      <p:bldP spid="263" grpId="0"/>
+      <p:bldP spid="333" grpId="0"/>
     </p:bldLst>
   </p:timing>
 </p:sld>
 </file>
 
-<file path=ppt/slides/slide27.xml><?xml version="1.0" encoding="utf-8"?>
+<file path=ppt/slides/slide34.xml><?xml version="1.0" encoding="utf-8"?>
 <p:sld xmlns:a="http://schemas.openxmlformats.org/drawingml/2006/main" xmlns:r="http://schemas.openxmlformats.org/officeDocument/2006/relationships" xmlns:p="http://schemas.openxmlformats.org/presentationml/2006/main">
   <p:cSld>
     <p:bg>
@@ -8339,14 +11845,14 @@
       </p:grpSpPr>
       <p:sp>
         <p:nvSpPr>
-          <p:cNvPr id="271" name="Title"/>
+          <p:cNvPr id="341" name="Kicker"/>
           <p:cNvSpPr txBox="1"/>
           <p:nvPr/>
         </p:nvSpPr>
         <p:spPr>
           <a:xfrm>
-            <a:off x="1050000" y="2300000"/>
-            <a:ext cx="10200000" cy="1700000"/>
+            <a:off x="900000" y="420000"/>
+            <a:ext cx="10000000" cy="420000"/>
           </a:xfrm>
           <a:prstGeom prst="rect">
             <a:avLst/>
@@ -8360,32 +11866,32 @@
           </a:bodyPr>
           <a:lstStyle/>
           <a:p>
-            <a:pPr algn="ctr">
+            <a:pPr>
               <a:buNone/>
             </a:pPr>
             <a:r>
-              <a:rPr lang="zh-CN" sz="5200" b="1" dirty="0">
-                <a:solidFill>
-                  <a:srgbClr val="F4EFE6"/>
-                </a:solidFill>
-                <a:latin typeface="Georgia"/>
-                <a:ea typeface="Georgia"/>
-              </a:rPr>
-              <a:t>谢谢</a:t>
+              <a:rPr lang="zh-CN" sz="1400" b="1" dirty="0">
+                <a:solidFill>
+                  <a:srgbClr val="C9A84C"/>
+                </a:solidFill>
+                <a:latin typeface="Helvetica Neue"/>
+                <a:ea typeface="Helvetica Neue"/>
+              </a:rPr>
+              <a:t>附录：所有数字都能复现</a:t>
             </a:r>
           </a:p>
         </p:txBody>
       </p:sp>
       <p:sp>
         <p:nvSpPr>
-          <p:cNvPr id="272" name="Subtitle"/>
+          <p:cNvPr id="342" name="Title"/>
           <p:cNvSpPr txBox="1"/>
           <p:nvPr/>
         </p:nvSpPr>
         <p:spPr>
           <a:xfrm>
-            <a:off x="1050000" y="4200000"/>
-            <a:ext cx="10200000" cy="900000"/>
+            <a:off x="900000" y="920000"/>
+            <a:ext cx="10300000" cy="800000"/>
           </a:xfrm>
           <a:prstGeom prst="rect">
             <a:avLst/>
@@ -8399,25 +11905,113 @@
           </a:bodyPr>
           <a:lstStyle/>
           <a:p>
-            <a:pPr algn="ctr">
+            <a:pPr>
               <a:buNone/>
             </a:pPr>
             <a:r>
-              <a:rPr lang="zh-CN" sz="2000" b="1" dirty="0">
-                <a:solidFill>
-                  <a:srgbClr val="C9A84C"/>
-                </a:solidFill>
-                <a:latin typeface="Helvetica Neue"/>
-                <a:ea typeface="Helvetica Neue"/>
-              </a:rPr>
-              <a:t>澜脉 · 污水厂设备 AI 预测性维护系统</a:t>
+              <a:rPr lang="zh-CN" sz="3400" b="1" dirty="0">
+                <a:solidFill>
+                  <a:srgbClr val="F4EFE6"/>
+                </a:solidFill>
+                <a:latin typeface="Georgia"/>
+                <a:ea typeface="Georgia"/>
+              </a:rPr>
+              <a:t>附录：所有数字都能复现</a:t>
             </a:r>
           </a:p>
         </p:txBody>
       </p:sp>
       <p:sp>
         <p:nvSpPr>
-          <p:cNvPr id="279" name="Page number"/>
+          <p:cNvPr id="343" name="Body"/>
+          <p:cNvSpPr txBox="1"/>
+          <p:nvPr/>
+        </p:nvSpPr>
+        <p:spPr>
+          <a:xfrm>
+            <a:off x="1050000" y="1850000"/>
+            <a:ext cx="10100000" cy="4500000"/>
+          </a:xfrm>
+          <a:prstGeom prst="rect">
+            <a:avLst/>
+          </a:prstGeom>
+          <a:noFill/>
+          <a:ln/>
+        </p:spPr>
+        <p:txBody>
+          <a:bodyPr wrap="square" rtlCol="0">
+            <a:normAutofit/>
+          </a:bodyPr>
+          <a:lstStyle/>
+          <a:p>
+            <a:pPr marL="285750" indent="-285750">
+              <a:buFont typeface="Arial" panose="020B0604020202020204"/>
+              <a:buChar char="•"/>
+            </a:pPr>
+            <a:r>
+              <a:rPr lang="zh-CN" sz="2000" b="0" dirty="0">
+                <a:solidFill>
+                  <a:srgbClr val="F4EFE6"/>
+                </a:solidFill>
+                <a:latin typeface="Helvetica Neue"/>
+                <a:ea typeface="Helvetica Neue"/>
+              </a:rPr>
+              <a:t>线上演示：落地页 / 十节看板 / 交互式演示台 / 两份样例报告</a:t>
+            </a:r>
+          </a:p>
+          <a:p>
+            <a:pPr marL="285750" indent="-285750">
+              <a:buFont typeface="Arial" panose="020B0604020202020204"/>
+              <a:buChar char="•"/>
+            </a:pPr>
+            <a:r>
+              <a:rPr lang="zh-CN" sz="2000" b="0" dirty="0">
+                <a:solidFill>
+                  <a:srgbClr val="F4EFE6"/>
+                </a:solidFill>
+                <a:latin typeface="Helvetica Neue"/>
+                <a:ea typeface="Helvetica Neue"/>
+              </a:rPr>
+              <a:t>一键复现：run_all（快速 9 阶段 / 全量 39 阶段）</a:t>
+            </a:r>
+          </a:p>
+          <a:p>
+            <a:pPr marL="285750" indent="-285750">
+              <a:buFont typeface="Arial" panose="020B0604020202020204"/>
+              <a:buChar char="•"/>
+            </a:pPr>
+            <a:r>
+              <a:rPr lang="zh-CN" sz="2000" b="0" dirty="0">
+                <a:solidFill>
+                  <a:srgbClr val="F4EFE6"/>
+                </a:solidFill>
+                <a:latin typeface="Helvetica Neue"/>
+                <a:ea typeface="Helvetica Neue"/>
+              </a:rPr>
+              <a:t>说明书：deliverables/澜脉_项目说明书.html（38 张图）</a:t>
+            </a:r>
+          </a:p>
+          <a:p>
+            <a:pPr marL="285750" indent="-285750">
+              <a:buFont typeface="Arial" panose="020B0604020202020204"/>
+              <a:buChar char="•"/>
+            </a:pPr>
+            <a:r>
+              <a:rPr lang="zh-CN" sz="2000" b="0" dirty="0">
+                <a:solidFill>
+                  <a:srgbClr val="F4EFE6"/>
+                </a:solidFill>
+                <a:latin typeface="Helvetica Neue"/>
+                <a:ea typeface="Helvetica Neue"/>
+              </a:rPr>
+              <a:t>口径与限定词：docs/08；技术细节与复核台账：PROJECT_STATE</a:t>
+            </a:r>
+          </a:p>
+        </p:txBody>
+      </p:sp>
+      <p:sp>
+        <p:nvSpPr>
+          <p:cNvPr id="349" name="Page number"/>
           <p:cNvSpPr txBox="1"/>
           <p:nvPr/>
         </p:nvSpPr>
@@ -8449,7 +12043,7 @@
                 <a:latin typeface="Helvetica Neue"/>
                 <a:ea typeface="Helvetica Neue"/>
               </a:rPr>
-              <a:t>27 / 27</a:t>
+              <a:t>34 / 36</a:t>
             </a:r>
           </a:p>
         </p:txBody>
@@ -8462,10 +12056,187 @@
   <p:transition spd="med">
     <p:fade/>
   </p:transition>
+  <p:timing>
+    <p:tnLst>
+      <p:par>
+        <p:cTn id="1" dur="indefinite" restart="never" nodeType="tmRoot">
+          <p:childTnLst>
+            <p:seq concurrent="1" nextAc="seek">
+              <p:cTn id="2" dur="indefinite" nodeType="mainSeq">
+                <p:childTnLst>
+                  <p:par>
+                    <p:cTn id="3" fill="hold">
+                      <p:stCondLst>
+                        <p:cond delay="indefinite"/>
+                      </p:stCondLst>
+                      <p:childTnLst>
+                        <p:par>
+                          <p:cTn id="4" presetID="1" presetClass="entr" presetSubtype="0" fill="hold" grpId="0" nodeType="clickEffect">
+                            <p:stCondLst>
+                              <p:cond delay="0"/>
+                            </p:stCondLst>
+                            <p:childTnLst>
+                              <p:set>
+                                <p:cBhvr>
+                                  <p:cTn id="5" dur="1" fill="hold">
+                                    <p:stCondLst>
+                                      <p:cond delay="0"/>
+                                    </p:stCondLst>
+                                  </p:cTn>
+                                  <p:tgtEl>
+                                    <p:spTgt spid="343"/>
+                                  </p:tgtEl>
+                                  <p:attrNameLst>
+                                    <p:attrName>style.visibility</p:attrName>
+                                  </p:attrNameLst>
+                                </p:cBhvr>
+                                <p:to>
+                                  <p:strVal val="visible"/>
+                                </p:to>
+                              </p:set>
+                            </p:childTnLst>
+                          </p:cTn>
+                        </p:par>
+                      </p:childTnLst>
+                    </p:cTn>
+                  </p:par>
+                  <p:par>
+                    <p:cTn id="6" fill="hold">
+                      <p:stCondLst>
+                        <p:cond delay="indefinite"/>
+                      </p:stCondLst>
+                      <p:childTnLst>
+                        <p:par>
+                          <p:cTn id="7" presetID="1" presetClass="entr" presetSubtype="0" fill="hold" grpId="0" nodeType="clickEffect">
+                            <p:stCondLst>
+                              <p:cond delay="0"/>
+                            </p:stCondLst>
+                            <p:childTnLst>
+                              <p:set>
+                                <p:cBhvr>
+                                  <p:cTn id="8" dur="1" fill="hold">
+                                    <p:stCondLst>
+                                      <p:cond delay="0"/>
+                                    </p:stCondLst>
+                                  </p:cTn>
+                                  <p:tgtEl>
+                                    <p:spTgt spid="343"/>
+                                  </p:tgtEl>
+                                  <p:attrNameLst>
+                                    <p:attrName>style.visibility</p:attrName>
+                                  </p:attrNameLst>
+                                </p:cBhvr>
+                                <p:to>
+                                  <p:strVal val="visible"/>
+                                </p:to>
+                              </p:set>
+                            </p:childTnLst>
+                          </p:cTn>
+                        </p:par>
+                      </p:childTnLst>
+                    </p:cTn>
+                  </p:par>
+                  <p:par>
+                    <p:cTn id="9" fill="hold">
+                      <p:stCondLst>
+                        <p:cond delay="indefinite"/>
+                      </p:stCondLst>
+                      <p:childTnLst>
+                        <p:par>
+                          <p:cTn id="10" presetID="1" presetClass="entr" presetSubtype="0" fill="hold" grpId="0" nodeType="clickEffect">
+                            <p:stCondLst>
+                              <p:cond delay="0"/>
+                            </p:stCondLst>
+                            <p:childTnLst>
+                              <p:set>
+                                <p:cBhvr>
+                                  <p:cTn id="11" dur="1" fill="hold">
+                                    <p:stCondLst>
+                                      <p:cond delay="0"/>
+                                    </p:stCondLst>
+                                  </p:cTn>
+                                  <p:tgtEl>
+                                    <p:spTgt spid="343"/>
+                                  </p:tgtEl>
+                                  <p:attrNameLst>
+                                    <p:attrName>style.visibility</p:attrName>
+                                  </p:attrNameLst>
+                                </p:cBhvr>
+                                <p:to>
+                                  <p:strVal val="visible"/>
+                                </p:to>
+                              </p:set>
+                            </p:childTnLst>
+                          </p:cTn>
+                        </p:par>
+                      </p:childTnLst>
+                    </p:cTn>
+                  </p:par>
+                  <p:par>
+                    <p:cTn id="12" fill="hold">
+                      <p:stCondLst>
+                        <p:cond delay="indefinite"/>
+                      </p:stCondLst>
+                      <p:childTnLst>
+                        <p:par>
+                          <p:cTn id="13" presetID="1" presetClass="entr" presetSubtype="0" fill="hold" grpId="0" nodeType="clickEffect">
+                            <p:stCondLst>
+                              <p:cond delay="0"/>
+                            </p:stCondLst>
+                            <p:childTnLst>
+                              <p:set>
+                                <p:cBhvr>
+                                  <p:cTn id="14" dur="1" fill="hold">
+                                    <p:stCondLst>
+                                      <p:cond delay="0"/>
+                                    </p:stCondLst>
+                                  </p:cTn>
+                                  <p:tgtEl>
+                                    <p:spTgt spid="343"/>
+                                  </p:tgtEl>
+                                  <p:attrNameLst>
+                                    <p:attrName>style.visibility</p:attrName>
+                                  </p:attrNameLst>
+                                </p:cBhvr>
+                                <p:to>
+                                  <p:strVal val="visible"/>
+                                </p:to>
+                              </p:set>
+                            </p:childTnLst>
+                          </p:cTn>
+                        </p:par>
+                      </p:childTnLst>
+                    </p:cTn>
+                  </p:par>
+                </p:childTnLst>
+              </p:cTn>
+              <p:prevCondLst>
+                <p:cond evt="onPrev" delay="0">
+                  <p:tgtEl>
+                    <p:sldTgt/>
+                  </p:tgtEl>
+                </p:cond>
+              </p:prevCondLst>
+              <p:nextCondLst>
+                <p:cond evt="onNext" delay="0">
+                  <p:tgtEl>
+                    <p:sldTgt/>
+                  </p:tgtEl>
+                </p:cond>
+              </p:nextCondLst>
+            </p:seq>
+          </p:childTnLst>
+        </p:cTn>
+      </p:par>
+    </p:tnLst>
+    <p:bldLst>
+      <p:bldP spid="343" grpId="0"/>
+    </p:bldLst>
+  </p:timing>
 </p:sld>
 </file>
 
-<file path=ppt/slides/slide3.xml><?xml version="1.0" encoding="utf-8"?>
+<file path=ppt/slides/slide35.xml><?xml version="1.0" encoding="utf-8"?>
 <p:sld xmlns:a="http://schemas.openxmlformats.org/drawingml/2006/main" xmlns:r="http://schemas.openxmlformats.org/officeDocument/2006/relationships" xmlns:p="http://schemas.openxmlformats.org/presentationml/2006/main">
   <p:cSld>
     <p:bg>
@@ -8492,7 +12263,7 @@
       </p:grpSpPr>
       <p:sp>
         <p:nvSpPr>
-          <p:cNvPr id="31" name="Kicker"/>
+          <p:cNvPr id="351" name="Kicker"/>
           <p:cNvSpPr txBox="1"/>
           <p:nvPr/>
         </p:nvSpPr>
@@ -8524,14 +12295,14 @@
                 <a:latin typeface="Helvetica Neue"/>
                 <a:ea typeface="Helvetica Neue"/>
               </a:rPr>
-              <a:t>目录（续）</a:t>
+              <a:t>谢谢——我们要的是一次试点机会</a:t>
             </a:r>
           </a:p>
         </p:txBody>
       </p:sp>
       <p:sp>
         <p:nvSpPr>
-          <p:cNvPr id="32" name="Title"/>
+          <p:cNvPr id="352" name="Title"/>
           <p:cNvSpPr txBox="1"/>
           <p:nvPr/>
         </p:nvSpPr>
@@ -8563,14 +12334,14 @@
                 <a:latin typeface="Georgia"/>
                 <a:ea typeface="Georgia"/>
               </a:rPr>
-              <a:t>目录（续）</a:t>
+              <a:t>谢谢——我们要的是一次试点机会</a:t>
             </a:r>
           </a:p>
         </p:txBody>
       </p:sp>
       <p:sp>
         <p:nvSpPr>
-          <p:cNvPr id="33" name="Body"/>
+          <p:cNvPr id="353" name="Body"/>
           <p:cNvSpPr txBox="1"/>
           <p:nvPr/>
         </p:nvSpPr>
@@ -8603,14 +12374,46 @@
                 <a:latin typeface="Helvetica Neue"/>
                 <a:ea typeface="Helvetica Neue"/>
               </a:rPr>
-              <a:t>团队与附录</a:t>
+              <a:t>不要"相信我们"，要一台设备、三个月、一份对照报告</a:t>
+            </a:r>
+          </a:p>
+          <a:p>
+            <a:pPr marL="285750" indent="-285750">
+              <a:buFont typeface="Arial" panose="020B0604020202020204"/>
+              <a:buChar char="•"/>
+            </a:pPr>
+            <a:r>
+              <a:rPr lang="zh-CN" sz="2000" b="0" dirty="0">
+                <a:solidFill>
+                  <a:srgbClr val="F4EFE6"/>
+                </a:solidFill>
+                <a:latin typeface="Helvetica Neue"/>
+                <a:ea typeface="Helvetica Neue"/>
+              </a:rPr>
+              <a:t>试点零成本：我们出工具、出报告，贵方只需提供历史数据与检修台账</a:t>
+            </a:r>
+          </a:p>
+          <a:p>
+            <a:pPr marL="285750" indent="-285750">
+              <a:buFont typeface="Arial" panose="020B0604020202020204"/>
+              <a:buChar char="•"/>
+            </a:pPr>
+            <a:r>
+              <a:rPr lang="zh-CN" sz="2000" b="0" dirty="0">
+                <a:solidFill>
+                  <a:srgbClr val="F4EFE6"/>
+                </a:solidFill>
+                <a:latin typeface="Helvetica Neue"/>
+                <a:ea typeface="Helvetica Neue"/>
+              </a:rPr>
+              <a:t>联系方式： ｜ ｜</a:t>
             </a:r>
           </a:p>
         </p:txBody>
       </p:sp>
       <p:sp>
         <p:nvSpPr>
-          <p:cNvPr id="39" name="Page number"/>
+          <p:cNvPr id="359" name="Page number"/>
           <p:cNvSpPr txBox="1"/>
           <p:nvPr/>
         </p:nvSpPr>
@@ -8642,7 +12445,7 @@
                 <a:latin typeface="Helvetica Neue"/>
                 <a:ea typeface="Helvetica Neue"/>
               </a:rPr>
-              <a:t>03 / 27</a:t>
+              <a:t>35 / 36</a:t>
             </a:r>
           </a:p>
         </p:txBody>
@@ -8655,6 +12458,528 @@
   <p:transition spd="med">
     <p:fade/>
   </p:transition>
+  <p:timing>
+    <p:tnLst>
+      <p:par>
+        <p:cTn id="1" dur="indefinite" restart="never" nodeType="tmRoot">
+          <p:childTnLst>
+            <p:seq concurrent="1" nextAc="seek">
+              <p:cTn id="2" dur="indefinite" nodeType="mainSeq">
+                <p:childTnLst>
+                  <p:par>
+                    <p:cTn id="3" fill="hold">
+                      <p:stCondLst>
+                        <p:cond delay="indefinite"/>
+                      </p:stCondLst>
+                      <p:childTnLst>
+                        <p:par>
+                          <p:cTn id="4" presetID="1" presetClass="entr" presetSubtype="0" fill="hold" grpId="0" nodeType="clickEffect">
+                            <p:stCondLst>
+                              <p:cond delay="0"/>
+                            </p:stCondLst>
+                            <p:childTnLst>
+                              <p:set>
+                                <p:cBhvr>
+                                  <p:cTn id="5" dur="1" fill="hold">
+                                    <p:stCondLst>
+                                      <p:cond delay="0"/>
+                                    </p:stCondLst>
+                                  </p:cTn>
+                                  <p:tgtEl>
+                                    <p:spTgt spid="353"/>
+                                  </p:tgtEl>
+                                  <p:attrNameLst>
+                                    <p:attrName>style.visibility</p:attrName>
+                                  </p:attrNameLst>
+                                </p:cBhvr>
+                                <p:to>
+                                  <p:strVal val="visible"/>
+                                </p:to>
+                              </p:set>
+                            </p:childTnLst>
+                          </p:cTn>
+                        </p:par>
+                      </p:childTnLst>
+                    </p:cTn>
+                  </p:par>
+                  <p:par>
+                    <p:cTn id="6" fill="hold">
+                      <p:stCondLst>
+                        <p:cond delay="indefinite"/>
+                      </p:stCondLst>
+                      <p:childTnLst>
+                        <p:par>
+                          <p:cTn id="7" presetID="1" presetClass="entr" presetSubtype="0" fill="hold" grpId="0" nodeType="clickEffect">
+                            <p:stCondLst>
+                              <p:cond delay="0"/>
+                            </p:stCondLst>
+                            <p:childTnLst>
+                              <p:set>
+                                <p:cBhvr>
+                                  <p:cTn id="8" dur="1" fill="hold">
+                                    <p:stCondLst>
+                                      <p:cond delay="0"/>
+                                    </p:stCondLst>
+                                  </p:cTn>
+                                  <p:tgtEl>
+                                    <p:spTgt spid="353"/>
+                                  </p:tgtEl>
+                                  <p:attrNameLst>
+                                    <p:attrName>style.visibility</p:attrName>
+                                  </p:attrNameLst>
+                                </p:cBhvr>
+                                <p:to>
+                                  <p:strVal val="visible"/>
+                                </p:to>
+                              </p:set>
+                            </p:childTnLst>
+                          </p:cTn>
+                        </p:par>
+                      </p:childTnLst>
+                    </p:cTn>
+                  </p:par>
+                  <p:par>
+                    <p:cTn id="9" fill="hold">
+                      <p:stCondLst>
+                        <p:cond delay="indefinite"/>
+                      </p:stCondLst>
+                      <p:childTnLst>
+                        <p:par>
+                          <p:cTn id="10" presetID="1" presetClass="entr" presetSubtype="0" fill="hold" grpId="0" nodeType="clickEffect">
+                            <p:stCondLst>
+                              <p:cond delay="0"/>
+                            </p:stCondLst>
+                            <p:childTnLst>
+                              <p:set>
+                                <p:cBhvr>
+                                  <p:cTn id="11" dur="1" fill="hold">
+                                    <p:stCondLst>
+                                      <p:cond delay="0"/>
+                                    </p:stCondLst>
+                                  </p:cTn>
+                                  <p:tgtEl>
+                                    <p:spTgt spid="353"/>
+                                  </p:tgtEl>
+                                  <p:attrNameLst>
+                                    <p:attrName>style.visibility</p:attrName>
+                                  </p:attrNameLst>
+                                </p:cBhvr>
+                                <p:to>
+                                  <p:strVal val="visible"/>
+                                </p:to>
+                              </p:set>
+                            </p:childTnLst>
+                          </p:cTn>
+                        </p:par>
+                      </p:childTnLst>
+                    </p:cTn>
+                  </p:par>
+                </p:childTnLst>
+              </p:cTn>
+              <p:prevCondLst>
+                <p:cond evt="onPrev" delay="0">
+                  <p:tgtEl>
+                    <p:sldTgt/>
+                  </p:tgtEl>
+                </p:cond>
+              </p:prevCondLst>
+              <p:nextCondLst>
+                <p:cond evt="onNext" delay="0">
+                  <p:tgtEl>
+                    <p:sldTgt/>
+                  </p:tgtEl>
+                </p:cond>
+              </p:nextCondLst>
+            </p:seq>
+          </p:childTnLst>
+        </p:cTn>
+      </p:par>
+    </p:tnLst>
+    <p:bldLst>
+      <p:bldP spid="353" grpId="0"/>
+    </p:bldLst>
+  </p:timing>
+</p:sld>
+</file>
+
+<file path=ppt/slides/slide36.xml><?xml version="1.0" encoding="utf-8"?>
+<p:sld xmlns:a="http://schemas.openxmlformats.org/drawingml/2006/main" xmlns:r="http://schemas.openxmlformats.org/officeDocument/2006/relationships" xmlns:p="http://schemas.openxmlformats.org/presentationml/2006/main">
+  <p:cSld>
+    <p:bg>
+      <p:bgPr>
+        <a:solidFill>
+          <a:srgbClr val="111316"/>
+        </a:solidFill>
+        <a:effectLst/>
+      </p:bgPr>
+    </p:bg>
+    <p:spTree>
+      <p:nvGrpSpPr>
+        <p:cNvPr id="1" name=""/>
+        <p:cNvGrpSpPr/>
+        <p:nvPr/>
+      </p:nvGrpSpPr>
+      <p:grpSpPr>
+        <a:xfrm>
+          <a:off x="0" y="0"/>
+          <a:ext cx="0" cy="0"/>
+          <a:chOff x="0" y="0"/>
+          <a:chExt cx="0" cy="0"/>
+        </a:xfrm>
+      </p:grpSpPr>
+      <p:sp>
+        <p:nvSpPr>
+          <p:cNvPr id="361" name="Title"/>
+          <p:cNvSpPr txBox="1"/>
+          <p:nvPr/>
+        </p:nvSpPr>
+        <p:spPr>
+          <a:xfrm>
+            <a:off x="1050000" y="2300000"/>
+            <a:ext cx="10200000" cy="1700000"/>
+          </a:xfrm>
+          <a:prstGeom prst="rect">
+            <a:avLst/>
+          </a:prstGeom>
+          <a:noFill/>
+          <a:ln/>
+        </p:spPr>
+        <p:txBody>
+          <a:bodyPr wrap="square" rtlCol="0">
+            <a:normAutofit/>
+          </a:bodyPr>
+          <a:lstStyle/>
+          <a:p>
+            <a:pPr algn="ctr">
+              <a:buNone/>
+            </a:pPr>
+            <a:r>
+              <a:rPr lang="zh-CN" sz="5200" b="1" dirty="0">
+                <a:solidFill>
+                  <a:srgbClr val="F4EFE6"/>
+                </a:solidFill>
+                <a:latin typeface="Georgia"/>
+                <a:ea typeface="Georgia"/>
+              </a:rPr>
+              <a:t>谢谢</a:t>
+            </a:r>
+          </a:p>
+        </p:txBody>
+      </p:sp>
+      <p:sp>
+        <p:nvSpPr>
+          <p:cNvPr id="362" name="Subtitle"/>
+          <p:cNvSpPr txBox="1"/>
+          <p:nvPr/>
+        </p:nvSpPr>
+        <p:spPr>
+          <a:xfrm>
+            <a:off x="1050000" y="4200000"/>
+            <a:ext cx="10200000" cy="900000"/>
+          </a:xfrm>
+          <a:prstGeom prst="rect">
+            <a:avLst/>
+          </a:prstGeom>
+          <a:noFill/>
+          <a:ln/>
+        </p:spPr>
+        <p:txBody>
+          <a:bodyPr wrap="square" rtlCol="0">
+            <a:normAutofit/>
+          </a:bodyPr>
+          <a:lstStyle/>
+          <a:p>
+            <a:pPr algn="ctr">
+              <a:buNone/>
+            </a:pPr>
+            <a:r>
+              <a:rPr lang="zh-CN" sz="2000" b="1" dirty="0">
+                <a:solidFill>
+                  <a:srgbClr val="C9A84C"/>
+                </a:solidFill>
+                <a:latin typeface="Helvetica Neue"/>
+                <a:ea typeface="Helvetica Neue"/>
+              </a:rPr>
+              <a:t>澜脉 · 污水厂设备 AI 预测性维护系统</a:t>
+            </a:r>
+          </a:p>
+        </p:txBody>
+      </p:sp>
+      <p:sp>
+        <p:nvSpPr>
+          <p:cNvPr id="369" name="Page number"/>
+          <p:cNvSpPr txBox="1"/>
+          <p:nvPr/>
+        </p:nvSpPr>
+        <p:spPr>
+          <a:xfrm>
+            <a:off x="10600000" y="6250000"/>
+            <a:ext cx="1200000" cy="400000"/>
+          </a:xfrm>
+          <a:prstGeom prst="rect">
+            <a:avLst/>
+          </a:prstGeom>
+          <a:noFill/>
+          <a:ln/>
+        </p:spPr>
+        <p:txBody>
+          <a:bodyPr wrap="square" rtlCol="0">
+            <a:normAutofit/>
+          </a:bodyPr>
+          <a:lstStyle/>
+          <a:p>
+            <a:pPr algn="r">
+              <a:buNone/>
+            </a:pPr>
+            <a:r>
+              <a:rPr lang="zh-CN" sz="1000" b="0" dirty="0">
+                <a:solidFill>
+                  <a:srgbClr val="A79F91"/>
+                </a:solidFill>
+                <a:latin typeface="Helvetica Neue"/>
+                <a:ea typeface="Helvetica Neue"/>
+              </a:rPr>
+              <a:t>36 / 36</a:t>
+            </a:r>
+          </a:p>
+        </p:txBody>
+      </p:sp>
+    </p:spTree>
+  </p:cSld>
+  <p:clrMapOvr>
+    <a:overrideClrMapping bg1="lt1" tx1="dk1" bg2="lt2" tx2="dk2" accent1="accent1" accent2="accent2" accent3="accent3" accent4="accent4" accent5="accent5" accent6="accent6" hlink="hlink" folHlink="folHlink"/>
+  </p:clrMapOvr>
+  <p:transition spd="med">
+    <p:fade/>
+  </p:transition>
+</p:sld>
+</file>
+
+<file path=ppt/slides/slide37.xml><?xml version="1.0" encoding="utf-8"?>
+<p:sld xmlns:a="http://schemas.openxmlformats.org/drawingml/2006/main" xmlns:p="http://schemas.openxmlformats.org/presentationml/2006/main" xmlns:r="http://schemas.openxmlformats.org/officeDocument/2006/relationships">
+  <p:cSld>
+    <p:spTree>
+      <p:nvGrpSpPr>
+        <p:cNvPr id="1" name=""/>
+        <p:cNvGrpSpPr/>
+        <p:nvPr/>
+      </p:nvGrpSpPr>
+      <p:grpSpPr/>
+      <p:pic>
+        <p:nvPicPr>
+          <p:cNvPr id="2" name="Picture 1" descr="figB_pipeline.png"/>
+          <p:cNvPicPr>
+            <a:picLocks noChangeAspect="1"/>
+          </p:cNvPicPr>
+          <p:nvPr/>
+        </p:nvPicPr>
+        <p:blipFill>
+          <a:blip r:embed="rId2"/>
+          <a:stretch>
+            <a:fillRect/>
+          </a:stretch>
+        </p:blipFill>
+        <p:spPr>
+          <a:xfrm>
+            <a:off x="731520" y="1037844"/>
+            <a:ext cx="10728960" cy="4096512"/>
+          </a:xfrm>
+          <a:prstGeom prst="rect">
+            <a:avLst/>
+          </a:prstGeom>
+        </p:spPr>
+      </p:pic>
+      <p:sp>
+        <p:nvSpPr>
+          <p:cNvPr id="3" name="TextBox 2"/>
+          <p:cNvSpPr txBox="1"/>
+          <p:nvPr/>
+        </p:nvSpPr>
+        <p:spPr>
+          <a:xfrm>
+            <a:off x="731520" y="5612130"/>
+            <a:ext cx="10728960" cy="685800"/>
+          </a:xfrm>
+          <a:prstGeom prst="rect">
+            <a:avLst/>
+          </a:prstGeom>
+          <a:noFill/>
+        </p:spPr>
+        <p:txBody>
+          <a:bodyPr wrap="square">
+            <a:spAutoFit/>
+          </a:bodyPr>
+          <a:lstStyle/>
+          <a:p>
+            <a:pPr algn="ctr"/>
+            <a:r>
+              <a:rPr sz="1400">
+                <a:solidFill>
+                  <a:srgbClr val="334455"/>
+                </a:solidFill>
+              </a:rPr>
+              <a:t>四段链路：检测 → 诊断 → 剩余寿命 → 维护决策</a:t>
+            </a:r>
+          </a:p>
+        </p:txBody>
+      </p:sp>
+    </p:spTree>
+  </p:cSld>
+  <p:clrMapOvr>
+    <a:masterClrMapping/>
+  </p:clrMapOvr>
+</p:sld>
+</file>
+
+<file path=ppt/slides/slide38.xml><?xml version="1.0" encoding="utf-8"?>
+<p:sld xmlns:a="http://schemas.openxmlformats.org/drawingml/2006/main" xmlns:p="http://schemas.openxmlformats.org/presentationml/2006/main" xmlns:r="http://schemas.openxmlformats.org/officeDocument/2006/relationships">
+  <p:cSld>
+    <p:spTree>
+      <p:nvGrpSpPr>
+        <p:cNvPr id="1" name=""/>
+        <p:cNvGrpSpPr/>
+        <p:nvPr/>
+      </p:nvGrpSpPr>
+      <p:grpSpPr/>
+      <p:pic>
+        <p:nvPicPr>
+          <p:cNvPr id="2" name="Picture 1" descr="figC_criterion.png"/>
+          <p:cNvPicPr>
+            <a:picLocks noChangeAspect="1"/>
+          </p:cNvPicPr>
+          <p:nvPr/>
+        </p:nvPicPr>
+        <p:blipFill>
+          <a:blip r:embed="rId2"/>
+          <a:stretch>
+            <a:fillRect/>
+          </a:stretch>
+        </p:blipFill>
+        <p:spPr>
+          <a:xfrm>
+            <a:off x="731520" y="1135380"/>
+            <a:ext cx="10728960" cy="3901440"/>
+          </a:xfrm>
+          <a:prstGeom prst="rect">
+            <a:avLst/>
+          </a:prstGeom>
+        </p:spPr>
+      </p:pic>
+      <p:sp>
+        <p:nvSpPr>
+          <p:cNvPr id="3" name="TextBox 2"/>
+          <p:cNvSpPr txBox="1"/>
+          <p:nvPr/>
+        </p:nvSpPr>
+        <p:spPr>
+          <a:xfrm>
+            <a:off x="731520" y="5612130"/>
+            <a:ext cx="10728960" cy="685800"/>
+          </a:xfrm>
+          <a:prstGeom prst="rect">
+            <a:avLst/>
+          </a:prstGeom>
+          <a:noFill/>
+        </p:spPr>
+        <p:txBody>
+          <a:bodyPr wrap="square">
+            <a:spAutoFit/>
+          </a:bodyPr>
+          <a:lstStyle/>
+          <a:p>
+            <a:pPr algn="ctr"/>
+            <a:r>
+              <a:rPr sz="1400">
+                <a:solidFill>
+                  <a:srgbClr val="334455"/>
+                </a:solidFill>
+              </a:rPr>
+              <a:t>检测判据：双基线分数 + 事件机 + P1/P2/P3 分级</a:t>
+            </a:r>
+          </a:p>
+        </p:txBody>
+      </p:sp>
+    </p:spTree>
+  </p:cSld>
+  <p:clrMapOvr>
+    <a:masterClrMapping/>
+  </p:clrMapOvr>
+</p:sld>
+</file>
+
+<file path=ppt/slides/slide39.xml><?xml version="1.0" encoding="utf-8"?>
+<p:sld xmlns:a="http://schemas.openxmlformats.org/drawingml/2006/main" xmlns:p="http://schemas.openxmlformats.org/presentationml/2006/main" xmlns:r="http://schemas.openxmlformats.org/officeDocument/2006/relationships">
+  <p:cSld>
+    <p:spTree>
+      <p:nvGrpSpPr>
+        <p:cNvPr id="1" name=""/>
+        <p:cNvGrpSpPr/>
+        <p:nvPr/>
+      </p:nvGrpSpPr>
+      <p:grpSpPr/>
+      <p:pic>
+        <p:nvPicPr>
+          <p:cNvPr id="2" name="Picture 1" descr="bsm1_4in1.png"/>
+          <p:cNvPicPr>
+            <a:picLocks noChangeAspect="1"/>
+          </p:cNvPicPr>
+          <p:nvPr/>
+        </p:nvPicPr>
+        <p:blipFill>
+          <a:blip r:embed="rId2"/>
+          <a:stretch>
+            <a:fillRect/>
+          </a:stretch>
+        </p:blipFill>
+        <p:spPr>
+          <a:xfrm>
+            <a:off x="2694940" y="731520"/>
+            <a:ext cx="6802120" cy="4709160"/>
+          </a:xfrm>
+          <a:prstGeom prst="rect">
+            <a:avLst/>
+          </a:prstGeom>
+        </p:spPr>
+      </p:pic>
+      <p:sp>
+        <p:nvSpPr>
+          <p:cNvPr id="3" name="TextBox 2"/>
+          <p:cNvSpPr txBox="1"/>
+          <p:nvPr/>
+        </p:nvSpPr>
+        <p:spPr>
+          <a:xfrm>
+            <a:off x="731520" y="5612130"/>
+            <a:ext cx="10728960" cy="685800"/>
+          </a:xfrm>
+          <a:prstGeom prst="rect">
+            <a:avLst/>
+          </a:prstGeom>
+          <a:noFill/>
+        </p:spPr>
+        <p:txBody>
+          <a:bodyPr wrap="square">
+            <a:spAutoFit/>
+          </a:bodyPr>
+          <a:lstStyle/>
+          <a:p>
+            <a:pPr algn="ctr"/>
+            <a:r>
+              <a:rPr sz="1400">
+                <a:solidFill>
+                  <a:srgbClr val="334455"/>
+                </a:solidFill>
+              </a:rPr>
+              <a:t>数字孪生闭环四图：注入退化 → 检测 → RUL → 决策</a:t>
+            </a:r>
+          </a:p>
+        </p:txBody>
+      </p:sp>
+    </p:spTree>
+  </p:cSld>
+  <p:clrMapOvr>
+    <a:masterClrMapping/>
+  </p:clrMapOvr>
 </p:sld>
 </file>
 
@@ -8717,7 +13042,7 @@
                 <a:latin typeface="Helvetica Neue"/>
                 <a:ea typeface="Helvetica Neue"/>
               </a:rPr>
-              <a:t>现状：关键设备仍是"坏了才修、到期就修"</a:t>
+              <a:t>澜脉：不加传感器，回答四个问题</a:t>
             </a:r>
           </a:p>
         </p:txBody>
@@ -8756,7 +13081,7 @@
                 <a:latin typeface="Georgia"/>
                 <a:ea typeface="Georgia"/>
               </a:rPr>
-              <a:t>现状：关键设备仍是"坏了才修、到期就修"</a:t>
+              <a:t>澜脉：不加传感器，回答四个问题</a:t>
             </a:r>
           </a:p>
         </p:txBody>
@@ -8796,7 +13121,7 @@
                 <a:latin typeface="Helvetica Neue"/>
                 <a:ea typeface="Helvetica Neue"/>
               </a:rPr>
-              <a:t>鼓风机、脱水机、泵：非计划停机代价高</a:t>
+              <a:t>有没有异常 → 是什么故障 → 还剩多久 → 何时修最省</a:t>
             </a:r>
           </a:p>
           <a:p>
@@ -8812,7 +13137,7 @@
                 <a:latin typeface="Helvetica Neue"/>
                 <a:ea typeface="Helvetica Neue"/>
               </a:rPr>
-              <a:t>定期大修：备件与人工浪费在没坏的设备上</a:t>
+              <a:t>纯软件：可离线部署，数据不出厂</a:t>
             </a:r>
           </a:p>
           <a:p>
@@ -8828,7 +13153,7 @@
                 <a:latin typeface="Helvetica Neue"/>
                 <a:ea typeface="Helvetica Neue"/>
               </a:rPr>
-              <a:t>电流、温度、压力、流量数据厂里本来就有</a:t>
+              <a:t>面向污水厂（TO B / TO G），按设备数订阅</a:t>
             </a:r>
           </a:p>
           <a:p>
@@ -8844,7 +13169,7 @@
                 <a:latin typeface="Helvetica Neue"/>
                 <a:ea typeface="Helvetica Neue"/>
               </a:rPr>
-              <a:t>缺的是"从数据看出设备在退化"的方法与工具</a:t>
+              <a:t>命题 2-6 要的是完整闭环，不是单点算法演示</a:t>
             </a:r>
           </a:p>
         </p:txBody>
@@ -8883,7 +13208,7 @@
                 <a:latin typeface="Helvetica Neue"/>
                 <a:ea typeface="Helvetica Neue"/>
               </a:rPr>
-              <a:t>04 / 27</a:t>
+              <a:t>04 / 36</a:t>
             </a:r>
           </a:p>
         </p:txBody>
@@ -9076,6 +13401,690 @@
 </p:sld>
 </file>
 
+<file path=ppt/slides/slide40.xml><?xml version="1.0" encoding="utf-8"?>
+<p:sld xmlns:a="http://schemas.openxmlformats.org/drawingml/2006/main" xmlns:p="http://schemas.openxmlformats.org/presentationml/2006/main" xmlns:r="http://schemas.openxmlformats.org/officeDocument/2006/relationships">
+  <p:cSld>
+    <p:spTree>
+      <p:nvGrpSpPr>
+        <p:cNvPr id="1" name=""/>
+        <p:cNvGrpSpPr/>
+        <p:nvPr/>
+      </p:nvGrpSpPr>
+      <p:grpSpPr/>
+      <p:pic>
+        <p:nvPicPr>
+          <p:cNvPr id="2" name="Picture 1" descr="bsm2_route_b_detect.png"/>
+          <p:cNvPicPr>
+            <a:picLocks noChangeAspect="1"/>
+          </p:cNvPicPr>
+          <p:nvPr/>
+        </p:nvPicPr>
+        <p:blipFill>
+          <a:blip r:embed="rId2"/>
+          <a:stretch>
+            <a:fillRect/>
+          </a:stretch>
+        </p:blipFill>
+        <p:spPr>
+          <a:xfrm>
+            <a:off x="2485644" y="731520"/>
+            <a:ext cx="7220712" cy="4709160"/>
+          </a:xfrm>
+          <a:prstGeom prst="rect">
+            <a:avLst/>
+          </a:prstGeom>
+        </p:spPr>
+      </p:pic>
+      <p:sp>
+        <p:nvSpPr>
+          <p:cNvPr id="3" name="TextBox 2"/>
+          <p:cNvSpPr txBox="1"/>
+          <p:nvPr/>
+        </p:nvSpPr>
+        <p:spPr>
+          <a:xfrm>
+            <a:off x="731520" y="5612130"/>
+            <a:ext cx="10728960" cy="685800"/>
+          </a:xfrm>
+          <a:prstGeom prst="rect">
+            <a:avLst/>
+          </a:prstGeom>
+          <a:noFill/>
+        </p:spPr>
+        <p:txBody>
+          <a:bodyPr wrap="square">
+            <a:spAutoFit/>
+          </a:bodyPr>
+          <a:lstStyle/>
+          <a:p>
+            <a:pPr algn="ctr"/>
+            <a:r>
+              <a:rPr sz="1400">
+                <a:solidFill>
+                  <a:srgbClr val="334455"/>
+                </a:solidFill>
+              </a:rPr>
+              <a:t>BSM2 整厂：原始量检不出，设备级比值通道 9.80 天检出</a:t>
+            </a:r>
+          </a:p>
+        </p:txBody>
+      </p:sp>
+    </p:spTree>
+  </p:cSld>
+  <p:clrMapOvr>
+    <a:masterClrMapping/>
+  </p:clrMapOvr>
+</p:sld>
+</file>
+
+<file path=ppt/slides/slide41.xml><?xml version="1.0" encoding="utf-8"?>
+<p:sld xmlns:a="http://schemas.openxmlformats.org/drawingml/2006/main" xmlns:p="http://schemas.openxmlformats.org/presentationml/2006/main" xmlns:r="http://schemas.openxmlformats.org/officeDocument/2006/relationships">
+  <p:cSld>
+    <p:spTree>
+      <p:nvGrpSpPr>
+        <p:cNvPr id="1" name=""/>
+        <p:cNvGrpSpPr/>
+        <p:nvPr/>
+      </p:nvGrpSpPr>
+      <p:grpSpPr/>
+      <p:pic>
+        <p:nvPicPr>
+          <p:cNvPr id="2" name="Picture 1" descr="sludge_line2.png"/>
+          <p:cNvPicPr>
+            <a:picLocks noChangeAspect="1"/>
+          </p:cNvPicPr>
+          <p:nvPr/>
+        </p:nvPicPr>
+        <p:blipFill>
+          <a:blip r:embed="rId2"/>
+          <a:stretch>
+            <a:fillRect/>
+          </a:stretch>
+        </p:blipFill>
+        <p:spPr>
+          <a:xfrm>
+            <a:off x="1700784" y="731520"/>
+            <a:ext cx="8790432" cy="4709160"/>
+          </a:xfrm>
+          <a:prstGeom prst="rect">
+            <a:avLst/>
+          </a:prstGeom>
+        </p:spPr>
+      </p:pic>
+      <p:sp>
+        <p:nvSpPr>
+          <p:cNvPr id="3" name="TextBox 2"/>
+          <p:cNvSpPr txBox="1"/>
+          <p:nvPr/>
+        </p:nvSpPr>
+        <p:spPr>
+          <a:xfrm>
+            <a:off x="731520" y="5612130"/>
+            <a:ext cx="10728960" cy="685800"/>
+          </a:xfrm>
+          <a:prstGeom prst="rect">
+            <a:avLst/>
+          </a:prstGeom>
+          <a:noFill/>
+        </p:spPr>
+        <p:txBody>
+          <a:bodyPr wrap="square">
+            <a:spAutoFit/>
+          </a:bodyPr>
+          <a:lstStyle/>
+          <a:p>
+            <a:pPr algn="ctr"/>
+            <a:r>
+              <a:rPr sz="1400">
+                <a:solidFill>
+                  <a:srgbClr val="334455"/>
+                </a:solidFill>
+              </a:rPr>
+              <a:t>污泥线闭环：含固率、湿泥饼量、滤液 TSS 与检测分数</a:t>
+            </a:r>
+          </a:p>
+        </p:txBody>
+      </p:sp>
+    </p:spTree>
+  </p:cSld>
+  <p:clrMapOvr>
+    <a:masterClrMapping/>
+  </p:clrMapOvr>
+</p:sld>
+</file>
+
+<file path=ppt/slides/slide42.xml><?xml version="1.0" encoding="utf-8"?>
+<p:sld xmlns:a="http://schemas.openxmlformats.org/drawingml/2006/main" xmlns:p="http://schemas.openxmlformats.org/presentationml/2006/main" xmlns:r="http://schemas.openxmlformats.org/officeDocument/2006/relationships">
+  <p:cSld>
+    <p:spTree>
+      <p:nvGrpSpPr>
+        <p:cNvPr id="1" name=""/>
+        <p:cNvGrpSpPr/>
+        <p:nvPr/>
+      </p:nvGrpSpPr>
+      <p:grpSpPr/>
+      <p:pic>
+        <p:nvPicPr>
+          <p:cNvPr id="2" name="Picture 1" descr="sludge_decision.png"/>
+          <p:cNvPicPr>
+            <a:picLocks noChangeAspect="1"/>
+          </p:cNvPicPr>
+          <p:nvPr/>
+        </p:nvPicPr>
+        <p:blipFill>
+          <a:blip r:embed="rId2"/>
+          <a:stretch>
+            <a:fillRect/>
+          </a:stretch>
+        </p:blipFill>
+        <p:spPr>
+          <a:xfrm>
+            <a:off x="731520" y="1543812"/>
+            <a:ext cx="10728960" cy="3084575"/>
+          </a:xfrm>
+          <a:prstGeom prst="rect">
+            <a:avLst/>
+          </a:prstGeom>
+        </p:spPr>
+      </p:pic>
+      <p:sp>
+        <p:nvSpPr>
+          <p:cNvPr id="3" name="TextBox 2"/>
+          <p:cNvSpPr txBox="1"/>
+          <p:nvPr/>
+        </p:nvSpPr>
+        <p:spPr>
+          <a:xfrm>
+            <a:off x="731520" y="5612130"/>
+            <a:ext cx="10728960" cy="685800"/>
+          </a:xfrm>
+          <a:prstGeom prst="rect">
+            <a:avLst/>
+          </a:prstGeom>
+          <a:noFill/>
+        </p:spPr>
+        <p:txBody>
+          <a:bodyPr wrap="square">
+            <a:spAutoFit/>
+          </a:bodyPr>
+          <a:lstStyle/>
+          <a:p>
+            <a:pPr algn="ctr"/>
+            <a:r>
+              <a:rPr sz="1400">
+                <a:solidFill>
+                  <a:srgbClr val="334455"/>
+                </a:solidFill>
+              </a:rPr>
+              <a:t>维护策略对比：RUL 驱动相对最优固定周期省 24.5%（占位成本）</a:t>
+            </a:r>
+          </a:p>
+        </p:txBody>
+      </p:sp>
+    </p:spTree>
+  </p:cSld>
+  <p:clrMapOvr>
+    <a:masterClrMapping/>
+  </p:clrMapOvr>
+</p:sld>
+</file>
+
+<file path=ppt/slides/slide43.xml><?xml version="1.0" encoding="utf-8"?>
+<p:sld xmlns:a="http://schemas.openxmlformats.org/drawingml/2006/main" xmlns:p="http://schemas.openxmlformats.org/presentationml/2006/main" xmlns:r="http://schemas.openxmlformats.org/officeDocument/2006/relationships">
+  <p:cSld>
+    <p:spTree>
+      <p:nvGrpSpPr>
+        <p:cNvPr id="1" name=""/>
+        <p:cNvGrpSpPr/>
+        <p:nvPr/>
+      </p:nvGrpSpPr>
+      <p:grpSpPr/>
+      <p:pic>
+        <p:nvPicPr>
+          <p:cNvPr id="2" name="Picture 1" descr="figures_4in1.png"/>
+          <p:cNvPicPr>
+            <a:picLocks noChangeAspect="1"/>
+          </p:cNvPicPr>
+          <p:nvPr/>
+        </p:nvPicPr>
+        <p:blipFill>
+          <a:blip r:embed="rId2"/>
+          <a:stretch>
+            <a:fillRect/>
+          </a:stretch>
+        </p:blipFill>
+        <p:spPr>
+          <a:xfrm>
+            <a:off x="2694940" y="731520"/>
+            <a:ext cx="6802120" cy="4709160"/>
+          </a:xfrm>
+          <a:prstGeom prst="rect">
+            <a:avLst/>
+          </a:prstGeom>
+        </p:spPr>
+      </p:pic>
+      <p:sp>
+        <p:nvSpPr>
+          <p:cNvPr id="3" name="TextBox 2"/>
+          <p:cNvSpPr txBox="1"/>
+          <p:nvPr/>
+        </p:nvSpPr>
+        <p:spPr>
+          <a:xfrm>
+            <a:off x="731520" y="5612130"/>
+            <a:ext cx="10728960" cy="685800"/>
+          </a:xfrm>
+          <a:prstGeom prst="rect">
+            <a:avLst/>
+          </a:prstGeom>
+          <a:noFill/>
+        </p:spPr>
+        <p:txBody>
+          <a:bodyPr wrap="square">
+            <a:spAutoFit/>
+          </a:bodyPr>
+          <a:lstStyle/>
+          <a:p>
+            <a:pPr algn="ctr"/>
+            <a:r>
+              <a:rPr sz="1400">
+                <a:solidFill>
+                  <a:srgbClr val="334455"/>
+                </a:solidFill>
+              </a:rPr>
+              <a:t>真实数据四图：误报-召回 / 策略成本 / 敏感性 / RUL 散点</a:t>
+            </a:r>
+          </a:p>
+        </p:txBody>
+      </p:sp>
+    </p:spTree>
+  </p:cSld>
+  <p:clrMapOvr>
+    <a:masterClrMapping/>
+  </p:clrMapOvr>
+</p:sld>
+</file>
+
+<file path=ppt/slides/slide44.xml><?xml version="1.0" encoding="utf-8"?>
+<p:sld xmlns:a="http://schemas.openxmlformats.org/drawingml/2006/main" xmlns:p="http://schemas.openxmlformats.org/presentationml/2006/main" xmlns:r="http://schemas.openxmlformats.org/officeDocument/2006/relationships">
+  <p:cSld>
+    <p:spTree>
+      <p:nvGrpSpPr>
+        <p:cNvPr id="1" name=""/>
+        <p:cNvGrpSpPr/>
+        <p:nvPr/>
+      </p:nvGrpSpPr>
+      <p:grpSpPr/>
+      <p:pic>
+        <p:nvPicPr>
+          <p:cNvPr id="2" name="Picture 1" descr="s2_demo_dashboard.png"/>
+          <p:cNvPicPr>
+            <a:picLocks noChangeAspect="1"/>
+          </p:cNvPicPr>
+          <p:nvPr/>
+        </p:nvPicPr>
+        <p:blipFill>
+          <a:blip r:embed="rId2"/>
+          <a:stretch>
+            <a:fillRect/>
+          </a:stretch>
+        </p:blipFill>
+        <p:spPr>
+          <a:xfrm>
+            <a:off x="4400702" y="731520"/>
+            <a:ext cx="3390595" cy="4709160"/>
+          </a:xfrm>
+          <a:prstGeom prst="rect">
+            <a:avLst/>
+          </a:prstGeom>
+        </p:spPr>
+      </p:pic>
+      <p:sp>
+        <p:nvSpPr>
+          <p:cNvPr id="3" name="TextBox 2"/>
+          <p:cNvSpPr txBox="1"/>
+          <p:nvPr/>
+        </p:nvSpPr>
+        <p:spPr>
+          <a:xfrm>
+            <a:off x="731520" y="5612130"/>
+            <a:ext cx="10728960" cy="685800"/>
+          </a:xfrm>
+          <a:prstGeom prst="rect">
+            <a:avLst/>
+          </a:prstGeom>
+          <a:noFill/>
+        </p:spPr>
+        <p:txBody>
+          <a:bodyPr wrap="square">
+            <a:spAutoFit/>
+          </a:bodyPr>
+          <a:lstStyle/>
+          <a:p>
+            <a:pPr algn="ctr"/>
+            <a:r>
+              <a:rPr sz="1400">
+                <a:solidFill>
+                  <a:srgbClr val="334455"/>
+                </a:solidFill>
+              </a:rPr>
+              <a:t>十节演示看板（在线可看）：从检测到决策的全部结果与口径</a:t>
+            </a:r>
+          </a:p>
+        </p:txBody>
+      </p:sp>
+    </p:spTree>
+  </p:cSld>
+  <p:clrMapOvr>
+    <a:masterClrMapping/>
+  </p:clrMapOvr>
+</p:sld>
+</file>
+
+<file path=ppt/slides/slide45.xml><?xml version="1.0" encoding="utf-8"?>
+<p:sld xmlns:a="http://schemas.openxmlformats.org/drawingml/2006/main" xmlns:p="http://schemas.openxmlformats.org/presentationml/2006/main" xmlns:r="http://schemas.openxmlformats.org/officeDocument/2006/relationships">
+  <p:cSld>
+    <p:spTree>
+      <p:nvGrpSpPr>
+        <p:cNvPr id="1" name=""/>
+        <p:cNvGrpSpPr/>
+        <p:nvPr/>
+      </p:nvGrpSpPr>
+      <p:grpSpPr/>
+      <p:pic>
+        <p:nvPicPr>
+          <p:cNvPr id="2" name="Picture 1" descr="s6_workbench.png"/>
+          <p:cNvPicPr>
+            <a:picLocks noChangeAspect="1"/>
+          </p:cNvPicPr>
+          <p:nvPr/>
+        </p:nvPicPr>
+        <p:blipFill>
+          <a:blip r:embed="rId2"/>
+          <a:stretch>
+            <a:fillRect/>
+          </a:stretch>
+        </p:blipFill>
+        <p:spPr>
+          <a:xfrm>
+            <a:off x="3835603" y="731520"/>
+            <a:ext cx="4520793" cy="4709160"/>
+          </a:xfrm>
+          <a:prstGeom prst="rect">
+            <a:avLst/>
+          </a:prstGeom>
+        </p:spPr>
+      </p:pic>
+      <p:sp>
+        <p:nvSpPr>
+          <p:cNvPr id="3" name="TextBox 2"/>
+          <p:cNvSpPr txBox="1"/>
+          <p:nvPr/>
+        </p:nvSpPr>
+        <p:spPr>
+          <a:xfrm>
+            <a:off x="731520" y="5612130"/>
+            <a:ext cx="10728960" cy="685800"/>
+          </a:xfrm>
+          <a:prstGeom prst="rect">
+            <a:avLst/>
+          </a:prstGeom>
+          <a:noFill/>
+        </p:spPr>
+        <p:txBody>
+          <a:bodyPr wrap="square">
+            <a:spAutoFit/>
+          </a:bodyPr>
+          <a:lstStyle/>
+          <a:p>
+            <a:pPr algn="ctr"/>
+            <a:r>
+              <a:rPr sz="1400">
+                <a:solidFill>
+                  <a:srgbClr val="334455"/>
+                </a:solidFill>
+              </a:rPr>
+              <a:t>本地工作台：浏览器上传 CSV → 标定基线 → 出报告，数据不出本机</a:t>
+            </a:r>
+          </a:p>
+        </p:txBody>
+      </p:sp>
+    </p:spTree>
+  </p:cSld>
+  <p:clrMapOvr>
+    <a:masterClrMapping/>
+  </p:clrMapOvr>
+</p:sld>
+</file>
+
+<file path=ppt/slides/slide46.xml><?xml version="1.0" encoding="utf-8"?>
+<p:sld xmlns:a="http://schemas.openxmlformats.org/drawingml/2006/main" xmlns:p="http://schemas.openxmlformats.org/presentationml/2006/main" xmlns:r="http://schemas.openxmlformats.org/officeDocument/2006/relationships">
+  <p:cSld>
+    <p:spTree>
+      <p:nvGrpSpPr>
+        <p:cNvPr id="1" name=""/>
+        <p:cNvGrpSpPr/>
+        <p:nvPr/>
+      </p:nvGrpSpPr>
+      <p:grpSpPr/>
+      <p:pic>
+        <p:nvPicPr>
+          <p:cNvPr id="2" name="Picture 1" descr="s8_report_metro_alarms.png"/>
+          <p:cNvPicPr>
+            <a:picLocks noChangeAspect="1"/>
+          </p:cNvPicPr>
+          <p:nvPr/>
+        </p:nvPicPr>
+        <p:blipFill>
+          <a:blip r:embed="rId2"/>
+          <a:stretch>
+            <a:fillRect/>
+          </a:stretch>
+        </p:blipFill>
+        <p:spPr>
+          <a:xfrm>
+            <a:off x="4330065" y="731520"/>
+            <a:ext cx="3531870" cy="4709160"/>
+          </a:xfrm>
+          <a:prstGeom prst="rect">
+            <a:avLst/>
+          </a:prstGeom>
+        </p:spPr>
+      </p:pic>
+      <p:sp>
+        <p:nvSpPr>
+          <p:cNvPr id="3" name="TextBox 2"/>
+          <p:cNvSpPr txBox="1"/>
+          <p:nvPr/>
+        </p:nvSpPr>
+        <p:spPr>
+          <a:xfrm>
+            <a:off x="731520" y="5612130"/>
+            <a:ext cx="10728960" cy="685800"/>
+          </a:xfrm>
+          <a:prstGeom prst="rect">
+            <a:avLst/>
+          </a:prstGeom>
+          <a:noFill/>
+        </p:spPr>
+        <p:txBody>
+          <a:bodyPr wrap="square">
+            <a:spAutoFit/>
+          </a:bodyPr>
+          <a:lstStyle/>
+          <a:p>
+            <a:pPr algn="ctr"/>
+            <a:r>
+              <a:rPr sz="1400">
+                <a:solidFill>
+                  <a:srgbClr val="334455"/>
+                </a:solidFill>
+              </a:rPr>
+              <a:t>企业版报告·分级告警明细（P1/P2/P3 与处置动作）</a:t>
+            </a:r>
+          </a:p>
+        </p:txBody>
+      </p:sp>
+    </p:spTree>
+  </p:cSld>
+  <p:clrMapOvr>
+    <a:masterClrMapping/>
+  </p:clrMapOvr>
+</p:sld>
+</file>
+
+<file path=ppt/slides/slide47.xml><?xml version="1.0" encoding="utf-8"?>
+<p:sld xmlns:a="http://schemas.openxmlformats.org/drawingml/2006/main" xmlns:p="http://schemas.openxmlformats.org/presentationml/2006/main" xmlns:r="http://schemas.openxmlformats.org/officeDocument/2006/relationships">
+  <p:cSld>
+    <p:spTree>
+      <p:nvGrpSpPr>
+        <p:cNvPr id="1" name=""/>
+        <p:cNvGrpSpPr/>
+        <p:nvPr/>
+      </p:nvGrpSpPr>
+      <p:grpSpPr/>
+      <p:pic>
+        <p:nvPicPr>
+          <p:cNvPr id="2" name="Picture 1" descr="figE_poc.png"/>
+          <p:cNvPicPr>
+            <a:picLocks noChangeAspect="1"/>
+          </p:cNvPicPr>
+          <p:nvPr/>
+        </p:nvPicPr>
+        <p:blipFill>
+          <a:blip r:embed="rId2"/>
+          <a:stretch>
+            <a:fillRect/>
+          </a:stretch>
+        </p:blipFill>
+        <p:spPr>
+          <a:xfrm>
+            <a:off x="731520" y="1525524"/>
+            <a:ext cx="10728960" cy="3121152"/>
+          </a:xfrm>
+          <a:prstGeom prst="rect">
+            <a:avLst/>
+          </a:prstGeom>
+        </p:spPr>
+      </p:pic>
+      <p:sp>
+        <p:nvSpPr>
+          <p:cNvPr id="3" name="TextBox 2"/>
+          <p:cNvSpPr txBox="1"/>
+          <p:nvPr/>
+        </p:nvSpPr>
+        <p:spPr>
+          <a:xfrm>
+            <a:off x="731520" y="5612130"/>
+            <a:ext cx="10728960" cy="685800"/>
+          </a:xfrm>
+          <a:prstGeom prst="rect">
+            <a:avLst/>
+          </a:prstGeom>
+          <a:noFill/>
+        </p:spPr>
+        <p:txBody>
+          <a:bodyPr wrap="square">
+            <a:spAutoFit/>
+          </a:bodyPr>
+          <a:lstStyle/>
+          <a:p>
+            <a:pPr algn="ctr"/>
+            <a:r>
+              <a:rPr sz="1400">
+                <a:solidFill>
+                  <a:srgbClr val="334455"/>
+                </a:solidFill>
+              </a:rPr>
+              <a:t>现场试点（POC）四步：选设备 → 标定 → 历史回放 → 在线运行</a:t>
+            </a:r>
+          </a:p>
+        </p:txBody>
+      </p:sp>
+    </p:spTree>
+  </p:cSld>
+  <p:clrMapOvr>
+    <a:masterClrMapping/>
+  </p:clrMapOvr>
+</p:sld>
+</file>
+
+<file path=ppt/slides/slide48.xml><?xml version="1.0" encoding="utf-8"?>
+<p:sld xmlns:a="http://schemas.openxmlformats.org/drawingml/2006/main" xmlns:p="http://schemas.openxmlformats.org/presentationml/2006/main" xmlns:r="http://schemas.openxmlformats.org/officeDocument/2006/relationships">
+  <p:cSld>
+    <p:spTree>
+      <p:nvGrpSpPr>
+        <p:cNvPr id="1" name=""/>
+        <p:cNvGrpSpPr/>
+        <p:nvPr/>
+      </p:nvGrpSpPr>
+      <p:grpSpPr/>
+      <p:pic>
+        <p:nvPicPr>
+          <p:cNvPr id="2" name="Picture 1" descr="s4_report_metropt3.png"/>
+          <p:cNvPicPr>
+            <a:picLocks noChangeAspect="1"/>
+          </p:cNvPicPr>
+          <p:nvPr/>
+        </p:nvPicPr>
+        <p:blipFill>
+          <a:blip r:embed="rId2"/>
+          <a:stretch>
+            <a:fillRect/>
+          </a:stretch>
+        </p:blipFill>
+        <p:spPr>
+          <a:xfrm>
+            <a:off x="4400702" y="731520"/>
+            <a:ext cx="3390595" cy="4709160"/>
+          </a:xfrm>
+          <a:prstGeom prst="rect">
+            <a:avLst/>
+          </a:prstGeom>
+        </p:spPr>
+      </p:pic>
+      <p:sp>
+        <p:nvSpPr>
+          <p:cNvPr id="3" name="TextBox 2"/>
+          <p:cNvSpPr txBox="1"/>
+          <p:nvPr/>
+        </p:nvSpPr>
+        <p:spPr>
+          <a:xfrm>
+            <a:off x="731520" y="5612130"/>
+            <a:ext cx="10728960" cy="685800"/>
+          </a:xfrm>
+          <a:prstGeom prst="rect">
+            <a:avLst/>
+          </a:prstGeom>
+          <a:noFill/>
+        </p:spPr>
+        <p:txBody>
+          <a:bodyPr wrap="square">
+            <a:spAutoFit/>
+          </a:bodyPr>
+          <a:lstStyle/>
+          <a:p>
+            <a:pPr algn="ctr"/>
+            <a:r>
+              <a:rPr sz="1400">
+                <a:solidFill>
+                  <a:srgbClr val="334455"/>
+                </a:solidFill>
+              </a:rPr>
+              <a:t>样例报告（真实空压机 214 天）：105 个告警，P1 56 / P2 30 / P3 19</a:t>
+            </a:r>
+          </a:p>
+        </p:txBody>
+      </p:sp>
+    </p:spTree>
+  </p:cSld>
+  <p:clrMapOvr>
+    <a:masterClrMapping/>
+  </p:clrMapOvr>
+</p:sld>
+</file>
+
 <file path=ppt/slides/slide5.xml><?xml version="1.0" encoding="utf-8"?>
 <p:sld xmlns:a="http://schemas.openxmlformats.org/drawingml/2006/main" xmlns:r="http://schemas.openxmlformats.org/officeDocument/2006/relationships" xmlns:p="http://schemas.openxmlformats.org/presentationml/2006/main">
   <p:cSld>
@@ -9135,424 +14144,6 @@
                 <a:latin typeface="Helvetica Neue"/>
                 <a:ea typeface="Helvetica Neue"/>
               </a:rPr>
-              <a:t>澜脉：不加传感器，回答四个问题</a:t>
-            </a:r>
-          </a:p>
-        </p:txBody>
-      </p:sp>
-      <p:sp>
-        <p:nvSpPr>
-          <p:cNvPr id="52" name="Title"/>
-          <p:cNvSpPr txBox="1"/>
-          <p:nvPr/>
-        </p:nvSpPr>
-        <p:spPr>
-          <a:xfrm>
-            <a:off x="900000" y="920000"/>
-            <a:ext cx="10300000" cy="800000"/>
-          </a:xfrm>
-          <a:prstGeom prst="rect">
-            <a:avLst/>
-          </a:prstGeom>
-          <a:noFill/>
-          <a:ln/>
-        </p:spPr>
-        <p:txBody>
-          <a:bodyPr wrap="square" rtlCol="0">
-            <a:normAutofit/>
-          </a:bodyPr>
-          <a:lstStyle/>
-          <a:p>
-            <a:pPr>
-              <a:buNone/>
-            </a:pPr>
-            <a:r>
-              <a:rPr lang="zh-CN" sz="3400" b="1" dirty="0">
-                <a:solidFill>
-                  <a:srgbClr val="F4EFE6"/>
-                </a:solidFill>
-                <a:latin typeface="Georgia"/>
-                <a:ea typeface="Georgia"/>
-              </a:rPr>
-              <a:t>澜脉：不加传感器，回答四个问题</a:t>
-            </a:r>
-          </a:p>
-        </p:txBody>
-      </p:sp>
-      <p:sp>
-        <p:nvSpPr>
-          <p:cNvPr id="53" name="Body"/>
-          <p:cNvSpPr txBox="1"/>
-          <p:nvPr/>
-        </p:nvSpPr>
-        <p:spPr>
-          <a:xfrm>
-            <a:off x="1050000" y="1850000"/>
-            <a:ext cx="10100000" cy="4500000"/>
-          </a:xfrm>
-          <a:prstGeom prst="rect">
-            <a:avLst/>
-          </a:prstGeom>
-          <a:noFill/>
-          <a:ln/>
-        </p:spPr>
-        <p:txBody>
-          <a:bodyPr wrap="square" rtlCol="0">
-            <a:normAutofit/>
-          </a:bodyPr>
-          <a:lstStyle/>
-          <a:p>
-            <a:pPr marL="285750" indent="-285750">
-              <a:buFont typeface="Arial" panose="020B0604020202020204"/>
-              <a:buChar char="•"/>
-            </a:pPr>
-            <a:r>
-              <a:rPr lang="zh-CN" sz="2000" b="0" dirty="0">
-                <a:solidFill>
-                  <a:srgbClr val="F4EFE6"/>
-                </a:solidFill>
-                <a:latin typeface="Helvetica Neue"/>
-                <a:ea typeface="Helvetica Neue"/>
-              </a:rPr>
-              <a:t>有没有异常 → 是什么故障 → 还剩多久 → 何时修最省</a:t>
-            </a:r>
-          </a:p>
-          <a:p>
-            <a:pPr marL="285750" indent="-285750">
-              <a:buFont typeface="Arial" panose="020B0604020202020204"/>
-              <a:buChar char="•"/>
-            </a:pPr>
-            <a:r>
-              <a:rPr lang="zh-CN" sz="2000" b="0" dirty="0">
-                <a:solidFill>
-                  <a:srgbClr val="F4EFE6"/>
-                </a:solidFill>
-                <a:latin typeface="Helvetica Neue"/>
-                <a:ea typeface="Helvetica Neue"/>
-              </a:rPr>
-              <a:t>纯软件：可离线部署，数据不出厂</a:t>
-            </a:r>
-          </a:p>
-          <a:p>
-            <a:pPr marL="285750" indent="-285750">
-              <a:buFont typeface="Arial" panose="020B0604020202020204"/>
-              <a:buChar char="•"/>
-            </a:pPr>
-            <a:r>
-              <a:rPr lang="zh-CN" sz="2000" b="0" dirty="0">
-                <a:solidFill>
-                  <a:srgbClr val="F4EFE6"/>
-                </a:solidFill>
-                <a:latin typeface="Helvetica Neue"/>
-                <a:ea typeface="Helvetica Neue"/>
-              </a:rPr>
-              <a:t>面向污水厂（TO B / TO G），按设备数订阅</a:t>
-            </a:r>
-          </a:p>
-          <a:p>
-            <a:pPr marL="285750" indent="-285750">
-              <a:buFont typeface="Arial" panose="020B0604020202020204"/>
-              <a:buChar char="•"/>
-            </a:pPr>
-            <a:r>
-              <a:rPr lang="zh-CN" sz="2000" b="0" dirty="0">
-                <a:solidFill>
-                  <a:srgbClr val="F4EFE6"/>
-                </a:solidFill>
-                <a:latin typeface="Helvetica Neue"/>
-                <a:ea typeface="Helvetica Neue"/>
-              </a:rPr>
-              <a:t>命题 2-6 要的是完整闭环，不是单点算法演示</a:t>
-            </a:r>
-          </a:p>
-        </p:txBody>
-      </p:sp>
-      <p:sp>
-        <p:nvSpPr>
-          <p:cNvPr id="59" name="Page number"/>
-          <p:cNvSpPr txBox="1"/>
-          <p:nvPr/>
-        </p:nvSpPr>
-        <p:spPr>
-          <a:xfrm>
-            <a:off x="10600000" y="6250000"/>
-            <a:ext cx="1200000" cy="400000"/>
-          </a:xfrm>
-          <a:prstGeom prst="rect">
-            <a:avLst/>
-          </a:prstGeom>
-          <a:noFill/>
-          <a:ln/>
-        </p:spPr>
-        <p:txBody>
-          <a:bodyPr wrap="square" rtlCol="0">
-            <a:normAutofit/>
-          </a:bodyPr>
-          <a:lstStyle/>
-          <a:p>
-            <a:pPr algn="r">
-              <a:buNone/>
-            </a:pPr>
-            <a:r>
-              <a:rPr lang="zh-CN" sz="1000" b="0" dirty="0">
-                <a:solidFill>
-                  <a:srgbClr val="A79F91"/>
-                </a:solidFill>
-                <a:latin typeface="Helvetica Neue"/>
-                <a:ea typeface="Helvetica Neue"/>
-              </a:rPr>
-              <a:t>05 / 27</a:t>
-            </a:r>
-          </a:p>
-        </p:txBody>
-      </p:sp>
-    </p:spTree>
-  </p:cSld>
-  <p:clrMapOvr>
-    <a:overrideClrMapping bg1="lt1" tx1="dk1" bg2="lt2" tx2="dk2" accent1="accent1" accent2="accent2" accent3="accent3" accent4="accent4" accent5="accent5" accent6="accent6" hlink="hlink" folHlink="folHlink"/>
-  </p:clrMapOvr>
-  <p:transition spd="med">
-    <p:fade/>
-  </p:transition>
-  <p:timing>
-    <p:tnLst>
-      <p:par>
-        <p:cTn id="1" dur="indefinite" restart="never" nodeType="tmRoot">
-          <p:childTnLst>
-            <p:seq concurrent="1" nextAc="seek">
-              <p:cTn id="2" dur="indefinite" nodeType="mainSeq">
-                <p:childTnLst>
-                  <p:par>
-                    <p:cTn id="3" fill="hold">
-                      <p:stCondLst>
-                        <p:cond delay="indefinite"/>
-                      </p:stCondLst>
-                      <p:childTnLst>
-                        <p:par>
-                          <p:cTn id="4" presetID="1" presetClass="entr" presetSubtype="0" fill="hold" grpId="0" nodeType="clickEffect">
-                            <p:stCondLst>
-                              <p:cond delay="0"/>
-                            </p:stCondLst>
-                            <p:childTnLst>
-                              <p:set>
-                                <p:cBhvr>
-                                  <p:cTn id="5" dur="1" fill="hold">
-                                    <p:stCondLst>
-                                      <p:cond delay="0"/>
-                                    </p:stCondLst>
-                                  </p:cTn>
-                                  <p:tgtEl>
-                                    <p:spTgt spid="53"/>
-                                  </p:tgtEl>
-                                  <p:attrNameLst>
-                                    <p:attrName>style.visibility</p:attrName>
-                                  </p:attrNameLst>
-                                </p:cBhvr>
-                                <p:to>
-                                  <p:strVal val="visible"/>
-                                </p:to>
-                              </p:set>
-                            </p:childTnLst>
-                          </p:cTn>
-                        </p:par>
-                      </p:childTnLst>
-                    </p:cTn>
-                  </p:par>
-                  <p:par>
-                    <p:cTn id="6" fill="hold">
-                      <p:stCondLst>
-                        <p:cond delay="indefinite"/>
-                      </p:stCondLst>
-                      <p:childTnLst>
-                        <p:par>
-                          <p:cTn id="7" presetID="1" presetClass="entr" presetSubtype="0" fill="hold" grpId="0" nodeType="clickEffect">
-                            <p:stCondLst>
-                              <p:cond delay="0"/>
-                            </p:stCondLst>
-                            <p:childTnLst>
-                              <p:set>
-                                <p:cBhvr>
-                                  <p:cTn id="8" dur="1" fill="hold">
-                                    <p:stCondLst>
-                                      <p:cond delay="0"/>
-                                    </p:stCondLst>
-                                  </p:cTn>
-                                  <p:tgtEl>
-                                    <p:spTgt spid="53"/>
-                                  </p:tgtEl>
-                                  <p:attrNameLst>
-                                    <p:attrName>style.visibility</p:attrName>
-                                  </p:attrNameLst>
-                                </p:cBhvr>
-                                <p:to>
-                                  <p:strVal val="visible"/>
-                                </p:to>
-                              </p:set>
-                            </p:childTnLst>
-                          </p:cTn>
-                        </p:par>
-                      </p:childTnLst>
-                    </p:cTn>
-                  </p:par>
-                  <p:par>
-                    <p:cTn id="9" fill="hold">
-                      <p:stCondLst>
-                        <p:cond delay="indefinite"/>
-                      </p:stCondLst>
-                      <p:childTnLst>
-                        <p:par>
-                          <p:cTn id="10" presetID="1" presetClass="entr" presetSubtype="0" fill="hold" grpId="0" nodeType="clickEffect">
-                            <p:stCondLst>
-                              <p:cond delay="0"/>
-                            </p:stCondLst>
-                            <p:childTnLst>
-                              <p:set>
-                                <p:cBhvr>
-                                  <p:cTn id="11" dur="1" fill="hold">
-                                    <p:stCondLst>
-                                      <p:cond delay="0"/>
-                                    </p:stCondLst>
-                                  </p:cTn>
-                                  <p:tgtEl>
-                                    <p:spTgt spid="53"/>
-                                  </p:tgtEl>
-                                  <p:attrNameLst>
-                                    <p:attrName>style.visibility</p:attrName>
-                                  </p:attrNameLst>
-                                </p:cBhvr>
-                                <p:to>
-                                  <p:strVal val="visible"/>
-                                </p:to>
-                              </p:set>
-                            </p:childTnLst>
-                          </p:cTn>
-                        </p:par>
-                      </p:childTnLst>
-                    </p:cTn>
-                  </p:par>
-                  <p:par>
-                    <p:cTn id="12" fill="hold">
-                      <p:stCondLst>
-                        <p:cond delay="indefinite"/>
-                      </p:stCondLst>
-                      <p:childTnLst>
-                        <p:par>
-                          <p:cTn id="13" presetID="1" presetClass="entr" presetSubtype="0" fill="hold" grpId="0" nodeType="clickEffect">
-                            <p:stCondLst>
-                              <p:cond delay="0"/>
-                            </p:stCondLst>
-                            <p:childTnLst>
-                              <p:set>
-                                <p:cBhvr>
-                                  <p:cTn id="14" dur="1" fill="hold">
-                                    <p:stCondLst>
-                                      <p:cond delay="0"/>
-                                    </p:stCondLst>
-                                  </p:cTn>
-                                  <p:tgtEl>
-                                    <p:spTgt spid="53"/>
-                                  </p:tgtEl>
-                                  <p:attrNameLst>
-                                    <p:attrName>style.visibility</p:attrName>
-                                  </p:attrNameLst>
-                                </p:cBhvr>
-                                <p:to>
-                                  <p:strVal val="visible"/>
-                                </p:to>
-                              </p:set>
-                            </p:childTnLst>
-                          </p:cTn>
-                        </p:par>
-                      </p:childTnLst>
-                    </p:cTn>
-                  </p:par>
-                </p:childTnLst>
-              </p:cTn>
-              <p:prevCondLst>
-                <p:cond evt="onPrev" delay="0">
-                  <p:tgtEl>
-                    <p:sldTgt/>
-                  </p:tgtEl>
-                </p:cond>
-              </p:prevCondLst>
-              <p:nextCondLst>
-                <p:cond evt="onNext" delay="0">
-                  <p:tgtEl>
-                    <p:sldTgt/>
-                  </p:tgtEl>
-                </p:cond>
-              </p:nextCondLst>
-            </p:seq>
-          </p:childTnLst>
-        </p:cTn>
-      </p:par>
-    </p:tnLst>
-    <p:bldLst>
-      <p:bldP spid="53" grpId="0"/>
-    </p:bldLst>
-  </p:timing>
-</p:sld>
-</file>
-
-<file path=ppt/slides/slide6.xml><?xml version="1.0" encoding="utf-8"?>
-<p:sld xmlns:a="http://schemas.openxmlformats.org/drawingml/2006/main" xmlns:r="http://schemas.openxmlformats.org/officeDocument/2006/relationships" xmlns:p="http://schemas.openxmlformats.org/presentationml/2006/main">
-  <p:cSld>
-    <p:bg>
-      <p:bgPr>
-        <a:solidFill>
-          <a:srgbClr val="111316"/>
-        </a:solidFill>
-        <a:effectLst/>
-      </p:bgPr>
-    </p:bg>
-    <p:spTree>
-      <p:nvGrpSpPr>
-        <p:cNvPr id="1" name=""/>
-        <p:cNvGrpSpPr/>
-        <p:nvPr/>
-      </p:nvGrpSpPr>
-      <p:grpSpPr>
-        <a:xfrm>
-          <a:off x="0" y="0"/>
-          <a:ext cx="0" cy="0"/>
-          <a:chOff x="0" y="0"/>
-          <a:chExt cx="0" cy="0"/>
-        </a:xfrm>
-      </p:grpSpPr>
-      <p:sp>
-        <p:nvSpPr>
-          <p:cNvPr id="61" name="Kicker"/>
-          <p:cNvSpPr txBox="1"/>
-          <p:nvPr/>
-        </p:nvSpPr>
-        <p:spPr>
-          <a:xfrm>
-            <a:off x="900000" y="420000"/>
-            <a:ext cx="10000000" cy="420000"/>
-          </a:xfrm>
-          <a:prstGeom prst="rect">
-            <a:avLst/>
-          </a:prstGeom>
-          <a:noFill/>
-          <a:ln/>
-        </p:spPr>
-        <p:txBody>
-          <a:bodyPr wrap="square" rtlCol="0">
-            <a:normAutofit/>
-          </a:bodyPr>
-          <a:lstStyle/>
-          <a:p>
-            <a:pPr>
-              <a:buNone/>
-            </a:pPr>
-            <a:r>
-              <a:rPr lang="zh-CN" sz="1400" b="1" dirty="0">
-                <a:solidFill>
-                  <a:srgbClr val="C9A84C"/>
-                </a:solidFill>
-                <a:latin typeface="Helvetica Neue"/>
-                <a:ea typeface="Helvetica Neue"/>
-              </a:rPr>
               <a:t>产品：一条链路四段，每段都有可核查数字</a:t>
             </a:r>
           </a:p>
@@ -9560,7 +14151,7 @@
       </p:sp>
       <p:graphicFrame>
         <p:nvGraphicFramePr>
-          <p:cNvPr id="63" name="Table"/>
+          <p:cNvPr id="53" name="Table"/>
           <p:cNvGraphicFramePr>
             <a:graphicFrameLocks noGrp="1"/>
           </p:cNvGraphicFramePr>
@@ -9973,6 +14564,247 @@
       </p:graphicFrame>
       <p:sp>
         <p:nvSpPr>
+          <p:cNvPr id="59" name="Page number"/>
+          <p:cNvSpPr txBox="1"/>
+          <p:nvPr/>
+        </p:nvSpPr>
+        <p:spPr>
+          <a:xfrm>
+            <a:off x="10600000" y="6250000"/>
+            <a:ext cx="1200000" cy="400000"/>
+          </a:xfrm>
+          <a:prstGeom prst="rect">
+            <a:avLst/>
+          </a:prstGeom>
+          <a:noFill/>
+          <a:ln/>
+        </p:spPr>
+        <p:txBody>
+          <a:bodyPr wrap="square" rtlCol="0">
+            <a:normAutofit/>
+          </a:bodyPr>
+          <a:lstStyle/>
+          <a:p>
+            <a:pPr algn="r">
+              <a:buNone/>
+            </a:pPr>
+            <a:r>
+              <a:rPr lang="zh-CN" sz="1000" b="0" dirty="0">
+                <a:solidFill>
+                  <a:srgbClr val="A79F91"/>
+                </a:solidFill>
+                <a:latin typeface="Helvetica Neue"/>
+                <a:ea typeface="Helvetica Neue"/>
+              </a:rPr>
+              <a:t>05 / 36</a:t>
+            </a:r>
+          </a:p>
+        </p:txBody>
+      </p:sp>
+    </p:spTree>
+  </p:cSld>
+  <p:clrMapOvr>
+    <a:overrideClrMapping bg1="lt1" tx1="dk1" bg2="lt2" tx2="dk2" accent1="accent1" accent2="accent2" accent3="accent3" accent4="accent4" accent5="accent5" accent6="accent6" hlink="hlink" folHlink="folHlink"/>
+  </p:clrMapOvr>
+  <p:transition spd="med">
+    <p:fade/>
+  </p:transition>
+</p:sld>
+</file>
+
+<file path=ppt/slides/slide6.xml><?xml version="1.0" encoding="utf-8"?>
+<p:sld xmlns:a="http://schemas.openxmlformats.org/drawingml/2006/main" xmlns:r="http://schemas.openxmlformats.org/officeDocument/2006/relationships" xmlns:p="http://schemas.openxmlformats.org/presentationml/2006/main">
+  <p:cSld>
+    <p:bg>
+      <p:bgPr>
+        <a:solidFill>
+          <a:srgbClr val="111316"/>
+        </a:solidFill>
+        <a:effectLst/>
+      </p:bgPr>
+    </p:bg>
+    <p:spTree>
+      <p:nvGrpSpPr>
+        <p:cNvPr id="1" name=""/>
+        <p:cNvGrpSpPr/>
+        <p:nvPr/>
+      </p:nvGrpSpPr>
+      <p:grpSpPr>
+        <a:xfrm>
+          <a:off x="0" y="0"/>
+          <a:ext cx="0" cy="0"/>
+          <a:chOff x="0" y="0"/>
+          <a:chExt cx="0" cy="0"/>
+        </a:xfrm>
+      </p:grpSpPr>
+      <p:sp>
+        <p:nvSpPr>
+          <p:cNvPr id="61" name="Kicker"/>
+          <p:cNvSpPr txBox="1"/>
+          <p:nvPr/>
+        </p:nvSpPr>
+        <p:spPr>
+          <a:xfrm>
+            <a:off x="900000" y="420000"/>
+            <a:ext cx="10000000" cy="420000"/>
+          </a:xfrm>
+          <a:prstGeom prst="rect">
+            <a:avLst/>
+          </a:prstGeom>
+          <a:noFill/>
+          <a:ln/>
+        </p:spPr>
+        <p:txBody>
+          <a:bodyPr wrap="square" rtlCol="0">
+            <a:normAutofit/>
+          </a:bodyPr>
+          <a:lstStyle/>
+          <a:p>
+            <a:pPr>
+              <a:buNone/>
+            </a:pPr>
+            <a:r>
+              <a:rPr lang="zh-CN" sz="1400" b="1" dirty="0">
+                <a:solidFill>
+                  <a:srgbClr val="C9A84C"/>
+                </a:solidFill>
+                <a:latin typeface="Helvetica Neue"/>
+                <a:ea typeface="Helvetica Neue"/>
+              </a:rPr>
+              <a:t>检测判据长什么样：双基线 + 事件机</a:t>
+            </a:r>
+          </a:p>
+        </p:txBody>
+      </p:sp>
+      <p:sp>
+        <p:nvSpPr>
+          <p:cNvPr id="62" name="Title"/>
+          <p:cNvSpPr txBox="1"/>
+          <p:nvPr/>
+        </p:nvSpPr>
+        <p:spPr>
+          <a:xfrm>
+            <a:off x="900000" y="920000"/>
+            <a:ext cx="10300000" cy="800000"/>
+          </a:xfrm>
+          <a:prstGeom prst="rect">
+            <a:avLst/>
+          </a:prstGeom>
+          <a:noFill/>
+          <a:ln/>
+        </p:spPr>
+        <p:txBody>
+          <a:bodyPr wrap="square" rtlCol="0">
+            <a:normAutofit/>
+          </a:bodyPr>
+          <a:lstStyle/>
+          <a:p>
+            <a:pPr>
+              <a:buNone/>
+            </a:pPr>
+            <a:r>
+              <a:rPr lang="zh-CN" sz="3400" b="1" dirty="0">
+                <a:solidFill>
+                  <a:srgbClr val="F4EFE6"/>
+                </a:solidFill>
+                <a:latin typeface="Georgia"/>
+                <a:ea typeface="Georgia"/>
+              </a:rPr>
+              <a:t>检测判据长什么样：双基线 + 事件机</a:t>
+            </a:r>
+          </a:p>
+        </p:txBody>
+      </p:sp>
+      <p:sp>
+        <p:nvSpPr>
+          <p:cNvPr id="63" name="Body"/>
+          <p:cNvSpPr txBox="1"/>
+          <p:nvPr/>
+        </p:nvSpPr>
+        <p:spPr>
+          <a:xfrm>
+            <a:off x="1050000" y="1850000"/>
+            <a:ext cx="10100000" cy="4500000"/>
+          </a:xfrm>
+          <a:prstGeom prst="rect">
+            <a:avLst/>
+          </a:prstGeom>
+          <a:noFill/>
+          <a:ln/>
+        </p:spPr>
+        <p:txBody>
+          <a:bodyPr wrap="square" rtlCol="0">
+            <a:normAutofit/>
+          </a:bodyPr>
+          <a:lstStyle/>
+          <a:p>
+            <a:pPr marL="285750" indent="-285750">
+              <a:buFont typeface="Arial" panose="020B0604020202020204"/>
+              <a:buChar char="•"/>
+            </a:pPr>
+            <a:r>
+              <a:rPr lang="zh-CN" sz="2000" b="0" dirty="0">
+                <a:solidFill>
+                  <a:srgbClr val="F4EFE6"/>
+                </a:solidFill>
+                <a:latin typeface="Helvetica Neue"/>
+                <a:ea typeface="Helvetica Neue"/>
+              </a:rPr>
+              <a:t>冻结基线抓慢漂移，短窗自适应抓突变</a:t>
+            </a:r>
+          </a:p>
+          <a:p>
+            <a:pPr marL="285750" indent="-285750">
+              <a:buFont typeface="Arial" panose="020B0604020202020204"/>
+              <a:buChar char="•"/>
+            </a:pPr>
+            <a:r>
+              <a:rPr lang="zh-CN" sz="2000" b="0" dirty="0">
+                <a:solidFill>
+                  <a:srgbClr val="F4EFE6"/>
+                </a:solidFill>
+                <a:latin typeface="Helvetica Neue"/>
+                <a:ea typeface="Helvetica Neue"/>
+              </a:rPr>
+              <a:t>事件机：连续 4 点越限进入，连续 8 点低于 0.8×阈退出</a:t>
+            </a:r>
+          </a:p>
+          <a:p>
+            <a:pPr marL="285750" indent="-285750">
+              <a:buFont typeface="Arial" panose="020B0604020202020204"/>
+              <a:buChar char="•"/>
+            </a:pPr>
+            <a:r>
+              <a:rPr lang="zh-CN" sz="2000" b="0" dirty="0">
+                <a:solidFill>
+                  <a:srgbClr val="F4EFE6"/>
+                </a:solidFill>
+                <a:latin typeface="Helvetica Neue"/>
+                <a:ea typeface="Helvetica Neue"/>
+              </a:rPr>
+              <a:t>分级：P1 立即处置 / P2 复核排计划 / P3 趋势观察</a:t>
+            </a:r>
+          </a:p>
+          <a:p>
+            <a:pPr marL="285750" indent="-285750">
+              <a:buFont typeface="Arial" panose="020B0604020202020204"/>
+              <a:buChar char="•"/>
+            </a:pPr>
+            <a:r>
+              <a:rPr lang="zh-CN" sz="2000" b="0" dirty="0">
+                <a:solidFill>
+                  <a:srgbClr val="F4EFE6"/>
+                </a:solidFill>
+                <a:latin typeface="Helvetica Neue"/>
+                <a:ea typeface="Helvetica Neue"/>
+              </a:rPr>
+              <a:t>严重度用分布位置比值，不用单点越限时刻</a:t>
+            </a:r>
+          </a:p>
+        </p:txBody>
+      </p:sp>
+      <p:sp>
+        <p:nvSpPr>
           <p:cNvPr id="69" name="Page number"/>
           <p:cNvSpPr txBox="1"/>
           <p:nvPr/>
@@ -10005,7 +14837,7 @@
                 <a:latin typeface="Helvetica Neue"/>
                 <a:ea typeface="Helvetica Neue"/>
               </a:rPr>
-              <a:t>06 / 27</a:t>
+              <a:t>06 / 36</a:t>
             </a:r>
           </a:p>
         </p:txBody>
@@ -10018,6 +14850,183 @@
   <p:transition spd="med">
     <p:fade/>
   </p:transition>
+  <p:timing>
+    <p:tnLst>
+      <p:par>
+        <p:cTn id="1" dur="indefinite" restart="never" nodeType="tmRoot">
+          <p:childTnLst>
+            <p:seq concurrent="1" nextAc="seek">
+              <p:cTn id="2" dur="indefinite" nodeType="mainSeq">
+                <p:childTnLst>
+                  <p:par>
+                    <p:cTn id="3" fill="hold">
+                      <p:stCondLst>
+                        <p:cond delay="indefinite"/>
+                      </p:stCondLst>
+                      <p:childTnLst>
+                        <p:par>
+                          <p:cTn id="4" presetID="1" presetClass="entr" presetSubtype="0" fill="hold" grpId="0" nodeType="clickEffect">
+                            <p:stCondLst>
+                              <p:cond delay="0"/>
+                            </p:stCondLst>
+                            <p:childTnLst>
+                              <p:set>
+                                <p:cBhvr>
+                                  <p:cTn id="5" dur="1" fill="hold">
+                                    <p:stCondLst>
+                                      <p:cond delay="0"/>
+                                    </p:stCondLst>
+                                  </p:cTn>
+                                  <p:tgtEl>
+                                    <p:spTgt spid="63"/>
+                                  </p:tgtEl>
+                                  <p:attrNameLst>
+                                    <p:attrName>style.visibility</p:attrName>
+                                  </p:attrNameLst>
+                                </p:cBhvr>
+                                <p:to>
+                                  <p:strVal val="visible"/>
+                                </p:to>
+                              </p:set>
+                            </p:childTnLst>
+                          </p:cTn>
+                        </p:par>
+                      </p:childTnLst>
+                    </p:cTn>
+                  </p:par>
+                  <p:par>
+                    <p:cTn id="6" fill="hold">
+                      <p:stCondLst>
+                        <p:cond delay="indefinite"/>
+                      </p:stCondLst>
+                      <p:childTnLst>
+                        <p:par>
+                          <p:cTn id="7" presetID="1" presetClass="entr" presetSubtype="0" fill="hold" grpId="0" nodeType="clickEffect">
+                            <p:stCondLst>
+                              <p:cond delay="0"/>
+                            </p:stCondLst>
+                            <p:childTnLst>
+                              <p:set>
+                                <p:cBhvr>
+                                  <p:cTn id="8" dur="1" fill="hold">
+                                    <p:stCondLst>
+                                      <p:cond delay="0"/>
+                                    </p:stCondLst>
+                                  </p:cTn>
+                                  <p:tgtEl>
+                                    <p:spTgt spid="63"/>
+                                  </p:tgtEl>
+                                  <p:attrNameLst>
+                                    <p:attrName>style.visibility</p:attrName>
+                                  </p:attrNameLst>
+                                </p:cBhvr>
+                                <p:to>
+                                  <p:strVal val="visible"/>
+                                </p:to>
+                              </p:set>
+                            </p:childTnLst>
+                          </p:cTn>
+                        </p:par>
+                      </p:childTnLst>
+                    </p:cTn>
+                  </p:par>
+                  <p:par>
+                    <p:cTn id="9" fill="hold">
+                      <p:stCondLst>
+                        <p:cond delay="indefinite"/>
+                      </p:stCondLst>
+                      <p:childTnLst>
+                        <p:par>
+                          <p:cTn id="10" presetID="1" presetClass="entr" presetSubtype="0" fill="hold" grpId="0" nodeType="clickEffect">
+                            <p:stCondLst>
+                              <p:cond delay="0"/>
+                            </p:stCondLst>
+                            <p:childTnLst>
+                              <p:set>
+                                <p:cBhvr>
+                                  <p:cTn id="11" dur="1" fill="hold">
+                                    <p:stCondLst>
+                                      <p:cond delay="0"/>
+                                    </p:stCondLst>
+                                  </p:cTn>
+                                  <p:tgtEl>
+                                    <p:spTgt spid="63"/>
+                                  </p:tgtEl>
+                                  <p:attrNameLst>
+                                    <p:attrName>style.visibility</p:attrName>
+                                  </p:attrNameLst>
+                                </p:cBhvr>
+                                <p:to>
+                                  <p:strVal val="visible"/>
+                                </p:to>
+                              </p:set>
+                            </p:childTnLst>
+                          </p:cTn>
+                        </p:par>
+                      </p:childTnLst>
+                    </p:cTn>
+                  </p:par>
+                  <p:par>
+                    <p:cTn id="12" fill="hold">
+                      <p:stCondLst>
+                        <p:cond delay="indefinite"/>
+                      </p:stCondLst>
+                      <p:childTnLst>
+                        <p:par>
+                          <p:cTn id="13" presetID="1" presetClass="entr" presetSubtype="0" fill="hold" grpId="0" nodeType="clickEffect">
+                            <p:stCondLst>
+                              <p:cond delay="0"/>
+                            </p:stCondLst>
+                            <p:childTnLst>
+                              <p:set>
+                                <p:cBhvr>
+                                  <p:cTn id="14" dur="1" fill="hold">
+                                    <p:stCondLst>
+                                      <p:cond delay="0"/>
+                                    </p:stCondLst>
+                                  </p:cTn>
+                                  <p:tgtEl>
+                                    <p:spTgt spid="63"/>
+                                  </p:tgtEl>
+                                  <p:attrNameLst>
+                                    <p:attrName>style.visibility</p:attrName>
+                                  </p:attrNameLst>
+                                </p:cBhvr>
+                                <p:to>
+                                  <p:strVal val="visible"/>
+                                </p:to>
+                              </p:set>
+                            </p:childTnLst>
+                          </p:cTn>
+                        </p:par>
+                      </p:childTnLst>
+                    </p:cTn>
+                  </p:par>
+                </p:childTnLst>
+              </p:cTn>
+              <p:prevCondLst>
+                <p:cond evt="onPrev" delay="0">
+                  <p:tgtEl>
+                    <p:sldTgt/>
+                  </p:tgtEl>
+                </p:cond>
+              </p:prevCondLst>
+              <p:nextCondLst>
+                <p:cond evt="onNext" delay="0">
+                  <p:tgtEl>
+                    <p:sldTgt/>
+                  </p:tgtEl>
+                </p:cond>
+              </p:nextCondLst>
+            </p:seq>
+          </p:childTnLst>
+        </p:cTn>
+      </p:par>
+    </p:tnLst>
+    <p:bldLst>
+      <p:bldP spid="63" grpId="0"/>
+    </p:bldLst>
+  </p:timing>
 </p:sld>
 </file>
 
@@ -10159,7 +15168,7 @@
                 <a:latin typeface="Helvetica Neue"/>
                 <a:ea typeface="Helvetica Neue"/>
               </a:rPr>
-              <a:t>冻结基线抓慢漂移，短窗自适应抓突变</a:t>
+              <a:t>自适应通道对慢漂移实测完全漏检（两条独立链路复现）</a:t>
             </a:r>
           </a:p>
           <a:p>
@@ -10175,7 +15184,7 @@
                 <a:latin typeface="Helvetica Neue"/>
                 <a:ea typeface="Helvetica Neue"/>
               </a:rPr>
-              <a:t>自适应通道对慢漂移实测完全漏检</a:t>
+              <a:t>同召回下误报事件比对照实现少 2.8 倍</a:t>
             </a:r>
           </a:p>
           <a:p>
@@ -10191,7 +15200,7 @@
                 <a:latin typeface="Helvetica Neue"/>
                 <a:ea typeface="Helvetica Neue"/>
               </a:rPr>
-              <a:t>同召回下误报事件比对照实现少 2.8 倍</a:t>
+              <a:t>事件机把分数变成"事件"，而不是点报警</a:t>
             </a:r>
           </a:p>
           <a:p>
@@ -10207,7 +15216,7 @@
                 <a:latin typeface="Helvetica Neue"/>
                 <a:ea typeface="Helvetica Neue"/>
               </a:rPr>
-              <a:t>事件机把分数变成"事件"，而不是点报警</a:t>
+              <a:t>参考域必须取稳态段：投运段做参考会误报 26/18/26 次</a:t>
             </a:r>
           </a:p>
         </p:txBody>
@@ -10246,7 +15255,7 @@
                 <a:latin typeface="Helvetica Neue"/>
                 <a:ea typeface="Helvetica Neue"/>
               </a:rPr>
-              <a:t>07 / 27</a:t>
+              <a:t>07 / 36</a:t>
             </a:r>
           </a:p>
         </p:txBody>
@@ -10664,7 +15673,7 @@
                 <a:latin typeface="Helvetica Neue"/>
                 <a:ea typeface="Helvetica Neue"/>
               </a:rPr>
-              <a:t>08 / 27</a:t>
+              <a:t>08 / 36</a:t>
             </a:r>
           </a:p>
         </p:txBody>
@@ -11082,7 +16091,7 @@
                 <a:latin typeface="Helvetica Neue"/>
                 <a:ea typeface="Helvetica Neue"/>
               </a:rPr>
-              <a:t>09 / 27</a:t>
+              <a:t>09 / 36</a:t>
             </a:r>
           </a:p>
         </p:txBody>

--- a/deliverables/ppt/澜脉_商业计划书.pptx
+++ b/deliverables/ppt/澜脉_商业计划书.pptx
@@ -52,7 +52,6 @@
     <p:sldId id="289" r:id="rId35"/>
     <p:sldId id="303" r:id="rId49"/>
     <p:sldId id="290" r:id="rId36"/>
-    <p:sldId id="291" r:id="rId37"/>
   </p:sldIdLst>
   <p:sldSz cx="12192000" cy="6858000" type="screen16x9"/>
   <p:notesSz cx="6858000" cy="9144000"/>
@@ -552,6 +551,994 @@
 </file>
 
 <file path=ppt/slides/slide10.xml><?xml version="1.0" encoding="utf-8"?>
+<p:sld xmlns:a="http://schemas.openxmlformats.org/drawingml/2006/main" xmlns:p="http://schemas.openxmlformats.org/presentationml/2006/main" xmlns:r="http://schemas.openxmlformats.org/officeDocument/2006/relationships">
+  <p:cSld>
+    <p:spTree>
+      <p:nvGrpSpPr>
+        <p:cNvPr id="1" name=""/>
+        <p:cNvGrpSpPr/>
+        <p:nvPr/>
+      </p:nvGrpSpPr>
+      <p:grpSpPr/>
+      <p:pic>
+        <p:nvPicPr>
+          <p:cNvPr id="2" name="Picture 1" descr="bsm1_4in1.png"/>
+          <p:cNvPicPr>
+            <a:picLocks noChangeAspect="1"/>
+          </p:cNvPicPr>
+          <p:nvPr/>
+        </p:nvPicPr>
+        <p:blipFill>
+          <a:blip r:embed="rId2"/>
+          <a:stretch>
+            <a:fillRect/>
+          </a:stretch>
+        </p:blipFill>
+        <p:spPr>
+          <a:xfrm>
+            <a:off x="2694940" y="731520"/>
+            <a:ext cx="6802120" cy="4709160"/>
+          </a:xfrm>
+          <a:prstGeom prst="rect">
+            <a:avLst/>
+          </a:prstGeom>
+        </p:spPr>
+      </p:pic>
+      <p:sp>
+        <p:nvSpPr>
+          <p:cNvPr id="3" name="TextBox 2"/>
+          <p:cNvSpPr txBox="1"/>
+          <p:nvPr/>
+        </p:nvSpPr>
+        <p:spPr>
+          <a:xfrm>
+            <a:off x="731520" y="5612130"/>
+            <a:ext cx="10728960" cy="685800"/>
+          </a:xfrm>
+          <a:prstGeom prst="rect">
+            <a:avLst/>
+          </a:prstGeom>
+          <a:noFill/>
+        </p:spPr>
+        <p:txBody>
+          <a:bodyPr wrap="square">
+            <a:spAutoFit/>
+          </a:bodyPr>
+          <a:lstStyle/>
+          <a:p>
+            <a:pPr algn="ctr"/>
+            <a:r>
+              <a:rPr sz="1400">
+                <a:solidFill>
+                  <a:srgbClr val="334455"/>
+                </a:solidFill>
+              </a:rPr>
+              <a:t>数字孪生闭环四图：注入退化 → 检测 → RUL → 决策</a:t>
+            </a:r>
+          </a:p>
+        </p:txBody>
+      </p:sp>
+    </p:spTree>
+  </p:cSld>
+  <p:clrMapOvr>
+    <a:masterClrMapping/>
+  </p:clrMapOvr>
+</p:sld>
+</file>
+
+<file path=ppt/slides/slide11.xml><?xml version="1.0" encoding="utf-8"?>
+<p:sld xmlns:a="http://schemas.openxmlformats.org/drawingml/2006/main" xmlns:r="http://schemas.openxmlformats.org/officeDocument/2006/relationships" xmlns:p="http://schemas.openxmlformats.org/presentationml/2006/main">
+  <p:cSld>
+    <p:bg>
+      <p:bgPr>
+        <a:solidFill>
+          <a:srgbClr val="111316"/>
+        </a:solidFill>
+        <a:effectLst/>
+      </p:bgPr>
+    </p:bg>
+    <p:spTree>
+      <p:nvGrpSpPr>
+        <p:cNvPr id="1" name=""/>
+        <p:cNvGrpSpPr/>
+        <p:nvPr/>
+      </p:nvGrpSpPr>
+      <p:grpSpPr>
+        <a:xfrm>
+          <a:off x="0" y="0"/>
+          <a:ext cx="0" cy="0"/>
+          <a:chOff x="0" y="0"/>
+          <a:chExt cx="0" cy="0"/>
+        </a:xfrm>
+      </p:grpSpPr>
+      <p:sp>
+        <p:nvSpPr>
+          <p:cNvPr id="81" name="Kicker"/>
+          <p:cNvSpPr txBox="1"/>
+          <p:nvPr/>
+        </p:nvSpPr>
+        <p:spPr>
+          <a:xfrm>
+            <a:off x="900000" y="420000"/>
+            <a:ext cx="10000000" cy="420000"/>
+          </a:xfrm>
+          <a:prstGeom prst="rect">
+            <a:avLst/>
+          </a:prstGeom>
+          <a:noFill/>
+          <a:ln/>
+        </p:spPr>
+        <p:txBody>
+          <a:bodyPr wrap="square" rtlCol="0">
+            <a:normAutofit/>
+          </a:bodyPr>
+          <a:lstStyle/>
+          <a:p>
+            <a:pPr>
+              <a:buNone/>
+            </a:pPr>
+            <a:r>
+              <a:rPr lang="zh-CN" sz="1400" b="1" dirty="0">
+                <a:solidFill>
+                  <a:srgbClr val="C9A84C"/>
+                </a:solidFill>
+                <a:latin typeface="Helvetica Neue"/>
+                <a:ea typeface="Helvetica Neue"/>
+              </a:rPr>
+              <a:t>创新二：阈值必须按工况标定，绝对阈值必然失效</a:t>
+            </a:r>
+          </a:p>
+        </p:txBody>
+      </p:sp>
+      <p:sp>
+        <p:nvSpPr>
+          <p:cNvPr id="82" name="Title"/>
+          <p:cNvSpPr txBox="1"/>
+          <p:nvPr/>
+        </p:nvSpPr>
+        <p:spPr>
+          <a:xfrm>
+            <a:off x="900000" y="920000"/>
+            <a:ext cx="10300000" cy="800000"/>
+          </a:xfrm>
+          <a:prstGeom prst="rect">
+            <a:avLst/>
+          </a:prstGeom>
+          <a:noFill/>
+          <a:ln/>
+        </p:spPr>
+        <p:txBody>
+          <a:bodyPr wrap="square" rtlCol="0">
+            <a:normAutofit/>
+          </a:bodyPr>
+          <a:lstStyle/>
+          <a:p>
+            <a:pPr>
+              <a:buNone/>
+            </a:pPr>
+            <a:r>
+              <a:rPr lang="zh-CN" sz="3400" b="1" dirty="0">
+                <a:solidFill>
+                  <a:srgbClr val="F4EFE6"/>
+                </a:solidFill>
+                <a:latin typeface="Georgia"/>
+                <a:ea typeface="Georgia"/>
+              </a:rPr>
+              <a:t>创新二：阈值必须按工况标定，绝对阈值必然失效</a:t>
+            </a:r>
+          </a:p>
+        </p:txBody>
+      </p:sp>
+      <p:sp>
+        <p:nvSpPr>
+          <p:cNvPr id="83" name="Body"/>
+          <p:cNvSpPr txBox="1"/>
+          <p:nvPr/>
+        </p:nvSpPr>
+        <p:spPr>
+          <a:xfrm>
+            <a:off x="1050000" y="1850000"/>
+            <a:ext cx="10100000" cy="4500000"/>
+          </a:xfrm>
+          <a:prstGeom prst="rect">
+            <a:avLst/>
+          </a:prstGeom>
+          <a:noFill/>
+          <a:ln/>
+        </p:spPr>
+        <p:txBody>
+          <a:bodyPr wrap="square" rtlCol="0">
+            <a:normAutofit/>
+          </a:bodyPr>
+          <a:lstStyle/>
+          <a:p>
+            <a:pPr marL="285750" indent="-285750">
+              <a:buFont typeface="Arial" panose="020B0604020202020204"/>
+              <a:buChar char="•"/>
+            </a:pPr>
+            <a:r>
+              <a:rPr lang="zh-CN" sz="2000" b="0" dirty="0">
+                <a:solidFill>
+                  <a:srgbClr val="F4EFE6"/>
+                </a:solidFill>
+                <a:latin typeface="Helvetica Neue"/>
+                <a:ea typeface="Helvetica Neue"/>
+              </a:rPr>
+              <a:t>换一段进水，健康本底就变，绝对阈值立刻失效</a:t>
+            </a:r>
+          </a:p>
+          <a:p>
+            <a:pPr marL="285750" indent="-285750">
+              <a:buFont typeface="Arial" panose="020B0604020202020204"/>
+              <a:buChar char="•"/>
+            </a:pPr>
+            <a:r>
+              <a:rPr lang="zh-CN" sz="2000" b="0" dirty="0">
+                <a:solidFill>
+                  <a:srgbClr val="F4EFE6"/>
+                </a:solidFill>
+                <a:latin typeface="Helvetica Neue"/>
+                <a:ea typeface="Helvetica Neue"/>
+              </a:rPr>
+              <a:t>工况分箱条件化：健康轨迹最高分 19.18 → 14.86</a:t>
+            </a:r>
+          </a:p>
+          <a:p>
+            <a:pPr marL="285750" indent="-285750">
+              <a:buFont typeface="Arial" panose="020B0604020202020204"/>
+              <a:buChar char="•"/>
+            </a:pPr>
+            <a:r>
+              <a:rPr lang="zh-CN" sz="2000" b="0" dirty="0">
+                <a:solidFill>
+                  <a:srgbClr val="F4EFE6"/>
+                </a:solidFill>
+                <a:latin typeface="Helvetica Neue"/>
+                <a:ea typeface="Helvetica Neue"/>
+              </a:rPr>
+              <a:t>仍不够时用同期同工况对拍差分</a:t>
+            </a:r>
+          </a:p>
+          <a:p>
+            <a:pPr marL="285750" indent="-285750">
+              <a:buFont typeface="Arial" panose="020B0604020202020204"/>
+              <a:buChar char="•"/>
+            </a:pPr>
+            <a:r>
+              <a:rPr lang="zh-CN" sz="2000" b="0" dirty="0">
+                <a:solidFill>
+                  <a:srgbClr val="F4EFE6"/>
+                </a:solidFill>
+                <a:latin typeface="Helvetica Neue"/>
+                <a:ea typeface="Helvetica Neue"/>
+              </a:rPr>
+              <a:t>对拍让原始量从"检不出"变成失效前 14.5 天</a:t>
+            </a:r>
+          </a:p>
+        </p:txBody>
+      </p:sp>
+      <p:sp>
+        <p:nvSpPr>
+          <p:cNvPr id="89" name="Page number"/>
+          <p:cNvSpPr txBox="1"/>
+          <p:nvPr/>
+        </p:nvSpPr>
+        <p:spPr>
+          <a:xfrm>
+            <a:off x="10600000" y="6250000"/>
+            <a:ext cx="1200000" cy="400000"/>
+          </a:xfrm>
+          <a:prstGeom prst="rect">
+            <a:avLst/>
+          </a:prstGeom>
+          <a:noFill/>
+          <a:ln/>
+        </p:spPr>
+        <p:txBody>
+          <a:bodyPr wrap="square" rtlCol="0">
+            <a:normAutofit/>
+          </a:bodyPr>
+          <a:lstStyle/>
+          <a:p>
+            <a:pPr algn="r">
+              <a:buNone/>
+            </a:pPr>
+            <a:r>
+              <a:rPr lang="zh-CN" sz="1000" b="0" dirty="0">
+                <a:solidFill>
+                  <a:srgbClr val="A79F91"/>
+                </a:solidFill>
+                <a:latin typeface="Helvetica Neue"/>
+                <a:ea typeface="Helvetica Neue"/>
+              </a:rPr>
+              <a:t>08 / 36</a:t>
+            </a:r>
+          </a:p>
+        </p:txBody>
+      </p:sp>
+    </p:spTree>
+  </p:cSld>
+  <p:clrMapOvr>
+    <a:overrideClrMapping bg1="lt1" tx1="dk1" bg2="lt2" tx2="dk2" accent1="accent1" accent2="accent2" accent3="accent3" accent4="accent4" accent5="accent5" accent6="accent6" hlink="hlink" folHlink="folHlink"/>
+  </p:clrMapOvr>
+  <p:transition spd="med">
+    <p:fade/>
+  </p:transition>
+  <p:timing>
+    <p:tnLst>
+      <p:par>
+        <p:cTn id="1" dur="indefinite" restart="never" nodeType="tmRoot">
+          <p:childTnLst>
+            <p:seq concurrent="1" nextAc="seek">
+              <p:cTn id="2" dur="indefinite" nodeType="mainSeq">
+                <p:childTnLst>
+                  <p:par>
+                    <p:cTn id="3" fill="hold">
+                      <p:stCondLst>
+                        <p:cond delay="indefinite"/>
+                      </p:stCondLst>
+                      <p:childTnLst>
+                        <p:par>
+                          <p:cTn id="4" presetID="1" presetClass="entr" presetSubtype="0" fill="hold" grpId="0" nodeType="clickEffect">
+                            <p:stCondLst>
+                              <p:cond delay="0"/>
+                            </p:stCondLst>
+                            <p:childTnLst>
+                              <p:set>
+                                <p:cBhvr>
+                                  <p:cTn id="5" dur="1" fill="hold">
+                                    <p:stCondLst>
+                                      <p:cond delay="0"/>
+                                    </p:stCondLst>
+                                  </p:cTn>
+                                  <p:tgtEl>
+                                    <p:spTgt spid="83"/>
+                                  </p:tgtEl>
+                                  <p:attrNameLst>
+                                    <p:attrName>style.visibility</p:attrName>
+                                  </p:attrNameLst>
+                                </p:cBhvr>
+                                <p:to>
+                                  <p:strVal val="visible"/>
+                                </p:to>
+                              </p:set>
+                            </p:childTnLst>
+                          </p:cTn>
+                        </p:par>
+                      </p:childTnLst>
+                    </p:cTn>
+                  </p:par>
+                  <p:par>
+                    <p:cTn id="6" fill="hold">
+                      <p:stCondLst>
+                        <p:cond delay="indefinite"/>
+                      </p:stCondLst>
+                      <p:childTnLst>
+                        <p:par>
+                          <p:cTn id="7" presetID="1" presetClass="entr" presetSubtype="0" fill="hold" grpId="0" nodeType="clickEffect">
+                            <p:stCondLst>
+                              <p:cond delay="0"/>
+                            </p:stCondLst>
+                            <p:childTnLst>
+                              <p:set>
+                                <p:cBhvr>
+                                  <p:cTn id="8" dur="1" fill="hold">
+                                    <p:stCondLst>
+                                      <p:cond delay="0"/>
+                                    </p:stCondLst>
+                                  </p:cTn>
+                                  <p:tgtEl>
+                                    <p:spTgt spid="83"/>
+                                  </p:tgtEl>
+                                  <p:attrNameLst>
+                                    <p:attrName>style.visibility</p:attrName>
+                                  </p:attrNameLst>
+                                </p:cBhvr>
+                                <p:to>
+                                  <p:strVal val="visible"/>
+                                </p:to>
+                              </p:set>
+                            </p:childTnLst>
+                          </p:cTn>
+                        </p:par>
+                      </p:childTnLst>
+                    </p:cTn>
+                  </p:par>
+                  <p:par>
+                    <p:cTn id="9" fill="hold">
+                      <p:stCondLst>
+                        <p:cond delay="indefinite"/>
+                      </p:stCondLst>
+                      <p:childTnLst>
+                        <p:par>
+                          <p:cTn id="10" presetID="1" presetClass="entr" presetSubtype="0" fill="hold" grpId="0" nodeType="clickEffect">
+                            <p:stCondLst>
+                              <p:cond delay="0"/>
+                            </p:stCondLst>
+                            <p:childTnLst>
+                              <p:set>
+                                <p:cBhvr>
+                                  <p:cTn id="11" dur="1" fill="hold">
+                                    <p:stCondLst>
+                                      <p:cond delay="0"/>
+                                    </p:stCondLst>
+                                  </p:cTn>
+                                  <p:tgtEl>
+                                    <p:spTgt spid="83"/>
+                                  </p:tgtEl>
+                                  <p:attrNameLst>
+                                    <p:attrName>style.visibility</p:attrName>
+                                  </p:attrNameLst>
+                                </p:cBhvr>
+                                <p:to>
+                                  <p:strVal val="visible"/>
+                                </p:to>
+                              </p:set>
+                            </p:childTnLst>
+                          </p:cTn>
+                        </p:par>
+                      </p:childTnLst>
+                    </p:cTn>
+                  </p:par>
+                  <p:par>
+                    <p:cTn id="12" fill="hold">
+                      <p:stCondLst>
+                        <p:cond delay="indefinite"/>
+                      </p:stCondLst>
+                      <p:childTnLst>
+                        <p:par>
+                          <p:cTn id="13" presetID="1" presetClass="entr" presetSubtype="0" fill="hold" grpId="0" nodeType="clickEffect">
+                            <p:stCondLst>
+                              <p:cond delay="0"/>
+                            </p:stCondLst>
+                            <p:childTnLst>
+                              <p:set>
+                                <p:cBhvr>
+                                  <p:cTn id="14" dur="1" fill="hold">
+                                    <p:stCondLst>
+                                      <p:cond delay="0"/>
+                                    </p:stCondLst>
+                                  </p:cTn>
+                                  <p:tgtEl>
+                                    <p:spTgt spid="83"/>
+                                  </p:tgtEl>
+                                  <p:attrNameLst>
+                                    <p:attrName>style.visibility</p:attrName>
+                                  </p:attrNameLst>
+                                </p:cBhvr>
+                                <p:to>
+                                  <p:strVal val="visible"/>
+                                </p:to>
+                              </p:set>
+                            </p:childTnLst>
+                          </p:cTn>
+                        </p:par>
+                      </p:childTnLst>
+                    </p:cTn>
+                  </p:par>
+                </p:childTnLst>
+              </p:cTn>
+              <p:prevCondLst>
+                <p:cond evt="onPrev" delay="0">
+                  <p:tgtEl>
+                    <p:sldTgt/>
+                  </p:tgtEl>
+                </p:cond>
+              </p:prevCondLst>
+              <p:nextCondLst>
+                <p:cond evt="onNext" delay="0">
+                  <p:tgtEl>
+                    <p:sldTgt/>
+                  </p:tgtEl>
+                </p:cond>
+              </p:nextCondLst>
+            </p:seq>
+          </p:childTnLst>
+        </p:cTn>
+      </p:par>
+    </p:tnLst>
+    <p:bldLst>
+      <p:bldP spid="83" grpId="0"/>
+    </p:bldLst>
+  </p:timing>
+</p:sld>
+</file>
+
+<file path=ppt/slides/slide12.xml><?xml version="1.0" encoding="utf-8"?>
+<p:sld xmlns:a="http://schemas.openxmlformats.org/drawingml/2006/main" xmlns:r="http://schemas.openxmlformats.org/officeDocument/2006/relationships" xmlns:p="http://schemas.openxmlformats.org/presentationml/2006/main">
+  <p:cSld>
+    <p:bg>
+      <p:bgPr>
+        <a:solidFill>
+          <a:srgbClr val="111316"/>
+        </a:solidFill>
+        <a:effectLst/>
+      </p:bgPr>
+    </p:bg>
+    <p:spTree>
+      <p:nvGrpSpPr>
+        <p:cNvPr id="1" name=""/>
+        <p:cNvGrpSpPr/>
+        <p:nvPr/>
+      </p:nvGrpSpPr>
+      <p:grpSpPr>
+        <a:xfrm>
+          <a:off x="0" y="0"/>
+          <a:ext cx="0" cy="0"/>
+          <a:chOff x="0" y="0"/>
+          <a:chExt cx="0" cy="0"/>
+        </a:xfrm>
+      </p:grpSpPr>
+      <p:sp>
+        <p:nvSpPr>
+          <p:cNvPr id="91" name="Kicker"/>
+          <p:cNvSpPr txBox="1"/>
+          <p:nvPr/>
+        </p:nvSpPr>
+        <p:spPr>
+          <a:xfrm>
+            <a:off x="900000" y="420000"/>
+            <a:ext cx="10000000" cy="420000"/>
+          </a:xfrm>
+          <a:prstGeom prst="rect">
+            <a:avLst/>
+          </a:prstGeom>
+          <a:noFill/>
+          <a:ln/>
+        </p:spPr>
+        <p:txBody>
+          <a:bodyPr wrap="square" rtlCol="0">
+            <a:normAutofit/>
+          </a:bodyPr>
+          <a:lstStyle/>
+          <a:p>
+            <a:pPr>
+              <a:buNone/>
+            </a:pPr>
+            <a:r>
+              <a:rPr lang="zh-CN" sz="1400" b="1" dirty="0">
+                <a:solidFill>
+                  <a:srgbClr val="C9A84C"/>
+                </a:solidFill>
+                <a:latin typeface="Helvetica Neue"/>
+                <a:ea typeface="Helvetica Neue"/>
+              </a:rPr>
+              <a:t>创新三：设备级比值通道，全厂大数据看不见的退化它看得见</a:t>
+            </a:r>
+          </a:p>
+        </p:txBody>
+      </p:sp>
+      <p:sp>
+        <p:nvSpPr>
+          <p:cNvPr id="92" name="Title"/>
+          <p:cNvSpPr txBox="1"/>
+          <p:nvPr/>
+        </p:nvSpPr>
+        <p:spPr>
+          <a:xfrm>
+            <a:off x="900000" y="920000"/>
+            <a:ext cx="10300000" cy="800000"/>
+          </a:xfrm>
+          <a:prstGeom prst="rect">
+            <a:avLst/>
+          </a:prstGeom>
+          <a:noFill/>
+          <a:ln/>
+        </p:spPr>
+        <p:txBody>
+          <a:bodyPr wrap="square" rtlCol="0">
+            <a:normAutofit/>
+          </a:bodyPr>
+          <a:lstStyle/>
+          <a:p>
+            <a:pPr>
+              <a:buNone/>
+            </a:pPr>
+            <a:r>
+              <a:rPr lang="zh-CN" sz="3400" b="1" dirty="0">
+                <a:solidFill>
+                  <a:srgbClr val="F4EFE6"/>
+                </a:solidFill>
+                <a:latin typeface="Georgia"/>
+                <a:ea typeface="Georgia"/>
+              </a:rPr>
+              <a:t>创新三：设备级比值通道，全厂大数据看不见的退化它看得见</a:t>
+            </a:r>
+          </a:p>
+        </p:txBody>
+      </p:sp>
+      <p:sp>
+        <p:nvSpPr>
+          <p:cNvPr id="93" name="Body"/>
+          <p:cNvSpPr txBox="1"/>
+          <p:nvPr/>
+        </p:nvSpPr>
+        <p:spPr>
+          <a:xfrm>
+            <a:off x="1050000" y="1850000"/>
+            <a:ext cx="10100000" cy="4500000"/>
+          </a:xfrm>
+          <a:prstGeom prst="rect">
+            <a:avLst/>
+          </a:prstGeom>
+          <a:noFill/>
+          <a:ln/>
+        </p:spPr>
+        <p:txBody>
+          <a:bodyPr wrap="square" rtlCol="0">
+            <a:normAutofit/>
+          </a:bodyPr>
+          <a:lstStyle/>
+          <a:p>
+            <a:pPr marL="285750" indent="-285750">
+              <a:buFont typeface="Arial" panose="020B0604020202020204"/>
+              <a:buChar char="•"/>
+            </a:pPr>
+            <a:r>
+              <a:rPr lang="zh-CN" sz="2000" b="0" dirty="0">
+                <a:solidFill>
+                  <a:srgbClr val="F4EFE6"/>
+                </a:solidFill>
+                <a:latin typeface="Helvetica Neue"/>
+                <a:ea typeface="Helvetica Neue"/>
+              </a:rPr>
+              <a:t>整厂 5 个原始量：零误报口径 86.11 天（晚于失效）</a:t>
+            </a:r>
+          </a:p>
+          <a:p>
+            <a:pPr marL="285750" indent="-285750">
+              <a:buFont typeface="Arial" panose="020B0604020202020204"/>
+              <a:buChar char="•"/>
+            </a:pPr>
+            <a:r>
+              <a:rPr lang="zh-CN" sz="2000" b="0" dirty="0">
+                <a:solidFill>
+                  <a:srgbClr val="F4EFE6"/>
+                </a:solidFill>
+                <a:latin typeface="Helvetica Neue"/>
+                <a:ea typeface="Helvetica Neue"/>
+              </a:rPr>
+              <a:t>设备级比值（干固体 ÷ 湿泥饼量）：9.80 天检出</a:t>
+            </a:r>
+          </a:p>
+          <a:p>
+            <a:pPr marL="285750" indent="-285750">
+              <a:buFont typeface="Arial" panose="020B0604020202020204"/>
+              <a:buChar char="•"/>
+            </a:pPr>
+            <a:r>
+              <a:rPr lang="zh-CN" sz="2000" b="0" dirty="0">
+                <a:solidFill>
+                  <a:srgbClr val="F4EFE6"/>
+                </a:solidFill>
+                <a:latin typeface="Helvetica Neue"/>
+                <a:ea typeface="Helvetica Neue"/>
+              </a:rPr>
+              <a:t>提前 37.47 天；湿泥饼量 +55.53%（理论 +55.6%）</a:t>
+            </a:r>
+          </a:p>
+          <a:p>
+            <a:pPr marL="285750" indent="-285750">
+              <a:buFont typeface="Arial" panose="020B0604020202020204"/>
+              <a:buChar char="•"/>
+            </a:pPr>
+            <a:r>
+              <a:rPr lang="zh-CN" sz="2000" b="0" dirty="0">
+                <a:solidFill>
+                  <a:srgbClr val="F4EFE6"/>
+                </a:solidFill>
+                <a:latin typeface="Helvetica Neue"/>
+                <a:ea typeface="Helvetica Neue"/>
+              </a:rPr>
+              <a:t>沼气、能耗、出水几乎无痕（±0.03%）</a:t>
+            </a:r>
+          </a:p>
+        </p:txBody>
+      </p:sp>
+      <p:sp>
+        <p:nvSpPr>
+          <p:cNvPr id="99" name="Page number"/>
+          <p:cNvSpPr txBox="1"/>
+          <p:nvPr/>
+        </p:nvSpPr>
+        <p:spPr>
+          <a:xfrm>
+            <a:off x="10600000" y="6250000"/>
+            <a:ext cx="1200000" cy="400000"/>
+          </a:xfrm>
+          <a:prstGeom prst="rect">
+            <a:avLst/>
+          </a:prstGeom>
+          <a:noFill/>
+          <a:ln/>
+        </p:spPr>
+        <p:txBody>
+          <a:bodyPr wrap="square" rtlCol="0">
+            <a:normAutofit/>
+          </a:bodyPr>
+          <a:lstStyle/>
+          <a:p>
+            <a:pPr algn="r">
+              <a:buNone/>
+            </a:pPr>
+            <a:r>
+              <a:rPr lang="zh-CN" sz="1000" b="0" dirty="0">
+                <a:solidFill>
+                  <a:srgbClr val="A79F91"/>
+                </a:solidFill>
+                <a:latin typeface="Helvetica Neue"/>
+                <a:ea typeface="Helvetica Neue"/>
+              </a:rPr>
+              <a:t>09 / 36</a:t>
+            </a:r>
+          </a:p>
+        </p:txBody>
+      </p:sp>
+    </p:spTree>
+  </p:cSld>
+  <p:clrMapOvr>
+    <a:overrideClrMapping bg1="lt1" tx1="dk1" bg2="lt2" tx2="dk2" accent1="accent1" accent2="accent2" accent3="accent3" accent4="accent4" accent5="accent5" accent6="accent6" hlink="hlink" folHlink="folHlink"/>
+  </p:clrMapOvr>
+  <p:transition spd="med">
+    <p:fade/>
+  </p:transition>
+  <p:timing>
+    <p:tnLst>
+      <p:par>
+        <p:cTn id="1" dur="indefinite" restart="never" nodeType="tmRoot">
+          <p:childTnLst>
+            <p:seq concurrent="1" nextAc="seek">
+              <p:cTn id="2" dur="indefinite" nodeType="mainSeq">
+                <p:childTnLst>
+                  <p:par>
+                    <p:cTn id="3" fill="hold">
+                      <p:stCondLst>
+                        <p:cond delay="indefinite"/>
+                      </p:stCondLst>
+                      <p:childTnLst>
+                        <p:par>
+                          <p:cTn id="4" presetID="1" presetClass="entr" presetSubtype="0" fill="hold" grpId="0" nodeType="clickEffect">
+                            <p:stCondLst>
+                              <p:cond delay="0"/>
+                            </p:stCondLst>
+                            <p:childTnLst>
+                              <p:set>
+                                <p:cBhvr>
+                                  <p:cTn id="5" dur="1" fill="hold">
+                                    <p:stCondLst>
+                                      <p:cond delay="0"/>
+                                    </p:stCondLst>
+                                  </p:cTn>
+                                  <p:tgtEl>
+                                    <p:spTgt spid="93"/>
+                                  </p:tgtEl>
+                                  <p:attrNameLst>
+                                    <p:attrName>style.visibility</p:attrName>
+                                  </p:attrNameLst>
+                                </p:cBhvr>
+                                <p:to>
+                                  <p:strVal val="visible"/>
+                                </p:to>
+                              </p:set>
+                            </p:childTnLst>
+                          </p:cTn>
+                        </p:par>
+                      </p:childTnLst>
+                    </p:cTn>
+                  </p:par>
+                  <p:par>
+                    <p:cTn id="6" fill="hold">
+                      <p:stCondLst>
+                        <p:cond delay="indefinite"/>
+                      </p:stCondLst>
+                      <p:childTnLst>
+                        <p:par>
+                          <p:cTn id="7" presetID="1" presetClass="entr" presetSubtype="0" fill="hold" grpId="0" nodeType="clickEffect">
+                            <p:stCondLst>
+                              <p:cond delay="0"/>
+                            </p:stCondLst>
+                            <p:childTnLst>
+                              <p:set>
+                                <p:cBhvr>
+                                  <p:cTn id="8" dur="1" fill="hold">
+                                    <p:stCondLst>
+                                      <p:cond delay="0"/>
+                                    </p:stCondLst>
+                                  </p:cTn>
+                                  <p:tgtEl>
+                                    <p:spTgt spid="93"/>
+                                  </p:tgtEl>
+                                  <p:attrNameLst>
+                                    <p:attrName>style.visibility</p:attrName>
+                                  </p:attrNameLst>
+                                </p:cBhvr>
+                                <p:to>
+                                  <p:strVal val="visible"/>
+                                </p:to>
+                              </p:set>
+                            </p:childTnLst>
+                          </p:cTn>
+                        </p:par>
+                      </p:childTnLst>
+                    </p:cTn>
+                  </p:par>
+                  <p:par>
+                    <p:cTn id="9" fill="hold">
+                      <p:stCondLst>
+                        <p:cond delay="indefinite"/>
+                      </p:stCondLst>
+                      <p:childTnLst>
+                        <p:par>
+                          <p:cTn id="10" presetID="1" presetClass="entr" presetSubtype="0" fill="hold" grpId="0" nodeType="clickEffect">
+                            <p:stCondLst>
+                              <p:cond delay="0"/>
+                            </p:stCondLst>
+                            <p:childTnLst>
+                              <p:set>
+                                <p:cBhvr>
+                                  <p:cTn id="11" dur="1" fill="hold">
+                                    <p:stCondLst>
+                                      <p:cond delay="0"/>
+                                    </p:stCondLst>
+                                  </p:cTn>
+                                  <p:tgtEl>
+                                    <p:spTgt spid="93"/>
+                                  </p:tgtEl>
+                                  <p:attrNameLst>
+                                    <p:attrName>style.visibility</p:attrName>
+                                  </p:attrNameLst>
+                                </p:cBhvr>
+                                <p:to>
+                                  <p:strVal val="visible"/>
+                                </p:to>
+                              </p:set>
+                            </p:childTnLst>
+                          </p:cTn>
+                        </p:par>
+                      </p:childTnLst>
+                    </p:cTn>
+                  </p:par>
+                  <p:par>
+                    <p:cTn id="12" fill="hold">
+                      <p:stCondLst>
+                        <p:cond delay="indefinite"/>
+                      </p:stCondLst>
+                      <p:childTnLst>
+                        <p:par>
+                          <p:cTn id="13" presetID="1" presetClass="entr" presetSubtype="0" fill="hold" grpId="0" nodeType="clickEffect">
+                            <p:stCondLst>
+                              <p:cond delay="0"/>
+                            </p:stCondLst>
+                            <p:childTnLst>
+                              <p:set>
+                                <p:cBhvr>
+                                  <p:cTn id="14" dur="1" fill="hold">
+                                    <p:stCondLst>
+                                      <p:cond delay="0"/>
+                                    </p:stCondLst>
+                                  </p:cTn>
+                                  <p:tgtEl>
+                                    <p:spTgt spid="93"/>
+                                  </p:tgtEl>
+                                  <p:attrNameLst>
+                                    <p:attrName>style.visibility</p:attrName>
+                                  </p:attrNameLst>
+                                </p:cBhvr>
+                                <p:to>
+                                  <p:strVal val="visible"/>
+                                </p:to>
+                              </p:set>
+                            </p:childTnLst>
+                          </p:cTn>
+                        </p:par>
+                      </p:childTnLst>
+                    </p:cTn>
+                  </p:par>
+                </p:childTnLst>
+              </p:cTn>
+              <p:prevCondLst>
+                <p:cond evt="onPrev" delay="0">
+                  <p:tgtEl>
+                    <p:sldTgt/>
+                  </p:tgtEl>
+                </p:cond>
+              </p:prevCondLst>
+              <p:nextCondLst>
+                <p:cond evt="onNext" delay="0">
+                  <p:tgtEl>
+                    <p:sldTgt/>
+                  </p:tgtEl>
+                </p:cond>
+              </p:nextCondLst>
+            </p:seq>
+          </p:childTnLst>
+        </p:cTn>
+      </p:par>
+    </p:tnLst>
+    <p:bldLst>
+      <p:bldP spid="93" grpId="0"/>
+    </p:bldLst>
+  </p:timing>
+</p:sld>
+</file>
+
+<file path=ppt/slides/slide13.xml><?xml version="1.0" encoding="utf-8"?>
+<p:sld xmlns:a="http://schemas.openxmlformats.org/drawingml/2006/main" xmlns:p="http://schemas.openxmlformats.org/presentationml/2006/main" xmlns:r="http://schemas.openxmlformats.org/officeDocument/2006/relationships">
+  <p:cSld>
+    <p:spTree>
+      <p:nvGrpSpPr>
+        <p:cNvPr id="1" name=""/>
+        <p:cNvGrpSpPr/>
+        <p:nvPr/>
+      </p:nvGrpSpPr>
+      <p:grpSpPr/>
+      <p:pic>
+        <p:nvPicPr>
+          <p:cNvPr id="2" name="Picture 1" descr="bsm2_route_b_detect.png"/>
+          <p:cNvPicPr>
+            <a:picLocks noChangeAspect="1"/>
+          </p:cNvPicPr>
+          <p:nvPr/>
+        </p:nvPicPr>
+        <p:blipFill>
+          <a:blip r:embed="rId2"/>
+          <a:stretch>
+            <a:fillRect/>
+          </a:stretch>
+        </p:blipFill>
+        <p:spPr>
+          <a:xfrm>
+            <a:off x="2485644" y="731520"/>
+            <a:ext cx="7220712" cy="4709160"/>
+          </a:xfrm>
+          <a:prstGeom prst="rect">
+            <a:avLst/>
+          </a:prstGeom>
+        </p:spPr>
+      </p:pic>
+      <p:sp>
+        <p:nvSpPr>
+          <p:cNvPr id="3" name="TextBox 2"/>
+          <p:cNvSpPr txBox="1"/>
+          <p:nvPr/>
+        </p:nvSpPr>
+        <p:spPr>
+          <a:xfrm>
+            <a:off x="731520" y="5612130"/>
+            <a:ext cx="10728960" cy="685800"/>
+          </a:xfrm>
+          <a:prstGeom prst="rect">
+            <a:avLst/>
+          </a:prstGeom>
+          <a:noFill/>
+        </p:spPr>
+        <p:txBody>
+          <a:bodyPr wrap="square">
+            <a:spAutoFit/>
+          </a:bodyPr>
+          <a:lstStyle/>
+          <a:p>
+            <a:pPr algn="ctr"/>
+            <a:r>
+              <a:rPr sz="1400">
+                <a:solidFill>
+                  <a:srgbClr val="334455"/>
+                </a:solidFill>
+              </a:rPr>
+              <a:t>BSM2 整厂：原始量检不出，设备级比值通道 9.80 天检出</a:t>
+            </a:r>
+          </a:p>
+        </p:txBody>
+      </p:sp>
+    </p:spTree>
+  </p:cSld>
+  <p:clrMapOvr>
+    <a:masterClrMapping/>
+  </p:clrMapOvr>
+</p:sld>
+</file>
+
+<file path=ppt/slides/slide14.xml><?xml version="1.0" encoding="utf-8"?>
 <p:sld xmlns:a="http://schemas.openxmlformats.org/drawingml/2006/main" xmlns:r="http://schemas.openxmlformats.org/officeDocument/2006/relationships" xmlns:p="http://schemas.openxmlformats.org/presentationml/2006/main">
   <p:cSld>
     <p:bg>
@@ -969,7 +1956,83 @@
 </p:sld>
 </file>
 
-<file path=ppt/slides/slide11.xml><?xml version="1.0" encoding="utf-8"?>
+<file path=ppt/slides/slide15.xml><?xml version="1.0" encoding="utf-8"?>
+<p:sld xmlns:a="http://schemas.openxmlformats.org/drawingml/2006/main" xmlns:p="http://schemas.openxmlformats.org/presentationml/2006/main" xmlns:r="http://schemas.openxmlformats.org/officeDocument/2006/relationships">
+  <p:cSld>
+    <p:spTree>
+      <p:nvGrpSpPr>
+        <p:cNvPr id="1" name=""/>
+        <p:cNvGrpSpPr/>
+        <p:nvPr/>
+      </p:nvGrpSpPr>
+      <p:grpSpPr/>
+      <p:pic>
+        <p:nvPicPr>
+          <p:cNvPr id="2" name="Picture 1" descr="sludge_line2.png"/>
+          <p:cNvPicPr>
+            <a:picLocks noChangeAspect="1"/>
+          </p:cNvPicPr>
+          <p:nvPr/>
+        </p:nvPicPr>
+        <p:blipFill>
+          <a:blip r:embed="rId2"/>
+          <a:stretch>
+            <a:fillRect/>
+          </a:stretch>
+        </p:blipFill>
+        <p:spPr>
+          <a:xfrm>
+            <a:off x="1700784" y="731520"/>
+            <a:ext cx="8790432" cy="4709160"/>
+          </a:xfrm>
+          <a:prstGeom prst="rect">
+            <a:avLst/>
+          </a:prstGeom>
+        </p:spPr>
+      </p:pic>
+      <p:sp>
+        <p:nvSpPr>
+          <p:cNvPr id="3" name="TextBox 2"/>
+          <p:cNvSpPr txBox="1"/>
+          <p:nvPr/>
+        </p:nvSpPr>
+        <p:spPr>
+          <a:xfrm>
+            <a:off x="731520" y="5612130"/>
+            <a:ext cx="10728960" cy="685800"/>
+          </a:xfrm>
+          <a:prstGeom prst="rect">
+            <a:avLst/>
+          </a:prstGeom>
+          <a:noFill/>
+        </p:spPr>
+        <p:txBody>
+          <a:bodyPr wrap="square">
+            <a:spAutoFit/>
+          </a:bodyPr>
+          <a:lstStyle/>
+          <a:p>
+            <a:pPr algn="ctr"/>
+            <a:r>
+              <a:rPr sz="1400">
+                <a:solidFill>
+                  <a:srgbClr val="334455"/>
+                </a:solidFill>
+              </a:rPr>
+              <a:t>污泥线闭环：含固率、湿泥饼量、滤液 TSS 与检测分数</a:t>
+            </a:r>
+          </a:p>
+        </p:txBody>
+      </p:sp>
+    </p:spTree>
+  </p:cSld>
+  <p:clrMapOvr>
+    <a:masterClrMapping/>
+  </p:clrMapOvr>
+</p:sld>
+</file>
+
+<file path=ppt/slides/slide16.xml><?xml version="1.0" encoding="utf-8"?>
 <p:sld xmlns:a="http://schemas.openxmlformats.org/drawingml/2006/main" xmlns:r="http://schemas.openxmlformats.org/officeDocument/2006/relationships" xmlns:p="http://schemas.openxmlformats.org/presentationml/2006/main">
   <p:cSld>
     <p:bg>
@@ -1387,7 +2450,83 @@
 </p:sld>
 </file>
 
-<file path=ppt/slides/slide12.xml><?xml version="1.0" encoding="utf-8"?>
+<file path=ppt/slides/slide17.xml><?xml version="1.0" encoding="utf-8"?>
+<p:sld xmlns:a="http://schemas.openxmlformats.org/drawingml/2006/main" xmlns:p="http://schemas.openxmlformats.org/presentationml/2006/main" xmlns:r="http://schemas.openxmlformats.org/officeDocument/2006/relationships">
+  <p:cSld>
+    <p:spTree>
+      <p:nvGrpSpPr>
+        <p:cNvPr id="1" name=""/>
+        <p:cNvGrpSpPr/>
+        <p:nvPr/>
+      </p:nvGrpSpPr>
+      <p:grpSpPr/>
+      <p:pic>
+        <p:nvPicPr>
+          <p:cNvPr id="2" name="Picture 1" descr="sludge_decision.png"/>
+          <p:cNvPicPr>
+            <a:picLocks noChangeAspect="1"/>
+          </p:cNvPicPr>
+          <p:nvPr/>
+        </p:nvPicPr>
+        <p:blipFill>
+          <a:blip r:embed="rId2"/>
+          <a:stretch>
+            <a:fillRect/>
+          </a:stretch>
+        </p:blipFill>
+        <p:spPr>
+          <a:xfrm>
+            <a:off x="731520" y="1543812"/>
+            <a:ext cx="10728960" cy="3084575"/>
+          </a:xfrm>
+          <a:prstGeom prst="rect">
+            <a:avLst/>
+          </a:prstGeom>
+        </p:spPr>
+      </p:pic>
+      <p:sp>
+        <p:nvSpPr>
+          <p:cNvPr id="3" name="TextBox 2"/>
+          <p:cNvSpPr txBox="1"/>
+          <p:nvPr/>
+        </p:nvSpPr>
+        <p:spPr>
+          <a:xfrm>
+            <a:off x="731520" y="5612130"/>
+            <a:ext cx="10728960" cy="685800"/>
+          </a:xfrm>
+          <a:prstGeom prst="rect">
+            <a:avLst/>
+          </a:prstGeom>
+          <a:noFill/>
+        </p:spPr>
+        <p:txBody>
+          <a:bodyPr wrap="square">
+            <a:spAutoFit/>
+          </a:bodyPr>
+          <a:lstStyle/>
+          <a:p>
+            <a:pPr algn="ctr"/>
+            <a:r>
+              <a:rPr sz="1400">
+                <a:solidFill>
+                  <a:srgbClr val="334455"/>
+                </a:solidFill>
+              </a:rPr>
+              <a:t>维护策略对比：RUL 驱动相对最优固定周期省 24.5%（占位成本）</a:t>
+            </a:r>
+          </a:p>
+        </p:txBody>
+      </p:sp>
+    </p:spTree>
+  </p:cSld>
+  <p:clrMapOvr>
+    <a:masterClrMapping/>
+  </p:clrMapOvr>
+</p:sld>
+</file>
+
+<file path=ppt/slides/slide18.xml><?xml version="1.0" encoding="utf-8"?>
 <p:sld xmlns:a="http://schemas.openxmlformats.org/drawingml/2006/main" xmlns:r="http://schemas.openxmlformats.org/officeDocument/2006/relationships" xmlns:p="http://schemas.openxmlformats.org/presentationml/2006/main">
   <p:cSld>
     <p:bg>
@@ -1857,7 +2996,7 @@
 </p:sld>
 </file>
 
-<file path=ppt/slides/slide13.xml><?xml version="1.0" encoding="utf-8"?>
+<file path=ppt/slides/slide19.xml><?xml version="1.0" encoding="utf-8"?>
 <p:sld xmlns:a="http://schemas.openxmlformats.org/drawingml/2006/main" xmlns:r="http://schemas.openxmlformats.org/officeDocument/2006/relationships" xmlns:p="http://schemas.openxmlformats.org/presentationml/2006/main">
   <p:cSld>
     <p:bg>
@@ -2310,7 +3449,501 @@
 </p:sld>
 </file>
 
-<file path=ppt/slides/slide14.xml><?xml version="1.0" encoding="utf-8"?>
+<file path=ppt/slides/slide2.xml><?xml version="1.0" encoding="utf-8"?>
+<p:sld xmlns:a="http://schemas.openxmlformats.org/drawingml/2006/main" xmlns:r="http://schemas.openxmlformats.org/officeDocument/2006/relationships" xmlns:p="http://schemas.openxmlformats.org/presentationml/2006/main">
+  <p:cSld>
+    <p:bg>
+      <p:bgPr>
+        <a:solidFill>
+          <a:srgbClr val="111316"/>
+        </a:solidFill>
+        <a:effectLst/>
+      </p:bgPr>
+    </p:bg>
+    <p:spTree>
+      <p:nvGrpSpPr>
+        <p:cNvPr id="1" name=""/>
+        <p:cNvGrpSpPr/>
+        <p:nvPr/>
+      </p:nvGrpSpPr>
+      <p:grpSpPr>
+        <a:xfrm>
+          <a:off x="0" y="0"/>
+          <a:ext cx="0" cy="0"/>
+          <a:chOff x="0" y="0"/>
+          <a:chExt cx="0" cy="0"/>
+        </a:xfrm>
+      </p:grpSpPr>
+      <p:sp>
+        <p:nvSpPr>
+          <p:cNvPr id="21" name="Kicker"/>
+          <p:cNvSpPr txBox="1"/>
+          <p:nvPr/>
+        </p:nvSpPr>
+        <p:spPr>
+          <a:xfrm>
+            <a:off x="900000" y="420000"/>
+            <a:ext cx="10000000" cy="420000"/>
+          </a:xfrm>
+          <a:prstGeom prst="rect">
+            <a:avLst/>
+          </a:prstGeom>
+          <a:noFill/>
+          <a:ln/>
+        </p:spPr>
+        <p:txBody>
+          <a:bodyPr wrap="square" rtlCol="0">
+            <a:normAutofit/>
+          </a:bodyPr>
+          <a:lstStyle/>
+          <a:p>
+            <a:pPr>
+              <a:buNone/>
+            </a:pPr>
+            <a:r>
+              <a:rPr lang="zh-CN" sz="1400" b="1" dirty="0">
+                <a:solidFill>
+                  <a:srgbClr val="C9A84C"/>
+                </a:solidFill>
+                <a:latin typeface="Helvetica Neue"/>
+                <a:ea typeface="Helvetica Neue"/>
+              </a:rPr>
+              <a:t>目录</a:t>
+            </a:r>
+          </a:p>
+        </p:txBody>
+      </p:sp>
+      <p:sp>
+        <p:nvSpPr>
+          <p:cNvPr id="22" name="Title"/>
+          <p:cNvSpPr txBox="1"/>
+          <p:nvPr/>
+        </p:nvSpPr>
+        <p:spPr>
+          <a:xfrm>
+            <a:off x="900000" y="920000"/>
+            <a:ext cx="10300000" cy="800000"/>
+          </a:xfrm>
+          <a:prstGeom prst="rect">
+            <a:avLst/>
+          </a:prstGeom>
+          <a:noFill/>
+          <a:ln/>
+        </p:spPr>
+        <p:txBody>
+          <a:bodyPr wrap="square" rtlCol="0">
+            <a:normAutofit/>
+          </a:bodyPr>
+          <a:lstStyle/>
+          <a:p>
+            <a:pPr>
+              <a:buNone/>
+            </a:pPr>
+            <a:r>
+              <a:rPr lang="zh-CN" sz="3400" b="1" dirty="0">
+                <a:solidFill>
+                  <a:srgbClr val="F4EFE6"/>
+                </a:solidFill>
+                <a:latin typeface="Georgia"/>
+                <a:ea typeface="Georgia"/>
+              </a:rPr>
+              <a:t>目录</a:t>
+            </a:r>
+          </a:p>
+        </p:txBody>
+      </p:sp>
+      <p:sp>
+        <p:nvSpPr>
+          <p:cNvPr id="23" name="Body"/>
+          <p:cNvSpPr txBox="1"/>
+          <p:nvPr/>
+        </p:nvSpPr>
+        <p:spPr>
+          <a:xfrm>
+            <a:off x="1050000" y="1850000"/>
+            <a:ext cx="10100000" cy="4500000"/>
+          </a:xfrm>
+          <a:prstGeom prst="rect">
+            <a:avLst/>
+          </a:prstGeom>
+          <a:noFill/>
+          <a:ln/>
+        </p:spPr>
+        <p:txBody>
+          <a:bodyPr wrap="square" rtlCol="0">
+            <a:normAutofit/>
+          </a:bodyPr>
+          <a:lstStyle/>
+          <a:p>
+            <a:pPr marL="285750" indent="-285750">
+              <a:buFont typeface="Arial" panose="020B0604020202020204"/>
+              <a:buChar char="•"/>
+            </a:pPr>
+            <a:r>
+              <a:rPr lang="zh-CN" sz="2000" b="0" dirty="0">
+                <a:solidFill>
+                  <a:srgbClr val="F4EFE6"/>
+                </a:solidFill>
+                <a:latin typeface="Helvetica Neue"/>
+                <a:ea typeface="Helvetica Neue"/>
+              </a:rPr>
+              <a:t>一、项目概述 二、产品与服务设计 三、技术创新与证据</a:t>
+            </a:r>
+          </a:p>
+          <a:p>
+            <a:pPr marL="285750" indent="-285750">
+              <a:buFont typeface="Arial" panose="020B0604020202020204"/>
+              <a:buChar char="•"/>
+            </a:pPr>
+            <a:r>
+              <a:rPr lang="zh-CN" sz="2000" b="0" dirty="0">
+                <a:solidFill>
+                  <a:srgbClr val="F4EFE6"/>
+                </a:solidFill>
+                <a:latin typeface="Helvetica Neue"/>
+                <a:ea typeface="Helvetica Neue"/>
+              </a:rPr>
+              <a:t>四、产品形态与使用方式 五、行业背景与目标市场</a:t>
+            </a:r>
+          </a:p>
+          <a:p>
+            <a:pPr marL="285750" indent="-285750">
+              <a:buFont typeface="Arial" panose="020B0604020202020204"/>
+              <a:buChar char="•"/>
+            </a:pPr>
+            <a:r>
+              <a:rPr lang="zh-CN" sz="2000" b="0" dirty="0">
+                <a:solidFill>
+                  <a:srgbClr val="F4EFE6"/>
+                </a:solidFill>
+                <a:latin typeface="Helvetica Neue"/>
+                <a:ea typeface="Helvetica Neue"/>
+              </a:rPr>
+              <a:t>六、竞争格局与优势 七、商业模式与财务</a:t>
+            </a:r>
+          </a:p>
+          <a:p>
+            <a:pPr marL="285750" indent="-285750">
+              <a:buFont typeface="Arial" panose="020B0604020202020204"/>
+              <a:buChar char="•"/>
+            </a:pPr>
+            <a:r>
+              <a:rPr lang="zh-CN" sz="2000" b="0" dirty="0">
+                <a:solidFill>
+                  <a:srgbClr val="F4EFE6"/>
+                </a:solidFill>
+                <a:latin typeface="Helvetica Neue"/>
+                <a:ea typeface="Helvetica Neue"/>
+              </a:rPr>
+              <a:t>八、实施计划与风险 九、团队与附录</a:t>
+            </a:r>
+          </a:p>
+        </p:txBody>
+      </p:sp>
+      <p:sp>
+        <p:nvSpPr>
+          <p:cNvPr id="29" name="Page number"/>
+          <p:cNvSpPr txBox="1"/>
+          <p:nvPr/>
+        </p:nvSpPr>
+        <p:spPr>
+          <a:xfrm>
+            <a:off x="10600000" y="6250000"/>
+            <a:ext cx="1200000" cy="400000"/>
+          </a:xfrm>
+          <a:prstGeom prst="rect">
+            <a:avLst/>
+          </a:prstGeom>
+          <a:noFill/>
+          <a:ln/>
+        </p:spPr>
+        <p:txBody>
+          <a:bodyPr wrap="square" rtlCol="0">
+            <a:normAutofit/>
+          </a:bodyPr>
+          <a:lstStyle/>
+          <a:p>
+            <a:pPr algn="r">
+              <a:buNone/>
+            </a:pPr>
+            <a:r>
+              <a:rPr lang="zh-CN" sz="1000" b="0" dirty="0">
+                <a:solidFill>
+                  <a:srgbClr val="A79F91"/>
+                </a:solidFill>
+                <a:latin typeface="Helvetica Neue"/>
+                <a:ea typeface="Helvetica Neue"/>
+              </a:rPr>
+              <a:t>02 / 36</a:t>
+            </a:r>
+          </a:p>
+        </p:txBody>
+      </p:sp>
+    </p:spTree>
+  </p:cSld>
+  <p:clrMapOvr>
+    <a:overrideClrMapping bg1="lt1" tx1="dk1" bg2="lt2" tx2="dk2" accent1="accent1" accent2="accent2" accent3="accent3" accent4="accent4" accent5="accent5" accent6="accent6" hlink="hlink" folHlink="folHlink"/>
+  </p:clrMapOvr>
+  <p:transition spd="med">
+    <p:fade/>
+  </p:transition>
+  <p:timing>
+    <p:tnLst>
+      <p:par>
+        <p:cTn id="1" dur="indefinite" restart="never" nodeType="tmRoot">
+          <p:childTnLst>
+            <p:seq concurrent="1" nextAc="seek">
+              <p:cTn id="2" dur="indefinite" nodeType="mainSeq">
+                <p:childTnLst>
+                  <p:par>
+                    <p:cTn id="3" fill="hold">
+                      <p:stCondLst>
+                        <p:cond delay="indefinite"/>
+                      </p:stCondLst>
+                      <p:childTnLst>
+                        <p:par>
+                          <p:cTn id="4" presetID="1" presetClass="entr" presetSubtype="0" fill="hold" grpId="0" nodeType="clickEffect">
+                            <p:stCondLst>
+                              <p:cond delay="0"/>
+                            </p:stCondLst>
+                            <p:childTnLst>
+                              <p:set>
+                                <p:cBhvr>
+                                  <p:cTn id="5" dur="1" fill="hold">
+                                    <p:stCondLst>
+                                      <p:cond delay="0"/>
+                                    </p:stCondLst>
+                                  </p:cTn>
+                                  <p:tgtEl>
+                                    <p:spTgt spid="23"/>
+                                  </p:tgtEl>
+                                  <p:attrNameLst>
+                                    <p:attrName>style.visibility</p:attrName>
+                                  </p:attrNameLst>
+                                </p:cBhvr>
+                                <p:to>
+                                  <p:strVal val="visible"/>
+                                </p:to>
+                              </p:set>
+                            </p:childTnLst>
+                          </p:cTn>
+                        </p:par>
+                      </p:childTnLst>
+                    </p:cTn>
+                  </p:par>
+                  <p:par>
+                    <p:cTn id="6" fill="hold">
+                      <p:stCondLst>
+                        <p:cond delay="indefinite"/>
+                      </p:stCondLst>
+                      <p:childTnLst>
+                        <p:par>
+                          <p:cTn id="7" presetID="1" presetClass="entr" presetSubtype="0" fill="hold" grpId="0" nodeType="clickEffect">
+                            <p:stCondLst>
+                              <p:cond delay="0"/>
+                            </p:stCondLst>
+                            <p:childTnLst>
+                              <p:set>
+                                <p:cBhvr>
+                                  <p:cTn id="8" dur="1" fill="hold">
+                                    <p:stCondLst>
+                                      <p:cond delay="0"/>
+                                    </p:stCondLst>
+                                  </p:cTn>
+                                  <p:tgtEl>
+                                    <p:spTgt spid="23"/>
+                                  </p:tgtEl>
+                                  <p:attrNameLst>
+                                    <p:attrName>style.visibility</p:attrName>
+                                  </p:attrNameLst>
+                                </p:cBhvr>
+                                <p:to>
+                                  <p:strVal val="visible"/>
+                                </p:to>
+                              </p:set>
+                            </p:childTnLst>
+                          </p:cTn>
+                        </p:par>
+                      </p:childTnLst>
+                    </p:cTn>
+                  </p:par>
+                  <p:par>
+                    <p:cTn id="9" fill="hold">
+                      <p:stCondLst>
+                        <p:cond delay="indefinite"/>
+                      </p:stCondLst>
+                      <p:childTnLst>
+                        <p:par>
+                          <p:cTn id="10" presetID="1" presetClass="entr" presetSubtype="0" fill="hold" grpId="0" nodeType="clickEffect">
+                            <p:stCondLst>
+                              <p:cond delay="0"/>
+                            </p:stCondLst>
+                            <p:childTnLst>
+                              <p:set>
+                                <p:cBhvr>
+                                  <p:cTn id="11" dur="1" fill="hold">
+                                    <p:stCondLst>
+                                      <p:cond delay="0"/>
+                                    </p:stCondLst>
+                                  </p:cTn>
+                                  <p:tgtEl>
+                                    <p:spTgt spid="23"/>
+                                  </p:tgtEl>
+                                  <p:attrNameLst>
+                                    <p:attrName>style.visibility</p:attrName>
+                                  </p:attrNameLst>
+                                </p:cBhvr>
+                                <p:to>
+                                  <p:strVal val="visible"/>
+                                </p:to>
+                              </p:set>
+                            </p:childTnLst>
+                          </p:cTn>
+                        </p:par>
+                      </p:childTnLst>
+                    </p:cTn>
+                  </p:par>
+                  <p:par>
+                    <p:cTn id="12" fill="hold">
+                      <p:stCondLst>
+                        <p:cond delay="indefinite"/>
+                      </p:stCondLst>
+                      <p:childTnLst>
+                        <p:par>
+                          <p:cTn id="13" presetID="1" presetClass="entr" presetSubtype="0" fill="hold" grpId="0" nodeType="clickEffect">
+                            <p:stCondLst>
+                              <p:cond delay="0"/>
+                            </p:stCondLst>
+                            <p:childTnLst>
+                              <p:set>
+                                <p:cBhvr>
+                                  <p:cTn id="14" dur="1" fill="hold">
+                                    <p:stCondLst>
+                                      <p:cond delay="0"/>
+                                    </p:stCondLst>
+                                  </p:cTn>
+                                  <p:tgtEl>
+                                    <p:spTgt spid="23"/>
+                                  </p:tgtEl>
+                                  <p:attrNameLst>
+                                    <p:attrName>style.visibility</p:attrName>
+                                  </p:attrNameLst>
+                                </p:cBhvr>
+                                <p:to>
+                                  <p:strVal val="visible"/>
+                                </p:to>
+                              </p:set>
+                            </p:childTnLst>
+                          </p:cTn>
+                        </p:par>
+                      </p:childTnLst>
+                    </p:cTn>
+                  </p:par>
+                </p:childTnLst>
+              </p:cTn>
+              <p:prevCondLst>
+                <p:cond evt="onPrev" delay="0">
+                  <p:tgtEl>
+                    <p:sldTgt/>
+                  </p:tgtEl>
+                </p:cond>
+              </p:prevCondLst>
+              <p:nextCondLst>
+                <p:cond evt="onNext" delay="0">
+                  <p:tgtEl>
+                    <p:sldTgt/>
+                  </p:tgtEl>
+                </p:cond>
+              </p:nextCondLst>
+            </p:seq>
+          </p:childTnLst>
+        </p:cTn>
+      </p:par>
+    </p:tnLst>
+    <p:bldLst>
+      <p:bldP spid="23" grpId="0"/>
+    </p:bldLst>
+  </p:timing>
+</p:sld>
+</file>
+
+<file path=ppt/slides/slide20.xml><?xml version="1.0" encoding="utf-8"?>
+<p:sld xmlns:a="http://schemas.openxmlformats.org/drawingml/2006/main" xmlns:p="http://schemas.openxmlformats.org/presentationml/2006/main" xmlns:r="http://schemas.openxmlformats.org/officeDocument/2006/relationships">
+  <p:cSld>
+    <p:spTree>
+      <p:nvGrpSpPr>
+        <p:cNvPr id="1" name=""/>
+        <p:cNvGrpSpPr/>
+        <p:nvPr/>
+      </p:nvGrpSpPr>
+      <p:grpSpPr/>
+      <p:pic>
+        <p:nvPicPr>
+          <p:cNvPr id="2" name="Picture 1" descr="figures_4in1.png"/>
+          <p:cNvPicPr>
+            <a:picLocks noChangeAspect="1"/>
+          </p:cNvPicPr>
+          <p:nvPr/>
+        </p:nvPicPr>
+        <p:blipFill>
+          <a:blip r:embed="rId2"/>
+          <a:stretch>
+            <a:fillRect/>
+          </a:stretch>
+        </p:blipFill>
+        <p:spPr>
+          <a:xfrm>
+            <a:off x="2694940" y="731520"/>
+            <a:ext cx="6802120" cy="4709160"/>
+          </a:xfrm>
+          <a:prstGeom prst="rect">
+            <a:avLst/>
+          </a:prstGeom>
+        </p:spPr>
+      </p:pic>
+      <p:sp>
+        <p:nvSpPr>
+          <p:cNvPr id="3" name="TextBox 2"/>
+          <p:cNvSpPr txBox="1"/>
+          <p:nvPr/>
+        </p:nvSpPr>
+        <p:spPr>
+          <a:xfrm>
+            <a:off x="731520" y="5612130"/>
+            <a:ext cx="10728960" cy="685800"/>
+          </a:xfrm>
+          <a:prstGeom prst="rect">
+            <a:avLst/>
+          </a:prstGeom>
+          <a:noFill/>
+        </p:spPr>
+        <p:txBody>
+          <a:bodyPr wrap="square">
+            <a:spAutoFit/>
+          </a:bodyPr>
+          <a:lstStyle/>
+          <a:p>
+            <a:pPr algn="ctr"/>
+            <a:r>
+              <a:rPr sz="1400">
+                <a:solidFill>
+                  <a:srgbClr val="334455"/>
+                </a:solidFill>
+              </a:rPr>
+              <a:t>真实数据四图：误报-召回 / 策略成本 / 敏感性 / RUL 散点</a:t>
+            </a:r>
+          </a:p>
+        </p:txBody>
+      </p:sp>
+    </p:spTree>
+  </p:cSld>
+  <p:clrMapOvr>
+    <a:masterClrMapping/>
+  </p:clrMapOvr>
+</p:sld>
+</file>
+
+<file path=ppt/slides/slide21.xml><?xml version="1.0" encoding="utf-8"?>
 <p:sld xmlns:a="http://schemas.openxmlformats.org/drawingml/2006/main" xmlns:r="http://schemas.openxmlformats.org/officeDocument/2006/relationships" xmlns:p="http://schemas.openxmlformats.org/presentationml/2006/main">
   <p:cSld>
     <p:bg>
@@ -2728,7 +4361,7 @@
 </p:sld>
 </file>
 
-<file path=ppt/slides/slide15.xml><?xml version="1.0" encoding="utf-8"?>
+<file path=ppt/slides/slide22.xml><?xml version="1.0" encoding="utf-8"?>
 <p:sld xmlns:a="http://schemas.openxmlformats.org/drawingml/2006/main" xmlns:r="http://schemas.openxmlformats.org/officeDocument/2006/relationships" xmlns:p="http://schemas.openxmlformats.org/presentationml/2006/main">
   <p:cSld>
     <p:bg>
@@ -3146,7 +4779,83 @@
 </p:sld>
 </file>
 
-<file path=ppt/slides/slide16.xml><?xml version="1.0" encoding="utf-8"?>
+<file path=ppt/slides/slide23.xml><?xml version="1.0" encoding="utf-8"?>
+<p:sld xmlns:a="http://schemas.openxmlformats.org/drawingml/2006/main" xmlns:p="http://schemas.openxmlformats.org/presentationml/2006/main" xmlns:r="http://schemas.openxmlformats.org/officeDocument/2006/relationships">
+  <p:cSld>
+    <p:spTree>
+      <p:nvGrpSpPr>
+        <p:cNvPr id="1" name=""/>
+        <p:cNvGrpSpPr/>
+        <p:nvPr/>
+      </p:nvGrpSpPr>
+      <p:grpSpPr/>
+      <p:pic>
+        <p:nvPicPr>
+          <p:cNvPr id="2" name="Picture 1" descr="s2_demo_dashboard.png"/>
+          <p:cNvPicPr>
+            <a:picLocks noChangeAspect="1"/>
+          </p:cNvPicPr>
+          <p:nvPr/>
+        </p:nvPicPr>
+        <p:blipFill>
+          <a:blip r:embed="rId2"/>
+          <a:stretch>
+            <a:fillRect/>
+          </a:stretch>
+        </p:blipFill>
+        <p:spPr>
+          <a:xfrm>
+            <a:off x="4400702" y="731520"/>
+            <a:ext cx="3390595" cy="4709160"/>
+          </a:xfrm>
+          <a:prstGeom prst="rect">
+            <a:avLst/>
+          </a:prstGeom>
+        </p:spPr>
+      </p:pic>
+      <p:sp>
+        <p:nvSpPr>
+          <p:cNvPr id="3" name="TextBox 2"/>
+          <p:cNvSpPr txBox="1"/>
+          <p:nvPr/>
+        </p:nvSpPr>
+        <p:spPr>
+          <a:xfrm>
+            <a:off x="731520" y="5612130"/>
+            <a:ext cx="10728960" cy="685800"/>
+          </a:xfrm>
+          <a:prstGeom prst="rect">
+            <a:avLst/>
+          </a:prstGeom>
+          <a:noFill/>
+        </p:spPr>
+        <p:txBody>
+          <a:bodyPr wrap="square">
+            <a:spAutoFit/>
+          </a:bodyPr>
+          <a:lstStyle/>
+          <a:p>
+            <a:pPr algn="ctr"/>
+            <a:r>
+              <a:rPr sz="1400">
+                <a:solidFill>
+                  <a:srgbClr val="334455"/>
+                </a:solidFill>
+              </a:rPr>
+              <a:t>十节演示看板（在线可看）：从检测到决策的全部结果与口径</a:t>
+            </a:r>
+          </a:p>
+        </p:txBody>
+      </p:sp>
+    </p:spTree>
+  </p:cSld>
+  <p:clrMapOvr>
+    <a:masterClrMapping/>
+  </p:clrMapOvr>
+</p:sld>
+</file>
+
+<file path=ppt/slides/slide24.xml><?xml version="1.0" encoding="utf-8"?>
 <p:sld xmlns:a="http://schemas.openxmlformats.org/drawingml/2006/main" xmlns:r="http://schemas.openxmlformats.org/officeDocument/2006/relationships" xmlns:p="http://schemas.openxmlformats.org/presentationml/2006/main">
   <p:cSld>
     <p:bg>
@@ -3616,7 +5325,7 @@
 </p:sld>
 </file>
 
-<file path=ppt/slides/slide17.xml><?xml version="1.0" encoding="utf-8"?>
+<file path=ppt/slides/slide25.xml><?xml version="1.0" encoding="utf-8"?>
 <p:sld xmlns:a="http://schemas.openxmlformats.org/drawingml/2006/main" xmlns:r="http://schemas.openxmlformats.org/officeDocument/2006/relationships" xmlns:p="http://schemas.openxmlformats.org/presentationml/2006/main">
   <p:cSld>
     <p:bg>
@@ -4086,7 +5795,83 @@
 </p:sld>
 </file>
 
-<file path=ppt/slides/slide18.xml><?xml version="1.0" encoding="utf-8"?>
+<file path=ppt/slides/slide26.xml><?xml version="1.0" encoding="utf-8"?>
+<p:sld xmlns:a="http://schemas.openxmlformats.org/drawingml/2006/main" xmlns:p="http://schemas.openxmlformats.org/presentationml/2006/main" xmlns:r="http://schemas.openxmlformats.org/officeDocument/2006/relationships">
+  <p:cSld>
+    <p:spTree>
+      <p:nvGrpSpPr>
+        <p:cNvPr id="1" name=""/>
+        <p:cNvGrpSpPr/>
+        <p:nvPr/>
+      </p:nvGrpSpPr>
+      <p:grpSpPr/>
+      <p:pic>
+        <p:nvPicPr>
+          <p:cNvPr id="2" name="Picture 1" descr="s6_workbench.png"/>
+          <p:cNvPicPr>
+            <a:picLocks noChangeAspect="1"/>
+          </p:cNvPicPr>
+          <p:nvPr/>
+        </p:nvPicPr>
+        <p:blipFill>
+          <a:blip r:embed="rId2"/>
+          <a:stretch>
+            <a:fillRect/>
+          </a:stretch>
+        </p:blipFill>
+        <p:spPr>
+          <a:xfrm>
+            <a:off x="3835603" y="731520"/>
+            <a:ext cx="4520793" cy="4709160"/>
+          </a:xfrm>
+          <a:prstGeom prst="rect">
+            <a:avLst/>
+          </a:prstGeom>
+        </p:spPr>
+      </p:pic>
+      <p:sp>
+        <p:nvSpPr>
+          <p:cNvPr id="3" name="TextBox 2"/>
+          <p:cNvSpPr txBox="1"/>
+          <p:nvPr/>
+        </p:nvSpPr>
+        <p:spPr>
+          <a:xfrm>
+            <a:off x="731520" y="5612130"/>
+            <a:ext cx="10728960" cy="685800"/>
+          </a:xfrm>
+          <a:prstGeom prst="rect">
+            <a:avLst/>
+          </a:prstGeom>
+          <a:noFill/>
+        </p:spPr>
+        <p:txBody>
+          <a:bodyPr wrap="square">
+            <a:spAutoFit/>
+          </a:bodyPr>
+          <a:lstStyle/>
+          <a:p>
+            <a:pPr algn="ctr"/>
+            <a:r>
+              <a:rPr sz="1400">
+                <a:solidFill>
+                  <a:srgbClr val="334455"/>
+                </a:solidFill>
+              </a:rPr>
+              <a:t>本地工作台：浏览器上传 CSV → 标定基线 → 出报告，数据不出本机</a:t>
+            </a:r>
+          </a:p>
+        </p:txBody>
+      </p:sp>
+    </p:spTree>
+  </p:cSld>
+  <p:clrMapOvr>
+    <a:masterClrMapping/>
+  </p:clrMapOvr>
+</p:sld>
+</file>
+
+<file path=ppt/slides/slide27.xml><?xml version="1.0" encoding="utf-8"?>
 <p:sld xmlns:a="http://schemas.openxmlformats.org/drawingml/2006/main" xmlns:r="http://schemas.openxmlformats.org/officeDocument/2006/relationships" xmlns:p="http://schemas.openxmlformats.org/presentationml/2006/main">
   <p:cSld>
     <p:bg>
@@ -4504,7 +6289,83 @@
 </p:sld>
 </file>
 
-<file path=ppt/slides/slide19.xml><?xml version="1.0" encoding="utf-8"?>
+<file path=ppt/slides/slide28.xml><?xml version="1.0" encoding="utf-8"?>
+<p:sld xmlns:a="http://schemas.openxmlformats.org/drawingml/2006/main" xmlns:p="http://schemas.openxmlformats.org/presentationml/2006/main" xmlns:r="http://schemas.openxmlformats.org/officeDocument/2006/relationships">
+  <p:cSld>
+    <p:spTree>
+      <p:nvGrpSpPr>
+        <p:cNvPr id="1" name=""/>
+        <p:cNvGrpSpPr/>
+        <p:nvPr/>
+      </p:nvGrpSpPr>
+      <p:grpSpPr/>
+      <p:pic>
+        <p:nvPicPr>
+          <p:cNvPr id="2" name="Picture 1" descr="s8_report_metro_alarms.png"/>
+          <p:cNvPicPr>
+            <a:picLocks noChangeAspect="1"/>
+          </p:cNvPicPr>
+          <p:nvPr/>
+        </p:nvPicPr>
+        <p:blipFill>
+          <a:blip r:embed="rId2"/>
+          <a:stretch>
+            <a:fillRect/>
+          </a:stretch>
+        </p:blipFill>
+        <p:spPr>
+          <a:xfrm>
+            <a:off x="4330065" y="731520"/>
+            <a:ext cx="3531870" cy="4709160"/>
+          </a:xfrm>
+          <a:prstGeom prst="rect">
+            <a:avLst/>
+          </a:prstGeom>
+        </p:spPr>
+      </p:pic>
+      <p:sp>
+        <p:nvSpPr>
+          <p:cNvPr id="3" name="TextBox 2"/>
+          <p:cNvSpPr txBox="1"/>
+          <p:nvPr/>
+        </p:nvSpPr>
+        <p:spPr>
+          <a:xfrm>
+            <a:off x="731520" y="5612130"/>
+            <a:ext cx="10728960" cy="685800"/>
+          </a:xfrm>
+          <a:prstGeom prst="rect">
+            <a:avLst/>
+          </a:prstGeom>
+          <a:noFill/>
+        </p:spPr>
+        <p:txBody>
+          <a:bodyPr wrap="square">
+            <a:spAutoFit/>
+          </a:bodyPr>
+          <a:lstStyle/>
+          <a:p>
+            <a:pPr algn="ctr"/>
+            <a:r>
+              <a:rPr sz="1400">
+                <a:solidFill>
+                  <a:srgbClr val="334455"/>
+                </a:solidFill>
+              </a:rPr>
+              <a:t>企业版报告·分级告警明细（P1/P2/P3 与处置动作）</a:t>
+            </a:r>
+          </a:p>
+        </p:txBody>
+      </p:sp>
+    </p:spTree>
+  </p:cSld>
+  <p:clrMapOvr>
+    <a:masterClrMapping/>
+  </p:clrMapOvr>
+</p:sld>
+</file>
+
+<file path=ppt/slides/slide29.xml><?xml version="1.0" encoding="utf-8"?>
 <p:sld xmlns:a="http://schemas.openxmlformats.org/drawingml/2006/main" xmlns:r="http://schemas.openxmlformats.org/officeDocument/2006/relationships" xmlns:p="http://schemas.openxmlformats.org/presentationml/2006/main">
   <p:cSld>
     <p:bg>
@@ -4958,7 +6819,7 @@
 </p:sld>
 </file>
 
-<file path=ppt/slides/slide2.xml><?xml version="1.0" encoding="utf-8"?>
+<file path=ppt/slides/slide3.xml><?xml version="1.0" encoding="utf-8"?>
 <p:sld xmlns:a="http://schemas.openxmlformats.org/drawingml/2006/main" xmlns:r="http://schemas.openxmlformats.org/officeDocument/2006/relationships" xmlns:p="http://schemas.openxmlformats.org/presentationml/2006/main">
   <p:cSld>
     <p:bg>
@@ -4985,7 +6846,7 @@
       </p:grpSpPr>
       <p:sp>
         <p:nvSpPr>
-          <p:cNvPr id="21" name="Kicker"/>
+          <p:cNvPr id="31" name="Kicker"/>
           <p:cNvSpPr txBox="1"/>
           <p:nvPr/>
         </p:nvSpPr>
@@ -5017,14 +6878,14 @@
                 <a:latin typeface="Helvetica Neue"/>
                 <a:ea typeface="Helvetica Neue"/>
               </a:rPr>
-              <a:t>目录</a:t>
+              <a:t>现状：关键设备仍是"坏了才修、到期就修"</a:t>
             </a:r>
           </a:p>
         </p:txBody>
       </p:sp>
       <p:sp>
         <p:nvSpPr>
-          <p:cNvPr id="22" name="Title"/>
+          <p:cNvPr id="32" name="Title"/>
           <p:cNvSpPr txBox="1"/>
           <p:nvPr/>
         </p:nvSpPr>
@@ -5056,14 +6917,14 @@
                 <a:latin typeface="Georgia"/>
                 <a:ea typeface="Georgia"/>
               </a:rPr>
-              <a:t>目录</a:t>
+              <a:t>现状：关键设备仍是"坏了才修、到期就修"</a:t>
             </a:r>
           </a:p>
         </p:txBody>
       </p:sp>
       <p:sp>
         <p:nvSpPr>
-          <p:cNvPr id="23" name="Body"/>
+          <p:cNvPr id="33" name="Body"/>
           <p:cNvSpPr txBox="1"/>
           <p:nvPr/>
         </p:nvSpPr>
@@ -5096,7 +6957,7 @@
                 <a:latin typeface="Helvetica Neue"/>
                 <a:ea typeface="Helvetica Neue"/>
               </a:rPr>
-              <a:t>一、项目概述 二、产品与服务设计 三、技术创新与证据</a:t>
+              <a:t>鼓风机、脱水机、泵：非计划停机代价高</a:t>
             </a:r>
           </a:p>
           <a:p>
@@ -5112,7 +6973,7 @@
                 <a:latin typeface="Helvetica Neue"/>
                 <a:ea typeface="Helvetica Neue"/>
               </a:rPr>
-              <a:t>四、产品形态与使用方式 五、行业背景与目标市场</a:t>
+              <a:t>定期大修：备件与人工浪费在没坏的设备上</a:t>
             </a:r>
           </a:p>
           <a:p>
@@ -5128,7 +6989,7 @@
                 <a:latin typeface="Helvetica Neue"/>
                 <a:ea typeface="Helvetica Neue"/>
               </a:rPr>
-              <a:t>六、竞争格局与优势 七、商业模式与财务</a:t>
+              <a:t>电流、温度、压力、流量数据厂里本来就有</a:t>
             </a:r>
           </a:p>
           <a:p>
@@ -5144,14 +7005,14 @@
                 <a:latin typeface="Helvetica Neue"/>
                 <a:ea typeface="Helvetica Neue"/>
               </a:rPr>
-              <a:t>八、实施计划与风险 九、团队与附录</a:t>
+              <a:t>缺的是"从数据看出设备在退化"的方法与工具</a:t>
             </a:r>
           </a:p>
         </p:txBody>
       </p:sp>
       <p:sp>
         <p:nvSpPr>
-          <p:cNvPr id="29" name="Page number"/>
+          <p:cNvPr id="39" name="Page number"/>
           <p:cNvSpPr txBox="1"/>
           <p:nvPr/>
         </p:nvSpPr>
@@ -5183,7 +7044,7 @@
                 <a:latin typeface="Helvetica Neue"/>
                 <a:ea typeface="Helvetica Neue"/>
               </a:rPr>
-              <a:t>02 / 36</a:t>
+              <a:t>03 / 36</a:t>
             </a:r>
           </a:p>
         </p:txBody>
@@ -5224,7 +7085,7 @@
                                     </p:stCondLst>
                                   </p:cTn>
                                   <p:tgtEl>
-                                    <p:spTgt spid="23"/>
+                                    <p:spTgt spid="33"/>
                                   </p:tgtEl>
                                   <p:attrNameLst>
                                     <p:attrName>style.visibility</p:attrName>
@@ -5260,7 +7121,7 @@
                                     </p:stCondLst>
                                   </p:cTn>
                                   <p:tgtEl>
-                                    <p:spTgt spid="23"/>
+                                    <p:spTgt spid="33"/>
                                   </p:tgtEl>
                                   <p:attrNameLst>
                                     <p:attrName>style.visibility</p:attrName>
@@ -5296,7 +7157,7 @@
                                     </p:stCondLst>
                                   </p:cTn>
                                   <p:tgtEl>
-                                    <p:spTgt spid="23"/>
+                                    <p:spTgt spid="33"/>
                                   </p:tgtEl>
                                   <p:attrNameLst>
                                     <p:attrName>style.visibility</p:attrName>
@@ -5332,7 +7193,7 @@
                                     </p:stCondLst>
                                   </p:cTn>
                                   <p:tgtEl>
-                                    <p:spTgt spid="23"/>
+                                    <p:spTgt spid="33"/>
                                   </p:tgtEl>
                                   <p:attrNameLst>
                                     <p:attrName>style.visibility</p:attrName>
@@ -5370,13 +7231,13 @@
       </p:par>
     </p:tnLst>
     <p:bldLst>
-      <p:bldP spid="23" grpId="0"/>
+      <p:bldP spid="33" grpId="0"/>
     </p:bldLst>
   </p:timing>
 </p:sld>
 </file>
 
-<file path=ppt/slides/slide20.xml><?xml version="1.0" encoding="utf-8"?>
+<file path=ppt/slides/slide30.xml><?xml version="1.0" encoding="utf-8"?>
 <p:sld xmlns:a="http://schemas.openxmlformats.org/drawingml/2006/main" xmlns:r="http://schemas.openxmlformats.org/officeDocument/2006/relationships" xmlns:p="http://schemas.openxmlformats.org/presentationml/2006/main">
   <p:cSld>
     <p:bg>
@@ -5794,7 +7655,7 @@
 </p:sld>
 </file>
 
-<file path=ppt/slides/slide21.xml><?xml version="1.0" encoding="utf-8"?>
+<file path=ppt/slides/slide31.xml><?xml version="1.0" encoding="utf-8"?>
 <p:sld xmlns:a="http://schemas.openxmlformats.org/drawingml/2006/main" xmlns:r="http://schemas.openxmlformats.org/officeDocument/2006/relationships" xmlns:p="http://schemas.openxmlformats.org/presentationml/2006/main">
   <p:cSld>
     <p:bg>
@@ -6212,7 +8073,7 @@
 </p:sld>
 </file>
 
-<file path=ppt/slides/slide22.xml><?xml version="1.0" encoding="utf-8"?>
+<file path=ppt/slides/slide32.xml><?xml version="1.0" encoding="utf-8"?>
 <p:sld xmlns:a="http://schemas.openxmlformats.org/drawingml/2006/main" xmlns:r="http://schemas.openxmlformats.org/officeDocument/2006/relationships" xmlns:p="http://schemas.openxmlformats.org/presentationml/2006/main">
   <p:cSld>
     <p:bg>
@@ -6630,7 +8491,7 @@
 </p:sld>
 </file>
 
-<file path=ppt/slides/slide23.xml><?xml version="1.0" encoding="utf-8"?>
+<file path=ppt/slides/slide33.xml><?xml version="1.0" encoding="utf-8"?>
 <p:sld xmlns:a="http://schemas.openxmlformats.org/drawingml/2006/main" xmlns:r="http://schemas.openxmlformats.org/officeDocument/2006/relationships" xmlns:p="http://schemas.openxmlformats.org/presentationml/2006/main">
   <p:cSld>
     <p:bg>
@@ -7048,7 +8909,7 @@
 </p:sld>
 </file>
 
-<file path=ppt/slides/slide24.xml><?xml version="1.0" encoding="utf-8"?>
+<file path=ppt/slides/slide34.xml><?xml version="1.0" encoding="utf-8"?>
 <p:sld xmlns:a="http://schemas.openxmlformats.org/drawingml/2006/main" xmlns:r="http://schemas.openxmlformats.org/officeDocument/2006/relationships" xmlns:p="http://schemas.openxmlformats.org/presentationml/2006/main">
   <p:cSld>
     <p:bg>
@@ -7604,7 +9465,7 @@
 </p:sld>
 </file>
 
-<file path=ppt/slides/slide25.xml><?xml version="1.0" encoding="utf-8"?>
+<file path=ppt/slides/slide35.xml><?xml version="1.0" encoding="utf-8"?>
 <p:sld xmlns:a="http://schemas.openxmlformats.org/drawingml/2006/main" xmlns:r="http://schemas.openxmlformats.org/officeDocument/2006/relationships" xmlns:p="http://schemas.openxmlformats.org/presentationml/2006/main">
   <p:cSld>
     <p:bg>
@@ -8022,7 +9883,7 @@
 </p:sld>
 </file>
 
-<file path=ppt/slides/slide26.xml><?xml version="1.0" encoding="utf-8"?>
+<file path=ppt/slides/slide36.xml><?xml version="1.0" encoding="utf-8"?>
 <p:sld xmlns:a="http://schemas.openxmlformats.org/drawingml/2006/main" xmlns:r="http://schemas.openxmlformats.org/officeDocument/2006/relationships" xmlns:p="http://schemas.openxmlformats.org/presentationml/2006/main">
   <p:cSld>
     <p:bg>
@@ -8440,7 +10301,7 @@
 </p:sld>
 </file>
 
-<file path=ppt/slides/slide27.xml><?xml version="1.0" encoding="utf-8"?>
+<file path=ppt/slides/slide37.xml><?xml version="1.0" encoding="utf-8"?>
 <p:sld xmlns:a="http://schemas.openxmlformats.org/drawingml/2006/main" xmlns:r="http://schemas.openxmlformats.org/officeDocument/2006/relationships" xmlns:p="http://schemas.openxmlformats.org/presentationml/2006/main">
   <p:cSld>
     <p:bg>
@@ -8858,7 +10719,7 @@
 </p:sld>
 </file>
 
-<file path=ppt/slides/slide28.xml><?xml version="1.0" encoding="utf-8"?>
+<file path=ppt/slides/slide38.xml><?xml version="1.0" encoding="utf-8"?>
 <p:sld xmlns:a="http://schemas.openxmlformats.org/drawingml/2006/main" xmlns:r="http://schemas.openxmlformats.org/officeDocument/2006/relationships" xmlns:p="http://schemas.openxmlformats.org/presentationml/2006/main">
   <p:cSld>
     <p:bg>
@@ -9276,7 +11137,7 @@
 </p:sld>
 </file>
 
-<file path=ppt/slides/slide29.xml><?xml version="1.0" encoding="utf-8"?>
+<file path=ppt/slides/slide39.xml><?xml version="1.0" encoding="utf-8"?>
 <p:sld xmlns:a="http://schemas.openxmlformats.org/drawingml/2006/main" xmlns:r="http://schemas.openxmlformats.org/officeDocument/2006/relationships" xmlns:p="http://schemas.openxmlformats.org/presentationml/2006/main">
   <p:cSld>
     <p:bg>
@@ -9694,7 +11555,7 @@
 </p:sld>
 </file>
 
-<file path=ppt/slides/slide3.xml><?xml version="1.0" encoding="utf-8"?>
+<file path=ppt/slides/slide4.xml><?xml version="1.0" encoding="utf-8"?>
 <p:sld xmlns:a="http://schemas.openxmlformats.org/drawingml/2006/main" xmlns:r="http://schemas.openxmlformats.org/officeDocument/2006/relationships" xmlns:p="http://schemas.openxmlformats.org/presentationml/2006/main">
   <p:cSld>
     <p:bg>
@@ -9721,7 +11582,7 @@
       </p:grpSpPr>
       <p:sp>
         <p:nvSpPr>
-          <p:cNvPr id="31" name="Kicker"/>
+          <p:cNvPr id="41" name="Kicker"/>
           <p:cNvSpPr txBox="1"/>
           <p:nvPr/>
         </p:nvSpPr>
@@ -9753,14 +11614,14 @@
                 <a:latin typeface="Helvetica Neue"/>
                 <a:ea typeface="Helvetica Neue"/>
               </a:rPr>
-              <a:t>现状：关键设备仍是"坏了才修、到期就修"</a:t>
+              <a:t>澜脉：不加传感器，回答四个问题</a:t>
             </a:r>
           </a:p>
         </p:txBody>
       </p:sp>
       <p:sp>
         <p:nvSpPr>
-          <p:cNvPr id="32" name="Title"/>
+          <p:cNvPr id="42" name="Title"/>
           <p:cNvSpPr txBox="1"/>
           <p:nvPr/>
         </p:nvSpPr>
@@ -9792,14 +11653,14 @@
                 <a:latin typeface="Georgia"/>
                 <a:ea typeface="Georgia"/>
               </a:rPr>
-              <a:t>现状：关键设备仍是"坏了才修、到期就修"</a:t>
+              <a:t>澜脉：不加传感器，回答四个问题</a:t>
             </a:r>
           </a:p>
         </p:txBody>
       </p:sp>
       <p:sp>
         <p:nvSpPr>
-          <p:cNvPr id="33" name="Body"/>
+          <p:cNvPr id="43" name="Body"/>
           <p:cNvSpPr txBox="1"/>
           <p:nvPr/>
         </p:nvSpPr>
@@ -9832,7 +11693,7 @@
                 <a:latin typeface="Helvetica Neue"/>
                 <a:ea typeface="Helvetica Neue"/>
               </a:rPr>
-              <a:t>鼓风机、脱水机、泵：非计划停机代价高</a:t>
+              <a:t>有没有异常 → 是什么故障 → 还剩多久 → 何时修最省</a:t>
             </a:r>
           </a:p>
           <a:p>
@@ -9848,7 +11709,7 @@
                 <a:latin typeface="Helvetica Neue"/>
                 <a:ea typeface="Helvetica Neue"/>
               </a:rPr>
-              <a:t>定期大修：备件与人工浪费在没坏的设备上</a:t>
+              <a:t>纯软件：可离线部署，数据不出厂</a:t>
             </a:r>
           </a:p>
           <a:p>
@@ -9864,7 +11725,7 @@
                 <a:latin typeface="Helvetica Neue"/>
                 <a:ea typeface="Helvetica Neue"/>
               </a:rPr>
-              <a:t>电流、温度、压力、流量数据厂里本来就有</a:t>
+              <a:t>面向污水厂（TO B / TO G），按设备数订阅</a:t>
             </a:r>
           </a:p>
           <a:p>
@@ -9880,14 +11741,14 @@
                 <a:latin typeface="Helvetica Neue"/>
                 <a:ea typeface="Helvetica Neue"/>
               </a:rPr>
-              <a:t>缺的是"从数据看出设备在退化"的方法与工具</a:t>
+              <a:t>命题 2-6 要的是完整闭环，不是单点算法演示</a:t>
             </a:r>
           </a:p>
         </p:txBody>
       </p:sp>
       <p:sp>
         <p:nvSpPr>
-          <p:cNvPr id="39" name="Page number"/>
+          <p:cNvPr id="49" name="Page number"/>
           <p:cNvSpPr txBox="1"/>
           <p:nvPr/>
         </p:nvSpPr>
@@ -9919,7 +11780,7 @@
                 <a:latin typeface="Helvetica Neue"/>
                 <a:ea typeface="Helvetica Neue"/>
               </a:rPr>
-              <a:t>03 / 36</a:t>
+              <a:t>04 / 36</a:t>
             </a:r>
           </a:p>
         </p:txBody>
@@ -9960,7 +11821,7 @@
                                     </p:stCondLst>
                                   </p:cTn>
                                   <p:tgtEl>
-                                    <p:spTgt spid="33"/>
+                                    <p:spTgt spid="43"/>
                                   </p:tgtEl>
                                   <p:attrNameLst>
                                     <p:attrName>style.visibility</p:attrName>
@@ -9996,7 +11857,7 @@
                                     </p:stCondLst>
                                   </p:cTn>
                                   <p:tgtEl>
-                                    <p:spTgt spid="33"/>
+                                    <p:spTgt spid="43"/>
                                   </p:tgtEl>
                                   <p:attrNameLst>
                                     <p:attrName>style.visibility</p:attrName>
@@ -10032,7 +11893,7 @@
                                     </p:stCondLst>
                                   </p:cTn>
                                   <p:tgtEl>
-                                    <p:spTgt spid="33"/>
+                                    <p:spTgt spid="43"/>
                                   </p:tgtEl>
                                   <p:attrNameLst>
                                     <p:attrName>style.visibility</p:attrName>
@@ -10068,7 +11929,7 @@
                                     </p:stCondLst>
                                   </p:cTn>
                                   <p:tgtEl>
-                                    <p:spTgt spid="33"/>
+                                    <p:spTgt spid="43"/>
                                   </p:tgtEl>
                                   <p:attrNameLst>
                                     <p:attrName>style.visibility</p:attrName>
@@ -10106,13 +11967,13 @@
       </p:par>
     </p:tnLst>
     <p:bldLst>
-      <p:bldP spid="33" grpId="0"/>
+      <p:bldP spid="43" grpId="0"/>
     </p:bldLst>
   </p:timing>
 </p:sld>
 </file>
 
-<file path=ppt/slides/slide30.xml><?xml version="1.0" encoding="utf-8"?>
+<file path=ppt/slides/slide40.xml><?xml version="1.0" encoding="utf-8"?>
 <p:sld xmlns:a="http://schemas.openxmlformats.org/drawingml/2006/main" xmlns:r="http://schemas.openxmlformats.org/officeDocument/2006/relationships" xmlns:p="http://schemas.openxmlformats.org/presentationml/2006/main">
   <p:cSld>
     <p:bg>
@@ -10512,7 +12373,7 @@
 </p:sld>
 </file>
 
-<file path=ppt/slides/slide31.xml><?xml version="1.0" encoding="utf-8"?>
+<file path=ppt/slides/slide41.xml><?xml version="1.0" encoding="utf-8"?>
 <p:sld xmlns:a="http://schemas.openxmlformats.org/drawingml/2006/main" xmlns:r="http://schemas.openxmlformats.org/officeDocument/2006/relationships" xmlns:p="http://schemas.openxmlformats.org/presentationml/2006/main">
   <p:cSld>
     <p:bg>
@@ -10982,7 +12843,7 @@
 </p:sld>
 </file>
 
-<file path=ppt/slides/slide32.xml><?xml version="1.0" encoding="utf-8"?>
+<file path=ppt/slides/slide42.xml><?xml version="1.0" encoding="utf-8"?>
 <p:sld xmlns:a="http://schemas.openxmlformats.org/drawingml/2006/main" xmlns:r="http://schemas.openxmlformats.org/officeDocument/2006/relationships" xmlns:p="http://schemas.openxmlformats.org/presentationml/2006/main">
   <p:cSld>
     <p:bg>
@@ -11400,7 +13261,7 @@
 </p:sld>
 </file>
 
-<file path=ppt/slides/slide33.xml><?xml version="1.0" encoding="utf-8"?>
+<file path=ppt/slides/slide43.xml><?xml version="1.0" encoding="utf-8"?>
 <p:sld xmlns:a="http://schemas.openxmlformats.org/drawingml/2006/main" xmlns:r="http://schemas.openxmlformats.org/officeDocument/2006/relationships" xmlns:p="http://schemas.openxmlformats.org/presentationml/2006/main">
   <p:cSld>
     <p:bg>
@@ -11818,7 +13679,83 @@
 </p:sld>
 </file>
 
-<file path=ppt/slides/slide34.xml><?xml version="1.0" encoding="utf-8"?>
+<file path=ppt/slides/slide44.xml><?xml version="1.0" encoding="utf-8"?>
+<p:sld xmlns:a="http://schemas.openxmlformats.org/drawingml/2006/main" xmlns:p="http://schemas.openxmlformats.org/presentationml/2006/main" xmlns:r="http://schemas.openxmlformats.org/officeDocument/2006/relationships">
+  <p:cSld>
+    <p:spTree>
+      <p:nvGrpSpPr>
+        <p:cNvPr id="1" name=""/>
+        <p:cNvGrpSpPr/>
+        <p:nvPr/>
+      </p:nvGrpSpPr>
+      <p:grpSpPr/>
+      <p:pic>
+        <p:nvPicPr>
+          <p:cNvPr id="2" name="Picture 1" descr="figE_poc.png"/>
+          <p:cNvPicPr>
+            <a:picLocks noChangeAspect="1"/>
+          </p:cNvPicPr>
+          <p:nvPr/>
+        </p:nvPicPr>
+        <p:blipFill>
+          <a:blip r:embed="rId2"/>
+          <a:stretch>
+            <a:fillRect/>
+          </a:stretch>
+        </p:blipFill>
+        <p:spPr>
+          <a:xfrm>
+            <a:off x="731520" y="1525524"/>
+            <a:ext cx="10728960" cy="3121152"/>
+          </a:xfrm>
+          <a:prstGeom prst="rect">
+            <a:avLst/>
+          </a:prstGeom>
+        </p:spPr>
+      </p:pic>
+      <p:sp>
+        <p:nvSpPr>
+          <p:cNvPr id="3" name="TextBox 2"/>
+          <p:cNvSpPr txBox="1"/>
+          <p:nvPr/>
+        </p:nvSpPr>
+        <p:spPr>
+          <a:xfrm>
+            <a:off x="731520" y="5612130"/>
+            <a:ext cx="10728960" cy="685800"/>
+          </a:xfrm>
+          <a:prstGeom prst="rect">
+            <a:avLst/>
+          </a:prstGeom>
+          <a:noFill/>
+        </p:spPr>
+        <p:txBody>
+          <a:bodyPr wrap="square">
+            <a:spAutoFit/>
+          </a:bodyPr>
+          <a:lstStyle/>
+          <a:p>
+            <a:pPr algn="ctr"/>
+            <a:r>
+              <a:rPr sz="1400">
+                <a:solidFill>
+                  <a:srgbClr val="334455"/>
+                </a:solidFill>
+              </a:rPr>
+              <a:t>现场试点（POC）四步：选设备 → 标定 → 历史回放 → 在线运行</a:t>
+            </a:r>
+          </a:p>
+        </p:txBody>
+      </p:sp>
+    </p:spTree>
+  </p:cSld>
+  <p:clrMapOvr>
+    <a:masterClrMapping/>
+  </p:clrMapOvr>
+</p:sld>
+</file>
+
+<file path=ppt/slides/slide45.xml><?xml version="1.0" encoding="utf-8"?>
 <p:sld xmlns:a="http://schemas.openxmlformats.org/drawingml/2006/main" xmlns:r="http://schemas.openxmlformats.org/officeDocument/2006/relationships" xmlns:p="http://schemas.openxmlformats.org/presentationml/2006/main">
   <p:cSld>
     <p:bg>
@@ -12236,7 +14173,83 @@
 </p:sld>
 </file>
 
-<file path=ppt/slides/slide35.xml><?xml version="1.0" encoding="utf-8"?>
+<file path=ppt/slides/slide46.xml><?xml version="1.0" encoding="utf-8"?>
+<p:sld xmlns:a="http://schemas.openxmlformats.org/drawingml/2006/main" xmlns:p="http://schemas.openxmlformats.org/presentationml/2006/main" xmlns:r="http://schemas.openxmlformats.org/officeDocument/2006/relationships">
+  <p:cSld>
+    <p:spTree>
+      <p:nvGrpSpPr>
+        <p:cNvPr id="1" name=""/>
+        <p:cNvGrpSpPr/>
+        <p:nvPr/>
+      </p:nvGrpSpPr>
+      <p:grpSpPr/>
+      <p:pic>
+        <p:nvPicPr>
+          <p:cNvPr id="2" name="Picture 1" descr="s4_report_metropt3.png"/>
+          <p:cNvPicPr>
+            <a:picLocks noChangeAspect="1"/>
+          </p:cNvPicPr>
+          <p:nvPr/>
+        </p:nvPicPr>
+        <p:blipFill>
+          <a:blip r:embed="rId2"/>
+          <a:stretch>
+            <a:fillRect/>
+          </a:stretch>
+        </p:blipFill>
+        <p:spPr>
+          <a:xfrm>
+            <a:off x="4400702" y="731520"/>
+            <a:ext cx="3390595" cy="4709160"/>
+          </a:xfrm>
+          <a:prstGeom prst="rect">
+            <a:avLst/>
+          </a:prstGeom>
+        </p:spPr>
+      </p:pic>
+      <p:sp>
+        <p:nvSpPr>
+          <p:cNvPr id="3" name="TextBox 2"/>
+          <p:cNvSpPr txBox="1"/>
+          <p:nvPr/>
+        </p:nvSpPr>
+        <p:spPr>
+          <a:xfrm>
+            <a:off x="731520" y="5612130"/>
+            <a:ext cx="10728960" cy="685800"/>
+          </a:xfrm>
+          <a:prstGeom prst="rect">
+            <a:avLst/>
+          </a:prstGeom>
+          <a:noFill/>
+        </p:spPr>
+        <p:txBody>
+          <a:bodyPr wrap="square">
+            <a:spAutoFit/>
+          </a:bodyPr>
+          <a:lstStyle/>
+          <a:p>
+            <a:pPr algn="ctr"/>
+            <a:r>
+              <a:rPr sz="1400">
+                <a:solidFill>
+                  <a:srgbClr val="334455"/>
+                </a:solidFill>
+              </a:rPr>
+              <a:t>样例报告（真实空压机 214 天）：105 个告警，P1 56 / P2 30 / P3 19</a:t>
+            </a:r>
+          </a:p>
+        </p:txBody>
+      </p:sp>
+    </p:spTree>
+  </p:cSld>
+  <p:clrMapOvr>
+    <a:masterClrMapping/>
+  </p:clrMapOvr>
+</p:sld>
+</file>
+
+<file path=ppt/slides/slide47.xml><?xml version="1.0" encoding="utf-8"?>
 <p:sld xmlns:a="http://schemas.openxmlformats.org/drawingml/2006/main" xmlns:r="http://schemas.openxmlformats.org/officeDocument/2006/relationships" xmlns:p="http://schemas.openxmlformats.org/presentationml/2006/main">
   <p:cSld>
     <p:bg>
@@ -12602,7 +14615,7 @@
 </p:sld>
 </file>
 
-<file path=ppt/slides/slide36.xml><?xml version="1.0" encoding="utf-8"?>
+<file path=ppt/slides/slide48.xml><?xml version="1.0" encoding="utf-8"?>
 <p:sld xmlns:a="http://schemas.openxmlformats.org/drawingml/2006/main" xmlns:r="http://schemas.openxmlformats.org/officeDocument/2006/relationships" xmlns:p="http://schemas.openxmlformats.org/presentationml/2006/main">
   <p:cSld>
     <p:bg>
@@ -12752,1336 +14765,6 @@
   <p:transition spd="med">
     <p:fade/>
   </p:transition>
-</p:sld>
-</file>
-
-<file path=ppt/slides/slide37.xml><?xml version="1.0" encoding="utf-8"?>
-<p:sld xmlns:a="http://schemas.openxmlformats.org/drawingml/2006/main" xmlns:p="http://schemas.openxmlformats.org/presentationml/2006/main" xmlns:r="http://schemas.openxmlformats.org/officeDocument/2006/relationships">
-  <p:cSld>
-    <p:spTree>
-      <p:nvGrpSpPr>
-        <p:cNvPr id="1" name=""/>
-        <p:cNvGrpSpPr/>
-        <p:nvPr/>
-      </p:nvGrpSpPr>
-      <p:grpSpPr/>
-      <p:pic>
-        <p:nvPicPr>
-          <p:cNvPr id="2" name="Picture 1" descr="figB_pipeline.png"/>
-          <p:cNvPicPr>
-            <a:picLocks noChangeAspect="1"/>
-          </p:cNvPicPr>
-          <p:nvPr/>
-        </p:nvPicPr>
-        <p:blipFill>
-          <a:blip r:embed="rId2"/>
-          <a:stretch>
-            <a:fillRect/>
-          </a:stretch>
-        </p:blipFill>
-        <p:spPr>
-          <a:xfrm>
-            <a:off x="731520" y="1037844"/>
-            <a:ext cx="10728960" cy="4096512"/>
-          </a:xfrm>
-          <a:prstGeom prst="rect">
-            <a:avLst/>
-          </a:prstGeom>
-        </p:spPr>
-      </p:pic>
-      <p:sp>
-        <p:nvSpPr>
-          <p:cNvPr id="3" name="TextBox 2"/>
-          <p:cNvSpPr txBox="1"/>
-          <p:nvPr/>
-        </p:nvSpPr>
-        <p:spPr>
-          <a:xfrm>
-            <a:off x="731520" y="5612130"/>
-            <a:ext cx="10728960" cy="685800"/>
-          </a:xfrm>
-          <a:prstGeom prst="rect">
-            <a:avLst/>
-          </a:prstGeom>
-          <a:noFill/>
-        </p:spPr>
-        <p:txBody>
-          <a:bodyPr wrap="square">
-            <a:spAutoFit/>
-          </a:bodyPr>
-          <a:lstStyle/>
-          <a:p>
-            <a:pPr algn="ctr"/>
-            <a:r>
-              <a:rPr sz="1400">
-                <a:solidFill>
-                  <a:srgbClr val="334455"/>
-                </a:solidFill>
-              </a:rPr>
-              <a:t>四段链路：检测 → 诊断 → 剩余寿命 → 维护决策</a:t>
-            </a:r>
-          </a:p>
-        </p:txBody>
-      </p:sp>
-    </p:spTree>
-  </p:cSld>
-  <p:clrMapOvr>
-    <a:masterClrMapping/>
-  </p:clrMapOvr>
-</p:sld>
-</file>
-
-<file path=ppt/slides/slide38.xml><?xml version="1.0" encoding="utf-8"?>
-<p:sld xmlns:a="http://schemas.openxmlformats.org/drawingml/2006/main" xmlns:p="http://schemas.openxmlformats.org/presentationml/2006/main" xmlns:r="http://schemas.openxmlformats.org/officeDocument/2006/relationships">
-  <p:cSld>
-    <p:spTree>
-      <p:nvGrpSpPr>
-        <p:cNvPr id="1" name=""/>
-        <p:cNvGrpSpPr/>
-        <p:nvPr/>
-      </p:nvGrpSpPr>
-      <p:grpSpPr/>
-      <p:pic>
-        <p:nvPicPr>
-          <p:cNvPr id="2" name="Picture 1" descr="figC_criterion.png"/>
-          <p:cNvPicPr>
-            <a:picLocks noChangeAspect="1"/>
-          </p:cNvPicPr>
-          <p:nvPr/>
-        </p:nvPicPr>
-        <p:blipFill>
-          <a:blip r:embed="rId2"/>
-          <a:stretch>
-            <a:fillRect/>
-          </a:stretch>
-        </p:blipFill>
-        <p:spPr>
-          <a:xfrm>
-            <a:off x="731520" y="1135380"/>
-            <a:ext cx="10728960" cy="3901440"/>
-          </a:xfrm>
-          <a:prstGeom prst="rect">
-            <a:avLst/>
-          </a:prstGeom>
-        </p:spPr>
-      </p:pic>
-      <p:sp>
-        <p:nvSpPr>
-          <p:cNvPr id="3" name="TextBox 2"/>
-          <p:cNvSpPr txBox="1"/>
-          <p:nvPr/>
-        </p:nvSpPr>
-        <p:spPr>
-          <a:xfrm>
-            <a:off x="731520" y="5612130"/>
-            <a:ext cx="10728960" cy="685800"/>
-          </a:xfrm>
-          <a:prstGeom prst="rect">
-            <a:avLst/>
-          </a:prstGeom>
-          <a:noFill/>
-        </p:spPr>
-        <p:txBody>
-          <a:bodyPr wrap="square">
-            <a:spAutoFit/>
-          </a:bodyPr>
-          <a:lstStyle/>
-          <a:p>
-            <a:pPr algn="ctr"/>
-            <a:r>
-              <a:rPr sz="1400">
-                <a:solidFill>
-                  <a:srgbClr val="334455"/>
-                </a:solidFill>
-              </a:rPr>
-              <a:t>检测判据：双基线分数 + 事件机 + P1/P2/P3 分级</a:t>
-            </a:r>
-          </a:p>
-        </p:txBody>
-      </p:sp>
-    </p:spTree>
-  </p:cSld>
-  <p:clrMapOvr>
-    <a:masterClrMapping/>
-  </p:clrMapOvr>
-</p:sld>
-</file>
-
-<file path=ppt/slides/slide39.xml><?xml version="1.0" encoding="utf-8"?>
-<p:sld xmlns:a="http://schemas.openxmlformats.org/drawingml/2006/main" xmlns:p="http://schemas.openxmlformats.org/presentationml/2006/main" xmlns:r="http://schemas.openxmlformats.org/officeDocument/2006/relationships">
-  <p:cSld>
-    <p:spTree>
-      <p:nvGrpSpPr>
-        <p:cNvPr id="1" name=""/>
-        <p:cNvGrpSpPr/>
-        <p:nvPr/>
-      </p:nvGrpSpPr>
-      <p:grpSpPr/>
-      <p:pic>
-        <p:nvPicPr>
-          <p:cNvPr id="2" name="Picture 1" descr="bsm1_4in1.png"/>
-          <p:cNvPicPr>
-            <a:picLocks noChangeAspect="1"/>
-          </p:cNvPicPr>
-          <p:nvPr/>
-        </p:nvPicPr>
-        <p:blipFill>
-          <a:blip r:embed="rId2"/>
-          <a:stretch>
-            <a:fillRect/>
-          </a:stretch>
-        </p:blipFill>
-        <p:spPr>
-          <a:xfrm>
-            <a:off x="2694940" y="731520"/>
-            <a:ext cx="6802120" cy="4709160"/>
-          </a:xfrm>
-          <a:prstGeom prst="rect">
-            <a:avLst/>
-          </a:prstGeom>
-        </p:spPr>
-      </p:pic>
-      <p:sp>
-        <p:nvSpPr>
-          <p:cNvPr id="3" name="TextBox 2"/>
-          <p:cNvSpPr txBox="1"/>
-          <p:nvPr/>
-        </p:nvSpPr>
-        <p:spPr>
-          <a:xfrm>
-            <a:off x="731520" y="5612130"/>
-            <a:ext cx="10728960" cy="685800"/>
-          </a:xfrm>
-          <a:prstGeom prst="rect">
-            <a:avLst/>
-          </a:prstGeom>
-          <a:noFill/>
-        </p:spPr>
-        <p:txBody>
-          <a:bodyPr wrap="square">
-            <a:spAutoFit/>
-          </a:bodyPr>
-          <a:lstStyle/>
-          <a:p>
-            <a:pPr algn="ctr"/>
-            <a:r>
-              <a:rPr sz="1400">
-                <a:solidFill>
-                  <a:srgbClr val="334455"/>
-                </a:solidFill>
-              </a:rPr>
-              <a:t>数字孪生闭环四图：注入退化 → 检测 → RUL → 决策</a:t>
-            </a:r>
-          </a:p>
-        </p:txBody>
-      </p:sp>
-    </p:spTree>
-  </p:cSld>
-  <p:clrMapOvr>
-    <a:masterClrMapping/>
-  </p:clrMapOvr>
-</p:sld>
-</file>
-
-<file path=ppt/slides/slide4.xml><?xml version="1.0" encoding="utf-8"?>
-<p:sld xmlns:a="http://schemas.openxmlformats.org/drawingml/2006/main" xmlns:r="http://schemas.openxmlformats.org/officeDocument/2006/relationships" xmlns:p="http://schemas.openxmlformats.org/presentationml/2006/main">
-  <p:cSld>
-    <p:bg>
-      <p:bgPr>
-        <a:solidFill>
-          <a:srgbClr val="111316"/>
-        </a:solidFill>
-        <a:effectLst/>
-      </p:bgPr>
-    </p:bg>
-    <p:spTree>
-      <p:nvGrpSpPr>
-        <p:cNvPr id="1" name=""/>
-        <p:cNvGrpSpPr/>
-        <p:nvPr/>
-      </p:nvGrpSpPr>
-      <p:grpSpPr>
-        <a:xfrm>
-          <a:off x="0" y="0"/>
-          <a:ext cx="0" cy="0"/>
-          <a:chOff x="0" y="0"/>
-          <a:chExt cx="0" cy="0"/>
-        </a:xfrm>
-      </p:grpSpPr>
-      <p:sp>
-        <p:nvSpPr>
-          <p:cNvPr id="41" name="Kicker"/>
-          <p:cNvSpPr txBox="1"/>
-          <p:nvPr/>
-        </p:nvSpPr>
-        <p:spPr>
-          <a:xfrm>
-            <a:off x="900000" y="420000"/>
-            <a:ext cx="10000000" cy="420000"/>
-          </a:xfrm>
-          <a:prstGeom prst="rect">
-            <a:avLst/>
-          </a:prstGeom>
-          <a:noFill/>
-          <a:ln/>
-        </p:spPr>
-        <p:txBody>
-          <a:bodyPr wrap="square" rtlCol="0">
-            <a:normAutofit/>
-          </a:bodyPr>
-          <a:lstStyle/>
-          <a:p>
-            <a:pPr>
-              <a:buNone/>
-            </a:pPr>
-            <a:r>
-              <a:rPr lang="zh-CN" sz="1400" b="1" dirty="0">
-                <a:solidFill>
-                  <a:srgbClr val="C9A84C"/>
-                </a:solidFill>
-                <a:latin typeface="Helvetica Neue"/>
-                <a:ea typeface="Helvetica Neue"/>
-              </a:rPr>
-              <a:t>澜脉：不加传感器，回答四个问题</a:t>
-            </a:r>
-          </a:p>
-        </p:txBody>
-      </p:sp>
-      <p:sp>
-        <p:nvSpPr>
-          <p:cNvPr id="42" name="Title"/>
-          <p:cNvSpPr txBox="1"/>
-          <p:nvPr/>
-        </p:nvSpPr>
-        <p:spPr>
-          <a:xfrm>
-            <a:off x="900000" y="920000"/>
-            <a:ext cx="10300000" cy="800000"/>
-          </a:xfrm>
-          <a:prstGeom prst="rect">
-            <a:avLst/>
-          </a:prstGeom>
-          <a:noFill/>
-          <a:ln/>
-        </p:spPr>
-        <p:txBody>
-          <a:bodyPr wrap="square" rtlCol="0">
-            <a:normAutofit/>
-          </a:bodyPr>
-          <a:lstStyle/>
-          <a:p>
-            <a:pPr>
-              <a:buNone/>
-            </a:pPr>
-            <a:r>
-              <a:rPr lang="zh-CN" sz="3400" b="1" dirty="0">
-                <a:solidFill>
-                  <a:srgbClr val="F4EFE6"/>
-                </a:solidFill>
-                <a:latin typeface="Georgia"/>
-                <a:ea typeface="Georgia"/>
-              </a:rPr>
-              <a:t>澜脉：不加传感器，回答四个问题</a:t>
-            </a:r>
-          </a:p>
-        </p:txBody>
-      </p:sp>
-      <p:sp>
-        <p:nvSpPr>
-          <p:cNvPr id="43" name="Body"/>
-          <p:cNvSpPr txBox="1"/>
-          <p:nvPr/>
-        </p:nvSpPr>
-        <p:spPr>
-          <a:xfrm>
-            <a:off x="1050000" y="1850000"/>
-            <a:ext cx="10100000" cy="4500000"/>
-          </a:xfrm>
-          <a:prstGeom prst="rect">
-            <a:avLst/>
-          </a:prstGeom>
-          <a:noFill/>
-          <a:ln/>
-        </p:spPr>
-        <p:txBody>
-          <a:bodyPr wrap="square" rtlCol="0">
-            <a:normAutofit/>
-          </a:bodyPr>
-          <a:lstStyle/>
-          <a:p>
-            <a:pPr marL="285750" indent="-285750">
-              <a:buFont typeface="Arial" panose="020B0604020202020204"/>
-              <a:buChar char="•"/>
-            </a:pPr>
-            <a:r>
-              <a:rPr lang="zh-CN" sz="2000" b="0" dirty="0">
-                <a:solidFill>
-                  <a:srgbClr val="F4EFE6"/>
-                </a:solidFill>
-                <a:latin typeface="Helvetica Neue"/>
-                <a:ea typeface="Helvetica Neue"/>
-              </a:rPr>
-              <a:t>有没有异常 → 是什么故障 → 还剩多久 → 何时修最省</a:t>
-            </a:r>
-          </a:p>
-          <a:p>
-            <a:pPr marL="285750" indent="-285750">
-              <a:buFont typeface="Arial" panose="020B0604020202020204"/>
-              <a:buChar char="•"/>
-            </a:pPr>
-            <a:r>
-              <a:rPr lang="zh-CN" sz="2000" b="0" dirty="0">
-                <a:solidFill>
-                  <a:srgbClr val="F4EFE6"/>
-                </a:solidFill>
-                <a:latin typeface="Helvetica Neue"/>
-                <a:ea typeface="Helvetica Neue"/>
-              </a:rPr>
-              <a:t>纯软件：可离线部署，数据不出厂</a:t>
-            </a:r>
-          </a:p>
-          <a:p>
-            <a:pPr marL="285750" indent="-285750">
-              <a:buFont typeface="Arial" panose="020B0604020202020204"/>
-              <a:buChar char="•"/>
-            </a:pPr>
-            <a:r>
-              <a:rPr lang="zh-CN" sz="2000" b="0" dirty="0">
-                <a:solidFill>
-                  <a:srgbClr val="F4EFE6"/>
-                </a:solidFill>
-                <a:latin typeface="Helvetica Neue"/>
-                <a:ea typeface="Helvetica Neue"/>
-              </a:rPr>
-              <a:t>面向污水厂（TO B / TO G），按设备数订阅</a:t>
-            </a:r>
-          </a:p>
-          <a:p>
-            <a:pPr marL="285750" indent="-285750">
-              <a:buFont typeface="Arial" panose="020B0604020202020204"/>
-              <a:buChar char="•"/>
-            </a:pPr>
-            <a:r>
-              <a:rPr lang="zh-CN" sz="2000" b="0" dirty="0">
-                <a:solidFill>
-                  <a:srgbClr val="F4EFE6"/>
-                </a:solidFill>
-                <a:latin typeface="Helvetica Neue"/>
-                <a:ea typeface="Helvetica Neue"/>
-              </a:rPr>
-              <a:t>命题 2-6 要的是完整闭环，不是单点算法演示</a:t>
-            </a:r>
-          </a:p>
-        </p:txBody>
-      </p:sp>
-      <p:sp>
-        <p:nvSpPr>
-          <p:cNvPr id="49" name="Page number"/>
-          <p:cNvSpPr txBox="1"/>
-          <p:nvPr/>
-        </p:nvSpPr>
-        <p:spPr>
-          <a:xfrm>
-            <a:off x="10600000" y="6250000"/>
-            <a:ext cx="1200000" cy="400000"/>
-          </a:xfrm>
-          <a:prstGeom prst="rect">
-            <a:avLst/>
-          </a:prstGeom>
-          <a:noFill/>
-          <a:ln/>
-        </p:spPr>
-        <p:txBody>
-          <a:bodyPr wrap="square" rtlCol="0">
-            <a:normAutofit/>
-          </a:bodyPr>
-          <a:lstStyle/>
-          <a:p>
-            <a:pPr algn="r">
-              <a:buNone/>
-            </a:pPr>
-            <a:r>
-              <a:rPr lang="zh-CN" sz="1000" b="0" dirty="0">
-                <a:solidFill>
-                  <a:srgbClr val="A79F91"/>
-                </a:solidFill>
-                <a:latin typeface="Helvetica Neue"/>
-                <a:ea typeface="Helvetica Neue"/>
-              </a:rPr>
-              <a:t>04 / 36</a:t>
-            </a:r>
-          </a:p>
-        </p:txBody>
-      </p:sp>
-    </p:spTree>
-  </p:cSld>
-  <p:clrMapOvr>
-    <a:overrideClrMapping bg1="lt1" tx1="dk1" bg2="lt2" tx2="dk2" accent1="accent1" accent2="accent2" accent3="accent3" accent4="accent4" accent5="accent5" accent6="accent6" hlink="hlink" folHlink="folHlink"/>
-  </p:clrMapOvr>
-  <p:transition spd="med">
-    <p:fade/>
-  </p:transition>
-  <p:timing>
-    <p:tnLst>
-      <p:par>
-        <p:cTn id="1" dur="indefinite" restart="never" nodeType="tmRoot">
-          <p:childTnLst>
-            <p:seq concurrent="1" nextAc="seek">
-              <p:cTn id="2" dur="indefinite" nodeType="mainSeq">
-                <p:childTnLst>
-                  <p:par>
-                    <p:cTn id="3" fill="hold">
-                      <p:stCondLst>
-                        <p:cond delay="indefinite"/>
-                      </p:stCondLst>
-                      <p:childTnLst>
-                        <p:par>
-                          <p:cTn id="4" presetID="1" presetClass="entr" presetSubtype="0" fill="hold" grpId="0" nodeType="clickEffect">
-                            <p:stCondLst>
-                              <p:cond delay="0"/>
-                            </p:stCondLst>
-                            <p:childTnLst>
-                              <p:set>
-                                <p:cBhvr>
-                                  <p:cTn id="5" dur="1" fill="hold">
-                                    <p:stCondLst>
-                                      <p:cond delay="0"/>
-                                    </p:stCondLst>
-                                  </p:cTn>
-                                  <p:tgtEl>
-                                    <p:spTgt spid="43"/>
-                                  </p:tgtEl>
-                                  <p:attrNameLst>
-                                    <p:attrName>style.visibility</p:attrName>
-                                  </p:attrNameLst>
-                                </p:cBhvr>
-                                <p:to>
-                                  <p:strVal val="visible"/>
-                                </p:to>
-                              </p:set>
-                            </p:childTnLst>
-                          </p:cTn>
-                        </p:par>
-                      </p:childTnLst>
-                    </p:cTn>
-                  </p:par>
-                  <p:par>
-                    <p:cTn id="6" fill="hold">
-                      <p:stCondLst>
-                        <p:cond delay="indefinite"/>
-                      </p:stCondLst>
-                      <p:childTnLst>
-                        <p:par>
-                          <p:cTn id="7" presetID="1" presetClass="entr" presetSubtype="0" fill="hold" grpId="0" nodeType="clickEffect">
-                            <p:stCondLst>
-                              <p:cond delay="0"/>
-                            </p:stCondLst>
-                            <p:childTnLst>
-                              <p:set>
-                                <p:cBhvr>
-                                  <p:cTn id="8" dur="1" fill="hold">
-                                    <p:stCondLst>
-                                      <p:cond delay="0"/>
-                                    </p:stCondLst>
-                                  </p:cTn>
-                                  <p:tgtEl>
-                                    <p:spTgt spid="43"/>
-                                  </p:tgtEl>
-                                  <p:attrNameLst>
-                                    <p:attrName>style.visibility</p:attrName>
-                                  </p:attrNameLst>
-                                </p:cBhvr>
-                                <p:to>
-                                  <p:strVal val="visible"/>
-                                </p:to>
-                              </p:set>
-                            </p:childTnLst>
-                          </p:cTn>
-                        </p:par>
-                      </p:childTnLst>
-                    </p:cTn>
-                  </p:par>
-                  <p:par>
-                    <p:cTn id="9" fill="hold">
-                      <p:stCondLst>
-                        <p:cond delay="indefinite"/>
-                      </p:stCondLst>
-                      <p:childTnLst>
-                        <p:par>
-                          <p:cTn id="10" presetID="1" presetClass="entr" presetSubtype="0" fill="hold" grpId="0" nodeType="clickEffect">
-                            <p:stCondLst>
-                              <p:cond delay="0"/>
-                            </p:stCondLst>
-                            <p:childTnLst>
-                              <p:set>
-                                <p:cBhvr>
-                                  <p:cTn id="11" dur="1" fill="hold">
-                                    <p:stCondLst>
-                                      <p:cond delay="0"/>
-                                    </p:stCondLst>
-                                  </p:cTn>
-                                  <p:tgtEl>
-                                    <p:spTgt spid="43"/>
-                                  </p:tgtEl>
-                                  <p:attrNameLst>
-                                    <p:attrName>style.visibility</p:attrName>
-                                  </p:attrNameLst>
-                                </p:cBhvr>
-                                <p:to>
-                                  <p:strVal val="visible"/>
-                                </p:to>
-                              </p:set>
-                            </p:childTnLst>
-                          </p:cTn>
-                        </p:par>
-                      </p:childTnLst>
-                    </p:cTn>
-                  </p:par>
-                  <p:par>
-                    <p:cTn id="12" fill="hold">
-                      <p:stCondLst>
-                        <p:cond delay="indefinite"/>
-                      </p:stCondLst>
-                      <p:childTnLst>
-                        <p:par>
-                          <p:cTn id="13" presetID="1" presetClass="entr" presetSubtype="0" fill="hold" grpId="0" nodeType="clickEffect">
-                            <p:stCondLst>
-                              <p:cond delay="0"/>
-                            </p:stCondLst>
-                            <p:childTnLst>
-                              <p:set>
-                                <p:cBhvr>
-                                  <p:cTn id="14" dur="1" fill="hold">
-                                    <p:stCondLst>
-                                      <p:cond delay="0"/>
-                                    </p:stCondLst>
-                                  </p:cTn>
-                                  <p:tgtEl>
-                                    <p:spTgt spid="43"/>
-                                  </p:tgtEl>
-                                  <p:attrNameLst>
-                                    <p:attrName>style.visibility</p:attrName>
-                                  </p:attrNameLst>
-                                </p:cBhvr>
-                                <p:to>
-                                  <p:strVal val="visible"/>
-                                </p:to>
-                              </p:set>
-                            </p:childTnLst>
-                          </p:cTn>
-                        </p:par>
-                      </p:childTnLst>
-                    </p:cTn>
-                  </p:par>
-                </p:childTnLst>
-              </p:cTn>
-              <p:prevCondLst>
-                <p:cond evt="onPrev" delay="0">
-                  <p:tgtEl>
-                    <p:sldTgt/>
-                  </p:tgtEl>
-                </p:cond>
-              </p:prevCondLst>
-              <p:nextCondLst>
-                <p:cond evt="onNext" delay="0">
-                  <p:tgtEl>
-                    <p:sldTgt/>
-                  </p:tgtEl>
-                </p:cond>
-              </p:nextCondLst>
-            </p:seq>
-          </p:childTnLst>
-        </p:cTn>
-      </p:par>
-    </p:tnLst>
-    <p:bldLst>
-      <p:bldP spid="43" grpId="0"/>
-    </p:bldLst>
-  </p:timing>
-</p:sld>
-</file>
-
-<file path=ppt/slides/slide40.xml><?xml version="1.0" encoding="utf-8"?>
-<p:sld xmlns:a="http://schemas.openxmlformats.org/drawingml/2006/main" xmlns:p="http://schemas.openxmlformats.org/presentationml/2006/main" xmlns:r="http://schemas.openxmlformats.org/officeDocument/2006/relationships">
-  <p:cSld>
-    <p:spTree>
-      <p:nvGrpSpPr>
-        <p:cNvPr id="1" name=""/>
-        <p:cNvGrpSpPr/>
-        <p:nvPr/>
-      </p:nvGrpSpPr>
-      <p:grpSpPr/>
-      <p:pic>
-        <p:nvPicPr>
-          <p:cNvPr id="2" name="Picture 1" descr="bsm2_route_b_detect.png"/>
-          <p:cNvPicPr>
-            <a:picLocks noChangeAspect="1"/>
-          </p:cNvPicPr>
-          <p:nvPr/>
-        </p:nvPicPr>
-        <p:blipFill>
-          <a:blip r:embed="rId2"/>
-          <a:stretch>
-            <a:fillRect/>
-          </a:stretch>
-        </p:blipFill>
-        <p:spPr>
-          <a:xfrm>
-            <a:off x="2485644" y="731520"/>
-            <a:ext cx="7220712" cy="4709160"/>
-          </a:xfrm>
-          <a:prstGeom prst="rect">
-            <a:avLst/>
-          </a:prstGeom>
-        </p:spPr>
-      </p:pic>
-      <p:sp>
-        <p:nvSpPr>
-          <p:cNvPr id="3" name="TextBox 2"/>
-          <p:cNvSpPr txBox="1"/>
-          <p:nvPr/>
-        </p:nvSpPr>
-        <p:spPr>
-          <a:xfrm>
-            <a:off x="731520" y="5612130"/>
-            <a:ext cx="10728960" cy="685800"/>
-          </a:xfrm>
-          <a:prstGeom prst="rect">
-            <a:avLst/>
-          </a:prstGeom>
-          <a:noFill/>
-        </p:spPr>
-        <p:txBody>
-          <a:bodyPr wrap="square">
-            <a:spAutoFit/>
-          </a:bodyPr>
-          <a:lstStyle/>
-          <a:p>
-            <a:pPr algn="ctr"/>
-            <a:r>
-              <a:rPr sz="1400">
-                <a:solidFill>
-                  <a:srgbClr val="334455"/>
-                </a:solidFill>
-              </a:rPr>
-              <a:t>BSM2 整厂：原始量检不出，设备级比值通道 9.80 天检出</a:t>
-            </a:r>
-          </a:p>
-        </p:txBody>
-      </p:sp>
-    </p:spTree>
-  </p:cSld>
-  <p:clrMapOvr>
-    <a:masterClrMapping/>
-  </p:clrMapOvr>
-</p:sld>
-</file>
-
-<file path=ppt/slides/slide41.xml><?xml version="1.0" encoding="utf-8"?>
-<p:sld xmlns:a="http://schemas.openxmlformats.org/drawingml/2006/main" xmlns:p="http://schemas.openxmlformats.org/presentationml/2006/main" xmlns:r="http://schemas.openxmlformats.org/officeDocument/2006/relationships">
-  <p:cSld>
-    <p:spTree>
-      <p:nvGrpSpPr>
-        <p:cNvPr id="1" name=""/>
-        <p:cNvGrpSpPr/>
-        <p:nvPr/>
-      </p:nvGrpSpPr>
-      <p:grpSpPr/>
-      <p:pic>
-        <p:nvPicPr>
-          <p:cNvPr id="2" name="Picture 1" descr="sludge_line2.png"/>
-          <p:cNvPicPr>
-            <a:picLocks noChangeAspect="1"/>
-          </p:cNvPicPr>
-          <p:nvPr/>
-        </p:nvPicPr>
-        <p:blipFill>
-          <a:blip r:embed="rId2"/>
-          <a:stretch>
-            <a:fillRect/>
-          </a:stretch>
-        </p:blipFill>
-        <p:spPr>
-          <a:xfrm>
-            <a:off x="1700784" y="731520"/>
-            <a:ext cx="8790432" cy="4709160"/>
-          </a:xfrm>
-          <a:prstGeom prst="rect">
-            <a:avLst/>
-          </a:prstGeom>
-        </p:spPr>
-      </p:pic>
-      <p:sp>
-        <p:nvSpPr>
-          <p:cNvPr id="3" name="TextBox 2"/>
-          <p:cNvSpPr txBox="1"/>
-          <p:nvPr/>
-        </p:nvSpPr>
-        <p:spPr>
-          <a:xfrm>
-            <a:off x="731520" y="5612130"/>
-            <a:ext cx="10728960" cy="685800"/>
-          </a:xfrm>
-          <a:prstGeom prst="rect">
-            <a:avLst/>
-          </a:prstGeom>
-          <a:noFill/>
-        </p:spPr>
-        <p:txBody>
-          <a:bodyPr wrap="square">
-            <a:spAutoFit/>
-          </a:bodyPr>
-          <a:lstStyle/>
-          <a:p>
-            <a:pPr algn="ctr"/>
-            <a:r>
-              <a:rPr sz="1400">
-                <a:solidFill>
-                  <a:srgbClr val="334455"/>
-                </a:solidFill>
-              </a:rPr>
-              <a:t>污泥线闭环：含固率、湿泥饼量、滤液 TSS 与检测分数</a:t>
-            </a:r>
-          </a:p>
-        </p:txBody>
-      </p:sp>
-    </p:spTree>
-  </p:cSld>
-  <p:clrMapOvr>
-    <a:masterClrMapping/>
-  </p:clrMapOvr>
-</p:sld>
-</file>
-
-<file path=ppt/slides/slide42.xml><?xml version="1.0" encoding="utf-8"?>
-<p:sld xmlns:a="http://schemas.openxmlformats.org/drawingml/2006/main" xmlns:p="http://schemas.openxmlformats.org/presentationml/2006/main" xmlns:r="http://schemas.openxmlformats.org/officeDocument/2006/relationships">
-  <p:cSld>
-    <p:spTree>
-      <p:nvGrpSpPr>
-        <p:cNvPr id="1" name=""/>
-        <p:cNvGrpSpPr/>
-        <p:nvPr/>
-      </p:nvGrpSpPr>
-      <p:grpSpPr/>
-      <p:pic>
-        <p:nvPicPr>
-          <p:cNvPr id="2" name="Picture 1" descr="sludge_decision.png"/>
-          <p:cNvPicPr>
-            <a:picLocks noChangeAspect="1"/>
-          </p:cNvPicPr>
-          <p:nvPr/>
-        </p:nvPicPr>
-        <p:blipFill>
-          <a:blip r:embed="rId2"/>
-          <a:stretch>
-            <a:fillRect/>
-          </a:stretch>
-        </p:blipFill>
-        <p:spPr>
-          <a:xfrm>
-            <a:off x="731520" y="1543812"/>
-            <a:ext cx="10728960" cy="3084575"/>
-          </a:xfrm>
-          <a:prstGeom prst="rect">
-            <a:avLst/>
-          </a:prstGeom>
-        </p:spPr>
-      </p:pic>
-      <p:sp>
-        <p:nvSpPr>
-          <p:cNvPr id="3" name="TextBox 2"/>
-          <p:cNvSpPr txBox="1"/>
-          <p:nvPr/>
-        </p:nvSpPr>
-        <p:spPr>
-          <a:xfrm>
-            <a:off x="731520" y="5612130"/>
-            <a:ext cx="10728960" cy="685800"/>
-          </a:xfrm>
-          <a:prstGeom prst="rect">
-            <a:avLst/>
-          </a:prstGeom>
-          <a:noFill/>
-        </p:spPr>
-        <p:txBody>
-          <a:bodyPr wrap="square">
-            <a:spAutoFit/>
-          </a:bodyPr>
-          <a:lstStyle/>
-          <a:p>
-            <a:pPr algn="ctr"/>
-            <a:r>
-              <a:rPr sz="1400">
-                <a:solidFill>
-                  <a:srgbClr val="334455"/>
-                </a:solidFill>
-              </a:rPr>
-              <a:t>维护策略对比：RUL 驱动相对最优固定周期省 24.5%（占位成本）</a:t>
-            </a:r>
-          </a:p>
-        </p:txBody>
-      </p:sp>
-    </p:spTree>
-  </p:cSld>
-  <p:clrMapOvr>
-    <a:masterClrMapping/>
-  </p:clrMapOvr>
-</p:sld>
-</file>
-
-<file path=ppt/slides/slide43.xml><?xml version="1.0" encoding="utf-8"?>
-<p:sld xmlns:a="http://schemas.openxmlformats.org/drawingml/2006/main" xmlns:p="http://schemas.openxmlformats.org/presentationml/2006/main" xmlns:r="http://schemas.openxmlformats.org/officeDocument/2006/relationships">
-  <p:cSld>
-    <p:spTree>
-      <p:nvGrpSpPr>
-        <p:cNvPr id="1" name=""/>
-        <p:cNvGrpSpPr/>
-        <p:nvPr/>
-      </p:nvGrpSpPr>
-      <p:grpSpPr/>
-      <p:pic>
-        <p:nvPicPr>
-          <p:cNvPr id="2" name="Picture 1" descr="figures_4in1.png"/>
-          <p:cNvPicPr>
-            <a:picLocks noChangeAspect="1"/>
-          </p:cNvPicPr>
-          <p:nvPr/>
-        </p:nvPicPr>
-        <p:blipFill>
-          <a:blip r:embed="rId2"/>
-          <a:stretch>
-            <a:fillRect/>
-          </a:stretch>
-        </p:blipFill>
-        <p:spPr>
-          <a:xfrm>
-            <a:off x="2694940" y="731520"/>
-            <a:ext cx="6802120" cy="4709160"/>
-          </a:xfrm>
-          <a:prstGeom prst="rect">
-            <a:avLst/>
-          </a:prstGeom>
-        </p:spPr>
-      </p:pic>
-      <p:sp>
-        <p:nvSpPr>
-          <p:cNvPr id="3" name="TextBox 2"/>
-          <p:cNvSpPr txBox="1"/>
-          <p:nvPr/>
-        </p:nvSpPr>
-        <p:spPr>
-          <a:xfrm>
-            <a:off x="731520" y="5612130"/>
-            <a:ext cx="10728960" cy="685800"/>
-          </a:xfrm>
-          <a:prstGeom prst="rect">
-            <a:avLst/>
-          </a:prstGeom>
-          <a:noFill/>
-        </p:spPr>
-        <p:txBody>
-          <a:bodyPr wrap="square">
-            <a:spAutoFit/>
-          </a:bodyPr>
-          <a:lstStyle/>
-          <a:p>
-            <a:pPr algn="ctr"/>
-            <a:r>
-              <a:rPr sz="1400">
-                <a:solidFill>
-                  <a:srgbClr val="334455"/>
-                </a:solidFill>
-              </a:rPr>
-              <a:t>真实数据四图：误报-召回 / 策略成本 / 敏感性 / RUL 散点</a:t>
-            </a:r>
-          </a:p>
-        </p:txBody>
-      </p:sp>
-    </p:spTree>
-  </p:cSld>
-  <p:clrMapOvr>
-    <a:masterClrMapping/>
-  </p:clrMapOvr>
-</p:sld>
-</file>
-
-<file path=ppt/slides/slide44.xml><?xml version="1.0" encoding="utf-8"?>
-<p:sld xmlns:a="http://schemas.openxmlformats.org/drawingml/2006/main" xmlns:p="http://schemas.openxmlformats.org/presentationml/2006/main" xmlns:r="http://schemas.openxmlformats.org/officeDocument/2006/relationships">
-  <p:cSld>
-    <p:spTree>
-      <p:nvGrpSpPr>
-        <p:cNvPr id="1" name=""/>
-        <p:cNvGrpSpPr/>
-        <p:nvPr/>
-      </p:nvGrpSpPr>
-      <p:grpSpPr/>
-      <p:pic>
-        <p:nvPicPr>
-          <p:cNvPr id="2" name="Picture 1" descr="s2_demo_dashboard.png"/>
-          <p:cNvPicPr>
-            <a:picLocks noChangeAspect="1"/>
-          </p:cNvPicPr>
-          <p:nvPr/>
-        </p:nvPicPr>
-        <p:blipFill>
-          <a:blip r:embed="rId2"/>
-          <a:stretch>
-            <a:fillRect/>
-          </a:stretch>
-        </p:blipFill>
-        <p:spPr>
-          <a:xfrm>
-            <a:off x="4400702" y="731520"/>
-            <a:ext cx="3390595" cy="4709160"/>
-          </a:xfrm>
-          <a:prstGeom prst="rect">
-            <a:avLst/>
-          </a:prstGeom>
-        </p:spPr>
-      </p:pic>
-      <p:sp>
-        <p:nvSpPr>
-          <p:cNvPr id="3" name="TextBox 2"/>
-          <p:cNvSpPr txBox="1"/>
-          <p:nvPr/>
-        </p:nvSpPr>
-        <p:spPr>
-          <a:xfrm>
-            <a:off x="731520" y="5612130"/>
-            <a:ext cx="10728960" cy="685800"/>
-          </a:xfrm>
-          <a:prstGeom prst="rect">
-            <a:avLst/>
-          </a:prstGeom>
-          <a:noFill/>
-        </p:spPr>
-        <p:txBody>
-          <a:bodyPr wrap="square">
-            <a:spAutoFit/>
-          </a:bodyPr>
-          <a:lstStyle/>
-          <a:p>
-            <a:pPr algn="ctr"/>
-            <a:r>
-              <a:rPr sz="1400">
-                <a:solidFill>
-                  <a:srgbClr val="334455"/>
-                </a:solidFill>
-              </a:rPr>
-              <a:t>十节演示看板（在线可看）：从检测到决策的全部结果与口径</a:t>
-            </a:r>
-          </a:p>
-        </p:txBody>
-      </p:sp>
-    </p:spTree>
-  </p:cSld>
-  <p:clrMapOvr>
-    <a:masterClrMapping/>
-  </p:clrMapOvr>
-</p:sld>
-</file>
-
-<file path=ppt/slides/slide45.xml><?xml version="1.0" encoding="utf-8"?>
-<p:sld xmlns:a="http://schemas.openxmlformats.org/drawingml/2006/main" xmlns:p="http://schemas.openxmlformats.org/presentationml/2006/main" xmlns:r="http://schemas.openxmlformats.org/officeDocument/2006/relationships">
-  <p:cSld>
-    <p:spTree>
-      <p:nvGrpSpPr>
-        <p:cNvPr id="1" name=""/>
-        <p:cNvGrpSpPr/>
-        <p:nvPr/>
-      </p:nvGrpSpPr>
-      <p:grpSpPr/>
-      <p:pic>
-        <p:nvPicPr>
-          <p:cNvPr id="2" name="Picture 1" descr="s6_workbench.png"/>
-          <p:cNvPicPr>
-            <a:picLocks noChangeAspect="1"/>
-          </p:cNvPicPr>
-          <p:nvPr/>
-        </p:nvPicPr>
-        <p:blipFill>
-          <a:blip r:embed="rId2"/>
-          <a:stretch>
-            <a:fillRect/>
-          </a:stretch>
-        </p:blipFill>
-        <p:spPr>
-          <a:xfrm>
-            <a:off x="3835603" y="731520"/>
-            <a:ext cx="4520793" cy="4709160"/>
-          </a:xfrm>
-          <a:prstGeom prst="rect">
-            <a:avLst/>
-          </a:prstGeom>
-        </p:spPr>
-      </p:pic>
-      <p:sp>
-        <p:nvSpPr>
-          <p:cNvPr id="3" name="TextBox 2"/>
-          <p:cNvSpPr txBox="1"/>
-          <p:nvPr/>
-        </p:nvSpPr>
-        <p:spPr>
-          <a:xfrm>
-            <a:off x="731520" y="5612130"/>
-            <a:ext cx="10728960" cy="685800"/>
-          </a:xfrm>
-          <a:prstGeom prst="rect">
-            <a:avLst/>
-          </a:prstGeom>
-          <a:noFill/>
-        </p:spPr>
-        <p:txBody>
-          <a:bodyPr wrap="square">
-            <a:spAutoFit/>
-          </a:bodyPr>
-          <a:lstStyle/>
-          <a:p>
-            <a:pPr algn="ctr"/>
-            <a:r>
-              <a:rPr sz="1400">
-                <a:solidFill>
-                  <a:srgbClr val="334455"/>
-                </a:solidFill>
-              </a:rPr>
-              <a:t>本地工作台：浏览器上传 CSV → 标定基线 → 出报告，数据不出本机</a:t>
-            </a:r>
-          </a:p>
-        </p:txBody>
-      </p:sp>
-    </p:spTree>
-  </p:cSld>
-  <p:clrMapOvr>
-    <a:masterClrMapping/>
-  </p:clrMapOvr>
-</p:sld>
-</file>
-
-<file path=ppt/slides/slide46.xml><?xml version="1.0" encoding="utf-8"?>
-<p:sld xmlns:a="http://schemas.openxmlformats.org/drawingml/2006/main" xmlns:p="http://schemas.openxmlformats.org/presentationml/2006/main" xmlns:r="http://schemas.openxmlformats.org/officeDocument/2006/relationships">
-  <p:cSld>
-    <p:spTree>
-      <p:nvGrpSpPr>
-        <p:cNvPr id="1" name=""/>
-        <p:cNvGrpSpPr/>
-        <p:nvPr/>
-      </p:nvGrpSpPr>
-      <p:grpSpPr/>
-      <p:pic>
-        <p:nvPicPr>
-          <p:cNvPr id="2" name="Picture 1" descr="s8_report_metro_alarms.png"/>
-          <p:cNvPicPr>
-            <a:picLocks noChangeAspect="1"/>
-          </p:cNvPicPr>
-          <p:nvPr/>
-        </p:nvPicPr>
-        <p:blipFill>
-          <a:blip r:embed="rId2"/>
-          <a:stretch>
-            <a:fillRect/>
-          </a:stretch>
-        </p:blipFill>
-        <p:spPr>
-          <a:xfrm>
-            <a:off x="4330065" y="731520"/>
-            <a:ext cx="3531870" cy="4709160"/>
-          </a:xfrm>
-          <a:prstGeom prst="rect">
-            <a:avLst/>
-          </a:prstGeom>
-        </p:spPr>
-      </p:pic>
-      <p:sp>
-        <p:nvSpPr>
-          <p:cNvPr id="3" name="TextBox 2"/>
-          <p:cNvSpPr txBox="1"/>
-          <p:nvPr/>
-        </p:nvSpPr>
-        <p:spPr>
-          <a:xfrm>
-            <a:off x="731520" y="5612130"/>
-            <a:ext cx="10728960" cy="685800"/>
-          </a:xfrm>
-          <a:prstGeom prst="rect">
-            <a:avLst/>
-          </a:prstGeom>
-          <a:noFill/>
-        </p:spPr>
-        <p:txBody>
-          <a:bodyPr wrap="square">
-            <a:spAutoFit/>
-          </a:bodyPr>
-          <a:lstStyle/>
-          <a:p>
-            <a:pPr algn="ctr"/>
-            <a:r>
-              <a:rPr sz="1400">
-                <a:solidFill>
-                  <a:srgbClr val="334455"/>
-                </a:solidFill>
-              </a:rPr>
-              <a:t>企业版报告·分级告警明细（P1/P2/P3 与处置动作）</a:t>
-            </a:r>
-          </a:p>
-        </p:txBody>
-      </p:sp>
-    </p:spTree>
-  </p:cSld>
-  <p:clrMapOvr>
-    <a:masterClrMapping/>
-  </p:clrMapOvr>
-</p:sld>
-</file>
-
-<file path=ppt/slides/slide47.xml><?xml version="1.0" encoding="utf-8"?>
-<p:sld xmlns:a="http://schemas.openxmlformats.org/drawingml/2006/main" xmlns:p="http://schemas.openxmlformats.org/presentationml/2006/main" xmlns:r="http://schemas.openxmlformats.org/officeDocument/2006/relationships">
-  <p:cSld>
-    <p:spTree>
-      <p:nvGrpSpPr>
-        <p:cNvPr id="1" name=""/>
-        <p:cNvGrpSpPr/>
-        <p:nvPr/>
-      </p:nvGrpSpPr>
-      <p:grpSpPr/>
-      <p:pic>
-        <p:nvPicPr>
-          <p:cNvPr id="2" name="Picture 1" descr="figE_poc.png"/>
-          <p:cNvPicPr>
-            <a:picLocks noChangeAspect="1"/>
-          </p:cNvPicPr>
-          <p:nvPr/>
-        </p:nvPicPr>
-        <p:blipFill>
-          <a:blip r:embed="rId2"/>
-          <a:stretch>
-            <a:fillRect/>
-          </a:stretch>
-        </p:blipFill>
-        <p:spPr>
-          <a:xfrm>
-            <a:off x="731520" y="1525524"/>
-            <a:ext cx="10728960" cy="3121152"/>
-          </a:xfrm>
-          <a:prstGeom prst="rect">
-            <a:avLst/>
-          </a:prstGeom>
-        </p:spPr>
-      </p:pic>
-      <p:sp>
-        <p:nvSpPr>
-          <p:cNvPr id="3" name="TextBox 2"/>
-          <p:cNvSpPr txBox="1"/>
-          <p:nvPr/>
-        </p:nvSpPr>
-        <p:spPr>
-          <a:xfrm>
-            <a:off x="731520" y="5612130"/>
-            <a:ext cx="10728960" cy="685800"/>
-          </a:xfrm>
-          <a:prstGeom prst="rect">
-            <a:avLst/>
-          </a:prstGeom>
-          <a:noFill/>
-        </p:spPr>
-        <p:txBody>
-          <a:bodyPr wrap="square">
-            <a:spAutoFit/>
-          </a:bodyPr>
-          <a:lstStyle/>
-          <a:p>
-            <a:pPr algn="ctr"/>
-            <a:r>
-              <a:rPr sz="1400">
-                <a:solidFill>
-                  <a:srgbClr val="334455"/>
-                </a:solidFill>
-              </a:rPr>
-              <a:t>现场试点（POC）四步：选设备 → 标定 → 历史回放 → 在线运行</a:t>
-            </a:r>
-          </a:p>
-        </p:txBody>
-      </p:sp>
-    </p:spTree>
-  </p:cSld>
-  <p:clrMapOvr>
-    <a:masterClrMapping/>
-  </p:clrMapOvr>
-</p:sld>
-</file>
-
-<file path=ppt/slides/slide48.xml><?xml version="1.0" encoding="utf-8"?>
-<p:sld xmlns:a="http://schemas.openxmlformats.org/drawingml/2006/main" xmlns:p="http://schemas.openxmlformats.org/presentationml/2006/main" xmlns:r="http://schemas.openxmlformats.org/officeDocument/2006/relationships">
-  <p:cSld>
-    <p:spTree>
-      <p:nvGrpSpPr>
-        <p:cNvPr id="1" name=""/>
-        <p:cNvGrpSpPr/>
-        <p:nvPr/>
-      </p:nvGrpSpPr>
-      <p:grpSpPr/>
-      <p:pic>
-        <p:nvPicPr>
-          <p:cNvPr id="2" name="Picture 1" descr="s4_report_metropt3.png"/>
-          <p:cNvPicPr>
-            <a:picLocks noChangeAspect="1"/>
-          </p:cNvPicPr>
-          <p:nvPr/>
-        </p:nvPicPr>
-        <p:blipFill>
-          <a:blip r:embed="rId2"/>
-          <a:stretch>
-            <a:fillRect/>
-          </a:stretch>
-        </p:blipFill>
-        <p:spPr>
-          <a:xfrm>
-            <a:off x="4400702" y="731520"/>
-            <a:ext cx="3390595" cy="4709160"/>
-          </a:xfrm>
-          <a:prstGeom prst="rect">
-            <a:avLst/>
-          </a:prstGeom>
-        </p:spPr>
-      </p:pic>
-      <p:sp>
-        <p:nvSpPr>
-          <p:cNvPr id="3" name="TextBox 2"/>
-          <p:cNvSpPr txBox="1"/>
-          <p:nvPr/>
-        </p:nvSpPr>
-        <p:spPr>
-          <a:xfrm>
-            <a:off x="731520" y="5612130"/>
-            <a:ext cx="10728960" cy="685800"/>
-          </a:xfrm>
-          <a:prstGeom prst="rect">
-            <a:avLst/>
-          </a:prstGeom>
-          <a:noFill/>
-        </p:spPr>
-        <p:txBody>
-          <a:bodyPr wrap="square">
-            <a:spAutoFit/>
-          </a:bodyPr>
-          <a:lstStyle/>
-          <a:p>
-            <a:pPr algn="ctr"/>
-            <a:r>
-              <a:rPr sz="1400">
-                <a:solidFill>
-                  <a:srgbClr val="334455"/>
-                </a:solidFill>
-              </a:rPr>
-              <a:t>样例报告（真实空压机 214 天）：105 个告警，P1 56 / P2 30 / P3 19</a:t>
-            </a:r>
-          </a:p>
-        </p:txBody>
-      </p:sp>
-    </p:spTree>
-  </p:cSld>
-  <p:clrMapOvr>
-    <a:masterClrMapping/>
-  </p:clrMapOvr>
 </p:sld>
 </file>
 
@@ -14613,6 +15296,82 @@
 </file>
 
 <file path=ppt/slides/slide6.xml><?xml version="1.0" encoding="utf-8"?>
+<p:sld xmlns:a="http://schemas.openxmlformats.org/drawingml/2006/main" xmlns:p="http://schemas.openxmlformats.org/presentationml/2006/main" xmlns:r="http://schemas.openxmlformats.org/officeDocument/2006/relationships">
+  <p:cSld>
+    <p:spTree>
+      <p:nvGrpSpPr>
+        <p:cNvPr id="1" name=""/>
+        <p:cNvGrpSpPr/>
+        <p:nvPr/>
+      </p:nvGrpSpPr>
+      <p:grpSpPr/>
+      <p:pic>
+        <p:nvPicPr>
+          <p:cNvPr id="2" name="Picture 1" descr="figB_pipeline.png"/>
+          <p:cNvPicPr>
+            <a:picLocks noChangeAspect="1"/>
+          </p:cNvPicPr>
+          <p:nvPr/>
+        </p:nvPicPr>
+        <p:blipFill>
+          <a:blip r:embed="rId2"/>
+          <a:stretch>
+            <a:fillRect/>
+          </a:stretch>
+        </p:blipFill>
+        <p:spPr>
+          <a:xfrm>
+            <a:off x="731520" y="1037844"/>
+            <a:ext cx="10728960" cy="4096512"/>
+          </a:xfrm>
+          <a:prstGeom prst="rect">
+            <a:avLst/>
+          </a:prstGeom>
+        </p:spPr>
+      </p:pic>
+      <p:sp>
+        <p:nvSpPr>
+          <p:cNvPr id="3" name="TextBox 2"/>
+          <p:cNvSpPr txBox="1"/>
+          <p:nvPr/>
+        </p:nvSpPr>
+        <p:spPr>
+          <a:xfrm>
+            <a:off x="731520" y="5612130"/>
+            <a:ext cx="10728960" cy="685800"/>
+          </a:xfrm>
+          <a:prstGeom prst="rect">
+            <a:avLst/>
+          </a:prstGeom>
+          <a:noFill/>
+        </p:spPr>
+        <p:txBody>
+          <a:bodyPr wrap="square">
+            <a:spAutoFit/>
+          </a:bodyPr>
+          <a:lstStyle/>
+          <a:p>
+            <a:pPr algn="ctr"/>
+            <a:r>
+              <a:rPr sz="1400">
+                <a:solidFill>
+                  <a:srgbClr val="334455"/>
+                </a:solidFill>
+              </a:rPr>
+              <a:t>四段链路：检测 → 诊断 → 剩余寿命 → 维护决策</a:t>
+            </a:r>
+          </a:p>
+        </p:txBody>
+      </p:sp>
+    </p:spTree>
+  </p:cSld>
+  <p:clrMapOvr>
+    <a:masterClrMapping/>
+  </p:clrMapOvr>
+</p:sld>
+</file>
+
+<file path=ppt/slides/slide7.xml><?xml version="1.0" encoding="utf-8"?>
 <p:sld xmlns:a="http://schemas.openxmlformats.org/drawingml/2006/main" xmlns:r="http://schemas.openxmlformats.org/officeDocument/2006/relationships" xmlns:p="http://schemas.openxmlformats.org/presentationml/2006/main">
   <p:cSld>
     <p:bg>
@@ -15030,7 +15789,83 @@
 </p:sld>
 </file>
 
-<file path=ppt/slides/slide7.xml><?xml version="1.0" encoding="utf-8"?>
+<file path=ppt/slides/slide8.xml><?xml version="1.0" encoding="utf-8"?>
+<p:sld xmlns:a="http://schemas.openxmlformats.org/drawingml/2006/main" xmlns:p="http://schemas.openxmlformats.org/presentationml/2006/main" xmlns:r="http://schemas.openxmlformats.org/officeDocument/2006/relationships">
+  <p:cSld>
+    <p:spTree>
+      <p:nvGrpSpPr>
+        <p:cNvPr id="1" name=""/>
+        <p:cNvGrpSpPr/>
+        <p:nvPr/>
+      </p:nvGrpSpPr>
+      <p:grpSpPr/>
+      <p:pic>
+        <p:nvPicPr>
+          <p:cNvPr id="2" name="Picture 1" descr="figC_criterion.png"/>
+          <p:cNvPicPr>
+            <a:picLocks noChangeAspect="1"/>
+          </p:cNvPicPr>
+          <p:nvPr/>
+        </p:nvPicPr>
+        <p:blipFill>
+          <a:blip r:embed="rId2"/>
+          <a:stretch>
+            <a:fillRect/>
+          </a:stretch>
+        </p:blipFill>
+        <p:spPr>
+          <a:xfrm>
+            <a:off x="731520" y="1135380"/>
+            <a:ext cx="10728960" cy="3901440"/>
+          </a:xfrm>
+          <a:prstGeom prst="rect">
+            <a:avLst/>
+          </a:prstGeom>
+        </p:spPr>
+      </p:pic>
+      <p:sp>
+        <p:nvSpPr>
+          <p:cNvPr id="3" name="TextBox 2"/>
+          <p:cNvSpPr txBox="1"/>
+          <p:nvPr/>
+        </p:nvSpPr>
+        <p:spPr>
+          <a:xfrm>
+            <a:off x="731520" y="5612130"/>
+            <a:ext cx="10728960" cy="685800"/>
+          </a:xfrm>
+          <a:prstGeom prst="rect">
+            <a:avLst/>
+          </a:prstGeom>
+          <a:noFill/>
+        </p:spPr>
+        <p:txBody>
+          <a:bodyPr wrap="square">
+            <a:spAutoFit/>
+          </a:bodyPr>
+          <a:lstStyle/>
+          <a:p>
+            <a:pPr algn="ctr"/>
+            <a:r>
+              <a:rPr sz="1400">
+                <a:solidFill>
+                  <a:srgbClr val="334455"/>
+                </a:solidFill>
+              </a:rPr>
+              <a:t>检测判据：双基线分数 + 事件机 + P1/P2/P3 分级</a:t>
+            </a:r>
+          </a:p>
+        </p:txBody>
+      </p:sp>
+    </p:spTree>
+  </p:cSld>
+  <p:clrMapOvr>
+    <a:masterClrMapping/>
+  </p:clrMapOvr>
+</p:sld>
+</file>
+
+<file path=ppt/slides/slide9.xml><?xml version="1.0" encoding="utf-8"?>
 <p:sld xmlns:a="http://schemas.openxmlformats.org/drawingml/2006/main" xmlns:r="http://schemas.openxmlformats.org/officeDocument/2006/relationships" xmlns:p="http://schemas.openxmlformats.org/presentationml/2006/main">
   <p:cSld>
     <p:bg>
@@ -15448,842 +16283,6 @@
 </p:sld>
 </file>
 
-<file path=ppt/slides/slide8.xml><?xml version="1.0" encoding="utf-8"?>
-<p:sld xmlns:a="http://schemas.openxmlformats.org/drawingml/2006/main" xmlns:r="http://schemas.openxmlformats.org/officeDocument/2006/relationships" xmlns:p="http://schemas.openxmlformats.org/presentationml/2006/main">
-  <p:cSld>
-    <p:bg>
-      <p:bgPr>
-        <a:solidFill>
-          <a:srgbClr val="111316"/>
-        </a:solidFill>
-        <a:effectLst/>
-      </p:bgPr>
-    </p:bg>
-    <p:spTree>
-      <p:nvGrpSpPr>
-        <p:cNvPr id="1" name=""/>
-        <p:cNvGrpSpPr/>
-        <p:nvPr/>
-      </p:nvGrpSpPr>
-      <p:grpSpPr>
-        <a:xfrm>
-          <a:off x="0" y="0"/>
-          <a:ext cx="0" cy="0"/>
-          <a:chOff x="0" y="0"/>
-          <a:chExt cx="0" cy="0"/>
-        </a:xfrm>
-      </p:grpSpPr>
-      <p:sp>
-        <p:nvSpPr>
-          <p:cNvPr id="81" name="Kicker"/>
-          <p:cNvSpPr txBox="1"/>
-          <p:nvPr/>
-        </p:nvSpPr>
-        <p:spPr>
-          <a:xfrm>
-            <a:off x="900000" y="420000"/>
-            <a:ext cx="10000000" cy="420000"/>
-          </a:xfrm>
-          <a:prstGeom prst="rect">
-            <a:avLst/>
-          </a:prstGeom>
-          <a:noFill/>
-          <a:ln/>
-        </p:spPr>
-        <p:txBody>
-          <a:bodyPr wrap="square" rtlCol="0">
-            <a:normAutofit/>
-          </a:bodyPr>
-          <a:lstStyle/>
-          <a:p>
-            <a:pPr>
-              <a:buNone/>
-            </a:pPr>
-            <a:r>
-              <a:rPr lang="zh-CN" sz="1400" b="1" dirty="0">
-                <a:solidFill>
-                  <a:srgbClr val="C9A84C"/>
-                </a:solidFill>
-                <a:latin typeface="Helvetica Neue"/>
-                <a:ea typeface="Helvetica Neue"/>
-              </a:rPr>
-              <a:t>创新二：阈值必须按工况标定，绝对阈值必然失效</a:t>
-            </a:r>
-          </a:p>
-        </p:txBody>
-      </p:sp>
-      <p:sp>
-        <p:nvSpPr>
-          <p:cNvPr id="82" name="Title"/>
-          <p:cNvSpPr txBox="1"/>
-          <p:nvPr/>
-        </p:nvSpPr>
-        <p:spPr>
-          <a:xfrm>
-            <a:off x="900000" y="920000"/>
-            <a:ext cx="10300000" cy="800000"/>
-          </a:xfrm>
-          <a:prstGeom prst="rect">
-            <a:avLst/>
-          </a:prstGeom>
-          <a:noFill/>
-          <a:ln/>
-        </p:spPr>
-        <p:txBody>
-          <a:bodyPr wrap="square" rtlCol="0">
-            <a:normAutofit/>
-          </a:bodyPr>
-          <a:lstStyle/>
-          <a:p>
-            <a:pPr>
-              <a:buNone/>
-            </a:pPr>
-            <a:r>
-              <a:rPr lang="zh-CN" sz="3400" b="1" dirty="0">
-                <a:solidFill>
-                  <a:srgbClr val="F4EFE6"/>
-                </a:solidFill>
-                <a:latin typeface="Georgia"/>
-                <a:ea typeface="Georgia"/>
-              </a:rPr>
-              <a:t>创新二：阈值必须按工况标定，绝对阈值必然失效</a:t>
-            </a:r>
-          </a:p>
-        </p:txBody>
-      </p:sp>
-      <p:sp>
-        <p:nvSpPr>
-          <p:cNvPr id="83" name="Body"/>
-          <p:cNvSpPr txBox="1"/>
-          <p:nvPr/>
-        </p:nvSpPr>
-        <p:spPr>
-          <a:xfrm>
-            <a:off x="1050000" y="1850000"/>
-            <a:ext cx="10100000" cy="4500000"/>
-          </a:xfrm>
-          <a:prstGeom prst="rect">
-            <a:avLst/>
-          </a:prstGeom>
-          <a:noFill/>
-          <a:ln/>
-        </p:spPr>
-        <p:txBody>
-          <a:bodyPr wrap="square" rtlCol="0">
-            <a:normAutofit/>
-          </a:bodyPr>
-          <a:lstStyle/>
-          <a:p>
-            <a:pPr marL="285750" indent="-285750">
-              <a:buFont typeface="Arial" panose="020B0604020202020204"/>
-              <a:buChar char="•"/>
-            </a:pPr>
-            <a:r>
-              <a:rPr lang="zh-CN" sz="2000" b="0" dirty="0">
-                <a:solidFill>
-                  <a:srgbClr val="F4EFE6"/>
-                </a:solidFill>
-                <a:latin typeface="Helvetica Neue"/>
-                <a:ea typeface="Helvetica Neue"/>
-              </a:rPr>
-              <a:t>换一段进水，健康本底就变，绝对阈值立刻失效</a:t>
-            </a:r>
-          </a:p>
-          <a:p>
-            <a:pPr marL="285750" indent="-285750">
-              <a:buFont typeface="Arial" panose="020B0604020202020204"/>
-              <a:buChar char="•"/>
-            </a:pPr>
-            <a:r>
-              <a:rPr lang="zh-CN" sz="2000" b="0" dirty="0">
-                <a:solidFill>
-                  <a:srgbClr val="F4EFE6"/>
-                </a:solidFill>
-                <a:latin typeface="Helvetica Neue"/>
-                <a:ea typeface="Helvetica Neue"/>
-              </a:rPr>
-              <a:t>工况分箱条件化：健康轨迹最高分 19.18 → 14.86</a:t>
-            </a:r>
-          </a:p>
-          <a:p>
-            <a:pPr marL="285750" indent="-285750">
-              <a:buFont typeface="Arial" panose="020B0604020202020204"/>
-              <a:buChar char="•"/>
-            </a:pPr>
-            <a:r>
-              <a:rPr lang="zh-CN" sz="2000" b="0" dirty="0">
-                <a:solidFill>
-                  <a:srgbClr val="F4EFE6"/>
-                </a:solidFill>
-                <a:latin typeface="Helvetica Neue"/>
-                <a:ea typeface="Helvetica Neue"/>
-              </a:rPr>
-              <a:t>仍不够时用同期同工况对拍差分</a:t>
-            </a:r>
-          </a:p>
-          <a:p>
-            <a:pPr marL="285750" indent="-285750">
-              <a:buFont typeface="Arial" panose="020B0604020202020204"/>
-              <a:buChar char="•"/>
-            </a:pPr>
-            <a:r>
-              <a:rPr lang="zh-CN" sz="2000" b="0" dirty="0">
-                <a:solidFill>
-                  <a:srgbClr val="F4EFE6"/>
-                </a:solidFill>
-                <a:latin typeface="Helvetica Neue"/>
-                <a:ea typeface="Helvetica Neue"/>
-              </a:rPr>
-              <a:t>对拍让原始量从"检不出"变成失效前 14.5 天</a:t>
-            </a:r>
-          </a:p>
-        </p:txBody>
-      </p:sp>
-      <p:sp>
-        <p:nvSpPr>
-          <p:cNvPr id="89" name="Page number"/>
-          <p:cNvSpPr txBox="1"/>
-          <p:nvPr/>
-        </p:nvSpPr>
-        <p:spPr>
-          <a:xfrm>
-            <a:off x="10600000" y="6250000"/>
-            <a:ext cx="1200000" cy="400000"/>
-          </a:xfrm>
-          <a:prstGeom prst="rect">
-            <a:avLst/>
-          </a:prstGeom>
-          <a:noFill/>
-          <a:ln/>
-        </p:spPr>
-        <p:txBody>
-          <a:bodyPr wrap="square" rtlCol="0">
-            <a:normAutofit/>
-          </a:bodyPr>
-          <a:lstStyle/>
-          <a:p>
-            <a:pPr algn="r">
-              <a:buNone/>
-            </a:pPr>
-            <a:r>
-              <a:rPr lang="zh-CN" sz="1000" b="0" dirty="0">
-                <a:solidFill>
-                  <a:srgbClr val="A79F91"/>
-                </a:solidFill>
-                <a:latin typeface="Helvetica Neue"/>
-                <a:ea typeface="Helvetica Neue"/>
-              </a:rPr>
-              <a:t>08 / 36</a:t>
-            </a:r>
-          </a:p>
-        </p:txBody>
-      </p:sp>
-    </p:spTree>
-  </p:cSld>
-  <p:clrMapOvr>
-    <a:overrideClrMapping bg1="lt1" tx1="dk1" bg2="lt2" tx2="dk2" accent1="accent1" accent2="accent2" accent3="accent3" accent4="accent4" accent5="accent5" accent6="accent6" hlink="hlink" folHlink="folHlink"/>
-  </p:clrMapOvr>
-  <p:transition spd="med">
-    <p:fade/>
-  </p:transition>
-  <p:timing>
-    <p:tnLst>
-      <p:par>
-        <p:cTn id="1" dur="indefinite" restart="never" nodeType="tmRoot">
-          <p:childTnLst>
-            <p:seq concurrent="1" nextAc="seek">
-              <p:cTn id="2" dur="indefinite" nodeType="mainSeq">
-                <p:childTnLst>
-                  <p:par>
-                    <p:cTn id="3" fill="hold">
-                      <p:stCondLst>
-                        <p:cond delay="indefinite"/>
-                      </p:stCondLst>
-                      <p:childTnLst>
-                        <p:par>
-                          <p:cTn id="4" presetID="1" presetClass="entr" presetSubtype="0" fill="hold" grpId="0" nodeType="clickEffect">
-                            <p:stCondLst>
-                              <p:cond delay="0"/>
-                            </p:stCondLst>
-                            <p:childTnLst>
-                              <p:set>
-                                <p:cBhvr>
-                                  <p:cTn id="5" dur="1" fill="hold">
-                                    <p:stCondLst>
-                                      <p:cond delay="0"/>
-                                    </p:stCondLst>
-                                  </p:cTn>
-                                  <p:tgtEl>
-                                    <p:spTgt spid="83"/>
-                                  </p:tgtEl>
-                                  <p:attrNameLst>
-                                    <p:attrName>style.visibility</p:attrName>
-                                  </p:attrNameLst>
-                                </p:cBhvr>
-                                <p:to>
-                                  <p:strVal val="visible"/>
-                                </p:to>
-                              </p:set>
-                            </p:childTnLst>
-                          </p:cTn>
-                        </p:par>
-                      </p:childTnLst>
-                    </p:cTn>
-                  </p:par>
-                  <p:par>
-                    <p:cTn id="6" fill="hold">
-                      <p:stCondLst>
-                        <p:cond delay="indefinite"/>
-                      </p:stCondLst>
-                      <p:childTnLst>
-                        <p:par>
-                          <p:cTn id="7" presetID="1" presetClass="entr" presetSubtype="0" fill="hold" grpId="0" nodeType="clickEffect">
-                            <p:stCondLst>
-                              <p:cond delay="0"/>
-                            </p:stCondLst>
-                            <p:childTnLst>
-                              <p:set>
-                                <p:cBhvr>
-                                  <p:cTn id="8" dur="1" fill="hold">
-                                    <p:stCondLst>
-                                      <p:cond delay="0"/>
-                                    </p:stCondLst>
-                                  </p:cTn>
-                                  <p:tgtEl>
-                                    <p:spTgt spid="83"/>
-                                  </p:tgtEl>
-                                  <p:attrNameLst>
-                                    <p:attrName>style.visibility</p:attrName>
-                                  </p:attrNameLst>
-                                </p:cBhvr>
-                                <p:to>
-                                  <p:strVal val="visible"/>
-                                </p:to>
-                              </p:set>
-                            </p:childTnLst>
-                          </p:cTn>
-                        </p:par>
-                      </p:childTnLst>
-                    </p:cTn>
-                  </p:par>
-                  <p:par>
-                    <p:cTn id="9" fill="hold">
-                      <p:stCondLst>
-                        <p:cond delay="indefinite"/>
-                      </p:stCondLst>
-                      <p:childTnLst>
-                        <p:par>
-                          <p:cTn id="10" presetID="1" presetClass="entr" presetSubtype="0" fill="hold" grpId="0" nodeType="clickEffect">
-                            <p:stCondLst>
-                              <p:cond delay="0"/>
-                            </p:stCondLst>
-                            <p:childTnLst>
-                              <p:set>
-                                <p:cBhvr>
-                                  <p:cTn id="11" dur="1" fill="hold">
-                                    <p:stCondLst>
-                                      <p:cond delay="0"/>
-                                    </p:stCondLst>
-                                  </p:cTn>
-                                  <p:tgtEl>
-                                    <p:spTgt spid="83"/>
-                                  </p:tgtEl>
-                                  <p:attrNameLst>
-                                    <p:attrName>style.visibility</p:attrName>
-                                  </p:attrNameLst>
-                                </p:cBhvr>
-                                <p:to>
-                                  <p:strVal val="visible"/>
-                                </p:to>
-                              </p:set>
-                            </p:childTnLst>
-                          </p:cTn>
-                        </p:par>
-                      </p:childTnLst>
-                    </p:cTn>
-                  </p:par>
-                  <p:par>
-                    <p:cTn id="12" fill="hold">
-                      <p:stCondLst>
-                        <p:cond delay="indefinite"/>
-                      </p:stCondLst>
-                      <p:childTnLst>
-                        <p:par>
-                          <p:cTn id="13" presetID="1" presetClass="entr" presetSubtype="0" fill="hold" grpId="0" nodeType="clickEffect">
-                            <p:stCondLst>
-                              <p:cond delay="0"/>
-                            </p:stCondLst>
-                            <p:childTnLst>
-                              <p:set>
-                                <p:cBhvr>
-                                  <p:cTn id="14" dur="1" fill="hold">
-                                    <p:stCondLst>
-                                      <p:cond delay="0"/>
-                                    </p:stCondLst>
-                                  </p:cTn>
-                                  <p:tgtEl>
-                                    <p:spTgt spid="83"/>
-                                  </p:tgtEl>
-                                  <p:attrNameLst>
-                                    <p:attrName>style.visibility</p:attrName>
-                                  </p:attrNameLst>
-                                </p:cBhvr>
-                                <p:to>
-                                  <p:strVal val="visible"/>
-                                </p:to>
-                              </p:set>
-                            </p:childTnLst>
-                          </p:cTn>
-                        </p:par>
-                      </p:childTnLst>
-                    </p:cTn>
-                  </p:par>
-                </p:childTnLst>
-              </p:cTn>
-              <p:prevCondLst>
-                <p:cond evt="onPrev" delay="0">
-                  <p:tgtEl>
-                    <p:sldTgt/>
-                  </p:tgtEl>
-                </p:cond>
-              </p:prevCondLst>
-              <p:nextCondLst>
-                <p:cond evt="onNext" delay="0">
-                  <p:tgtEl>
-                    <p:sldTgt/>
-                  </p:tgtEl>
-                </p:cond>
-              </p:nextCondLst>
-            </p:seq>
-          </p:childTnLst>
-        </p:cTn>
-      </p:par>
-    </p:tnLst>
-    <p:bldLst>
-      <p:bldP spid="83" grpId="0"/>
-    </p:bldLst>
-  </p:timing>
-</p:sld>
-</file>
-
-<file path=ppt/slides/slide9.xml><?xml version="1.0" encoding="utf-8"?>
-<p:sld xmlns:a="http://schemas.openxmlformats.org/drawingml/2006/main" xmlns:r="http://schemas.openxmlformats.org/officeDocument/2006/relationships" xmlns:p="http://schemas.openxmlformats.org/presentationml/2006/main">
-  <p:cSld>
-    <p:bg>
-      <p:bgPr>
-        <a:solidFill>
-          <a:srgbClr val="111316"/>
-        </a:solidFill>
-        <a:effectLst/>
-      </p:bgPr>
-    </p:bg>
-    <p:spTree>
-      <p:nvGrpSpPr>
-        <p:cNvPr id="1" name=""/>
-        <p:cNvGrpSpPr/>
-        <p:nvPr/>
-      </p:nvGrpSpPr>
-      <p:grpSpPr>
-        <a:xfrm>
-          <a:off x="0" y="0"/>
-          <a:ext cx="0" cy="0"/>
-          <a:chOff x="0" y="0"/>
-          <a:chExt cx="0" cy="0"/>
-        </a:xfrm>
-      </p:grpSpPr>
-      <p:sp>
-        <p:nvSpPr>
-          <p:cNvPr id="91" name="Kicker"/>
-          <p:cNvSpPr txBox="1"/>
-          <p:nvPr/>
-        </p:nvSpPr>
-        <p:spPr>
-          <a:xfrm>
-            <a:off x="900000" y="420000"/>
-            <a:ext cx="10000000" cy="420000"/>
-          </a:xfrm>
-          <a:prstGeom prst="rect">
-            <a:avLst/>
-          </a:prstGeom>
-          <a:noFill/>
-          <a:ln/>
-        </p:spPr>
-        <p:txBody>
-          <a:bodyPr wrap="square" rtlCol="0">
-            <a:normAutofit/>
-          </a:bodyPr>
-          <a:lstStyle/>
-          <a:p>
-            <a:pPr>
-              <a:buNone/>
-            </a:pPr>
-            <a:r>
-              <a:rPr lang="zh-CN" sz="1400" b="1" dirty="0">
-                <a:solidFill>
-                  <a:srgbClr val="C9A84C"/>
-                </a:solidFill>
-                <a:latin typeface="Helvetica Neue"/>
-                <a:ea typeface="Helvetica Neue"/>
-              </a:rPr>
-              <a:t>创新三：设备级比值通道，全厂大数据看不见的退化它看得见</a:t>
-            </a:r>
-          </a:p>
-        </p:txBody>
-      </p:sp>
-      <p:sp>
-        <p:nvSpPr>
-          <p:cNvPr id="92" name="Title"/>
-          <p:cNvSpPr txBox="1"/>
-          <p:nvPr/>
-        </p:nvSpPr>
-        <p:spPr>
-          <a:xfrm>
-            <a:off x="900000" y="920000"/>
-            <a:ext cx="10300000" cy="800000"/>
-          </a:xfrm>
-          <a:prstGeom prst="rect">
-            <a:avLst/>
-          </a:prstGeom>
-          <a:noFill/>
-          <a:ln/>
-        </p:spPr>
-        <p:txBody>
-          <a:bodyPr wrap="square" rtlCol="0">
-            <a:normAutofit/>
-          </a:bodyPr>
-          <a:lstStyle/>
-          <a:p>
-            <a:pPr>
-              <a:buNone/>
-            </a:pPr>
-            <a:r>
-              <a:rPr lang="zh-CN" sz="3400" b="1" dirty="0">
-                <a:solidFill>
-                  <a:srgbClr val="F4EFE6"/>
-                </a:solidFill>
-                <a:latin typeface="Georgia"/>
-                <a:ea typeface="Georgia"/>
-              </a:rPr>
-              <a:t>创新三：设备级比值通道，全厂大数据看不见的退化它看得见</a:t>
-            </a:r>
-          </a:p>
-        </p:txBody>
-      </p:sp>
-      <p:sp>
-        <p:nvSpPr>
-          <p:cNvPr id="93" name="Body"/>
-          <p:cNvSpPr txBox="1"/>
-          <p:nvPr/>
-        </p:nvSpPr>
-        <p:spPr>
-          <a:xfrm>
-            <a:off x="1050000" y="1850000"/>
-            <a:ext cx="10100000" cy="4500000"/>
-          </a:xfrm>
-          <a:prstGeom prst="rect">
-            <a:avLst/>
-          </a:prstGeom>
-          <a:noFill/>
-          <a:ln/>
-        </p:spPr>
-        <p:txBody>
-          <a:bodyPr wrap="square" rtlCol="0">
-            <a:normAutofit/>
-          </a:bodyPr>
-          <a:lstStyle/>
-          <a:p>
-            <a:pPr marL="285750" indent="-285750">
-              <a:buFont typeface="Arial" panose="020B0604020202020204"/>
-              <a:buChar char="•"/>
-            </a:pPr>
-            <a:r>
-              <a:rPr lang="zh-CN" sz="2000" b="0" dirty="0">
-                <a:solidFill>
-                  <a:srgbClr val="F4EFE6"/>
-                </a:solidFill>
-                <a:latin typeface="Helvetica Neue"/>
-                <a:ea typeface="Helvetica Neue"/>
-              </a:rPr>
-              <a:t>整厂 5 个原始量：零误报口径 86.11 天（晚于失效）</a:t>
-            </a:r>
-          </a:p>
-          <a:p>
-            <a:pPr marL="285750" indent="-285750">
-              <a:buFont typeface="Arial" panose="020B0604020202020204"/>
-              <a:buChar char="•"/>
-            </a:pPr>
-            <a:r>
-              <a:rPr lang="zh-CN" sz="2000" b="0" dirty="0">
-                <a:solidFill>
-                  <a:srgbClr val="F4EFE6"/>
-                </a:solidFill>
-                <a:latin typeface="Helvetica Neue"/>
-                <a:ea typeface="Helvetica Neue"/>
-              </a:rPr>
-              <a:t>设备级比值（干固体 ÷ 湿泥饼量）：9.80 天检出</a:t>
-            </a:r>
-          </a:p>
-          <a:p>
-            <a:pPr marL="285750" indent="-285750">
-              <a:buFont typeface="Arial" panose="020B0604020202020204"/>
-              <a:buChar char="•"/>
-            </a:pPr>
-            <a:r>
-              <a:rPr lang="zh-CN" sz="2000" b="0" dirty="0">
-                <a:solidFill>
-                  <a:srgbClr val="F4EFE6"/>
-                </a:solidFill>
-                <a:latin typeface="Helvetica Neue"/>
-                <a:ea typeface="Helvetica Neue"/>
-              </a:rPr>
-              <a:t>提前 37.47 天；湿泥饼量 +55.53%（理论 +55.6%）</a:t>
-            </a:r>
-          </a:p>
-          <a:p>
-            <a:pPr marL="285750" indent="-285750">
-              <a:buFont typeface="Arial" panose="020B0604020202020204"/>
-              <a:buChar char="•"/>
-            </a:pPr>
-            <a:r>
-              <a:rPr lang="zh-CN" sz="2000" b="0" dirty="0">
-                <a:solidFill>
-                  <a:srgbClr val="F4EFE6"/>
-                </a:solidFill>
-                <a:latin typeface="Helvetica Neue"/>
-                <a:ea typeface="Helvetica Neue"/>
-              </a:rPr>
-              <a:t>沼气、能耗、出水几乎无痕（±0.03%）</a:t>
-            </a:r>
-          </a:p>
-        </p:txBody>
-      </p:sp>
-      <p:sp>
-        <p:nvSpPr>
-          <p:cNvPr id="99" name="Page number"/>
-          <p:cNvSpPr txBox="1"/>
-          <p:nvPr/>
-        </p:nvSpPr>
-        <p:spPr>
-          <a:xfrm>
-            <a:off x="10600000" y="6250000"/>
-            <a:ext cx="1200000" cy="400000"/>
-          </a:xfrm>
-          <a:prstGeom prst="rect">
-            <a:avLst/>
-          </a:prstGeom>
-          <a:noFill/>
-          <a:ln/>
-        </p:spPr>
-        <p:txBody>
-          <a:bodyPr wrap="square" rtlCol="0">
-            <a:normAutofit/>
-          </a:bodyPr>
-          <a:lstStyle/>
-          <a:p>
-            <a:pPr algn="r">
-              <a:buNone/>
-            </a:pPr>
-            <a:r>
-              <a:rPr lang="zh-CN" sz="1000" b="0" dirty="0">
-                <a:solidFill>
-                  <a:srgbClr val="A79F91"/>
-                </a:solidFill>
-                <a:latin typeface="Helvetica Neue"/>
-                <a:ea typeface="Helvetica Neue"/>
-              </a:rPr>
-              <a:t>09 / 36</a:t>
-            </a:r>
-          </a:p>
-        </p:txBody>
-      </p:sp>
-    </p:spTree>
-  </p:cSld>
-  <p:clrMapOvr>
-    <a:overrideClrMapping bg1="lt1" tx1="dk1" bg2="lt2" tx2="dk2" accent1="accent1" accent2="accent2" accent3="accent3" accent4="accent4" accent5="accent5" accent6="accent6" hlink="hlink" folHlink="folHlink"/>
-  </p:clrMapOvr>
-  <p:transition spd="med">
-    <p:fade/>
-  </p:transition>
-  <p:timing>
-    <p:tnLst>
-      <p:par>
-        <p:cTn id="1" dur="indefinite" restart="never" nodeType="tmRoot">
-          <p:childTnLst>
-            <p:seq concurrent="1" nextAc="seek">
-              <p:cTn id="2" dur="indefinite" nodeType="mainSeq">
-                <p:childTnLst>
-                  <p:par>
-                    <p:cTn id="3" fill="hold">
-                      <p:stCondLst>
-                        <p:cond delay="indefinite"/>
-                      </p:stCondLst>
-                      <p:childTnLst>
-                        <p:par>
-                          <p:cTn id="4" presetID="1" presetClass="entr" presetSubtype="0" fill="hold" grpId="0" nodeType="clickEffect">
-                            <p:stCondLst>
-                              <p:cond delay="0"/>
-                            </p:stCondLst>
-                            <p:childTnLst>
-                              <p:set>
-                                <p:cBhvr>
-                                  <p:cTn id="5" dur="1" fill="hold">
-                                    <p:stCondLst>
-                                      <p:cond delay="0"/>
-                                    </p:stCondLst>
-                                  </p:cTn>
-                                  <p:tgtEl>
-                                    <p:spTgt spid="93"/>
-                                  </p:tgtEl>
-                                  <p:attrNameLst>
-                                    <p:attrName>style.visibility</p:attrName>
-                                  </p:attrNameLst>
-                                </p:cBhvr>
-                                <p:to>
-                                  <p:strVal val="visible"/>
-                                </p:to>
-                              </p:set>
-                            </p:childTnLst>
-                          </p:cTn>
-                        </p:par>
-                      </p:childTnLst>
-                    </p:cTn>
-                  </p:par>
-                  <p:par>
-                    <p:cTn id="6" fill="hold">
-                      <p:stCondLst>
-                        <p:cond delay="indefinite"/>
-                      </p:stCondLst>
-                      <p:childTnLst>
-                        <p:par>
-                          <p:cTn id="7" presetID="1" presetClass="entr" presetSubtype="0" fill="hold" grpId="0" nodeType="clickEffect">
-                            <p:stCondLst>
-                              <p:cond delay="0"/>
-                            </p:stCondLst>
-                            <p:childTnLst>
-                              <p:set>
-                                <p:cBhvr>
-                                  <p:cTn id="8" dur="1" fill="hold">
-                                    <p:stCondLst>
-                                      <p:cond delay="0"/>
-                                    </p:stCondLst>
-                                  </p:cTn>
-                                  <p:tgtEl>
-                                    <p:spTgt spid="93"/>
-                                  </p:tgtEl>
-                                  <p:attrNameLst>
-                                    <p:attrName>style.visibility</p:attrName>
-                                  </p:attrNameLst>
-                                </p:cBhvr>
-                                <p:to>
-                                  <p:strVal val="visible"/>
-                                </p:to>
-                              </p:set>
-                            </p:childTnLst>
-                          </p:cTn>
-                        </p:par>
-                      </p:childTnLst>
-                    </p:cTn>
-                  </p:par>
-                  <p:par>
-                    <p:cTn id="9" fill="hold">
-                      <p:stCondLst>
-                        <p:cond delay="indefinite"/>
-                      </p:stCondLst>
-                      <p:childTnLst>
-                        <p:par>
-                          <p:cTn id="10" presetID="1" presetClass="entr" presetSubtype="0" fill="hold" grpId="0" nodeType="clickEffect">
-                            <p:stCondLst>
-                              <p:cond delay="0"/>
-                            </p:stCondLst>
-                            <p:childTnLst>
-                              <p:set>
-                                <p:cBhvr>
-                                  <p:cTn id="11" dur="1" fill="hold">
-                                    <p:stCondLst>
-                                      <p:cond delay="0"/>
-                                    </p:stCondLst>
-                                  </p:cTn>
-                                  <p:tgtEl>
-                                    <p:spTgt spid="93"/>
-                                  </p:tgtEl>
-                                  <p:attrNameLst>
-                                    <p:attrName>style.visibility</p:attrName>
-                                  </p:attrNameLst>
-                                </p:cBhvr>
-                                <p:to>
-                                  <p:strVal val="visible"/>
-                                </p:to>
-                              </p:set>
-                            </p:childTnLst>
-                          </p:cTn>
-                        </p:par>
-                      </p:childTnLst>
-                    </p:cTn>
-                  </p:par>
-                  <p:par>
-                    <p:cTn id="12" fill="hold">
-                      <p:stCondLst>
-                        <p:cond delay="indefinite"/>
-                      </p:stCondLst>
-                      <p:childTnLst>
-                        <p:par>
-                          <p:cTn id="13" presetID="1" presetClass="entr" presetSubtype="0" fill="hold" grpId="0" nodeType="clickEffect">
-                            <p:stCondLst>
-                              <p:cond delay="0"/>
-                            </p:stCondLst>
-                            <p:childTnLst>
-                              <p:set>
-                                <p:cBhvr>
-                                  <p:cTn id="14" dur="1" fill="hold">
-                                    <p:stCondLst>
-                                      <p:cond delay="0"/>
-                                    </p:stCondLst>
-                                  </p:cTn>
-                                  <p:tgtEl>
-                                    <p:spTgt spid="93"/>
-                                  </p:tgtEl>
-                                  <p:attrNameLst>
-                                    <p:attrName>style.visibility</p:attrName>
-                                  </p:attrNameLst>
-                                </p:cBhvr>
-                                <p:to>
-                                  <p:strVal val="visible"/>
-                                </p:to>
-                              </p:set>
-                            </p:childTnLst>
-                          </p:cTn>
-                        </p:par>
-                      </p:childTnLst>
-                    </p:cTn>
-                  </p:par>
-                </p:childTnLst>
-              </p:cTn>
-              <p:prevCondLst>
-                <p:cond evt="onPrev" delay="0">
-                  <p:tgtEl>
-                    <p:sldTgt/>
-                  </p:tgtEl>
-                </p:cond>
-              </p:prevCondLst>
-              <p:nextCondLst>
-                <p:cond evt="onNext" delay="0">
-                  <p:tgtEl>
-                    <p:sldTgt/>
-                  </p:tgtEl>
-                </p:cond>
-              </p:nextCondLst>
-            </p:seq>
-          </p:childTnLst>
-        </p:cTn>
-      </p:par>
-    </p:tnLst>
-    <p:bldLst>
-      <p:bldP spid="93" grpId="0"/>
-    </p:bldLst>
-  </p:timing>
-</p:sld>
-</file>
-
 <file path=ppt/theme/theme1.xml><?xml version="1.0" encoding="utf-8"?>
 <a:theme xmlns:a="http://schemas.openxmlformats.org/drawingml/2006/main" name="dsh-ppt Velvet Standard">
   <a:themeElements>
